--- a/deliverables/HYPNEXIS26_DataTrust_AI_expanded.pptx
+++ b/deliverables/HYPNEXIS26_DataTrust_AI_expanded.pptx
@@ -1,27 +1,27 @@
 
 <file path=ppt/presentation.xml><?xml version="1.0" encoding="utf-8"?>
-<p:presentation xmlns:p="http://schemas.openxmlformats.org/presentationml/2006/main">
+<p:presentation xmlns:a="http://schemas.openxmlformats.org/drawingml/2006/main" xmlns:r="http://schemas.openxmlformats.org/officeDocument/2006/relationships" xmlns:p="http://schemas.openxmlformats.org/presentationml/2006/main">
   <p:sldMasterIdLst>
-    <p:sldMasterId xmlns:r="http://schemas.openxmlformats.org/officeDocument/2006/relationships" id="2147483648" r:id="R67c214012c61441f"/>
+    <p:sldMasterId id="2147483648" r:id="rId1"/>
   </p:sldMasterIdLst>
   <p:notesMasterIdLst>
-    <p:notesMasterId xmlns:r="http://schemas.openxmlformats.org/officeDocument/2006/relationships" r:id="R42f5cf3ad0d043ca"/>
+    <p:notesMasterId r:id="rId11"/>
   </p:notesMasterIdLst>
   <p:sldIdLst>
-    <p:sldId xmlns:r="http://schemas.openxmlformats.org/officeDocument/2006/relationships" id="256" r:id="Rce784a8ac8ad4aa7"/>
-    <p:sldId xmlns:r="http://schemas.openxmlformats.org/officeDocument/2006/relationships" id="257" r:id="R182a70a5bfc84d03"/>
-    <p:sldId xmlns:r="http://schemas.openxmlformats.org/officeDocument/2006/relationships" id="258" r:id="Ra1c1cf12c2e24d6e"/>
-    <p:sldId xmlns:r="http://schemas.openxmlformats.org/officeDocument/2006/relationships" id="259" r:id="R47d0fc27d62c49ab"/>
-    <p:sldId xmlns:r="http://schemas.openxmlformats.org/officeDocument/2006/relationships" id="260" r:id="Rb8e8a248a51f4540"/>
-    <p:sldId xmlns:r="http://schemas.openxmlformats.org/officeDocument/2006/relationships" id="261" r:id="R20ff01947dc6434d"/>
-    <p:sldId xmlns:r="http://schemas.openxmlformats.org/officeDocument/2006/relationships" id="262" r:id="R1d822962ad274b12"/>
-    <p:sldId xmlns:r="http://schemas.openxmlformats.org/officeDocument/2006/relationships" id="263" r:id="Rd1a0405f0dbd43de"/>
-    <p:sldId xmlns:r="http://schemas.openxmlformats.org/officeDocument/2006/relationships" id="264" r:id="R1be8fc345e874fce"/>
+    <p:sldId id="256" r:id="rId2"/>
+    <p:sldId id="257" r:id="rId3"/>
+    <p:sldId id="258" r:id="rId4"/>
+    <p:sldId id="259" r:id="rId5"/>
+    <p:sldId id="260" r:id="rId6"/>
+    <p:sldId id="261" r:id="rId7"/>
+    <p:sldId id="262" r:id="rId8"/>
+    <p:sldId id="263" r:id="rId9"/>
+    <p:sldId id="264" r:id="rId10"/>
   </p:sldIdLst>
   <p:sldSz cx="12192000" cy="6858000"/>
   <p:notesSz cx="6858000" cy="9144000"/>
   <p:defaultTextStyle>
-    <a:lvl1pPr xmlns:a="http://schemas.openxmlformats.org/drawingml/2006/main" marL="0" algn="l" defTabSz="914400">
+    <a:lvl1pPr marL="0" algn="l" defTabSz="914400">
       <a:buNone/>
       <a:defRPr sz="1800" kern="1200">
         <a:solidFill>
@@ -32,7 +32,7 @@
         <a:cs typeface="+mn-lt"/>
       </a:defRPr>
     </a:lvl1pPr>
-    <a:lvl2pPr xmlns:a="http://schemas.openxmlformats.org/drawingml/2006/main" marL="457200" algn="l" defTabSz="914400">
+    <a:lvl2pPr marL="457200" algn="l" defTabSz="914400">
       <a:buNone/>
       <a:defRPr sz="1800" kern="1200">
         <a:solidFill>
@@ -43,7 +43,7 @@
         <a:cs typeface="+mn-lt"/>
       </a:defRPr>
     </a:lvl2pPr>
-    <a:lvl3pPr xmlns:a="http://schemas.openxmlformats.org/drawingml/2006/main" marL="914400" algn="l" defTabSz="914400">
+    <a:lvl3pPr marL="914400" algn="l" defTabSz="914400">
       <a:buNone/>
       <a:defRPr sz="1800" kern="1200">
         <a:solidFill>
@@ -54,7 +54,7 @@
         <a:cs typeface="+mn-lt"/>
       </a:defRPr>
     </a:lvl3pPr>
-    <a:lvl4pPr xmlns:a="http://schemas.openxmlformats.org/drawingml/2006/main" marL="1371600" algn="l" defTabSz="914400">
+    <a:lvl4pPr marL="1371600" algn="l" defTabSz="914400">
       <a:buNone/>
       <a:defRPr sz="1800" kern="1200">
         <a:solidFill>
@@ -65,7 +65,7 @@
         <a:cs typeface="+mn-lt"/>
       </a:defRPr>
     </a:lvl4pPr>
-    <a:lvl5pPr xmlns:a="http://schemas.openxmlformats.org/drawingml/2006/main" marL="1828800" algn="l" defTabSz="914400">
+    <a:lvl5pPr marL="1828800" algn="l" defTabSz="914400">
       <a:buNone/>
       <a:defRPr sz="1800" kern="1200">
         <a:solidFill>
@@ -76,7 +76,7 @@
         <a:cs typeface="+mn-lt"/>
       </a:defRPr>
     </a:lvl5pPr>
-    <a:lvl6pPr xmlns:a="http://schemas.openxmlformats.org/drawingml/2006/main" marL="2286000" algn="l" defTabSz="914400">
+    <a:lvl6pPr marL="2286000" algn="l" defTabSz="914400">
       <a:buNone/>
       <a:defRPr sz="1800" kern="1200">
         <a:solidFill>
@@ -87,7 +87,7 @@
         <a:cs typeface="+mn-lt"/>
       </a:defRPr>
     </a:lvl6pPr>
-    <a:lvl7pPr xmlns:a="http://schemas.openxmlformats.org/drawingml/2006/main" marL="2743200" algn="l" defTabSz="914400">
+    <a:lvl7pPr marL="2743200" algn="l" defTabSz="914400">
       <a:buNone/>
       <a:defRPr sz="1800" kern="1200">
         <a:solidFill>
@@ -98,7 +98,7 @@
         <a:cs typeface="+mn-lt"/>
       </a:defRPr>
     </a:lvl7pPr>
-    <a:lvl8pPr xmlns:a="http://schemas.openxmlformats.org/drawingml/2006/main" marL="3200400" algn="l" defTabSz="914400">
+    <a:lvl8pPr marL="3200400" algn="l" defTabSz="914400">
       <a:buNone/>
       <a:defRPr sz="1800" kern="1200">
         <a:solidFill>
@@ -109,7 +109,7 @@
         <a:cs typeface="+mn-lt"/>
       </a:defRPr>
     </a:lvl8pPr>
-    <a:lvl9pPr xmlns:a="http://schemas.openxmlformats.org/drawingml/2006/main" marL="3657600" algn="l" defTabSz="914400">
+    <a:lvl9pPr marL="3657600" algn="l" defTabSz="914400">
       <a:buNone/>
       <a:defRPr sz="1800" kern="1200">
         <a:solidFill>
@@ -121,15 +121,20 @@
       </a:defRPr>
     </a:lvl9pPr>
   </p:defaultTextStyle>
+  <p:extLst>
+    <p:ext uri="{EFAFB233-063F-42B5-8137-9DF3F51BA10A}">
+      <p15:sldGuideLst xmlns:p15="http://schemas.microsoft.com/office/powerpoint/2012/main"/>
+    </p:ext>
+  </p:extLst>
 </p:presentation>
 </file>
 
 <file path=ppt/notesMasters/notesMaster1.xml><?xml version="1.0" encoding="utf-8"?>
-<p:notesMaster xmlns:p="http://schemas.openxmlformats.org/presentationml/2006/main">
+<p:notesMaster xmlns:a="http://schemas.openxmlformats.org/drawingml/2006/main" xmlns:r="http://schemas.openxmlformats.org/officeDocument/2006/relationships" xmlns:p="http://schemas.openxmlformats.org/presentationml/2006/main">
   <p:cSld>
     <p:bg>
       <p:bgRef idx="1001">
-        <a:schemeClr xmlns:a="http://schemas.openxmlformats.org/drawingml/2006/main" val="bg1"/>
+        <a:schemeClr val="bg1"/>
       </p:bgRef>
     </p:bg>
     <p:spTree>
@@ -139,420 +144,164 @@
         <p:nvPr/>
       </p:nvGrpSpPr>
       <p:grpSpPr>
-        <a:xfrm xmlns:a="http://schemas.openxmlformats.org/drawingml/2006/main"/>
+        <a:xfrm>
+          <a:off x="0" y="0"/>
+          <a:ext cx="0" cy="0"/>
+          <a:chOff x="0" y="0"/>
+          <a:chExt cx="0" cy="0"/>
+        </a:xfrm>
       </p:grpSpPr>
       <p:sp>
         <p:nvSpPr>
           <p:cNvPr id="2" name="Header Placeholder"/>
-          <p:cNvSpPr/>
+          <p:cNvSpPr>
+            <a:spLocks noGrp="1"/>
+          </p:cNvSpPr>
           <p:nvPr>
             <p:ph type="hdr" sz="quarter"/>
           </p:nvPr>
         </p:nvSpPr>
         <p:spPr>
-          <a:prstGeom xmlns:a="http://schemas.openxmlformats.org/drawingml/2006/main" prst="rect">
-            <a:avLst/>
-          </a:prstGeom>
-        </p:spPr>
-        <p:txBody>
-          <a:bodyPr xmlns:a="http://schemas.openxmlformats.org/drawingml/2006/main"/>
-          <a:lstStyle xmlns:a="http://schemas.openxmlformats.org/drawingml/2006/main"/>
-          <a:p xmlns:a="http://schemas.openxmlformats.org/drawingml/2006/main"/>
+          <a:prstGeom prst="rect">
+            <a:avLst/>
+          </a:prstGeom>
+        </p:spPr>
+        <p:txBody>
+          <a:bodyPr/>
+          <a:lstStyle/>
+          <a:p>
+            <a:endParaRPr/>
+          </a:p>
         </p:txBody>
       </p:sp>
       <p:sp>
         <p:nvSpPr>
           <p:cNvPr id="3" name="Date Placeholder"/>
-          <p:cNvSpPr/>
+          <p:cNvSpPr>
+            <a:spLocks noGrp="1"/>
+          </p:cNvSpPr>
           <p:nvPr>
             <p:ph type="dt" sz="quarter" idx="1"/>
           </p:nvPr>
         </p:nvSpPr>
         <p:spPr>
-          <a:prstGeom xmlns:a="http://schemas.openxmlformats.org/drawingml/2006/main" prst="rect">
-            <a:avLst/>
-          </a:prstGeom>
-        </p:spPr>
-        <p:txBody>
-          <a:bodyPr xmlns:a="http://schemas.openxmlformats.org/drawingml/2006/main"/>
-          <a:lstStyle xmlns:a="http://schemas.openxmlformats.org/drawingml/2006/main"/>
-          <a:p xmlns:a="http://schemas.openxmlformats.org/drawingml/2006/main"/>
+          <a:prstGeom prst="rect">
+            <a:avLst/>
+          </a:prstGeom>
+        </p:spPr>
+        <p:txBody>
+          <a:bodyPr/>
+          <a:lstStyle/>
+          <a:p>
+            <a:endParaRPr/>
+          </a:p>
         </p:txBody>
       </p:sp>
       <p:sp>
         <p:nvSpPr>
           <p:cNvPr id="4" name="Slide Image Placeholder"/>
-          <p:cNvSpPr/>
+          <p:cNvSpPr>
+            <a:spLocks noGrp="1" noRot="1" noChangeAspect="1"/>
+          </p:cNvSpPr>
           <p:nvPr>
             <p:ph type="sldImg" idx="2"/>
           </p:nvPr>
         </p:nvSpPr>
         <p:spPr>
-          <a:prstGeom xmlns:a="http://schemas.openxmlformats.org/drawingml/2006/main" prst="rect">
-            <a:avLst/>
-          </a:prstGeom>
-        </p:spPr>
-        <p:txBody>
-          <a:bodyPr xmlns:a="http://schemas.openxmlformats.org/drawingml/2006/main"/>
-          <a:lstStyle xmlns:a="http://schemas.openxmlformats.org/drawingml/2006/main"/>
-          <a:p xmlns:a="http://schemas.openxmlformats.org/drawingml/2006/main"/>
+          <a:prstGeom prst="rect">
+            <a:avLst/>
+          </a:prstGeom>
+        </p:spPr>
+        <p:txBody>
+          <a:bodyPr/>
+          <a:lstStyle/>
+          <a:p>
+            <a:endParaRPr/>
+          </a:p>
         </p:txBody>
       </p:sp>
       <p:sp>
         <p:nvSpPr>
           <p:cNvPr id="5" name="Notes Placeholder"/>
-          <p:cNvSpPr/>
+          <p:cNvSpPr>
+            <a:spLocks noGrp="1"/>
+          </p:cNvSpPr>
           <p:nvPr>
             <p:ph type="body" sz="quarter" idx="3"/>
           </p:nvPr>
         </p:nvSpPr>
         <p:spPr>
-          <a:prstGeom xmlns:a="http://schemas.openxmlformats.org/drawingml/2006/main" prst="rect">
-            <a:avLst/>
-          </a:prstGeom>
-        </p:spPr>
-        <p:txBody>
-          <a:bodyPr xmlns:a="http://schemas.openxmlformats.org/drawingml/2006/main"/>
-          <a:lstStyle xmlns:a="http://schemas.openxmlformats.org/drawingml/2006/main"/>
-          <a:p xmlns:a="http://schemas.openxmlformats.org/drawingml/2006/main"/>
+          <a:prstGeom prst="rect">
+            <a:avLst/>
+          </a:prstGeom>
+        </p:spPr>
+        <p:txBody>
+          <a:bodyPr/>
+          <a:lstStyle/>
+          <a:p>
+            <a:endParaRPr/>
+          </a:p>
         </p:txBody>
       </p:sp>
       <p:sp>
         <p:nvSpPr>
           <p:cNvPr id="6" name="Footer Placeholder"/>
-          <p:cNvSpPr/>
+          <p:cNvSpPr>
+            <a:spLocks noGrp="1"/>
+          </p:cNvSpPr>
           <p:nvPr>
             <p:ph type="ftr" sz="quarter" idx="4"/>
           </p:nvPr>
         </p:nvSpPr>
         <p:spPr>
-          <a:prstGeom xmlns:a="http://schemas.openxmlformats.org/drawingml/2006/main" prst="rect">
-            <a:avLst/>
-          </a:prstGeom>
-        </p:spPr>
-        <p:txBody>
-          <a:bodyPr xmlns:a="http://schemas.openxmlformats.org/drawingml/2006/main"/>
-          <a:lstStyle xmlns:a="http://schemas.openxmlformats.org/drawingml/2006/main"/>
-          <a:p xmlns:a="http://schemas.openxmlformats.org/drawingml/2006/main"/>
+          <a:prstGeom prst="rect">
+            <a:avLst/>
+          </a:prstGeom>
+        </p:spPr>
+        <p:txBody>
+          <a:bodyPr/>
+          <a:lstStyle/>
+          <a:p>
+            <a:endParaRPr/>
+          </a:p>
         </p:txBody>
       </p:sp>
       <p:sp>
         <p:nvSpPr>
           <p:cNvPr id="7" name="Slide Number Placeholder"/>
-          <p:cNvSpPr/>
+          <p:cNvSpPr>
+            <a:spLocks noGrp="1"/>
+          </p:cNvSpPr>
           <p:nvPr>
             <p:ph type="sldNum" sz="quarter" idx="5"/>
           </p:nvPr>
         </p:nvSpPr>
         <p:spPr>
-          <a:prstGeom xmlns:a="http://schemas.openxmlformats.org/drawingml/2006/main" prst="rect">
-            <a:avLst/>
-          </a:prstGeom>
-        </p:spPr>
-        <p:txBody>
-          <a:bodyPr xmlns:a="http://schemas.openxmlformats.org/drawingml/2006/main"/>
-          <a:lstStyle xmlns:a="http://schemas.openxmlformats.org/drawingml/2006/main"/>
-          <a:p xmlns:a="http://schemas.openxmlformats.org/drawingml/2006/main"/>
+          <a:prstGeom prst="rect">
+            <a:avLst/>
+          </a:prstGeom>
+        </p:spPr>
+        <p:txBody>
+          <a:bodyPr/>
+          <a:lstStyle/>
+          <a:p>
+            <a:endParaRPr/>
+          </a:p>
         </p:txBody>
       </p:sp>
     </p:spTree>
   </p:cSld>
   <p:clrMap bg1="lt1" tx1="dk1" bg2="lt2" tx2="dk2" accent1="accent1" accent2="accent2" accent3="accent3" accent4="accent4" accent5="accent5" accent6="accent6" hlink="hlink" folHlink="folHlink"/>
   <p:notesStyle>
-    <a:lvl1pPr xmlns:a="http://schemas.openxmlformats.org/drawingml/2006/main" marL="0" algn="l" defTabSz="914400" rtl="0" eaLnBrk="1" latinLnBrk="0" hangingPunct="1">
+    <a:lvl1pPr marL="0" algn="l" defTabSz="914400" rtl="0" eaLnBrk="1" latinLnBrk="0" hangingPunct="1">
       <a:defRPr sz="1200" kern="1200"/>
     </a:lvl1pPr>
   </p:notesStyle>
 </p:notesMaster>
 </file>
 
-<file path=ppt/notesMasters/theme/theme3.xml><?xml version="1.0" encoding="utf-8"?>
-<a:theme xmlns:a="http://schemas.openxmlformats.org/drawingml/2006/main" name="Hypnexis">
-  <a:themeElements>
-    <a:clrScheme name="Hypnexis">
-      <a:dk1>
-        <a:srgbClr val="040A20"/>
-      </a:dk1>
-      <a:lt1>
-        <a:srgbClr val="FFFFFF"/>
-      </a:lt1>
-      <a:dk2>
-        <a:srgbClr val="0B1A4A"/>
-      </a:dk2>
-      <a:lt2>
-        <a:srgbClr val="CFE0FF"/>
-      </a:lt2>
-      <a:accent1>
-        <a:srgbClr val="1E5BFF"/>
-      </a:accent1>
-      <a:accent2>
-        <a:srgbClr val="4DA3FF"/>
-      </a:accent2>
-      <a:accent3>
-        <a:srgbClr val="0A2A8F"/>
-      </a:accent3>
-      <a:accent4>
-        <a:srgbClr val="9CC4FF"/>
-      </a:accent4>
-      <a:accent5>
-        <a:srgbClr val="6C8CFF"/>
-      </a:accent5>
-      <a:accent6>
-        <a:srgbClr val="00C2FF"/>
-      </a:accent6>
-      <a:hlink>
-        <a:srgbClr val="4DA3FF"/>
-      </a:hlink>
-      <a:folHlink>
-        <a:srgbClr val="9CC4FF"/>
-      </a:folHlink>
-    </a:clrScheme>
-    <a:fontScheme name="Hypnexis">
-      <a:majorFont>
-        <a:latin typeface="Arial"/>
-        <a:ea typeface=""/>
-        <a:cs typeface=""/>
-        <a:font script="Jpan" typeface="游ゴシック Light"/>
-        <a:font script="Hang" typeface="맑은 고딕"/>
-        <a:font script="Hans" typeface="等线 Light"/>
-        <a:font script="Hant" typeface="新細明體"/>
-        <a:font script="Arab" typeface="Times New Roman"/>
-        <a:font script="Hebr" typeface="Times New Roman"/>
-        <a:font script="Thai" typeface="Angsana New"/>
-        <a:font script="Ethi" typeface="Nyala"/>
-        <a:font script="Beng" typeface="Vrinda"/>
-        <a:font script="Gujr" typeface="Shruti"/>
-        <a:font script="Khmr" typeface="MoolBoran"/>
-        <a:font script="Knda" typeface="Tunga"/>
-        <a:font script="Guru" typeface="Raavi"/>
-        <a:font script="Cans" typeface="Euphemia"/>
-        <a:font script="Cher" typeface="Plantagenet Cherokee"/>
-        <a:font script="Yiii" typeface="Microsoft Yi Baiti"/>
-        <a:font script="Tibt" typeface="Microsoft Himalaya"/>
-        <a:font script="Thaa" typeface="MV Boli"/>
-        <a:font script="Deva" typeface="Mangal"/>
-        <a:font script="Telu" typeface="Gautami"/>
-        <a:font script="Taml" typeface="Latha"/>
-        <a:font script="Syrc" typeface="Estrangelo Edessa"/>
-        <a:font script="Orya" typeface="Kalinga"/>
-        <a:font script="Mlym" typeface="Kartika"/>
-        <a:font script="Laoo" typeface="DokChampa"/>
-        <a:font script="Sinh" typeface="Iskoola Pota"/>
-        <a:font script="Mong" typeface="Mongolian Baiti"/>
-        <a:font script="Viet" typeface="Times New Roman"/>
-        <a:font script="Uigh" typeface="Microsoft Uighur"/>
-        <a:font script="Geor" typeface="Sylfaen"/>
-        <a:font script="Armn" typeface="Arial"/>
-        <a:font script="Bugi" typeface="Leelawadee UI"/>
-        <a:font script="Bopo" typeface="Microsoft JhengHei"/>
-        <a:font script="Java" typeface="Javanese Text"/>
-        <a:font script="Lisu" typeface="Segoe UI"/>
-        <a:font script="Mymr" typeface="Myanmar Text"/>
-        <a:font script="Nkoo" typeface="Ebrima"/>
-        <a:font script="Olck" typeface="Nirmala UI"/>
-        <a:font script="Osma" typeface="Ebrima"/>
-        <a:font script="Phag" typeface="Phagspa"/>
-        <a:font script="Syrn" typeface="Estrangelo Edessa"/>
-        <a:font script="Syrj" typeface="Estrangelo Edessa"/>
-        <a:font script="Syre" typeface="Estrangelo Edessa"/>
-        <a:font script="Sora" typeface="Nirmala UI"/>
-        <a:font script="Tale" typeface="Microsoft Tai Le"/>
-        <a:font script="Talu" typeface="Microsoft New Tai Lue"/>
-        <a:font script="Tfng" typeface="Ebrima"/>
-      </a:majorFont>
-      <a:minorFont>
-        <a:latin typeface="Calibri"/>
-        <a:ea typeface=""/>
-        <a:cs typeface=""/>
-        <a:font script="Jpan" typeface="游ゴシック"/>
-        <a:font script="Hang" typeface="맑은 고딕"/>
-        <a:font script="Hans" typeface="等线"/>
-        <a:font script="Hant" typeface="新細明體"/>
-        <a:font script="Arab" typeface="Arial"/>
-        <a:font script="Hebr" typeface="Arial"/>
-        <a:font script="Thai" typeface="Cordia New"/>
-        <a:font script="Ethi" typeface="Nyala"/>
-        <a:font script="Beng" typeface="Vrinda"/>
-        <a:font script="Gujr" typeface="Shruti"/>
-        <a:font script="Khmr" typeface="DaunPenh"/>
-        <a:font script="Knda" typeface="Tunga"/>
-        <a:font script="Guru" typeface="Raavi"/>
-        <a:font script="Cans" typeface="Euphemia"/>
-        <a:font script="Cher" typeface="Plantagenet Cherokee"/>
-        <a:font script="Yiii" typeface="Microsoft Yi Baiti"/>
-        <a:font script="Tibt" typeface="Microsoft Himalaya"/>
-        <a:font script="Thaa" typeface="MV Boli"/>
-        <a:font script="Deva" typeface="Mangal"/>
-        <a:font script="Telu" typeface="Gautami"/>
-        <a:font script="Taml" typeface="Latha"/>
-        <a:font script="Syrc" typeface="Estrangelo Edessa"/>
-        <a:font script="Orya" typeface="Kalinga"/>
-        <a:font script="Mlym" typeface="Kartika"/>
-        <a:font script="Laoo" typeface="DokChampa"/>
-        <a:font script="Sinh" typeface="Iskoola Pota"/>
-        <a:font script="Mong" typeface="Mongolian Baiti"/>
-        <a:font script="Viet" typeface="Arial"/>
-        <a:font script="Uigh" typeface="Microsoft Uighur"/>
-        <a:font script="Geor" typeface="Sylfaen"/>
-        <a:font script="Armn" typeface="Arial"/>
-        <a:font script="Bugi" typeface="Leelawadee UI"/>
-        <a:font script="Bopo" typeface="Microsoft JhengHei"/>
-        <a:font script="Java" typeface="Javanese Text"/>
-        <a:font script="Lisu" typeface="Segoe UI"/>
-        <a:font script="Mymr" typeface="Myanmar Text"/>
-        <a:font script="Nkoo" typeface="Ebrima"/>
-        <a:font script="Olck" typeface="Nirmala UI"/>
-        <a:font script="Osma" typeface="Ebrima"/>
-        <a:font script="Phag" typeface="Phagspa"/>
-        <a:font script="Syrn" typeface="Estrangelo Edessa"/>
-        <a:font script="Syrj" typeface="Estrangelo Edessa"/>
-        <a:font script="Syre" typeface="Estrangelo Edessa"/>
-        <a:font script="Sora" typeface="Nirmala UI"/>
-        <a:font script="Tale" typeface="Microsoft Tai Le"/>
-        <a:font script="Talu" typeface="Microsoft New Tai Lue"/>
-        <a:font script="Tfng" typeface="Ebrima"/>
-      </a:minorFont>
-    </a:fontScheme>
-    <a:fmtScheme name="Hypnexis">
-      <a:fillStyleLst>
-        <a:solidFill>
-          <a:schemeClr val="phClr"/>
-        </a:solidFill>
-        <a:gradFill rotWithShape="1">
-          <a:gsLst>
-            <a:gs pos="0">
-              <a:schemeClr val="phClr">
-                <a:tint val="67000"/>
-                <a:lumMod val="110000"/>
-                <a:satMod val="105000"/>
-              </a:schemeClr>
-            </a:gs>
-            <a:gs pos="50000">
-              <a:schemeClr val="phClr">
-                <a:tint val="73000"/>
-                <a:lumMod val="105000"/>
-                <a:satMod val="103000"/>
-              </a:schemeClr>
-            </a:gs>
-            <a:gs pos="100000">
-              <a:schemeClr val="phClr">
-                <a:tint val="81000"/>
-                <a:lumMod val="105000"/>
-                <a:satMod val="109000"/>
-              </a:schemeClr>
-            </a:gs>
-          </a:gsLst>
-          <a:lin ang="5400000" scaled="0"/>
-        </a:gradFill>
-        <a:gradFill rotWithShape="1">
-          <a:gsLst>
-            <a:gs pos="0">
-              <a:schemeClr val="phClr">
-                <a:tint val="94000"/>
-                <a:lumMod val="102000"/>
-                <a:satMod val="103000"/>
-              </a:schemeClr>
-            </a:gs>
-            <a:gs pos="50000">
-              <a:schemeClr val="phClr">
-                <a:shade val="100000"/>
-                <a:lumMod val="100000"/>
-                <a:satMod val="110000"/>
-              </a:schemeClr>
-            </a:gs>
-            <a:gs pos="100000">
-              <a:schemeClr val="phClr">
-                <a:shade val="78000"/>
-                <a:lumMod val="99000"/>
-                <a:satMod val="120000"/>
-              </a:schemeClr>
-            </a:gs>
-          </a:gsLst>
-          <a:lin ang="5400000" scaled="0"/>
-        </a:gradFill>
-      </a:fillStyleLst>
-      <a:lnStyleLst>
-        <a:ln w="6350">
-          <a:solidFill>
-            <a:schemeClr val="phClr"/>
-          </a:solidFill>
-          <a:prstDash val="solid"/>
-        </a:ln>
-        <a:ln w="12700">
-          <a:solidFill>
-            <a:schemeClr val="phClr"/>
-          </a:solidFill>
-          <a:prstDash val="solid"/>
-        </a:ln>
-        <a:ln w="19050">
-          <a:solidFill>
-            <a:schemeClr val="phClr"/>
-          </a:solidFill>
-          <a:prstDash val="solid"/>
-        </a:ln>
-      </a:lnStyleLst>
-      <a:effectStyleLst>
-        <a:effectStyle>
-          <a:effectLst/>
-        </a:effectStyle>
-        <a:effectStyle>
-          <a:effectLst/>
-        </a:effectStyle>
-        <a:effectStyle>
-          <a:effectLst>
-            <a:outerShdw blurRad="57150" dist="19050" dir="5400000" algn="ctr" rotWithShape="0">
-              <a:srgbClr val="000000">
-                <a:alpha val="63000"/>
-              </a:srgbClr>
-            </a:outerShdw>
-          </a:effectLst>
-        </a:effectStyle>
-      </a:effectStyleLst>
-      <a:bgFillStyleLst>
-        <a:solidFill>
-          <a:schemeClr val="phClr"/>
-        </a:solidFill>
-        <a:solidFill>
-          <a:schemeClr val="phClr">
-            <a:tint val="95000"/>
-            <a:satMod val="170000"/>
-          </a:schemeClr>
-        </a:solidFill>
-        <a:gradFill rotWithShape="1">
-          <a:gsLst>
-            <a:gs pos="0">
-              <a:schemeClr val="phClr">
-                <a:tint val="93000"/>
-                <a:shade val="98000"/>
-                <a:lumMod val="102000"/>
-                <a:satMod val="150000"/>
-              </a:schemeClr>
-            </a:gs>
-            <a:gs pos="50000">
-              <a:schemeClr val="phClr">
-                <a:tint val="98000"/>
-                <a:shade val="90000"/>
-                <a:lumMod val="103000"/>
-                <a:satMod val="130000"/>
-              </a:schemeClr>
-            </a:gs>
-            <a:gs pos="100000">
-              <a:schemeClr val="phClr">
-                <a:shade val="63000"/>
-                <a:satMod val="120000"/>
-              </a:schemeClr>
-            </a:gs>
-          </a:gsLst>
-          <a:lin ang="5400000" scaled="0"/>
-        </a:gradFill>
-      </a:bgFillStyleLst>
-    </a:fmtScheme>
-  </a:themeElements>
-</a:theme>
-</file>
-
 <file path=ppt/notesSlides/notesSlide1.xml><?xml version="1.0" encoding="utf-8"?>
-<p:notes xmlns:p="http://schemas.openxmlformats.org/presentationml/2006/main">
+<p:notes xmlns:a="http://schemas.openxmlformats.org/drawingml/2006/main" xmlns:r="http://schemas.openxmlformats.org/officeDocument/2006/relationships" xmlns:p="http://schemas.openxmlformats.org/presentationml/2006/main">
   <p:cSld>
     <p:spTree>
       <p:nvGrpSpPr>
@@ -561,16 +310,21 @@
         <p:nvPr/>
       </p:nvGrpSpPr>
       <p:grpSpPr>
-        <a:xfrm xmlns:a="http://schemas.openxmlformats.org/drawingml/2006/main"/>
+        <a:xfrm>
+          <a:off x="0" y="0"/>
+          <a:ext cx="0" cy="0"/>
+          <a:chOff x="0" y="0"/>
+          <a:chExt cx="0" cy="0"/>
+        </a:xfrm>
       </p:grpSpPr>
       <p:sp>
         <p:nvSpPr>
           <p:cNvPr id="2" name="Slide Image Placeholder 1"/>
           <p:cNvSpPr>
-            <a:spLocks xmlns:a="http://schemas.openxmlformats.org/drawingml/2006/main" noGrp="1"/>
+            <a:spLocks noGrp="1" noRot="1" noChangeAspect="1"/>
           </p:cNvSpPr>
           <p:nvPr>
-            <p:ph type="sldImg" idx="0"/>
+            <p:ph type="sldImg"/>
           </p:nvPr>
         </p:nvSpPr>
         <p:spPr/>
@@ -579,7 +333,7 @@
         <p:nvSpPr>
           <p:cNvPr id="3" name="Notes Placeholder 2"/>
           <p:cNvSpPr>
-            <a:spLocks xmlns:a="http://schemas.openxmlformats.org/drawingml/2006/main" noGrp="1"/>
+            <a:spLocks noGrp="1"/>
           </p:cNvSpPr>
           <p:nvPr>
             <p:ph type="body" idx="1"/>
@@ -587,13 +341,12 @@
         </p:nvSpPr>
         <p:spPr/>
         <p:txBody>
-          <a:bodyPr xmlns:a="http://schemas.openxmlformats.org/drawingml/2006/main"/>
-          <a:lstStyle xmlns:a="http://schemas.openxmlformats.org/drawingml/2006/main"/>
-          <a:p xmlns:a="http://schemas.openxmlformats.org/drawingml/2006/main">
+          <a:bodyPr/>
+          <a:lstStyle/>
+          <a:p>
             <a:r>
               <a:t>The title is a concise description of the user-supplied Phase 2 extension. Team ID, official problem statement ID, and contact details were not included in the source materials.</a:t>
             </a:r>
-            <a:endParaRPr/>
           </a:p>
         </p:txBody>
       </p:sp>
@@ -601,7 +354,7 @@
         <p:nvSpPr>
           <p:cNvPr id="4" name="Slide Number Placeholder 3"/>
           <p:cNvSpPr>
-            <a:spLocks xmlns:a="http://schemas.openxmlformats.org/drawingml/2006/main" noGrp="1"/>
+            <a:spLocks noGrp="1"/>
           </p:cNvSpPr>
           <p:nvPr>
             <p:ph type="sldNum" idx="5"/>
@@ -609,21 +362,23 @@
         </p:nvSpPr>
         <p:spPr/>
         <p:txBody>
-          <a:bodyPr xmlns:a="http://schemas.openxmlformats.org/drawingml/2006/main"/>
-          <a:lstStyle xmlns:a="http://schemas.openxmlformats.org/drawingml/2006/main"/>
-          <a:p xmlns:a="http://schemas.openxmlformats.org/drawingml/2006/main"/>
+          <a:bodyPr/>
+          <a:lstStyle/>
+          <a:p>
+            <a:endParaRPr/>
+          </a:p>
         </p:txBody>
       </p:sp>
     </p:spTree>
   </p:cSld>
   <p:clrMapOvr>
-    <a:masterClrMapping xmlns:a="http://schemas.openxmlformats.org/drawingml/2006/main"/>
+    <a:masterClrMapping/>
   </p:clrMapOvr>
 </p:notes>
 </file>
 
 <file path=ppt/notesSlides/notesSlide2.xml><?xml version="1.0" encoding="utf-8"?>
-<p:notes xmlns:p="http://schemas.openxmlformats.org/presentationml/2006/main">
+<p:notes xmlns:a="http://schemas.openxmlformats.org/drawingml/2006/main" xmlns:r="http://schemas.openxmlformats.org/officeDocument/2006/relationships" xmlns:p="http://schemas.openxmlformats.org/presentationml/2006/main">
   <p:cSld>
     <p:spTree>
       <p:nvGrpSpPr>
@@ -632,16 +387,21 @@
         <p:nvPr/>
       </p:nvGrpSpPr>
       <p:grpSpPr>
-        <a:xfrm xmlns:a="http://schemas.openxmlformats.org/drawingml/2006/main"/>
+        <a:xfrm>
+          <a:off x="0" y="0"/>
+          <a:ext cx="0" cy="0"/>
+          <a:chOff x="0" y="0"/>
+          <a:chExt cx="0" cy="0"/>
+        </a:xfrm>
       </p:grpSpPr>
       <p:sp>
         <p:nvSpPr>
           <p:cNvPr id="2" name="Slide Image Placeholder 1"/>
           <p:cNvSpPr>
-            <a:spLocks xmlns:a="http://schemas.openxmlformats.org/drawingml/2006/main" noGrp="1"/>
+            <a:spLocks noGrp="1" noRot="1" noChangeAspect="1"/>
           </p:cNvSpPr>
           <p:nvPr>
-            <p:ph type="sldImg" idx="0"/>
+            <p:ph type="sldImg"/>
           </p:nvPr>
         </p:nvSpPr>
         <p:spPr/>
@@ -650,7 +410,7 @@
         <p:nvSpPr>
           <p:cNvPr id="3" name="Notes Placeholder 2"/>
           <p:cNvSpPr>
-            <a:spLocks xmlns:a="http://schemas.openxmlformats.org/drawingml/2006/main" noGrp="1"/>
+            <a:spLocks noGrp="1"/>
           </p:cNvSpPr>
           <p:nvPr>
             <p:ph type="body" idx="1"/>
@@ -658,13 +418,12 @@
         </p:nvSpPr>
         <p:spPr/>
         <p:txBody>
-          <a:bodyPr xmlns:a="http://schemas.openxmlformats.org/drawingml/2006/main"/>
-          <a:lstStyle xmlns:a="http://schemas.openxmlformats.org/drawingml/2006/main"/>
-          <a:p xmlns:a="http://schemas.openxmlformats.org/drawingml/2006/main">
+          <a:bodyPr/>
+          <a:lstStyle/>
+          <a:p>
             <a:r>
               <a:t>Sources: README.md (Phase 2 section); backend/app/document_store.py; backend/app/graph_engine.py; backend/tests/test_phase2_documents.py. The 7.7-second result is from an isolated local test database with 500 generated input documents. The graph total includes four seeded sample documents.</a:t>
             </a:r>
-            <a:endParaRPr/>
           </a:p>
         </p:txBody>
       </p:sp>
@@ -672,7 +431,7 @@
         <p:nvSpPr>
           <p:cNvPr id="4" name="Slide Number Placeholder 3"/>
           <p:cNvSpPr>
-            <a:spLocks xmlns:a="http://schemas.openxmlformats.org/drawingml/2006/main" noGrp="1"/>
+            <a:spLocks noGrp="1"/>
           </p:cNvSpPr>
           <p:nvPr>
             <p:ph type="sldNum" idx="5"/>
@@ -680,21 +439,23 @@
         </p:nvSpPr>
         <p:spPr/>
         <p:txBody>
-          <a:bodyPr xmlns:a="http://schemas.openxmlformats.org/drawingml/2006/main"/>
-          <a:lstStyle xmlns:a="http://schemas.openxmlformats.org/drawingml/2006/main"/>
-          <a:p xmlns:a="http://schemas.openxmlformats.org/drawingml/2006/main"/>
+          <a:bodyPr/>
+          <a:lstStyle/>
+          <a:p>
+            <a:endParaRPr/>
+          </a:p>
         </p:txBody>
       </p:sp>
     </p:spTree>
   </p:cSld>
   <p:clrMapOvr>
-    <a:masterClrMapping xmlns:a="http://schemas.openxmlformats.org/drawingml/2006/main"/>
+    <a:masterClrMapping/>
   </p:clrMapOvr>
 </p:notes>
 </file>
 
 <file path=ppt/notesSlides/notesSlide3.xml><?xml version="1.0" encoding="utf-8"?>
-<p:notes xmlns:p="http://schemas.openxmlformats.org/presentationml/2006/main">
+<p:notes xmlns:a="http://schemas.openxmlformats.org/drawingml/2006/main" xmlns:r="http://schemas.openxmlformats.org/officeDocument/2006/relationships" xmlns:p="http://schemas.openxmlformats.org/presentationml/2006/main">
   <p:cSld>
     <p:spTree>
       <p:nvGrpSpPr>
@@ -703,16 +464,21 @@
         <p:nvPr/>
       </p:nvGrpSpPr>
       <p:grpSpPr>
-        <a:xfrm xmlns:a="http://schemas.openxmlformats.org/drawingml/2006/main"/>
+        <a:xfrm>
+          <a:off x="0" y="0"/>
+          <a:ext cx="0" cy="0"/>
+          <a:chOff x="0" y="0"/>
+          <a:chExt cx="0" cy="0"/>
+        </a:xfrm>
       </p:grpSpPr>
       <p:sp>
         <p:nvSpPr>
           <p:cNvPr id="2" name="Slide Image Placeholder 1"/>
           <p:cNvSpPr>
-            <a:spLocks xmlns:a="http://schemas.openxmlformats.org/drawingml/2006/main" noGrp="1"/>
+            <a:spLocks noGrp="1" noRot="1" noChangeAspect="1"/>
           </p:cNvSpPr>
           <p:nvPr>
-            <p:ph type="sldImg" idx="0"/>
+            <p:ph type="sldImg"/>
           </p:nvPr>
         </p:nvSpPr>
         <p:spPr/>
@@ -721,7 +487,7 @@
         <p:nvSpPr>
           <p:cNvPr id="3" name="Notes Placeholder 2"/>
           <p:cNvSpPr>
-            <a:spLocks xmlns:a="http://schemas.openxmlformats.org/drawingml/2006/main" noGrp="1"/>
+            <a:spLocks noGrp="1"/>
           </p:cNvSpPr>
           <p:nvPr>
             <p:ph type="body" idx="1"/>
@@ -729,13 +495,12 @@
         </p:nvSpPr>
         <p:spPr/>
         <p:txBody>
-          <a:bodyPr xmlns:a="http://schemas.openxmlformats.org/drawingml/2006/main"/>
-          <a:lstStyle xmlns:a="http://schemas.openxmlformats.org/drawingml/2006/main"/>
-          <a:p xmlns:a="http://schemas.openxmlformats.org/drawingml/2006/main">
+          <a:bodyPr/>
+          <a:lstStyle/>
+          <a:p>
             <a:r>
               <a:t>Sources: README.md (Architecture Overview and Phase 2); backend/app/document_safety.py; backend/app/document_store.py; backend/app/graph_engine.py; backend/app/retrieval_engine.py; backend/app/validation_engine.py.</a:t>
             </a:r>
-            <a:endParaRPr/>
           </a:p>
         </p:txBody>
       </p:sp>
@@ -743,7 +508,7 @@
         <p:nvSpPr>
           <p:cNvPr id="4" name="Slide Number Placeholder 3"/>
           <p:cNvSpPr>
-            <a:spLocks xmlns:a="http://schemas.openxmlformats.org/drawingml/2006/main" noGrp="1"/>
+            <a:spLocks noGrp="1"/>
           </p:cNvSpPr>
           <p:nvPr>
             <p:ph type="sldNum" idx="5"/>
@@ -751,21 +516,23 @@
         </p:nvSpPr>
         <p:spPr/>
         <p:txBody>
-          <a:bodyPr xmlns:a="http://schemas.openxmlformats.org/drawingml/2006/main"/>
-          <a:lstStyle xmlns:a="http://schemas.openxmlformats.org/drawingml/2006/main"/>
-          <a:p xmlns:a="http://schemas.openxmlformats.org/drawingml/2006/main"/>
+          <a:bodyPr/>
+          <a:lstStyle/>
+          <a:p>
+            <a:endParaRPr/>
+          </a:p>
         </p:txBody>
       </p:sp>
     </p:spTree>
   </p:cSld>
   <p:clrMapOvr>
-    <a:masterClrMapping xmlns:a="http://schemas.openxmlformats.org/drawingml/2006/main"/>
+    <a:masterClrMapping/>
   </p:clrMapOvr>
 </p:notes>
 </file>
 
 <file path=ppt/notesSlides/notesSlide4.xml><?xml version="1.0" encoding="utf-8"?>
-<p:notes xmlns:p="http://schemas.openxmlformats.org/presentationml/2006/main">
+<p:notes xmlns:a="http://schemas.openxmlformats.org/drawingml/2006/main" xmlns:r="http://schemas.openxmlformats.org/officeDocument/2006/relationships" xmlns:p="http://schemas.openxmlformats.org/presentationml/2006/main">
   <p:cSld>
     <p:spTree>
       <p:nvGrpSpPr>
@@ -774,16 +541,21 @@
         <p:nvPr/>
       </p:nvGrpSpPr>
       <p:grpSpPr>
-        <a:xfrm xmlns:a="http://schemas.openxmlformats.org/drawingml/2006/main"/>
+        <a:xfrm>
+          <a:off x="0" y="0"/>
+          <a:ext cx="0" cy="0"/>
+          <a:chOff x="0" y="0"/>
+          <a:chExt cx="0" cy="0"/>
+        </a:xfrm>
       </p:grpSpPr>
       <p:sp>
         <p:nvSpPr>
           <p:cNvPr id="2" name="Slide Image Placeholder 1"/>
           <p:cNvSpPr>
-            <a:spLocks xmlns:a="http://schemas.openxmlformats.org/drawingml/2006/main" noGrp="1"/>
+            <a:spLocks noGrp="1" noRot="1" noChangeAspect="1"/>
           </p:cNvSpPr>
           <p:nvPr>
-            <p:ph type="sldImg" idx="0"/>
+            <p:ph type="sldImg"/>
           </p:nvPr>
         </p:nvSpPr>
         <p:spPr/>
@@ -792,7 +564,7 @@
         <p:nvSpPr>
           <p:cNvPr id="3" name="Notes Placeholder 2"/>
           <p:cNvSpPr>
-            <a:spLocks xmlns:a="http://schemas.openxmlformats.org/drawingml/2006/main" noGrp="1"/>
+            <a:spLocks noGrp="1"/>
           </p:cNvSpPr>
           <p:nvPr>
             <p:ph type="body" idx="1"/>
@@ -800,13 +572,12 @@
         </p:nvSpPr>
         <p:spPr/>
         <p:txBody>
-          <a:bodyPr xmlns:a="http://schemas.openxmlformats.org/drawingml/2006/main"/>
-          <a:lstStyle xmlns:a="http://schemas.openxmlformats.org/drawingml/2006/main"/>
-          <a:p xmlns:a="http://schemas.openxmlformats.org/drawingml/2006/main">
+          <a:bodyPr/>
+          <a:lstStyle/>
+          <a:p>
             <a:r>
               <a:t>Sources: frontend/src/App.tsx; frontend/src/components/DataStudioView.tsx; frontend/src/components/EvidencePathReplayPanel.tsx. The user flow summarizes the current local application behavior.</a:t>
             </a:r>
-            <a:endParaRPr/>
           </a:p>
         </p:txBody>
       </p:sp>
@@ -814,7 +585,7 @@
         <p:nvSpPr>
           <p:cNvPr id="4" name="Slide Number Placeholder 3"/>
           <p:cNvSpPr>
-            <a:spLocks xmlns:a="http://schemas.openxmlformats.org/drawingml/2006/main" noGrp="1"/>
+            <a:spLocks noGrp="1"/>
           </p:cNvSpPr>
           <p:nvPr>
             <p:ph type="sldNum" idx="5"/>
@@ -822,21 +593,23 @@
         </p:nvSpPr>
         <p:spPr/>
         <p:txBody>
-          <a:bodyPr xmlns:a="http://schemas.openxmlformats.org/drawingml/2006/main"/>
-          <a:lstStyle xmlns:a="http://schemas.openxmlformats.org/drawingml/2006/main"/>
-          <a:p xmlns:a="http://schemas.openxmlformats.org/drawingml/2006/main"/>
+          <a:bodyPr/>
+          <a:lstStyle/>
+          <a:p>
+            <a:endParaRPr/>
+          </a:p>
         </p:txBody>
       </p:sp>
     </p:spTree>
   </p:cSld>
   <p:clrMapOvr>
-    <a:masterClrMapping xmlns:a="http://schemas.openxmlformats.org/drawingml/2006/main"/>
+    <a:masterClrMapping/>
   </p:clrMapOvr>
 </p:notes>
 </file>
 
 <file path=ppt/notesSlides/notesSlide5.xml><?xml version="1.0" encoding="utf-8"?>
-<p:notes xmlns:p="http://schemas.openxmlformats.org/presentationml/2006/main">
+<p:notes xmlns:a="http://schemas.openxmlformats.org/drawingml/2006/main" xmlns:r="http://schemas.openxmlformats.org/officeDocument/2006/relationships" xmlns:p="http://schemas.openxmlformats.org/presentationml/2006/main">
   <p:cSld>
     <p:spTree>
       <p:nvGrpSpPr>
@@ -845,16 +618,21 @@
         <p:nvPr/>
       </p:nvGrpSpPr>
       <p:grpSpPr>
-        <a:xfrm xmlns:a="http://schemas.openxmlformats.org/drawingml/2006/main"/>
+        <a:xfrm>
+          <a:off x="0" y="0"/>
+          <a:ext cx="0" cy="0"/>
+          <a:chOff x="0" y="0"/>
+          <a:chExt cx="0" cy="0"/>
+        </a:xfrm>
       </p:grpSpPr>
       <p:sp>
         <p:nvSpPr>
           <p:cNvPr id="2" name="Slide Image Placeholder 1"/>
           <p:cNvSpPr>
-            <a:spLocks xmlns:a="http://schemas.openxmlformats.org/drawingml/2006/main" noGrp="1"/>
+            <a:spLocks noGrp="1" noRot="1" noChangeAspect="1"/>
           </p:cNvSpPr>
           <p:nvPr>
-            <p:ph type="sldImg" idx="0"/>
+            <p:ph type="sldImg"/>
           </p:nvPr>
         </p:nvSpPr>
         <p:spPr/>
@@ -863,7 +641,7 @@
         <p:nvSpPr>
           <p:cNvPr id="3" name="Notes Placeholder 2"/>
           <p:cNvSpPr>
-            <a:spLocks xmlns:a="http://schemas.openxmlformats.org/drawingml/2006/main" noGrp="1"/>
+            <a:spLocks noGrp="1"/>
           </p:cNvSpPr>
           <p:nvPr>
             <p:ph type="body" idx="1"/>
@@ -871,13 +649,12 @@
         </p:nvSpPr>
         <p:spPr/>
         <p:txBody>
-          <a:bodyPr xmlns:a="http://schemas.openxmlformats.org/drawingml/2006/main"/>
-          <a:lstStyle xmlns:a="http://schemas.openxmlformats.org/drawingml/2006/main"/>
-          <a:p xmlns:a="http://schemas.openxmlformats.org/drawingml/2006/main">
+          <a:bodyPr/>
+          <a:lstStyle/>
+          <a:p>
             <a:r>
               <a:t>Sources: README.md (Quick Start and Phase 2); backend/app/main.py; backend/app/models.py; backend/app/document_store.py; backend/app/graph_engine.py. This deck describes the local prototype; operational constraints are identified as implementation limits.</a:t>
             </a:r>
-            <a:endParaRPr/>
           </a:p>
         </p:txBody>
       </p:sp>
@@ -885,7 +662,7 @@
         <p:nvSpPr>
           <p:cNvPr id="4" name="Slide Number Placeholder 3"/>
           <p:cNvSpPr>
-            <a:spLocks xmlns:a="http://schemas.openxmlformats.org/drawingml/2006/main" noGrp="1"/>
+            <a:spLocks noGrp="1"/>
           </p:cNvSpPr>
           <p:nvPr>
             <p:ph type="sldNum" idx="5"/>
@@ -893,21 +670,23 @@
         </p:nvSpPr>
         <p:spPr/>
         <p:txBody>
-          <a:bodyPr xmlns:a="http://schemas.openxmlformats.org/drawingml/2006/main"/>
-          <a:lstStyle xmlns:a="http://schemas.openxmlformats.org/drawingml/2006/main"/>
-          <a:p xmlns:a="http://schemas.openxmlformats.org/drawingml/2006/main"/>
+          <a:bodyPr/>
+          <a:lstStyle/>
+          <a:p>
+            <a:endParaRPr/>
+          </a:p>
         </p:txBody>
       </p:sp>
     </p:spTree>
   </p:cSld>
   <p:clrMapOvr>
-    <a:masterClrMapping xmlns:a="http://schemas.openxmlformats.org/drawingml/2006/main"/>
+    <a:masterClrMapping/>
   </p:clrMapOvr>
 </p:notes>
 </file>
 
 <file path=ppt/notesSlides/notesSlide6.xml><?xml version="1.0" encoding="utf-8"?>
-<p:notes xmlns:p="http://schemas.openxmlformats.org/presentationml/2006/main">
+<p:notes xmlns:a="http://schemas.openxmlformats.org/drawingml/2006/main" xmlns:r="http://schemas.openxmlformats.org/officeDocument/2006/relationships" xmlns:p="http://schemas.openxmlformats.org/presentationml/2006/main">
   <p:cSld>
     <p:spTree>
       <p:nvGrpSpPr>
@@ -916,16 +695,21 @@
         <p:nvPr/>
       </p:nvGrpSpPr>
       <p:grpSpPr>
-        <a:xfrm xmlns:a="http://schemas.openxmlformats.org/drawingml/2006/main"/>
+        <a:xfrm>
+          <a:off x="0" y="0"/>
+          <a:ext cx="0" cy="0"/>
+          <a:chOff x="0" y="0"/>
+          <a:chExt cx="0" cy="0"/>
+        </a:xfrm>
       </p:grpSpPr>
       <p:sp>
         <p:nvSpPr>
           <p:cNvPr id="2" name="Slide Image Placeholder 1"/>
           <p:cNvSpPr>
-            <a:spLocks xmlns:a="http://schemas.openxmlformats.org/drawingml/2006/main" noGrp="1"/>
+            <a:spLocks noGrp="1" noRot="1" noChangeAspect="1"/>
           </p:cNvSpPr>
           <p:nvPr>
-            <p:ph type="sldImg" idx="0"/>
+            <p:ph type="sldImg"/>
           </p:nvPr>
         </p:nvSpPr>
         <p:spPr/>
@@ -934,7 +718,7 @@
         <p:nvSpPr>
           <p:cNvPr id="3" name="Notes Placeholder 2"/>
           <p:cNvSpPr>
-            <a:spLocks xmlns:a="http://schemas.openxmlformats.org/drawingml/2006/main" noGrp="1"/>
+            <a:spLocks noGrp="1"/>
           </p:cNvSpPr>
           <p:nvPr>
             <p:ph type="body" idx="1"/>
@@ -942,13 +726,12 @@
         </p:nvSpPr>
         <p:spPr/>
         <p:txBody>
-          <a:bodyPr xmlns:a="http://schemas.openxmlformats.org/drawingml/2006/main"/>
-          <a:lstStyle xmlns:a="http://schemas.openxmlformats.org/drawingml/2006/main"/>
-          <a:p xmlns:a="http://schemas.openxmlformats.org/drawingml/2006/main">
+          <a:bodyPr/>
+          <a:lstStyle/>
+          <a:p>
             <a:r>
               <a:t>Measured result: 500 generated documents ingested in 7,675.74 ms in an isolated local test run; resulting graph size was 504 documents, 539 entities, and 40 relationships. The 504 document total includes four sample documents. Injection filtering was exercised with 21 planted instruction strings. No energy or carbon measurements were made. Source: backend/tests/test_phase2_documents.py and local benchmark response.</a:t>
             </a:r>
-            <a:endParaRPr/>
           </a:p>
         </p:txBody>
       </p:sp>
@@ -956,7 +739,7 @@
         <p:nvSpPr>
           <p:cNvPr id="4" name="Slide Number Placeholder 3"/>
           <p:cNvSpPr>
-            <a:spLocks xmlns:a="http://schemas.openxmlformats.org/drawingml/2006/main" noGrp="1"/>
+            <a:spLocks noGrp="1"/>
           </p:cNvSpPr>
           <p:nvPr>
             <p:ph type="sldNum" idx="5"/>
@@ -964,21 +747,23 @@
         </p:nvSpPr>
         <p:spPr/>
         <p:txBody>
-          <a:bodyPr xmlns:a="http://schemas.openxmlformats.org/drawingml/2006/main"/>
-          <a:lstStyle xmlns:a="http://schemas.openxmlformats.org/drawingml/2006/main"/>
-          <a:p xmlns:a="http://schemas.openxmlformats.org/drawingml/2006/main"/>
+          <a:bodyPr/>
+          <a:lstStyle/>
+          <a:p>
+            <a:endParaRPr/>
+          </a:p>
         </p:txBody>
       </p:sp>
     </p:spTree>
   </p:cSld>
   <p:clrMapOvr>
-    <a:masterClrMapping xmlns:a="http://schemas.openxmlformats.org/drawingml/2006/main"/>
+    <a:masterClrMapping/>
   </p:clrMapOvr>
 </p:notes>
 </file>
 
 <file path=ppt/notesSlides/notesSlide7.xml><?xml version="1.0" encoding="utf-8"?>
-<p:notes xmlns:p="http://schemas.openxmlformats.org/presentationml/2006/main">
+<p:notes xmlns:a="http://schemas.openxmlformats.org/drawingml/2006/main" xmlns:r="http://schemas.openxmlformats.org/officeDocument/2006/relationships" xmlns:p="http://schemas.openxmlformats.org/presentationml/2006/main">
   <p:cSld>
     <p:spTree>
       <p:nvGrpSpPr>
@@ -987,16 +772,21 @@
         <p:nvPr/>
       </p:nvGrpSpPr>
       <p:grpSpPr>
-        <a:xfrm xmlns:a="http://schemas.openxmlformats.org/drawingml/2006/main"/>
+        <a:xfrm>
+          <a:off x="0" y="0"/>
+          <a:ext cx="0" cy="0"/>
+          <a:chOff x="0" y="0"/>
+          <a:chExt cx="0" cy="0"/>
+        </a:xfrm>
       </p:grpSpPr>
       <p:sp>
         <p:nvSpPr>
           <p:cNvPr id="2" name="Slide Image Placeholder 1"/>
           <p:cNvSpPr>
-            <a:spLocks xmlns:a="http://schemas.openxmlformats.org/drawingml/2006/main" noGrp="1"/>
+            <a:spLocks noGrp="1" noRot="1" noChangeAspect="1"/>
           </p:cNvSpPr>
           <p:nvPr>
-            <p:ph type="sldImg" idx="0"/>
+            <p:ph type="sldImg"/>
           </p:nvPr>
         </p:nvSpPr>
         <p:spPr/>
@@ -1005,7 +795,7 @@
         <p:nvSpPr>
           <p:cNvPr id="3" name="Notes Placeholder 2"/>
           <p:cNvSpPr>
-            <a:spLocks xmlns:a="http://schemas.openxmlformats.org/drawingml/2006/main" noGrp="1"/>
+            <a:spLocks noGrp="1"/>
           </p:cNvSpPr>
           <p:nvPr>
             <p:ph type="body" idx="1"/>
@@ -1013,13 +803,12 @@
         </p:nvSpPr>
         <p:spPr/>
         <p:txBody>
-          <a:bodyPr xmlns:a="http://schemas.openxmlformats.org/drawingml/2006/main"/>
-          <a:lstStyle xmlns:a="http://schemas.openxmlformats.org/drawingml/2006/main"/>
-          <a:p xmlns:a="http://schemas.openxmlformats.org/drawingml/2006/main">
+          <a:bodyPr/>
+          <a:lstStyle/>
+          <a:p>
             <a:r>
               <a:t>The deployment and revenue model on this slide is a proposal for future pilots, not current revenue or a confirmed commercial plan.</a:t>
             </a:r>
-            <a:endParaRPr/>
           </a:p>
         </p:txBody>
       </p:sp>
@@ -1027,7 +816,7 @@
         <p:nvSpPr>
           <p:cNvPr id="4" name="Slide Number Placeholder 3"/>
           <p:cNvSpPr>
-            <a:spLocks xmlns:a="http://schemas.openxmlformats.org/drawingml/2006/main" noGrp="1"/>
+            <a:spLocks noGrp="1"/>
           </p:cNvSpPr>
           <p:nvPr>
             <p:ph type="sldNum" idx="5"/>
@@ -1035,21 +824,23 @@
         </p:nvSpPr>
         <p:spPr/>
         <p:txBody>
-          <a:bodyPr xmlns:a="http://schemas.openxmlformats.org/drawingml/2006/main"/>
-          <a:lstStyle xmlns:a="http://schemas.openxmlformats.org/drawingml/2006/main"/>
-          <a:p xmlns:a="http://schemas.openxmlformats.org/drawingml/2006/main"/>
+          <a:bodyPr/>
+          <a:lstStyle/>
+          <a:p>
+            <a:endParaRPr/>
+          </a:p>
         </p:txBody>
       </p:sp>
     </p:spTree>
   </p:cSld>
   <p:clrMapOvr>
-    <a:masterClrMapping xmlns:a="http://schemas.openxmlformats.org/drawingml/2006/main"/>
+    <a:masterClrMapping/>
   </p:clrMapOvr>
 </p:notes>
 </file>
 
 <file path=ppt/notesSlides/notesSlide8.xml><?xml version="1.0" encoding="utf-8"?>
-<p:notes xmlns:p="http://schemas.openxmlformats.org/presentationml/2006/main">
+<p:notes xmlns:a="http://schemas.openxmlformats.org/drawingml/2006/main" xmlns:r="http://schemas.openxmlformats.org/officeDocument/2006/relationships" xmlns:p="http://schemas.openxmlformats.org/presentationml/2006/main">
   <p:cSld>
     <p:spTree>
       <p:nvGrpSpPr>
@@ -1058,16 +849,21 @@
         <p:nvPr/>
       </p:nvGrpSpPr>
       <p:grpSpPr>
-        <a:xfrm xmlns:a="http://schemas.openxmlformats.org/drawingml/2006/main"/>
+        <a:xfrm>
+          <a:off x="0" y="0"/>
+          <a:ext cx="0" cy="0"/>
+          <a:chOff x="0" y="0"/>
+          <a:chExt cx="0" cy="0"/>
+        </a:xfrm>
       </p:grpSpPr>
       <p:sp>
         <p:nvSpPr>
           <p:cNvPr id="2" name="Slide Image Placeholder 1"/>
           <p:cNvSpPr>
-            <a:spLocks xmlns:a="http://schemas.openxmlformats.org/drawingml/2006/main" noGrp="1"/>
+            <a:spLocks noGrp="1" noRot="1" noChangeAspect="1"/>
           </p:cNvSpPr>
           <p:nvPr>
-            <p:ph type="sldImg" idx="0"/>
+            <p:ph type="sldImg"/>
           </p:nvPr>
         </p:nvSpPr>
         <p:spPr/>
@@ -1076,7 +872,7 @@
         <p:nvSpPr>
           <p:cNvPr id="3" name="Notes Placeholder 2"/>
           <p:cNvSpPr>
-            <a:spLocks xmlns:a="http://schemas.openxmlformats.org/drawingml/2006/main" noGrp="1"/>
+            <a:spLocks noGrp="1"/>
           </p:cNvSpPr>
           <p:nvPr>
             <p:ph type="body" idx="1"/>
@@ -1084,13 +880,12 @@
         </p:nvSpPr>
         <p:spPr/>
         <p:txBody>
-          <a:bodyPr xmlns:a="http://schemas.openxmlformats.org/drawingml/2006/main"/>
-          <a:lstStyle xmlns:a="http://schemas.openxmlformats.org/drawingml/2006/main"/>
-          <a:p xmlns:a="http://schemas.openxmlformats.org/drawingml/2006/main">
+          <a:bodyPr/>
+          <a:lstStyle/>
+          <a:p>
             <a:r>
               <a:t>All references are project source files; no external research claims were added. The benchmark is synthetic and should not be presented as a production-corpus result.</a:t>
             </a:r>
-            <a:endParaRPr/>
           </a:p>
         </p:txBody>
       </p:sp>
@@ -1098,7 +893,7 @@
         <p:nvSpPr>
           <p:cNvPr id="4" name="Slide Number Placeholder 3"/>
           <p:cNvSpPr>
-            <a:spLocks xmlns:a="http://schemas.openxmlformats.org/drawingml/2006/main" noGrp="1"/>
+            <a:spLocks noGrp="1"/>
           </p:cNvSpPr>
           <p:nvPr>
             <p:ph type="sldNum" idx="5"/>
@@ -1106,21 +901,23 @@
         </p:nvSpPr>
         <p:spPr/>
         <p:txBody>
-          <a:bodyPr xmlns:a="http://schemas.openxmlformats.org/drawingml/2006/main"/>
-          <a:lstStyle xmlns:a="http://schemas.openxmlformats.org/drawingml/2006/main"/>
-          <a:p xmlns:a="http://schemas.openxmlformats.org/drawingml/2006/main"/>
+          <a:bodyPr/>
+          <a:lstStyle/>
+          <a:p>
+            <a:endParaRPr/>
+          </a:p>
         </p:txBody>
       </p:sp>
     </p:spTree>
   </p:cSld>
   <p:clrMapOvr>
-    <a:masterClrMapping xmlns:a="http://schemas.openxmlformats.org/drawingml/2006/main"/>
+    <a:masterClrMapping/>
   </p:clrMapOvr>
 </p:notes>
 </file>
 
 <file path=ppt/notesSlides/notesSlide9.xml><?xml version="1.0" encoding="utf-8"?>
-<p:notes xmlns:p="http://schemas.openxmlformats.org/presentationml/2006/main">
+<p:notes xmlns:a="http://schemas.openxmlformats.org/drawingml/2006/main" xmlns:r="http://schemas.openxmlformats.org/officeDocument/2006/relationships" xmlns:p="http://schemas.openxmlformats.org/presentationml/2006/main">
   <p:cSld>
     <p:spTree>
       <p:nvGrpSpPr>
@@ -1129,16 +926,21 @@
         <p:nvPr/>
       </p:nvGrpSpPr>
       <p:grpSpPr>
-        <a:xfrm xmlns:a="http://schemas.openxmlformats.org/drawingml/2006/main"/>
+        <a:xfrm>
+          <a:off x="0" y="0"/>
+          <a:ext cx="0" cy="0"/>
+          <a:chOff x="0" y="0"/>
+          <a:chExt cx="0" cy="0"/>
+        </a:xfrm>
       </p:grpSpPr>
       <p:sp>
         <p:nvSpPr>
           <p:cNvPr id="2" name="Slide Image Placeholder 1"/>
           <p:cNvSpPr>
-            <a:spLocks xmlns:a="http://schemas.openxmlformats.org/drawingml/2006/main" noGrp="1"/>
+            <a:spLocks noGrp="1" noRot="1" noChangeAspect="1"/>
           </p:cNvSpPr>
           <p:nvPr>
-            <p:ph type="sldImg" idx="0"/>
+            <p:ph type="sldImg"/>
           </p:nvPr>
         </p:nvSpPr>
         <p:spPr/>
@@ -1147,7 +949,7 @@
         <p:nvSpPr>
           <p:cNvPr id="3" name="Notes Placeholder 2"/>
           <p:cNvSpPr>
-            <a:spLocks xmlns:a="http://schemas.openxmlformats.org/drawingml/2006/main" noGrp="1"/>
+            <a:spLocks noGrp="1"/>
           </p:cNvSpPr>
           <p:nvPr>
             <p:ph type="body" idx="1"/>
@@ -1155,13 +957,12 @@
         </p:nvSpPr>
         <p:spPr/>
         <p:txBody>
-          <a:bodyPr xmlns:a="http://schemas.openxmlformats.org/drawingml/2006/main"/>
-          <a:lstStyle xmlns:a="http://schemas.openxmlformats.org/drawingml/2006/main"/>
-          <a:p xmlns:a="http://schemas.openxmlformats.org/drawingml/2006/main">
+          <a:bodyPr/>
+          <a:lstStyle/>
+          <a:p>
             <a:r>
               <a:t>Team ID and contact information were not supplied and are marked accordingly.</a:t>
             </a:r>
-            <a:endParaRPr/>
           </a:p>
         </p:txBody>
       </p:sp>
@@ -1169,7 +970,7 @@
         <p:nvSpPr>
           <p:cNvPr id="4" name="Slide Number Placeholder 3"/>
           <p:cNvSpPr>
-            <a:spLocks xmlns:a="http://schemas.openxmlformats.org/drawingml/2006/main" noGrp="1"/>
+            <a:spLocks noGrp="1"/>
           </p:cNvSpPr>
           <p:nvPr>
             <p:ph type="sldNum" idx="5"/>
@@ -1177,25 +978,27 @@
         </p:nvSpPr>
         <p:spPr/>
         <p:txBody>
-          <a:bodyPr xmlns:a="http://schemas.openxmlformats.org/drawingml/2006/main"/>
-          <a:lstStyle xmlns:a="http://schemas.openxmlformats.org/drawingml/2006/main"/>
-          <a:p xmlns:a="http://schemas.openxmlformats.org/drawingml/2006/main"/>
+          <a:bodyPr/>
+          <a:lstStyle/>
+          <a:p>
+            <a:endParaRPr/>
+          </a:p>
         </p:txBody>
       </p:sp>
     </p:spTree>
   </p:cSld>
   <p:clrMapOvr>
-    <a:masterClrMapping xmlns:a="http://schemas.openxmlformats.org/drawingml/2006/main"/>
+    <a:masterClrMapping/>
   </p:clrMapOvr>
 </p:notes>
 </file>
 
 <file path=ppt/slideLayouts/slideLayout1.xml><?xml version="1.0" encoding="utf-8"?>
-<p:sldLayout xmlns:p="http://schemas.openxmlformats.org/presentationml/2006/main" preserve="1">
+<p:sldLayout xmlns:a="http://schemas.openxmlformats.org/drawingml/2006/main" xmlns:r="http://schemas.openxmlformats.org/officeDocument/2006/relationships" xmlns:p="http://schemas.openxmlformats.org/presentationml/2006/main" preserve="1">
   <p:cSld name="DEFAULT">
     <p:bg>
       <p:bgRef idx="1001">
-        <a:schemeClr xmlns:a="http://schemas.openxmlformats.org/drawingml/2006/main" val="bg1"/>
+        <a:schemeClr val="bg1"/>
       </p:bgRef>
     </p:bg>
     <p:spTree>
@@ -1205,27 +1008,36 @@
         <p:nvPr/>
       </p:nvGrpSpPr>
       <p:grpSpPr>
-        <a:xfrm xmlns:a="http://schemas.openxmlformats.org/drawingml/2006/main"/>
+        <a:xfrm>
+          <a:off x="0" y="0"/>
+          <a:ext cx="0" cy="0"/>
+          <a:chOff x="0" y="0"/>
+          <a:chExt cx="0" cy="0"/>
+        </a:xfrm>
       </p:grpSpPr>
     </p:spTree>
   </p:cSld>
+  <p:clrMapOvr>
+    <a:masterClrMapping/>
+  </p:clrMapOvr>
 </p:sldLayout>
 </file>
 
 <file path=ppt/slideLayouts/slideLayout2.xml><?xml version="1.0" encoding="utf-8"?>
-<p:sldLayout xmlns:p="http://schemas.openxmlformats.org/presentationml/2006/main" preserve="1">
+<p:sldLayout xmlns:a="http://schemas.openxmlformats.org/drawingml/2006/main" xmlns:r="http://schemas.openxmlformats.org/officeDocument/2006/relationships" xmlns:p="http://schemas.openxmlformats.org/presentationml/2006/main" preserve="1">
   <p:cSld name="HYPNEXIS_TITLE">
     <p:bg>
       <p:bgPr>
-        <a:blipFill xmlns:a="http://schemas.openxmlformats.org/drawingml/2006/main" rotWithShape="1">
-          <a:blip xmlns:r="http://schemas.openxmlformats.org/officeDocument/2006/relationships" r:embed="R9a76ea7440764db3">
+        <a:blipFill rotWithShape="1">
+          <a:blip r:embed="rId2">
             <a:lum/>
           </a:blip>
-          <a:srcRect l="0" t="0" r="0" b="0"/>
+          <a:srcRect/>
           <a:stretch>
-            <a:fillRect l="0" t="0" r="0" b="0"/>
+            <a:fillRect/>
           </a:stretch>
         </a:blipFill>
+        <a:effectLst/>
       </p:bgPr>
     </p:bg>
     <p:spTree>
@@ -1235,27 +1047,36 @@
         <p:nvPr/>
       </p:nvGrpSpPr>
       <p:grpSpPr>
-        <a:xfrm xmlns:a="http://schemas.openxmlformats.org/drawingml/2006/main"/>
+        <a:xfrm>
+          <a:off x="0" y="0"/>
+          <a:ext cx="0" cy="0"/>
+          <a:chOff x="0" y="0"/>
+          <a:chExt cx="0" cy="0"/>
+        </a:xfrm>
       </p:grpSpPr>
     </p:spTree>
   </p:cSld>
+  <p:clrMapOvr>
+    <a:masterClrMapping/>
+  </p:clrMapOvr>
 </p:sldLayout>
 </file>
 
 <file path=ppt/slideLayouts/slideLayout3.xml><?xml version="1.0" encoding="utf-8"?>
-<p:sldLayout xmlns:p="http://schemas.openxmlformats.org/presentationml/2006/main" preserve="1">
+<p:sldLayout xmlns:a="http://schemas.openxmlformats.org/drawingml/2006/main" xmlns:r="http://schemas.openxmlformats.org/officeDocument/2006/relationships" xmlns:p="http://schemas.openxmlformats.org/presentationml/2006/main" preserve="1">
   <p:cSld name="HYPNEXIS_CONTENT">
     <p:bg>
       <p:bgPr>
-        <a:blipFill xmlns:a="http://schemas.openxmlformats.org/drawingml/2006/main" rotWithShape="1">
-          <a:blip xmlns:r="http://schemas.openxmlformats.org/officeDocument/2006/relationships" r:embed="Rac9671629fcf417e">
+        <a:blipFill rotWithShape="1">
+          <a:blip r:embed="rId2">
             <a:lum/>
           </a:blip>
-          <a:srcRect l="0" t="0" r="0" b="0"/>
+          <a:srcRect/>
           <a:stretch>
-            <a:fillRect l="0" t="0" r="0" b="0"/>
+            <a:fillRect/>
           </a:stretch>
         </a:blipFill>
+        <a:effectLst/>
       </p:bgPr>
     </p:bg>
     <p:spTree>
@@ -1265,34 +1086,39 @@
         <p:nvPr/>
       </p:nvGrpSpPr>
       <p:grpSpPr>
-        <a:xfrm xmlns:a="http://schemas.openxmlformats.org/drawingml/2006/main"/>
+        <a:xfrm>
+          <a:off x="0" y="0"/>
+          <a:ext cx="0" cy="0"/>
+          <a:chOff x="0" y="0"/>
+          <a:chExt cx="0" cy="0"/>
+        </a:xfrm>
       </p:grpSpPr>
       <p:pic>
         <p:nvPicPr>
           <p:cNvPr id="2" name="Image 0">
-            <a:extLst xmlns:a="http://schemas.openxmlformats.org/drawingml/2006/main">
+            <a:extLst>
               <a:ext uri="{FF2B5EF4-FFF2-40B4-BE49-F238E27FC236}">
                 <a16:creationId xmlns:a16="http://schemas.microsoft.com/office/drawing/2014/main" id="{1CAAE12D-5083-4C8F-9119-5531D7ABE28E}"/>
               </a:ext>
             </a:extLst>
           </p:cNvPr>
           <p:cNvPicPr>
-            <a:picLocks xmlns:a="http://schemas.openxmlformats.org/drawingml/2006/main" noChangeAspect="1"/>
+            <a:picLocks noChangeAspect="1"/>
           </p:cNvPicPr>
           <p:nvPr/>
         </p:nvPicPr>
         <p:blipFill>
-          <a:blip xmlns:r="http://schemas.openxmlformats.org/officeDocument/2006/relationships" xmlns:a="http://schemas.openxmlformats.org/drawingml/2006/main" r:embed="R38d29cdff5e34488"/>
-          <a:stretch xmlns:a="http://schemas.openxmlformats.org/drawingml/2006/main">
-            <a:fillRect l="0" t="0" r="0" b="0"/>
+          <a:blip r:embed="rId3"/>
+          <a:stretch>
+            <a:fillRect/>
           </a:stretch>
         </p:blipFill>
         <p:spPr>
-          <a:xfrm xmlns:a="http://schemas.openxmlformats.org/drawingml/2006/main">
+          <a:xfrm>
             <a:off x="457200" y="292608"/>
             <a:ext cx="1105163" cy="502920"/>
           </a:xfrm>
-          <a:prstGeom xmlns:a="http://schemas.openxmlformats.org/drawingml/2006/main" prst="rect">
+          <a:prstGeom prst="rect">
             <a:avLst/>
           </a:prstGeom>
         </p:spPr>
@@ -1300,31 +1126,31 @@
       <p:sp>
         <p:nvSpPr>
           <p:cNvPr id="3" name="Text 0">
-            <a:extLst xmlns:a="http://schemas.openxmlformats.org/drawingml/2006/main">
+            <a:extLst>
               <a:ext uri="{FF2B5EF4-FFF2-40B4-BE49-F238E27FC236}">
                 <a16:creationId xmlns:a16="http://schemas.microsoft.com/office/drawing/2014/main" id="{93C7982D-3483-4FAA-A050-451DFF207BC2}"/>
               </a:ext>
             </a:extLst>
           </p:cNvPr>
           <p:cNvSpPr>
-            <a:spLocks xmlns:a="http://schemas.openxmlformats.org/drawingml/2006/main" noGrp="1"/>
-          </p:cNvSpPr>
-          <p:nvPr/>
-        </p:nvSpPr>
-        <p:spPr>
-          <a:xfrm xmlns:a="http://schemas.openxmlformats.org/drawingml/2006/main">
+            <a:spLocks noGrp="1"/>
+          </p:cNvSpPr>
+          <p:nvPr/>
+        </p:nvSpPr>
+        <p:spPr>
+          <a:xfrm>
             <a:off x="2926080" y="365760"/>
             <a:ext cx="8778240" cy="365760"/>
           </a:xfrm>
-          <a:prstGeom xmlns:a="http://schemas.openxmlformats.org/drawingml/2006/main" prst="rect">
-            <a:avLst/>
-          </a:prstGeom>
-          <a:noFill xmlns:a="http://schemas.openxmlformats.org/drawingml/2006/main"/>
-        </p:spPr>
-        <p:txBody>
-          <a:bodyPr xmlns:a="http://schemas.openxmlformats.org/drawingml/2006/main" wrap="square" lIns="0" tIns="0" rIns="0" bIns="0" anchor="ctr"/>
-          <a:lstStyle xmlns:a="http://schemas.openxmlformats.org/drawingml/2006/main"/>
-          <a:p xmlns:a="http://schemas.openxmlformats.org/drawingml/2006/main">
+          <a:prstGeom prst="rect">
+            <a:avLst/>
+          </a:prstGeom>
+          <a:noFill/>
+        </p:spPr>
+        <p:txBody>
+          <a:bodyPr wrap="square" lIns="0" tIns="0" rIns="0" bIns="0" anchor="ctr"/>
+          <a:lstStyle/>
+          <a:p>
             <a:pPr marL="0" indent="0" algn="r">
               <a:buNone/>
             </a:pPr>
@@ -1346,26 +1172,26 @@
       <p:sp>
         <p:nvSpPr>
           <p:cNvPr id="4" name="Shape 1">
-            <a:extLst xmlns:a="http://schemas.openxmlformats.org/drawingml/2006/main">
+            <a:extLst>
               <a:ext uri="{FF2B5EF4-FFF2-40B4-BE49-F238E27FC236}">
                 <a16:creationId xmlns:a16="http://schemas.microsoft.com/office/drawing/2014/main" id="{1CD84AFF-29BA-4F49-B24B-61A567CBA20D}"/>
               </a:ext>
             </a:extLst>
           </p:cNvPr>
           <p:cNvSpPr>
-            <a:spLocks xmlns:a="http://schemas.openxmlformats.org/drawingml/2006/main" noGrp="1"/>
-          </p:cNvSpPr>
-          <p:nvPr/>
-        </p:nvSpPr>
-        <p:spPr>
-          <a:xfrm xmlns:a="http://schemas.openxmlformats.org/drawingml/2006/main">
+            <a:spLocks noGrp="1"/>
+          </p:cNvSpPr>
+          <p:nvPr/>
+        </p:nvSpPr>
+        <p:spPr>
+          <a:xfrm>
             <a:off x="457200" y="6355080"/>
             <a:ext cx="11274552" cy="9144"/>
           </a:xfrm>
-          <a:prstGeom xmlns:a="http://schemas.openxmlformats.org/drawingml/2006/main" prst="rect">
-            <a:avLst/>
-          </a:prstGeom>
-          <a:solidFill xmlns:a="http://schemas.openxmlformats.org/drawingml/2006/main">
+          <a:prstGeom prst="rect">
+            <a:avLst/>
+          </a:prstGeom>
+          <a:solidFill>
             <a:srgbClr val="1E5BFF">
               <a:alpha val="50000"/>
             </a:srgbClr>
@@ -1375,31 +1201,31 @@
       <p:sp>
         <p:nvSpPr>
           <p:cNvPr id="5" name="Text 2">
-            <a:extLst xmlns:a="http://schemas.openxmlformats.org/drawingml/2006/main">
+            <a:extLst>
               <a:ext uri="{FF2B5EF4-FFF2-40B4-BE49-F238E27FC236}">
                 <a16:creationId xmlns:a16="http://schemas.microsoft.com/office/drawing/2014/main" id="{7E4BE5D0-489E-4CD5-974B-C8975701175A}"/>
               </a:ext>
             </a:extLst>
           </p:cNvPr>
           <p:cNvSpPr>
-            <a:spLocks xmlns:a="http://schemas.openxmlformats.org/drawingml/2006/main" noGrp="1"/>
-          </p:cNvSpPr>
-          <p:nvPr/>
-        </p:nvSpPr>
-        <p:spPr>
-          <a:xfrm xmlns:a="http://schemas.openxmlformats.org/drawingml/2006/main">
+            <a:spLocks noGrp="1"/>
+          </p:cNvSpPr>
+          <p:nvPr/>
+        </p:nvSpPr>
+        <p:spPr>
+          <a:xfrm>
             <a:off x="457200" y="6428232"/>
             <a:ext cx="8229600" cy="274320"/>
           </a:xfrm>
-          <a:prstGeom xmlns:a="http://schemas.openxmlformats.org/drawingml/2006/main" prst="rect">
-            <a:avLst/>
-          </a:prstGeom>
-          <a:noFill xmlns:a="http://schemas.openxmlformats.org/drawingml/2006/main"/>
-        </p:spPr>
-        <p:txBody>
-          <a:bodyPr xmlns:a="http://schemas.openxmlformats.org/drawingml/2006/main" wrap="square" lIns="0" tIns="0" rIns="0" bIns="0" anchor="ctr"/>
-          <a:lstStyle xmlns:a="http://schemas.openxmlformats.org/drawingml/2006/main"/>
-          <a:p xmlns:a="http://schemas.openxmlformats.org/drawingml/2006/main">
+          <a:prstGeom prst="rect">
+            <a:avLst/>
+          </a:prstGeom>
+          <a:noFill/>
+        </p:spPr>
+        <p:txBody>
+          <a:bodyPr wrap="square" lIns="0" tIns="0" rIns="0" bIns="0" anchor="ctr"/>
+          <a:lstStyle/>
+          <a:p>
             <a:pPr marL="0" indent="0">
               <a:buNone/>
             </a:pPr>
@@ -1421,31 +1247,31 @@
       <p:sp>
         <p:nvSpPr>
           <p:cNvPr id="25" name="Slide Number Placeholder 0">
-            <a:extLst xmlns:a="http://schemas.openxmlformats.org/drawingml/2006/main">
+            <a:extLst>
               <a:ext uri="{FF2B5EF4-FFF2-40B4-BE49-F238E27FC236}">
                 <a16:creationId xmlns:a16="http://schemas.microsoft.com/office/drawing/2014/main" id="{51DB9800-8A78-4D8F-BEDE-4F8240E59459}"/>
               </a:ext>
             </a:extLst>
           </p:cNvPr>
           <p:cNvSpPr>
-            <a:spLocks xmlns:a="http://schemas.openxmlformats.org/drawingml/2006/main" noGrp="1"/>
+            <a:spLocks noGrp="1"/>
           </p:cNvSpPr>
           <p:nvPr>
             <p:ph type="sldNum" idx="4294967295"/>
           </p:nvPr>
         </p:nvSpPr>
         <p:spPr>
-          <a:xfrm xmlns:a="http://schemas.openxmlformats.org/drawingml/2006/main">
+          <a:xfrm>
             <a:off x="11155680" y="6428232"/>
             <a:ext cx="576072" cy="274320"/>
           </a:xfrm>
-          <a:prstGeom xmlns:a="http://schemas.openxmlformats.org/drawingml/2006/main" prst="rect">
-            <a:avLst/>
-          </a:prstGeom>
-        </p:spPr>
-        <p:txBody>
-          <a:bodyPr xmlns:a="http://schemas.openxmlformats.org/drawingml/2006/main"/>
-          <a:lstStyle xmlns:a="http://schemas.openxmlformats.org/drawingml/2006/main">
+          <a:prstGeom prst="rect">
+            <a:avLst/>
+          </a:prstGeom>
+        </p:spPr>
+        <p:txBody>
+          <a:bodyPr/>
+          <a:lstStyle>
             <a:lvl1pPr>
               <a:buNone/>
               <a:defRPr sz="1000">
@@ -1458,13 +1284,13 @@
               </a:defRPr>
             </a:lvl1pPr>
           </a:lstStyle>
-          <a:p xmlns:a="http://schemas.openxmlformats.org/drawingml/2006/main">
+          <a:p>
             <a:pPr algn="r">
               <a:buNone/>
             </a:pPr>
             <a:fld id="{F7021451-1387-4CA6-816F-3879F97B5CBC}" type="slidenum">
               <a:rPr b="0"/>
-              <a:t>1003</a:t>
+              <a:t>‹#›</a:t>
             </a:fld>
             <a:endParaRPr/>
           </a:p>
@@ -1472,23 +1298,27 @@
       </p:sp>
     </p:spTree>
   </p:cSld>
+  <p:clrMapOvr>
+    <a:masterClrMapping/>
+  </p:clrMapOvr>
 </p:sldLayout>
 </file>
 
 <file path=ppt/slideLayouts/slideLayout4.xml><?xml version="1.0" encoding="utf-8"?>
-<p:sldLayout xmlns:p="http://schemas.openxmlformats.org/presentationml/2006/main" preserve="1">
+<p:sldLayout xmlns:a="http://schemas.openxmlformats.org/drawingml/2006/main" xmlns:r="http://schemas.openxmlformats.org/officeDocument/2006/relationships" xmlns:p="http://schemas.openxmlformats.org/presentationml/2006/main" preserve="1">
   <p:cSld name="HYPNEXIS_SECTION">
     <p:bg>
       <p:bgPr>
-        <a:blipFill xmlns:a="http://schemas.openxmlformats.org/drawingml/2006/main" rotWithShape="1">
-          <a:blip xmlns:r="http://schemas.openxmlformats.org/officeDocument/2006/relationships" r:embed="Rb3fdea6a26544d72">
+        <a:blipFill rotWithShape="1">
+          <a:blip r:embed="rId2">
             <a:lum/>
           </a:blip>
-          <a:srcRect l="0" t="0" r="0" b="0"/>
+          <a:srcRect/>
           <a:stretch>
-            <a:fillRect l="0" t="0" r="0" b="0"/>
+            <a:fillRect/>
           </a:stretch>
         </a:blipFill>
+        <a:effectLst/>
       </p:bgPr>
     </p:bg>
     <p:spTree>
@@ -1498,46 +1328,59 @@
         <p:nvPr/>
       </p:nvGrpSpPr>
       <p:grpSpPr>
-        <a:xfrm xmlns:a="http://schemas.openxmlformats.org/drawingml/2006/main"/>
+        <a:xfrm>
+          <a:off x="0" y="0"/>
+          <a:ext cx="0" cy="0"/>
+          <a:chOff x="0" y="0"/>
+          <a:chExt cx="0" cy="0"/>
+        </a:xfrm>
       </p:grpSpPr>
       <p:pic>
         <p:nvPicPr>
           <p:cNvPr id="2" name="Image 0">
-            <a:extLst xmlns:a="http://schemas.openxmlformats.org/drawingml/2006/main">
+            <a:extLst>
               <a:ext uri="{FF2B5EF4-FFF2-40B4-BE49-F238E27FC236}">
                 <a16:creationId xmlns:a16="http://schemas.microsoft.com/office/drawing/2014/main" id="{A5FD61DB-A978-4137-8A46-CC3EEFFA9277}"/>
               </a:ext>
             </a:extLst>
           </p:cNvPr>
           <p:cNvPicPr>
-            <a:picLocks xmlns:a="http://schemas.openxmlformats.org/drawingml/2006/main" noChangeAspect="1"/>
+            <a:picLocks noChangeAspect="1"/>
           </p:cNvPicPr>
           <p:nvPr/>
         </p:nvPicPr>
         <p:blipFill>
-          <a:blip xmlns:r="http://schemas.openxmlformats.org/officeDocument/2006/relationships" xmlns:a="http://schemas.openxmlformats.org/drawingml/2006/main" r:embed="R7c2dde6b7ddb4116"/>
-          <a:stretch xmlns:a="http://schemas.openxmlformats.org/drawingml/2006/main">
-            <a:fillRect l="0" t="0" r="0" b="0"/>
+          <a:blip r:embed="rId3"/>
+          <a:stretch>
+            <a:fillRect/>
           </a:stretch>
         </p:blipFill>
         <p:spPr>
-          <a:xfrm xmlns:a="http://schemas.openxmlformats.org/drawingml/2006/main">
+          <a:xfrm>
             <a:off x="457200" y="292608"/>
             <a:ext cx="1005840" cy="457200"/>
           </a:xfrm>
-          <a:prstGeom xmlns:a="http://schemas.openxmlformats.org/drawingml/2006/main" prst="rect">
+          <a:prstGeom prst="rect">
             <a:avLst/>
           </a:prstGeom>
         </p:spPr>
       </p:pic>
     </p:spTree>
   </p:cSld>
+  <p:clrMapOvr>
+    <a:masterClrMapping/>
+  </p:clrMapOvr>
 </p:sldLayout>
 </file>
 
 <file path=ppt/slideMasters/slideMaster1.xml><?xml version="1.0" encoding="utf-8"?>
-<p:sldMaster xmlns:p="http://schemas.openxmlformats.org/presentationml/2006/main">
+<p:sldMaster xmlns:a="http://schemas.openxmlformats.org/drawingml/2006/main" xmlns:r="http://schemas.openxmlformats.org/officeDocument/2006/relationships" xmlns:p="http://schemas.openxmlformats.org/presentationml/2006/main">
   <p:cSld>
+    <p:bg>
+      <p:bgRef idx="1001">
+        <a:schemeClr val="bg1"/>
+      </p:bgRef>
+    </p:bg>
     <p:spTree>
       <p:nvGrpSpPr>
         <p:cNvPr id="1" name=""/>
@@ -1545,36 +1388,41 @@
         <p:nvPr/>
       </p:nvGrpSpPr>
       <p:grpSpPr>
-        <a:xfrm xmlns:a="http://schemas.openxmlformats.org/drawingml/2006/main"/>
+        <a:xfrm>
+          <a:off x="0" y="0"/>
+          <a:ext cx="0" cy="0"/>
+          <a:chOff x="0" y="0"/>
+          <a:chExt cx="0" cy="0"/>
+        </a:xfrm>
       </p:grpSpPr>
       <p:sp>
         <p:nvSpPr>
           <p:cNvPr id="25" name="Slide Number Placeholder 0">
-            <a:extLst xmlns:a="http://schemas.openxmlformats.org/drawingml/2006/main">
+            <a:extLst>
               <a:ext uri="{FF2B5EF4-FFF2-40B4-BE49-F238E27FC236}">
                 <a16:creationId xmlns:a16="http://schemas.microsoft.com/office/drawing/2014/main" id="{D0DBC955-8C1C-4A06-AE5B-250E81D1B601}"/>
               </a:ext>
             </a:extLst>
           </p:cNvPr>
           <p:cNvSpPr>
-            <a:spLocks xmlns:a="http://schemas.openxmlformats.org/drawingml/2006/main" noGrp="1"/>
+            <a:spLocks noGrp="1"/>
           </p:cNvSpPr>
           <p:nvPr>
             <p:ph type="sldNum" idx="4294967295"/>
           </p:nvPr>
         </p:nvSpPr>
         <p:spPr>
-          <a:xfrm xmlns:a="http://schemas.openxmlformats.org/drawingml/2006/main">
+          <a:xfrm>
             <a:off x="11155680" y="6428232"/>
             <a:ext cx="576072" cy="274320"/>
           </a:xfrm>
-          <a:prstGeom xmlns:a="http://schemas.openxmlformats.org/drawingml/2006/main" prst="rect">
-            <a:avLst/>
-          </a:prstGeom>
-        </p:spPr>
-        <p:txBody>
-          <a:bodyPr xmlns:a="http://schemas.openxmlformats.org/drawingml/2006/main"/>
-          <a:lstStyle xmlns:a="http://schemas.openxmlformats.org/drawingml/2006/main">
+          <a:prstGeom prst="rect">
+            <a:avLst/>
+          </a:prstGeom>
+        </p:spPr>
+        <p:txBody>
+          <a:bodyPr/>
+          <a:lstStyle>
             <a:lvl1pPr>
               <a:buNone/>
               <a:defRPr sz="1000">
@@ -1587,13 +1435,13 @@
               </a:defRPr>
             </a:lvl1pPr>
           </a:lstStyle>
-          <a:p xmlns:a="http://schemas.openxmlformats.org/drawingml/2006/main">
+          <a:p>
             <a:pPr algn="r">
               <a:buNone/>
             </a:pPr>
             <a:fld id="{F7021451-1387-4CA6-816F-3879F97B5CBC}" type="slidenum">
               <a:rPr b="0"/>
-              <a:t>null</a:t>
+              <a:t>‹#›</a:t>
             </a:fld>
             <a:endParaRPr/>
           </a:p>
@@ -1603,15 +1451,15 @@
   </p:cSld>
   <p:clrMap bg1="lt1" tx1="dk1" bg2="lt2" tx2="dk2" accent1="accent1" accent2="accent2" accent3="accent3" accent4="accent4" accent5="accent5" accent6="accent6" hlink="hlink" folHlink="folHlink"/>
   <p:sldLayoutIdLst>
-    <p:sldLayoutId xmlns:r="http://schemas.openxmlformats.org/officeDocument/2006/relationships" id="2147483649" r:id="Rc9ee6356b0a54e4a"/>
-    <p:sldLayoutId xmlns:r="http://schemas.openxmlformats.org/officeDocument/2006/relationships" id="2147483650" r:id="R87a2929072d84c61"/>
-    <p:sldLayoutId xmlns:r="http://schemas.openxmlformats.org/officeDocument/2006/relationships" id="2147483651" r:id="R9736494baa98482a"/>
-    <p:sldLayoutId xmlns:r="http://schemas.openxmlformats.org/officeDocument/2006/relationships" id="2147483652" r:id="R8f5efd125db441f9"/>
+    <p:sldLayoutId id="2147483649" r:id="rId1"/>
+    <p:sldLayoutId id="2147483650" r:id="rId2"/>
+    <p:sldLayoutId id="2147483651" r:id="rId3"/>
+    <p:sldLayoutId id="2147483652" r:id="rId4"/>
   </p:sldLayoutIdLst>
   <p:hf sldNum="0" hdr="0" ftr="0" dt="0"/>
   <p:txStyles>
     <p:titleStyle>
-      <a:lvl1pPr xmlns:a="http://schemas.openxmlformats.org/drawingml/2006/main" algn="ctr" defTabSz="914400">
+      <a:lvl1pPr algn="ctr" defTabSz="914400">
         <a:spcBef>
           <a:spcPct val="0"/>
         </a:spcBef>
@@ -1627,7 +1475,7 @@
       </a:lvl1pPr>
     </p:titleStyle>
     <p:bodyStyle>
-      <a:lvl1pPr xmlns:a="http://schemas.openxmlformats.org/drawingml/2006/main" marL="342900" indent="-342900" algn="l" defTabSz="914400">
+      <a:lvl1pPr marL="342900" indent="-342900" algn="l" defTabSz="914400">
         <a:spcBef>
           <a:spcPct val="20000"/>
         </a:spcBef>
@@ -1642,7 +1490,7 @@
           <a:cs typeface="+mn-lt"/>
         </a:defRPr>
       </a:lvl1pPr>
-      <a:lvl2pPr xmlns:a="http://schemas.openxmlformats.org/drawingml/2006/main" marL="742950" indent="-285750" algn="l" defTabSz="914400">
+      <a:lvl2pPr marL="742950" indent="-285750" algn="l" defTabSz="914400">
         <a:spcBef>
           <a:spcPct val="20000"/>
         </a:spcBef>
@@ -1657,7 +1505,7 @@
           <a:cs typeface="+mn-lt"/>
         </a:defRPr>
       </a:lvl2pPr>
-      <a:lvl3pPr xmlns:a="http://schemas.openxmlformats.org/drawingml/2006/main" marL="1143000" indent="-228600" algn="l" defTabSz="914400">
+      <a:lvl3pPr marL="1143000" indent="-228600" algn="l" defTabSz="914400">
         <a:spcBef>
           <a:spcPct val="20000"/>
         </a:spcBef>
@@ -1672,7 +1520,7 @@
           <a:cs typeface="+mn-lt"/>
         </a:defRPr>
       </a:lvl3pPr>
-      <a:lvl4pPr xmlns:a="http://schemas.openxmlformats.org/drawingml/2006/main" marL="1600200" indent="-228600" algn="l" defTabSz="914400">
+      <a:lvl4pPr marL="1600200" indent="-228600" algn="l" defTabSz="914400">
         <a:spcBef>
           <a:spcPct val="20000"/>
         </a:spcBef>
@@ -1687,7 +1535,7 @@
           <a:cs typeface="+mn-lt"/>
         </a:defRPr>
       </a:lvl4pPr>
-      <a:lvl5pPr xmlns:a="http://schemas.openxmlformats.org/drawingml/2006/main" marL="2057400" indent="-228600" algn="l" defTabSz="914400">
+      <a:lvl5pPr marL="2057400" indent="-228600" algn="l" defTabSz="914400">
         <a:spcBef>
           <a:spcPct val="20000"/>
         </a:spcBef>
@@ -1702,7 +1550,7 @@
           <a:cs typeface="+mn-lt"/>
         </a:defRPr>
       </a:lvl5pPr>
-      <a:lvl6pPr xmlns:a="http://schemas.openxmlformats.org/drawingml/2006/main" marL="2514600" indent="-228600" algn="l" defTabSz="914400">
+      <a:lvl6pPr marL="2514600" indent="-228600" algn="l" defTabSz="914400">
         <a:spcBef>
           <a:spcPct val="20000"/>
         </a:spcBef>
@@ -1717,7 +1565,7 @@
           <a:cs typeface="+mn-lt"/>
         </a:defRPr>
       </a:lvl6pPr>
-      <a:lvl7pPr xmlns:a="http://schemas.openxmlformats.org/drawingml/2006/main" marL="2971800" indent="-228600" algn="l" defTabSz="914400">
+      <a:lvl7pPr marL="2971800" indent="-228600" algn="l" defTabSz="914400">
         <a:spcBef>
           <a:spcPct val="20000"/>
         </a:spcBef>
@@ -1732,7 +1580,7 @@
           <a:cs typeface="+mn-lt"/>
         </a:defRPr>
       </a:lvl7pPr>
-      <a:lvl8pPr xmlns:a="http://schemas.openxmlformats.org/drawingml/2006/main" marL="3429000" indent="-228600" algn="l" defTabSz="914400">
+      <a:lvl8pPr marL="3429000" indent="-228600" algn="l" defTabSz="914400">
         <a:spcBef>
           <a:spcPct val="20000"/>
         </a:spcBef>
@@ -1747,7 +1595,7 @@
           <a:cs typeface="+mn-lt"/>
         </a:defRPr>
       </a:lvl8pPr>
-      <a:lvl9pPr xmlns:a="http://schemas.openxmlformats.org/drawingml/2006/main" marL="3886200" indent="-228600" algn="l" defTabSz="914400">
+      <a:lvl9pPr marL="3886200" indent="-228600" algn="l" defTabSz="914400">
         <a:spcBef>
           <a:spcPct val="20000"/>
         </a:spcBef>
@@ -1764,7 +1612,7 @@
       </a:lvl9pPr>
     </p:bodyStyle>
     <p:otherStyle>
-      <a:lvl1pPr xmlns:a="http://schemas.openxmlformats.org/drawingml/2006/main" marL="0" algn="l" defTabSz="914400">
+      <a:lvl1pPr marL="0" algn="l" defTabSz="914400">
         <a:buNone/>
         <a:defRPr sz="1800" kern="1200">
           <a:solidFill>
@@ -1775,7 +1623,7 @@
           <a:cs typeface="+mn-lt"/>
         </a:defRPr>
       </a:lvl1pPr>
-      <a:lvl2pPr xmlns:a="http://schemas.openxmlformats.org/drawingml/2006/main" marL="457200" algn="l" defTabSz="914400">
+      <a:lvl2pPr marL="457200" algn="l" defTabSz="914400">
         <a:buNone/>
         <a:defRPr sz="1800" kern="1200">
           <a:solidFill>
@@ -1786,7 +1634,7 @@
           <a:cs typeface="+mn-lt"/>
         </a:defRPr>
       </a:lvl2pPr>
-      <a:lvl3pPr xmlns:a="http://schemas.openxmlformats.org/drawingml/2006/main" marL="914400" algn="l" defTabSz="914400">
+      <a:lvl3pPr marL="914400" algn="l" defTabSz="914400">
         <a:buNone/>
         <a:defRPr sz="1800" kern="1200">
           <a:solidFill>
@@ -1797,7 +1645,7 @@
           <a:cs typeface="+mn-lt"/>
         </a:defRPr>
       </a:lvl3pPr>
-      <a:lvl4pPr xmlns:a="http://schemas.openxmlformats.org/drawingml/2006/main" marL="1371600" algn="l" defTabSz="914400">
+      <a:lvl4pPr marL="1371600" algn="l" defTabSz="914400">
         <a:buNone/>
         <a:defRPr sz="1800" kern="1200">
           <a:solidFill>
@@ -1808,7 +1656,7 @@
           <a:cs typeface="+mn-lt"/>
         </a:defRPr>
       </a:lvl4pPr>
-      <a:lvl5pPr xmlns:a="http://schemas.openxmlformats.org/drawingml/2006/main" marL="1828800" algn="l" defTabSz="914400">
+      <a:lvl5pPr marL="1828800" algn="l" defTabSz="914400">
         <a:buNone/>
         <a:defRPr sz="1800" kern="1200">
           <a:solidFill>
@@ -1819,7 +1667,7 @@
           <a:cs typeface="+mn-lt"/>
         </a:defRPr>
       </a:lvl5pPr>
-      <a:lvl6pPr xmlns:a="http://schemas.openxmlformats.org/drawingml/2006/main" marL="2286000" algn="l" defTabSz="914400">
+      <a:lvl6pPr marL="2286000" algn="l" defTabSz="914400">
         <a:buNone/>
         <a:defRPr sz="1800" kern="1200">
           <a:solidFill>
@@ -1830,7 +1678,7 @@
           <a:cs typeface="+mn-lt"/>
         </a:defRPr>
       </a:lvl6pPr>
-      <a:lvl7pPr xmlns:a="http://schemas.openxmlformats.org/drawingml/2006/main" marL="2743200" algn="l" defTabSz="914400">
+      <a:lvl7pPr marL="2743200" algn="l" defTabSz="914400">
         <a:buNone/>
         <a:defRPr sz="1800" kern="1200">
           <a:solidFill>
@@ -1841,7 +1689,7 @@
           <a:cs typeface="+mn-lt"/>
         </a:defRPr>
       </a:lvl7pPr>
-      <a:lvl8pPr xmlns:a="http://schemas.openxmlformats.org/drawingml/2006/main" marL="3200400" algn="l" defTabSz="914400">
+      <a:lvl8pPr marL="3200400" algn="l" defTabSz="914400">
         <a:buNone/>
         <a:defRPr sz="1800" kern="1200">
           <a:solidFill>
@@ -1852,7 +1700,7 @@
           <a:cs typeface="+mn-lt"/>
         </a:defRPr>
       </a:lvl8pPr>
-      <a:lvl9pPr xmlns:a="http://schemas.openxmlformats.org/drawingml/2006/main" marL="3657600" algn="l" defTabSz="914400">
+      <a:lvl9pPr marL="3657600" algn="l" defTabSz="914400">
         <a:buNone/>
         <a:defRPr sz="1800" kern="1200">
           <a:solidFill>
@@ -1868,293 +1716,8 @@
 </p:sldMaster>
 </file>
 
-<file path=ppt/slideMasters/theme/theme2.xml><?xml version="1.0" encoding="utf-8"?>
-<a:theme xmlns:a="http://schemas.openxmlformats.org/drawingml/2006/main" name="Hypnexis">
-  <a:themeElements>
-    <a:clrScheme name="Hypnexis">
-      <a:dk1>
-        <a:srgbClr val="040A20"/>
-      </a:dk1>
-      <a:lt1>
-        <a:srgbClr val="FFFFFF"/>
-      </a:lt1>
-      <a:dk2>
-        <a:srgbClr val="0B1A4A"/>
-      </a:dk2>
-      <a:lt2>
-        <a:srgbClr val="CFE0FF"/>
-      </a:lt2>
-      <a:accent1>
-        <a:srgbClr val="1E5BFF"/>
-      </a:accent1>
-      <a:accent2>
-        <a:srgbClr val="4DA3FF"/>
-      </a:accent2>
-      <a:accent3>
-        <a:srgbClr val="0A2A8F"/>
-      </a:accent3>
-      <a:accent4>
-        <a:srgbClr val="9CC4FF"/>
-      </a:accent4>
-      <a:accent5>
-        <a:srgbClr val="6C8CFF"/>
-      </a:accent5>
-      <a:accent6>
-        <a:srgbClr val="00C2FF"/>
-      </a:accent6>
-      <a:hlink>
-        <a:srgbClr val="4DA3FF"/>
-      </a:hlink>
-      <a:folHlink>
-        <a:srgbClr val="9CC4FF"/>
-      </a:folHlink>
-    </a:clrScheme>
-    <a:fontScheme name="Hypnexis">
-      <a:majorFont>
-        <a:latin typeface="Arial"/>
-        <a:ea typeface=""/>
-        <a:cs typeface=""/>
-        <a:font script="Jpan" typeface="游ゴシック Light"/>
-        <a:font script="Hang" typeface="맑은 고딕"/>
-        <a:font script="Hans" typeface="等线 Light"/>
-        <a:font script="Hant" typeface="新細明體"/>
-        <a:font script="Arab" typeface="Times New Roman"/>
-        <a:font script="Hebr" typeface="Times New Roman"/>
-        <a:font script="Thai" typeface="Angsana New"/>
-        <a:font script="Ethi" typeface="Nyala"/>
-        <a:font script="Beng" typeface="Vrinda"/>
-        <a:font script="Gujr" typeface="Shruti"/>
-        <a:font script="Khmr" typeface="MoolBoran"/>
-        <a:font script="Knda" typeface="Tunga"/>
-        <a:font script="Guru" typeface="Raavi"/>
-        <a:font script="Cans" typeface="Euphemia"/>
-        <a:font script="Cher" typeface="Plantagenet Cherokee"/>
-        <a:font script="Yiii" typeface="Microsoft Yi Baiti"/>
-        <a:font script="Tibt" typeface="Microsoft Himalaya"/>
-        <a:font script="Thaa" typeface="MV Boli"/>
-        <a:font script="Deva" typeface="Mangal"/>
-        <a:font script="Telu" typeface="Gautami"/>
-        <a:font script="Taml" typeface="Latha"/>
-        <a:font script="Syrc" typeface="Estrangelo Edessa"/>
-        <a:font script="Orya" typeface="Kalinga"/>
-        <a:font script="Mlym" typeface="Kartika"/>
-        <a:font script="Laoo" typeface="DokChampa"/>
-        <a:font script="Sinh" typeface="Iskoola Pota"/>
-        <a:font script="Mong" typeface="Mongolian Baiti"/>
-        <a:font script="Viet" typeface="Times New Roman"/>
-        <a:font script="Uigh" typeface="Microsoft Uighur"/>
-        <a:font script="Geor" typeface="Sylfaen"/>
-        <a:font script="Armn" typeface="Arial"/>
-        <a:font script="Bugi" typeface="Leelawadee UI"/>
-        <a:font script="Bopo" typeface="Microsoft JhengHei"/>
-        <a:font script="Java" typeface="Javanese Text"/>
-        <a:font script="Lisu" typeface="Segoe UI"/>
-        <a:font script="Mymr" typeface="Myanmar Text"/>
-        <a:font script="Nkoo" typeface="Ebrima"/>
-        <a:font script="Olck" typeface="Nirmala UI"/>
-        <a:font script="Osma" typeface="Ebrima"/>
-        <a:font script="Phag" typeface="Phagspa"/>
-        <a:font script="Syrn" typeface="Estrangelo Edessa"/>
-        <a:font script="Syrj" typeface="Estrangelo Edessa"/>
-        <a:font script="Syre" typeface="Estrangelo Edessa"/>
-        <a:font script="Sora" typeface="Nirmala UI"/>
-        <a:font script="Tale" typeface="Microsoft Tai Le"/>
-        <a:font script="Talu" typeface="Microsoft New Tai Lue"/>
-        <a:font script="Tfng" typeface="Ebrima"/>
-      </a:majorFont>
-      <a:minorFont>
-        <a:latin typeface="Calibri"/>
-        <a:ea typeface=""/>
-        <a:cs typeface=""/>
-        <a:font script="Jpan" typeface="游ゴシック"/>
-        <a:font script="Hang" typeface="맑은 고딕"/>
-        <a:font script="Hans" typeface="等线"/>
-        <a:font script="Hant" typeface="新細明體"/>
-        <a:font script="Arab" typeface="Arial"/>
-        <a:font script="Hebr" typeface="Arial"/>
-        <a:font script="Thai" typeface="Cordia New"/>
-        <a:font script="Ethi" typeface="Nyala"/>
-        <a:font script="Beng" typeface="Vrinda"/>
-        <a:font script="Gujr" typeface="Shruti"/>
-        <a:font script="Khmr" typeface="DaunPenh"/>
-        <a:font script="Knda" typeface="Tunga"/>
-        <a:font script="Guru" typeface="Raavi"/>
-        <a:font script="Cans" typeface="Euphemia"/>
-        <a:font script="Cher" typeface="Plantagenet Cherokee"/>
-        <a:font script="Yiii" typeface="Microsoft Yi Baiti"/>
-        <a:font script="Tibt" typeface="Microsoft Himalaya"/>
-        <a:font script="Thaa" typeface="MV Boli"/>
-        <a:font script="Deva" typeface="Mangal"/>
-        <a:font script="Telu" typeface="Gautami"/>
-        <a:font script="Taml" typeface="Latha"/>
-        <a:font script="Syrc" typeface="Estrangelo Edessa"/>
-        <a:font script="Orya" typeface="Kalinga"/>
-        <a:font script="Mlym" typeface="Kartika"/>
-        <a:font script="Laoo" typeface="DokChampa"/>
-        <a:font script="Sinh" typeface="Iskoola Pota"/>
-        <a:font script="Mong" typeface="Mongolian Baiti"/>
-        <a:font script="Viet" typeface="Arial"/>
-        <a:font script="Uigh" typeface="Microsoft Uighur"/>
-        <a:font script="Geor" typeface="Sylfaen"/>
-        <a:font script="Armn" typeface="Arial"/>
-        <a:font script="Bugi" typeface="Leelawadee UI"/>
-        <a:font script="Bopo" typeface="Microsoft JhengHei"/>
-        <a:font script="Java" typeface="Javanese Text"/>
-        <a:font script="Lisu" typeface="Segoe UI"/>
-        <a:font script="Mymr" typeface="Myanmar Text"/>
-        <a:font script="Nkoo" typeface="Ebrima"/>
-        <a:font script="Olck" typeface="Nirmala UI"/>
-        <a:font script="Osma" typeface="Ebrima"/>
-        <a:font script="Phag" typeface="Phagspa"/>
-        <a:font script="Syrn" typeface="Estrangelo Edessa"/>
-        <a:font script="Syrj" typeface="Estrangelo Edessa"/>
-        <a:font script="Syre" typeface="Estrangelo Edessa"/>
-        <a:font script="Sora" typeface="Nirmala UI"/>
-        <a:font script="Tale" typeface="Microsoft Tai Le"/>
-        <a:font script="Talu" typeface="Microsoft New Tai Lue"/>
-        <a:font script="Tfng" typeface="Ebrima"/>
-      </a:minorFont>
-    </a:fontScheme>
-    <a:fmtScheme name="Hypnexis">
-      <a:fillStyleLst>
-        <a:solidFill>
-          <a:schemeClr val="phClr"/>
-        </a:solidFill>
-        <a:gradFill rotWithShape="1">
-          <a:gsLst>
-            <a:gs pos="0">
-              <a:schemeClr val="phClr">
-                <a:tint val="67000"/>
-                <a:lumMod val="110000"/>
-                <a:satMod val="105000"/>
-              </a:schemeClr>
-            </a:gs>
-            <a:gs pos="50000">
-              <a:schemeClr val="phClr">
-                <a:tint val="73000"/>
-                <a:lumMod val="105000"/>
-                <a:satMod val="103000"/>
-              </a:schemeClr>
-            </a:gs>
-            <a:gs pos="100000">
-              <a:schemeClr val="phClr">
-                <a:tint val="81000"/>
-                <a:lumMod val="105000"/>
-                <a:satMod val="109000"/>
-              </a:schemeClr>
-            </a:gs>
-          </a:gsLst>
-          <a:lin ang="5400000" scaled="0"/>
-        </a:gradFill>
-        <a:gradFill rotWithShape="1">
-          <a:gsLst>
-            <a:gs pos="0">
-              <a:schemeClr val="phClr">
-                <a:tint val="94000"/>
-                <a:lumMod val="102000"/>
-                <a:satMod val="103000"/>
-              </a:schemeClr>
-            </a:gs>
-            <a:gs pos="50000">
-              <a:schemeClr val="phClr">
-                <a:shade val="100000"/>
-                <a:lumMod val="100000"/>
-                <a:satMod val="110000"/>
-              </a:schemeClr>
-            </a:gs>
-            <a:gs pos="100000">
-              <a:schemeClr val="phClr">
-                <a:shade val="78000"/>
-                <a:lumMod val="99000"/>
-                <a:satMod val="120000"/>
-              </a:schemeClr>
-            </a:gs>
-          </a:gsLst>
-          <a:lin ang="5400000" scaled="0"/>
-        </a:gradFill>
-      </a:fillStyleLst>
-      <a:lnStyleLst>
-        <a:ln w="6350">
-          <a:solidFill>
-            <a:schemeClr val="phClr"/>
-          </a:solidFill>
-          <a:prstDash val="solid"/>
-        </a:ln>
-        <a:ln w="12700">
-          <a:solidFill>
-            <a:schemeClr val="phClr"/>
-          </a:solidFill>
-          <a:prstDash val="solid"/>
-        </a:ln>
-        <a:ln w="19050">
-          <a:solidFill>
-            <a:schemeClr val="phClr"/>
-          </a:solidFill>
-          <a:prstDash val="solid"/>
-        </a:ln>
-      </a:lnStyleLst>
-      <a:effectStyleLst>
-        <a:effectStyle>
-          <a:effectLst/>
-        </a:effectStyle>
-        <a:effectStyle>
-          <a:effectLst/>
-        </a:effectStyle>
-        <a:effectStyle>
-          <a:effectLst>
-            <a:outerShdw blurRad="57150" dist="19050" dir="5400000" algn="ctr" rotWithShape="0">
-              <a:srgbClr val="000000">
-                <a:alpha val="63000"/>
-              </a:srgbClr>
-            </a:outerShdw>
-          </a:effectLst>
-        </a:effectStyle>
-      </a:effectStyleLst>
-      <a:bgFillStyleLst>
-        <a:solidFill>
-          <a:schemeClr val="phClr"/>
-        </a:solidFill>
-        <a:solidFill>
-          <a:schemeClr val="phClr">
-            <a:tint val="95000"/>
-            <a:satMod val="170000"/>
-          </a:schemeClr>
-        </a:solidFill>
-        <a:gradFill rotWithShape="1">
-          <a:gsLst>
-            <a:gs pos="0">
-              <a:schemeClr val="phClr">
-                <a:tint val="93000"/>
-                <a:shade val="98000"/>
-                <a:lumMod val="102000"/>
-                <a:satMod val="150000"/>
-              </a:schemeClr>
-            </a:gs>
-            <a:gs pos="50000">
-              <a:schemeClr val="phClr">
-                <a:tint val="98000"/>
-                <a:shade val="90000"/>
-                <a:lumMod val="103000"/>
-                <a:satMod val="130000"/>
-              </a:schemeClr>
-            </a:gs>
-            <a:gs pos="100000">
-              <a:schemeClr val="phClr">
-                <a:shade val="63000"/>
-                <a:satMod val="120000"/>
-              </a:schemeClr>
-            </a:gs>
-          </a:gsLst>
-          <a:lin ang="5400000" scaled="0"/>
-        </a:gradFill>
-      </a:bgFillStyleLst>
-    </a:fmtScheme>
-  </a:themeElements>
-</a:theme>
-</file>
-
 <file path=ppt/slides/slide1.xml><?xml version="1.0" encoding="utf-8"?>
-<p:sld xmlns:p="http://schemas.openxmlformats.org/presentationml/2006/main">
+<p:sld xmlns:a="http://schemas.openxmlformats.org/drawingml/2006/main" xmlns:r="http://schemas.openxmlformats.org/officeDocument/2006/relationships" xmlns:p="http://schemas.openxmlformats.org/presentationml/2006/main">
   <p:cSld>
     <p:spTree>
       <p:nvGrpSpPr>
@@ -2163,36 +1726,41 @@
         <p:nvPr/>
       </p:nvGrpSpPr>
       <p:grpSpPr>
-        <a:xfrm xmlns:a="http://schemas.openxmlformats.org/drawingml/2006/main"/>
+        <a:xfrm>
+          <a:off x="0" y="0"/>
+          <a:ext cx="0" cy="0"/>
+          <a:chOff x="0" y="0"/>
+          <a:chExt cx="0" cy="0"/>
+        </a:xfrm>
       </p:grpSpPr>
       <p:sp>
         <p:nvSpPr>
           <p:cNvPr id="2" name="Text 0">
-            <a:extLst xmlns:a="http://schemas.openxmlformats.org/drawingml/2006/main">
+            <a:extLst>
               <a:ext uri="{FF2B5EF4-FFF2-40B4-BE49-F238E27FC236}">
                 <a16:creationId xmlns:a16="http://schemas.microsoft.com/office/drawing/2014/main" id="{AEB06D67-1A21-445D-9D7A-097CDE9B041D}"/>
               </a:ext>
             </a:extLst>
           </p:cNvPr>
           <p:cNvSpPr>
-            <a:spLocks xmlns:a="http://schemas.openxmlformats.org/drawingml/2006/main" noGrp="1"/>
-          </p:cNvSpPr>
-          <p:nvPr/>
-        </p:nvSpPr>
-        <p:spPr>
-          <a:xfrm xmlns:a="http://schemas.openxmlformats.org/drawingml/2006/main">
+            <a:spLocks noGrp="1"/>
+          </p:cNvSpPr>
+          <p:nvPr/>
+        </p:nvSpPr>
+        <p:spPr>
+          <a:xfrm>
             <a:off x="548640" y="365760"/>
             <a:ext cx="6400800" cy="320040"/>
           </a:xfrm>
-          <a:prstGeom xmlns:a="http://schemas.openxmlformats.org/drawingml/2006/main" prst="rect">
-            <a:avLst/>
-          </a:prstGeom>
-          <a:noFill xmlns:a="http://schemas.openxmlformats.org/drawingml/2006/main"/>
-        </p:spPr>
-        <p:txBody>
-          <a:bodyPr xmlns:a="http://schemas.openxmlformats.org/drawingml/2006/main" wrap="square" lIns="0" tIns="0" rIns="0" bIns="0" anchor="ctr"/>
-          <a:lstStyle xmlns:a="http://schemas.openxmlformats.org/drawingml/2006/main"/>
-          <a:p xmlns:a="http://schemas.openxmlformats.org/drawingml/2006/main">
+          <a:prstGeom prst="rect">
+            <a:avLst/>
+          </a:prstGeom>
+          <a:noFill/>
+        </p:spPr>
+        <p:txBody>
+          <a:bodyPr wrap="square" lIns="0" tIns="0" rIns="0" bIns="0" anchor="ctr"/>
+          <a:lstStyle/>
+          <a:p>
             <a:pPr marL="0" indent="0">
               <a:buNone/>
             </a:pPr>
@@ -2214,31 +1782,31 @@
       <p:sp>
         <p:nvSpPr>
           <p:cNvPr id="3" name="Text 1">
-            <a:extLst xmlns:a="http://schemas.openxmlformats.org/drawingml/2006/main">
+            <a:extLst>
               <a:ext uri="{FF2B5EF4-FFF2-40B4-BE49-F238E27FC236}">
                 <a16:creationId xmlns:a16="http://schemas.microsoft.com/office/drawing/2014/main" id="{D4D26A88-170B-4C26-BD5D-DE5D6C44ABCF}"/>
               </a:ext>
             </a:extLst>
           </p:cNvPr>
           <p:cNvSpPr>
-            <a:spLocks xmlns:a="http://schemas.openxmlformats.org/drawingml/2006/main" noGrp="1"/>
-          </p:cNvSpPr>
-          <p:nvPr/>
-        </p:nvSpPr>
-        <p:spPr>
-          <a:xfrm xmlns:a="http://schemas.openxmlformats.org/drawingml/2006/main">
+            <a:spLocks noGrp="1"/>
+          </p:cNvSpPr>
+          <p:nvPr/>
+        </p:nvSpPr>
+        <p:spPr>
+          <a:xfrm>
             <a:off x="548640" y="685800"/>
             <a:ext cx="7315200" cy="274320"/>
           </a:xfrm>
-          <a:prstGeom xmlns:a="http://schemas.openxmlformats.org/drawingml/2006/main" prst="rect">
-            <a:avLst/>
-          </a:prstGeom>
-          <a:noFill xmlns:a="http://schemas.openxmlformats.org/drawingml/2006/main"/>
-        </p:spPr>
-        <p:txBody>
-          <a:bodyPr xmlns:a="http://schemas.openxmlformats.org/drawingml/2006/main" wrap="square" lIns="0" tIns="0" rIns="0" bIns="0" anchor="ctr"/>
-          <a:lstStyle xmlns:a="http://schemas.openxmlformats.org/drawingml/2006/main"/>
-          <a:p xmlns:a="http://schemas.openxmlformats.org/drawingml/2006/main">
+          <a:prstGeom prst="rect">
+            <a:avLst/>
+          </a:prstGeom>
+          <a:noFill/>
+        </p:spPr>
+        <p:txBody>
+          <a:bodyPr wrap="square" lIns="0" tIns="0" rIns="0" bIns="0" anchor="ctr"/>
+          <a:lstStyle/>
+          <a:p>
             <a:pPr marL="0" indent="0">
               <a:buNone/>
             </a:pPr>
@@ -2260,29 +1828,29 @@
       <p:pic>
         <p:nvPicPr>
           <p:cNvPr id="4" name="Image 0">
-            <a:extLst xmlns:a="http://schemas.openxmlformats.org/drawingml/2006/main">
+            <a:extLst>
               <a:ext uri="{FF2B5EF4-FFF2-40B4-BE49-F238E27FC236}">
                 <a16:creationId xmlns:a16="http://schemas.microsoft.com/office/drawing/2014/main" id="{E772C84C-D058-40E0-980F-227190D5433D}"/>
               </a:ext>
             </a:extLst>
           </p:cNvPr>
           <p:cNvPicPr>
-            <a:picLocks xmlns:a="http://schemas.openxmlformats.org/drawingml/2006/main" noChangeAspect="1"/>
+            <a:picLocks noChangeAspect="1"/>
           </p:cNvPicPr>
           <p:nvPr/>
         </p:nvPicPr>
         <p:blipFill>
-          <a:blip xmlns:r="http://schemas.openxmlformats.org/officeDocument/2006/relationships" xmlns:a="http://schemas.openxmlformats.org/drawingml/2006/main" r:embed="R25821b0af62f4b11"/>
-          <a:stretch xmlns:a="http://schemas.openxmlformats.org/drawingml/2006/main">
-            <a:fillRect l="0" t="0" r="0" b="0"/>
+          <a:blip r:embed="rId3"/>
+          <a:stretch>
+            <a:fillRect/>
           </a:stretch>
         </p:blipFill>
         <p:spPr>
-          <a:xfrm xmlns:a="http://schemas.openxmlformats.org/drawingml/2006/main">
+          <a:xfrm>
             <a:off x="548640" y="1600200"/>
             <a:ext cx="5120640" cy="2330220"/>
           </a:xfrm>
-          <a:prstGeom xmlns:a="http://schemas.openxmlformats.org/drawingml/2006/main" prst="rect">
+          <a:prstGeom prst="rect">
             <a:avLst/>
           </a:prstGeom>
         </p:spPr>
@@ -2290,31 +1858,31 @@
       <p:sp>
         <p:nvSpPr>
           <p:cNvPr id="5" name="Text 2">
-            <a:extLst xmlns:a="http://schemas.openxmlformats.org/drawingml/2006/main">
+            <a:extLst>
               <a:ext uri="{FF2B5EF4-FFF2-40B4-BE49-F238E27FC236}">
                 <a16:creationId xmlns:a16="http://schemas.microsoft.com/office/drawing/2014/main" id="{AC732F80-81C3-4058-9903-F962FAF0752B}"/>
               </a:ext>
             </a:extLst>
           </p:cNvPr>
           <p:cNvSpPr>
-            <a:spLocks xmlns:a="http://schemas.openxmlformats.org/drawingml/2006/main" noGrp="1"/>
-          </p:cNvSpPr>
-          <p:nvPr/>
-        </p:nvSpPr>
-        <p:spPr>
-          <a:xfrm xmlns:a="http://schemas.openxmlformats.org/drawingml/2006/main">
+            <a:spLocks noGrp="1"/>
+          </p:cNvSpPr>
+          <p:nvPr/>
+        </p:nvSpPr>
+        <p:spPr>
+          <a:xfrm>
             <a:off x="548640" y="4526280"/>
             <a:ext cx="6400800" cy="320040"/>
           </a:xfrm>
-          <a:prstGeom xmlns:a="http://schemas.openxmlformats.org/drawingml/2006/main" prst="rect">
-            <a:avLst/>
-          </a:prstGeom>
-          <a:noFill xmlns:a="http://schemas.openxmlformats.org/drawingml/2006/main"/>
-        </p:spPr>
-        <p:txBody>
-          <a:bodyPr xmlns:a="http://schemas.openxmlformats.org/drawingml/2006/main" wrap="square" lIns="0" tIns="0" rIns="0" bIns="0" anchor="ctr"/>
-          <a:lstStyle xmlns:a="http://schemas.openxmlformats.org/drawingml/2006/main"/>
-          <a:p xmlns:a="http://schemas.openxmlformats.org/drawingml/2006/main">
+          <a:prstGeom prst="rect">
+            <a:avLst/>
+          </a:prstGeom>
+          <a:noFill/>
+        </p:spPr>
+        <p:txBody>
+          <a:bodyPr wrap="square" lIns="0" tIns="0" rIns="0" bIns="0" anchor="ctr"/>
+          <a:lstStyle/>
+          <a:p>
             <a:pPr marL="0" indent="0">
               <a:buNone/>
             </a:pPr>
@@ -2336,31 +1904,31 @@
       <p:sp>
         <p:nvSpPr>
           <p:cNvPr id="6" name="Text 3">
-            <a:extLst xmlns:a="http://schemas.openxmlformats.org/drawingml/2006/main">
+            <a:extLst>
               <a:ext uri="{FF2B5EF4-FFF2-40B4-BE49-F238E27FC236}">
                 <a16:creationId xmlns:a16="http://schemas.microsoft.com/office/drawing/2014/main" id="{71644C5F-6F57-44BA-B2F0-7A74E654C387}"/>
               </a:ext>
             </a:extLst>
           </p:cNvPr>
           <p:cNvSpPr>
-            <a:spLocks xmlns:a="http://schemas.openxmlformats.org/drawingml/2006/main" noGrp="1"/>
-          </p:cNvSpPr>
-          <p:nvPr/>
-        </p:nvSpPr>
-        <p:spPr>
-          <a:xfrm xmlns:a="http://schemas.openxmlformats.org/drawingml/2006/main">
+            <a:spLocks noGrp="1"/>
+          </p:cNvSpPr>
+          <p:nvPr/>
+        </p:nvSpPr>
+        <p:spPr>
+          <a:xfrm>
             <a:off x="548640" y="4892040"/>
             <a:ext cx="6400800" cy="274320"/>
           </a:xfrm>
-          <a:prstGeom xmlns:a="http://schemas.openxmlformats.org/drawingml/2006/main" prst="rect">
-            <a:avLst/>
-          </a:prstGeom>
-          <a:noFill xmlns:a="http://schemas.openxmlformats.org/drawingml/2006/main"/>
-        </p:spPr>
-        <p:txBody>
-          <a:bodyPr xmlns:a="http://schemas.openxmlformats.org/drawingml/2006/main" wrap="square" lIns="0" tIns="0" rIns="0" bIns="0" anchor="ctr"/>
-          <a:lstStyle xmlns:a="http://schemas.openxmlformats.org/drawingml/2006/main"/>
-          <a:p xmlns:a="http://schemas.openxmlformats.org/drawingml/2006/main">
+          <a:prstGeom prst="rect">
+            <a:avLst/>
+          </a:prstGeom>
+          <a:noFill/>
+        </p:spPr>
+        <p:txBody>
+          <a:bodyPr wrap="square" lIns="0" tIns="0" rIns="0" bIns="0" anchor="ctr"/>
+          <a:lstStyle/>
+          <a:p>
             <a:pPr marL="0" indent="0">
               <a:buNone/>
             </a:pPr>
@@ -2382,33 +1950,33 @@
       <p:sp>
         <p:nvSpPr>
           <p:cNvPr id="7" name="Team details card">
-            <a:extLst xmlns:a="http://schemas.openxmlformats.org/drawingml/2006/main">
+            <a:extLst>
               <a:ext uri="{FF2B5EF4-FFF2-40B4-BE49-F238E27FC236}">
                 <a16:creationId xmlns:a16="http://schemas.microsoft.com/office/drawing/2014/main" id="{804B443D-8478-4E8D-9C9B-296680864FA9}"/>
               </a:ext>
             </a:extLst>
           </p:cNvPr>
           <p:cNvSpPr>
-            <a:spLocks xmlns:a="http://schemas.openxmlformats.org/drawingml/2006/main" noGrp="1"/>
-          </p:cNvSpPr>
-          <p:nvPr/>
-        </p:nvSpPr>
-        <p:spPr>
-          <a:xfrm xmlns:a="http://schemas.openxmlformats.org/drawingml/2006/main">
+            <a:spLocks noGrp="1"/>
+          </p:cNvSpPr>
+          <p:nvPr/>
+        </p:nvSpPr>
+        <p:spPr>
+          <a:xfrm>
             <a:off x="6949440" y="1371600"/>
             <a:ext cx="4754880" cy="4480560"/>
           </a:xfrm>
-          <a:prstGeom xmlns:a="http://schemas.openxmlformats.org/drawingml/2006/main" prst="roundRect">
+          <a:prstGeom prst="roundRect">
             <a:avLst>
               <a:gd name="adj" fmla="val 2449"/>
             </a:avLst>
           </a:prstGeom>
-          <a:solidFill xmlns:a="http://schemas.openxmlformats.org/drawingml/2006/main">
+          <a:solidFill>
             <a:srgbClr val="0B1A4A">
               <a:alpha val="75000"/>
             </a:srgbClr>
           </a:solidFill>
-          <a:ln xmlns:a="http://schemas.openxmlformats.org/drawingml/2006/main" w="12700">
+          <a:ln w="12700">
             <a:solidFill>
               <a:srgbClr val="1E5BFF"/>
             </a:solidFill>
@@ -2419,31 +1987,31 @@
       <p:sp>
         <p:nvSpPr>
           <p:cNvPr id="8" name="Text 5">
-            <a:extLst xmlns:a="http://schemas.openxmlformats.org/drawingml/2006/main">
+            <a:extLst>
               <a:ext uri="{FF2B5EF4-FFF2-40B4-BE49-F238E27FC236}">
                 <a16:creationId xmlns:a16="http://schemas.microsoft.com/office/drawing/2014/main" id="{8852F30D-068E-44F8-AD5F-9E1E64F28C74}"/>
               </a:ext>
             </a:extLst>
           </p:cNvPr>
           <p:cNvSpPr>
-            <a:spLocks xmlns:a="http://schemas.openxmlformats.org/drawingml/2006/main" noGrp="1"/>
-          </p:cNvSpPr>
-          <p:nvPr/>
-        </p:nvSpPr>
-        <p:spPr>
-          <a:xfrm xmlns:a="http://schemas.openxmlformats.org/drawingml/2006/main">
+            <a:spLocks noGrp="1"/>
+          </p:cNvSpPr>
+          <p:nvPr/>
+        </p:nvSpPr>
+        <p:spPr>
+          <a:xfrm>
             <a:off x="7223760" y="1554480"/>
             <a:ext cx="4297680" cy="256032"/>
           </a:xfrm>
-          <a:prstGeom xmlns:a="http://schemas.openxmlformats.org/drawingml/2006/main" prst="rect">
-            <a:avLst/>
-          </a:prstGeom>
-          <a:noFill xmlns:a="http://schemas.openxmlformats.org/drawingml/2006/main"/>
-        </p:spPr>
-        <p:txBody>
-          <a:bodyPr xmlns:a="http://schemas.openxmlformats.org/drawingml/2006/main" wrap="square" lIns="0" tIns="0" rIns="0" bIns="0" anchor="ctr"/>
-          <a:lstStyle xmlns:a="http://schemas.openxmlformats.org/drawingml/2006/main"/>
-          <a:p xmlns:a="http://schemas.openxmlformats.org/drawingml/2006/main">
+          <a:prstGeom prst="rect">
+            <a:avLst/>
+          </a:prstGeom>
+          <a:noFill/>
+        </p:spPr>
+        <p:txBody>
+          <a:bodyPr wrap="square" lIns="0" tIns="0" rIns="0" bIns="0" anchor="ctr"/>
+          <a:lstStyle/>
+          <a:p>
             <a:pPr marL="0" indent="0">
               <a:buNone/>
             </a:pPr>
@@ -2465,31 +2033,31 @@
       <p:sp>
         <p:nvSpPr>
           <p:cNvPr id="9" name="Text 6">
-            <a:extLst xmlns:a="http://schemas.openxmlformats.org/drawingml/2006/main">
+            <a:extLst>
               <a:ext uri="{FF2B5EF4-FFF2-40B4-BE49-F238E27FC236}">
                 <a16:creationId xmlns:a16="http://schemas.microsoft.com/office/drawing/2014/main" id="{84D6079E-40FF-4892-B878-704BA73014E5}"/>
               </a:ext>
             </a:extLst>
           </p:cNvPr>
           <p:cNvSpPr>
-            <a:spLocks xmlns:a="http://schemas.openxmlformats.org/drawingml/2006/main" noGrp="1"/>
-          </p:cNvSpPr>
-          <p:nvPr/>
-        </p:nvSpPr>
-        <p:spPr>
-          <a:xfrm xmlns:a="http://schemas.openxmlformats.org/drawingml/2006/main">
+            <a:spLocks noGrp="1"/>
+          </p:cNvSpPr>
+          <p:nvPr/>
+        </p:nvSpPr>
+        <p:spPr>
+          <a:xfrm>
             <a:off x="7223760" y="1801368"/>
             <a:ext cx="4297680" cy="347472"/>
           </a:xfrm>
-          <a:prstGeom xmlns:a="http://schemas.openxmlformats.org/drawingml/2006/main" prst="rect">
-            <a:avLst/>
-          </a:prstGeom>
-          <a:noFill xmlns:a="http://schemas.openxmlformats.org/drawingml/2006/main"/>
-        </p:spPr>
-        <p:txBody>
-          <a:bodyPr xmlns:a="http://schemas.openxmlformats.org/drawingml/2006/main" wrap="square" lIns="0" tIns="0" rIns="0" bIns="0" anchor="ctr"/>
-          <a:lstStyle xmlns:a="http://schemas.openxmlformats.org/drawingml/2006/main"/>
-          <a:p xmlns:a="http://schemas.openxmlformats.org/drawingml/2006/main">
+          <a:prstGeom prst="rect">
+            <a:avLst/>
+          </a:prstGeom>
+          <a:noFill/>
+        </p:spPr>
+        <p:txBody>
+          <a:bodyPr wrap="square" lIns="0" tIns="0" rIns="0" bIns="0" anchor="ctr"/>
+          <a:lstStyle/>
+          <a:p>
             <a:pPr marL="0" indent="0">
               <a:buNone/>
             </a:pPr>
@@ -2511,31 +2079,31 @@
       <p:sp>
         <p:nvSpPr>
           <p:cNvPr id="10" name="Text 7">
-            <a:extLst xmlns:a="http://schemas.openxmlformats.org/drawingml/2006/main">
+            <a:extLst>
               <a:ext uri="{FF2B5EF4-FFF2-40B4-BE49-F238E27FC236}">
                 <a16:creationId xmlns:a16="http://schemas.microsoft.com/office/drawing/2014/main" id="{B0C528E0-94DE-43F1-A7F9-61434F80B540}"/>
               </a:ext>
             </a:extLst>
           </p:cNvPr>
           <p:cNvSpPr>
-            <a:spLocks xmlns:a="http://schemas.openxmlformats.org/drawingml/2006/main" noGrp="1"/>
-          </p:cNvSpPr>
-          <p:nvPr/>
-        </p:nvSpPr>
-        <p:spPr>
-          <a:xfrm xmlns:a="http://schemas.openxmlformats.org/drawingml/2006/main">
+            <a:spLocks noGrp="1"/>
+          </p:cNvSpPr>
+          <p:nvPr/>
+        </p:nvSpPr>
+        <p:spPr>
+          <a:xfrm>
             <a:off x="7223760" y="2249424"/>
             <a:ext cx="4297680" cy="256032"/>
           </a:xfrm>
-          <a:prstGeom xmlns:a="http://schemas.openxmlformats.org/drawingml/2006/main" prst="rect">
-            <a:avLst/>
-          </a:prstGeom>
-          <a:noFill xmlns:a="http://schemas.openxmlformats.org/drawingml/2006/main"/>
-        </p:spPr>
-        <p:txBody>
-          <a:bodyPr xmlns:a="http://schemas.openxmlformats.org/drawingml/2006/main" wrap="square" lIns="0" tIns="0" rIns="0" bIns="0" anchor="ctr"/>
-          <a:lstStyle xmlns:a="http://schemas.openxmlformats.org/drawingml/2006/main"/>
-          <a:p xmlns:a="http://schemas.openxmlformats.org/drawingml/2006/main">
+          <a:prstGeom prst="rect">
+            <a:avLst/>
+          </a:prstGeom>
+          <a:noFill/>
+        </p:spPr>
+        <p:txBody>
+          <a:bodyPr wrap="square" lIns="0" tIns="0" rIns="0" bIns="0" anchor="ctr"/>
+          <a:lstStyle/>
+          <a:p>
             <a:pPr marL="0" indent="0">
               <a:buNone/>
             </a:pPr>
@@ -2557,36 +2125,36 @@
       <p:sp>
         <p:nvSpPr>
           <p:cNvPr id="11" name="Text 8">
-            <a:extLst xmlns:a="http://schemas.openxmlformats.org/drawingml/2006/main">
+            <a:extLst>
               <a:ext uri="{FF2B5EF4-FFF2-40B4-BE49-F238E27FC236}">
                 <a16:creationId xmlns:a16="http://schemas.microsoft.com/office/drawing/2014/main" id="{72674527-C9B5-424A-AAC3-90163EAD80BA}"/>
               </a:ext>
             </a:extLst>
           </p:cNvPr>
           <p:cNvSpPr>
-            <a:spLocks xmlns:a="http://schemas.openxmlformats.org/drawingml/2006/main" noGrp="1"/>
-          </p:cNvSpPr>
-          <p:nvPr/>
-        </p:nvSpPr>
-        <p:spPr>
-          <a:xfrm xmlns:a="http://schemas.openxmlformats.org/drawingml/2006/main">
+            <a:spLocks noGrp="1"/>
+          </p:cNvSpPr>
+          <p:nvPr/>
+        </p:nvSpPr>
+        <p:spPr>
+          <a:xfrm>
             <a:off x="7223760" y="2496312"/>
             <a:ext cx="4297680" cy="347472"/>
           </a:xfrm>
-          <a:prstGeom xmlns:a="http://schemas.openxmlformats.org/drawingml/2006/main" prst="rect">
-            <a:avLst/>
-          </a:prstGeom>
-          <a:noFill xmlns:a="http://schemas.openxmlformats.org/drawingml/2006/main"/>
-        </p:spPr>
-        <p:txBody>
-          <a:bodyPr xmlns:a="http://schemas.openxmlformats.org/drawingml/2006/main" wrap="square" lIns="0" tIns="0" rIns="0" bIns="0" anchor="ctr"/>
-          <a:lstStyle xmlns:a="http://schemas.openxmlformats.org/drawingml/2006/main"/>
-          <a:p xmlns:a="http://schemas.openxmlformats.org/drawingml/2006/main">
+          <a:prstGeom prst="rect">
+            <a:avLst/>
+          </a:prstGeom>
+          <a:noFill/>
+        </p:spPr>
+        <p:txBody>
+          <a:bodyPr wrap="square" lIns="0" tIns="0" rIns="0" bIns="0" anchor="ctr"/>
+          <a:lstStyle/>
+          <a:p>
             <a:pPr marL="0" indent="0">
               <a:buNone/>
             </a:pPr>
             <a:r>
-              <a:rPr sz="1600">
+              <a:rPr sz="1600" dirty="0">
                 <a:solidFill>
                   <a:srgbClr val="FFFFFF"/>
                 </a:solidFill>
@@ -2596,38 +2164,38 @@
               </a:rPr>
               <a:t>Not provided</a:t>
             </a:r>
-            <a:endParaRPr sz="1600"/>
+            <a:endParaRPr sz="1600" dirty="0"/>
           </a:p>
         </p:txBody>
       </p:sp>
       <p:sp>
         <p:nvSpPr>
           <p:cNvPr id="12" name="Text 9">
-            <a:extLst xmlns:a="http://schemas.openxmlformats.org/drawingml/2006/main">
+            <a:extLst>
               <a:ext uri="{FF2B5EF4-FFF2-40B4-BE49-F238E27FC236}">
                 <a16:creationId xmlns:a16="http://schemas.microsoft.com/office/drawing/2014/main" id="{172169E3-1D03-486C-87E4-FBC7061B2FF3}"/>
               </a:ext>
             </a:extLst>
           </p:cNvPr>
           <p:cNvSpPr>
-            <a:spLocks xmlns:a="http://schemas.openxmlformats.org/drawingml/2006/main" noGrp="1"/>
-          </p:cNvSpPr>
-          <p:nvPr/>
-        </p:nvSpPr>
-        <p:spPr>
-          <a:xfrm xmlns:a="http://schemas.openxmlformats.org/drawingml/2006/main">
+            <a:spLocks noGrp="1"/>
+          </p:cNvSpPr>
+          <p:nvPr/>
+        </p:nvSpPr>
+        <p:spPr>
+          <a:xfrm>
             <a:off x="7223760" y="2944368"/>
             <a:ext cx="4297680" cy="256032"/>
           </a:xfrm>
-          <a:prstGeom xmlns:a="http://schemas.openxmlformats.org/drawingml/2006/main" prst="rect">
-            <a:avLst/>
-          </a:prstGeom>
-          <a:noFill xmlns:a="http://schemas.openxmlformats.org/drawingml/2006/main"/>
-        </p:spPr>
-        <p:txBody>
-          <a:bodyPr xmlns:a="http://schemas.openxmlformats.org/drawingml/2006/main" wrap="square" lIns="0" tIns="0" rIns="0" bIns="0" anchor="ctr"/>
-          <a:lstStyle xmlns:a="http://schemas.openxmlformats.org/drawingml/2006/main"/>
-          <a:p xmlns:a="http://schemas.openxmlformats.org/drawingml/2006/main">
+          <a:prstGeom prst="rect">
+            <a:avLst/>
+          </a:prstGeom>
+          <a:noFill/>
+        </p:spPr>
+        <p:txBody>
+          <a:bodyPr wrap="square" lIns="0" tIns="0" rIns="0" bIns="0" anchor="ctr"/>
+          <a:lstStyle/>
+          <a:p>
             <a:pPr marL="0" indent="0">
               <a:buNone/>
             </a:pPr>
@@ -2649,36 +2217,36 @@
       <p:sp>
         <p:nvSpPr>
           <p:cNvPr id="13" name="Text 10">
-            <a:extLst xmlns:a="http://schemas.openxmlformats.org/drawingml/2006/main">
+            <a:extLst>
               <a:ext uri="{FF2B5EF4-FFF2-40B4-BE49-F238E27FC236}">
                 <a16:creationId xmlns:a16="http://schemas.microsoft.com/office/drawing/2014/main" id="{8C685641-14E8-4B47-AF80-C2C07BDFB7E0}"/>
               </a:ext>
             </a:extLst>
           </p:cNvPr>
           <p:cNvSpPr>
-            <a:spLocks xmlns:a="http://schemas.openxmlformats.org/drawingml/2006/main" noGrp="1"/>
-          </p:cNvSpPr>
-          <p:nvPr/>
-        </p:nvSpPr>
-        <p:spPr>
-          <a:xfrm xmlns:a="http://schemas.openxmlformats.org/drawingml/2006/main">
+            <a:spLocks noGrp="1"/>
+          </p:cNvSpPr>
+          <p:nvPr/>
+        </p:nvSpPr>
+        <p:spPr>
+          <a:xfrm>
             <a:off x="7223760" y="3191256"/>
             <a:ext cx="4297680" cy="347472"/>
           </a:xfrm>
-          <a:prstGeom xmlns:a="http://schemas.openxmlformats.org/drawingml/2006/main" prst="rect">
-            <a:avLst/>
-          </a:prstGeom>
-          <a:noFill xmlns:a="http://schemas.openxmlformats.org/drawingml/2006/main"/>
-        </p:spPr>
-        <p:txBody>
-          <a:bodyPr xmlns:a="http://schemas.openxmlformats.org/drawingml/2006/main" wrap="square" lIns="0" tIns="0" rIns="0" bIns="0" anchor="ctr"/>
-          <a:lstStyle xmlns:a="http://schemas.openxmlformats.org/drawingml/2006/main"/>
-          <a:p xmlns:a="http://schemas.openxmlformats.org/drawingml/2006/main">
+          <a:prstGeom prst="rect">
+            <a:avLst/>
+          </a:prstGeom>
+          <a:noFill/>
+        </p:spPr>
+        <p:txBody>
+          <a:bodyPr wrap="square" lIns="0" tIns="0" rIns="0" bIns="0" anchor="ctr"/>
+          <a:lstStyle/>
+          <a:p>
             <a:pPr marL="0" indent="0">
               <a:buNone/>
             </a:pPr>
             <a:r>
-              <a:rPr sz="1600">
+              <a:rPr sz="1600" dirty="0">
                 <a:solidFill>
                   <a:srgbClr val="FFFFFF"/>
                 </a:solidFill>
@@ -2688,38 +2256,38 @@
               </a:rPr>
               <a:t>Not provided</a:t>
             </a:r>
-            <a:endParaRPr sz="1600"/>
+            <a:endParaRPr sz="1600" dirty="0"/>
           </a:p>
         </p:txBody>
       </p:sp>
       <p:sp>
         <p:nvSpPr>
           <p:cNvPr id="14" name="Text 11">
-            <a:extLst xmlns:a="http://schemas.openxmlformats.org/drawingml/2006/main">
+            <a:extLst>
               <a:ext uri="{FF2B5EF4-FFF2-40B4-BE49-F238E27FC236}">
                 <a16:creationId xmlns:a16="http://schemas.microsoft.com/office/drawing/2014/main" id="{F084796D-E9F4-485E-A32A-ACD399788F25}"/>
               </a:ext>
             </a:extLst>
           </p:cNvPr>
           <p:cNvSpPr>
-            <a:spLocks xmlns:a="http://schemas.openxmlformats.org/drawingml/2006/main" noGrp="1"/>
-          </p:cNvSpPr>
-          <p:nvPr/>
-        </p:nvSpPr>
-        <p:spPr>
-          <a:xfrm xmlns:a="http://schemas.openxmlformats.org/drawingml/2006/main">
+            <a:spLocks noGrp="1"/>
+          </p:cNvSpPr>
+          <p:nvPr/>
+        </p:nvSpPr>
+        <p:spPr>
+          <a:xfrm>
             <a:off x="7223760" y="3639312"/>
             <a:ext cx="4297680" cy="256032"/>
           </a:xfrm>
-          <a:prstGeom xmlns:a="http://schemas.openxmlformats.org/drawingml/2006/main" prst="rect">
-            <a:avLst/>
-          </a:prstGeom>
-          <a:noFill xmlns:a="http://schemas.openxmlformats.org/drawingml/2006/main"/>
-        </p:spPr>
-        <p:txBody>
-          <a:bodyPr xmlns:a="http://schemas.openxmlformats.org/drawingml/2006/main" wrap="square" lIns="0" tIns="0" rIns="0" bIns="0" anchor="ctr"/>
-          <a:lstStyle xmlns:a="http://schemas.openxmlformats.org/drawingml/2006/main"/>
-          <a:p xmlns:a="http://schemas.openxmlformats.org/drawingml/2006/main">
+          <a:prstGeom prst="rect">
+            <a:avLst/>
+          </a:prstGeom>
+          <a:noFill/>
+        </p:spPr>
+        <p:txBody>
+          <a:bodyPr wrap="square" lIns="0" tIns="0" rIns="0" bIns="0" anchor="ctr"/>
+          <a:lstStyle/>
+          <a:p>
             <a:pPr marL="0" indent="0">
               <a:buNone/>
             </a:pPr>
@@ -2741,31 +2309,31 @@
       <p:sp>
         <p:nvSpPr>
           <p:cNvPr id="15" name="Text 12">
-            <a:extLst xmlns:a="http://schemas.openxmlformats.org/drawingml/2006/main">
+            <a:extLst>
               <a:ext uri="{FF2B5EF4-FFF2-40B4-BE49-F238E27FC236}">
                 <a16:creationId xmlns:a16="http://schemas.microsoft.com/office/drawing/2014/main" id="{9234747F-79CA-49B9-B74F-DF8991F3A063}"/>
               </a:ext>
             </a:extLst>
           </p:cNvPr>
           <p:cNvSpPr>
-            <a:spLocks xmlns:a="http://schemas.openxmlformats.org/drawingml/2006/main" noGrp="1"/>
-          </p:cNvSpPr>
-          <p:nvPr/>
-        </p:nvSpPr>
-        <p:spPr>
-          <a:xfrm xmlns:a="http://schemas.openxmlformats.org/drawingml/2006/main">
+            <a:spLocks noGrp="1"/>
+          </p:cNvSpPr>
+          <p:nvPr/>
+        </p:nvSpPr>
+        <p:spPr>
+          <a:xfrm>
             <a:off x="7223760" y="3886200"/>
             <a:ext cx="4297680" cy="347472"/>
           </a:xfrm>
-          <a:prstGeom xmlns:a="http://schemas.openxmlformats.org/drawingml/2006/main" prst="rect">
-            <a:avLst/>
-          </a:prstGeom>
-          <a:noFill xmlns:a="http://schemas.openxmlformats.org/drawingml/2006/main"/>
-        </p:spPr>
-        <p:txBody>
-          <a:bodyPr xmlns:a="http://schemas.openxmlformats.org/drawingml/2006/main" wrap="square" lIns="0" tIns="0" rIns="0" bIns="0" anchor="ctr"/>
-          <a:lstStyle xmlns:a="http://schemas.openxmlformats.org/drawingml/2006/main"/>
-          <a:p xmlns:a="http://schemas.openxmlformats.org/drawingml/2006/main">
+          <a:prstGeom prst="rect">
+            <a:avLst/>
+          </a:prstGeom>
+          <a:noFill/>
+        </p:spPr>
+        <p:txBody>
+          <a:bodyPr wrap="square" lIns="0" tIns="0" rIns="0" bIns="0" anchor="ctr"/>
+          <a:lstStyle/>
+          <a:p>
             <a:pPr marL="0" indent="0">
               <a:buNone/>
             </a:pPr>
@@ -2787,31 +2355,31 @@
       <p:sp>
         <p:nvSpPr>
           <p:cNvPr id="16" name="Text 13">
-            <a:extLst xmlns:a="http://schemas.openxmlformats.org/drawingml/2006/main">
+            <a:extLst>
               <a:ext uri="{FF2B5EF4-FFF2-40B4-BE49-F238E27FC236}">
                 <a16:creationId xmlns:a16="http://schemas.microsoft.com/office/drawing/2014/main" id="{8CA84D9E-40BB-46D4-986A-98F0BC5CDFD6}"/>
               </a:ext>
             </a:extLst>
           </p:cNvPr>
           <p:cNvSpPr>
-            <a:spLocks xmlns:a="http://schemas.openxmlformats.org/drawingml/2006/main" noGrp="1"/>
-          </p:cNvSpPr>
-          <p:nvPr/>
-        </p:nvSpPr>
-        <p:spPr>
-          <a:xfrm xmlns:a="http://schemas.openxmlformats.org/drawingml/2006/main">
+            <a:spLocks noGrp="1"/>
+          </p:cNvSpPr>
+          <p:nvPr/>
+        </p:nvSpPr>
+        <p:spPr>
+          <a:xfrm>
             <a:off x="7223760" y="4334256"/>
             <a:ext cx="4297680" cy="256032"/>
           </a:xfrm>
-          <a:prstGeom xmlns:a="http://schemas.openxmlformats.org/drawingml/2006/main" prst="rect">
-            <a:avLst/>
-          </a:prstGeom>
-          <a:noFill xmlns:a="http://schemas.openxmlformats.org/drawingml/2006/main"/>
-        </p:spPr>
-        <p:txBody>
-          <a:bodyPr xmlns:a="http://schemas.openxmlformats.org/drawingml/2006/main" wrap="square" lIns="0" tIns="0" rIns="0" bIns="0" anchor="ctr"/>
-          <a:lstStyle xmlns:a="http://schemas.openxmlformats.org/drawingml/2006/main"/>
-          <a:p xmlns:a="http://schemas.openxmlformats.org/drawingml/2006/main">
+          <a:prstGeom prst="rect">
+            <a:avLst/>
+          </a:prstGeom>
+          <a:noFill/>
+        </p:spPr>
+        <p:txBody>
+          <a:bodyPr wrap="square" lIns="0" tIns="0" rIns="0" bIns="0" anchor="ctr"/>
+          <a:lstStyle/>
+          <a:p>
             <a:pPr marL="0" indent="0">
               <a:buNone/>
             </a:pPr>
@@ -2833,31 +2401,31 @@
       <p:sp>
         <p:nvSpPr>
           <p:cNvPr id="17" name="Text 14">
-            <a:extLst xmlns:a="http://schemas.openxmlformats.org/drawingml/2006/main">
+            <a:extLst>
               <a:ext uri="{FF2B5EF4-FFF2-40B4-BE49-F238E27FC236}">
                 <a16:creationId xmlns:a16="http://schemas.microsoft.com/office/drawing/2014/main" id="{1F52FE81-9616-40C5-A9CC-B7ACCAA46CA3}"/>
               </a:ext>
             </a:extLst>
           </p:cNvPr>
           <p:cNvSpPr>
-            <a:spLocks xmlns:a="http://schemas.openxmlformats.org/drawingml/2006/main" noGrp="1"/>
-          </p:cNvSpPr>
-          <p:nvPr/>
-        </p:nvSpPr>
-        <p:spPr>
-          <a:xfrm xmlns:a="http://schemas.openxmlformats.org/drawingml/2006/main">
+            <a:spLocks noGrp="1"/>
+          </p:cNvSpPr>
+          <p:nvPr/>
+        </p:nvSpPr>
+        <p:spPr>
+          <a:xfrm>
             <a:off x="7223760" y="4581144"/>
             <a:ext cx="4297680" cy="347472"/>
           </a:xfrm>
-          <a:prstGeom xmlns:a="http://schemas.openxmlformats.org/drawingml/2006/main" prst="rect">
-            <a:avLst/>
-          </a:prstGeom>
-          <a:noFill xmlns:a="http://schemas.openxmlformats.org/drawingml/2006/main"/>
-        </p:spPr>
-        <p:txBody>
-          <a:bodyPr xmlns:a="http://schemas.openxmlformats.org/drawingml/2006/main" wrap="square" lIns="0" tIns="0" rIns="0" bIns="0" anchor="ctr"/>
-          <a:lstStyle xmlns:a="http://schemas.openxmlformats.org/drawingml/2006/main"/>
-          <a:p xmlns:a="http://schemas.openxmlformats.org/drawingml/2006/main">
+          <a:prstGeom prst="rect">
+            <a:avLst/>
+          </a:prstGeom>
+          <a:noFill/>
+        </p:spPr>
+        <p:txBody>
+          <a:bodyPr wrap="square" lIns="0" tIns="0" rIns="0" bIns="0" anchor="ctr"/>
+          <a:lstStyle/>
+          <a:p>
             <a:pPr marL="0" indent="0">
               <a:buNone/>
             </a:pPr>
@@ -2879,31 +2447,31 @@
       <p:sp>
         <p:nvSpPr>
           <p:cNvPr id="18" name="Text 15">
-            <a:extLst xmlns:a="http://schemas.openxmlformats.org/drawingml/2006/main">
+            <a:extLst>
               <a:ext uri="{FF2B5EF4-FFF2-40B4-BE49-F238E27FC236}">
                 <a16:creationId xmlns:a16="http://schemas.microsoft.com/office/drawing/2014/main" id="{20253905-8201-408E-9CFA-E53A47C3FCDD}"/>
               </a:ext>
             </a:extLst>
           </p:cNvPr>
           <p:cNvSpPr>
-            <a:spLocks xmlns:a="http://schemas.openxmlformats.org/drawingml/2006/main" noGrp="1"/>
-          </p:cNvSpPr>
-          <p:nvPr/>
-        </p:nvSpPr>
-        <p:spPr>
-          <a:xfrm xmlns:a="http://schemas.openxmlformats.org/drawingml/2006/main">
+            <a:spLocks noGrp="1"/>
+          </p:cNvSpPr>
+          <p:nvPr/>
+        </p:nvSpPr>
+        <p:spPr>
+          <a:xfrm>
             <a:off x="7223760" y="5029200"/>
             <a:ext cx="4297680" cy="256032"/>
           </a:xfrm>
-          <a:prstGeom xmlns:a="http://schemas.openxmlformats.org/drawingml/2006/main" prst="rect">
-            <a:avLst/>
-          </a:prstGeom>
-          <a:noFill xmlns:a="http://schemas.openxmlformats.org/drawingml/2006/main"/>
-        </p:spPr>
-        <p:txBody>
-          <a:bodyPr xmlns:a="http://schemas.openxmlformats.org/drawingml/2006/main" wrap="square" lIns="0" tIns="0" rIns="0" bIns="0" anchor="ctr"/>
-          <a:lstStyle xmlns:a="http://schemas.openxmlformats.org/drawingml/2006/main"/>
-          <a:p xmlns:a="http://schemas.openxmlformats.org/drawingml/2006/main">
+          <a:prstGeom prst="rect">
+            <a:avLst/>
+          </a:prstGeom>
+          <a:noFill/>
+        </p:spPr>
+        <p:txBody>
+          <a:bodyPr wrap="square" lIns="0" tIns="0" rIns="0" bIns="0" anchor="ctr"/>
+          <a:lstStyle/>
+          <a:p>
             <a:pPr marL="0" indent="0">
               <a:buNone/>
             </a:pPr>
@@ -2925,31 +2493,31 @@
       <p:sp>
         <p:nvSpPr>
           <p:cNvPr id="19" name="Text 16">
-            <a:extLst xmlns:a="http://schemas.openxmlformats.org/drawingml/2006/main">
+            <a:extLst>
               <a:ext uri="{FF2B5EF4-FFF2-40B4-BE49-F238E27FC236}">
                 <a16:creationId xmlns:a16="http://schemas.microsoft.com/office/drawing/2014/main" id="{BAC84DB8-D7FD-457F-9C78-2E0F780FB5CC}"/>
               </a:ext>
             </a:extLst>
           </p:cNvPr>
           <p:cNvSpPr>
-            <a:spLocks xmlns:a="http://schemas.openxmlformats.org/drawingml/2006/main" noGrp="1"/>
-          </p:cNvSpPr>
-          <p:nvPr/>
-        </p:nvSpPr>
-        <p:spPr>
-          <a:xfrm xmlns:a="http://schemas.openxmlformats.org/drawingml/2006/main">
+            <a:spLocks noGrp="1"/>
+          </p:cNvSpPr>
+          <p:nvPr/>
+        </p:nvSpPr>
+        <p:spPr>
+          <a:xfrm>
             <a:off x="7223760" y="5276088"/>
             <a:ext cx="4297680" cy="347472"/>
           </a:xfrm>
-          <a:prstGeom xmlns:a="http://schemas.openxmlformats.org/drawingml/2006/main" prst="rect">
-            <a:avLst/>
-          </a:prstGeom>
-          <a:noFill xmlns:a="http://schemas.openxmlformats.org/drawingml/2006/main"/>
-        </p:spPr>
-        <p:txBody>
-          <a:bodyPr xmlns:a="http://schemas.openxmlformats.org/drawingml/2006/main" wrap="square" lIns="0" tIns="0" rIns="0" bIns="0" anchor="ctr"/>
-          <a:lstStyle xmlns:a="http://schemas.openxmlformats.org/drawingml/2006/main"/>
-          <a:p xmlns:a="http://schemas.openxmlformats.org/drawingml/2006/main">
+          <a:prstGeom prst="rect">
+            <a:avLst/>
+          </a:prstGeom>
+          <a:noFill/>
+        </p:spPr>
+        <p:txBody>
+          <a:bodyPr wrap="square" lIns="0" tIns="0" rIns="0" bIns="0" anchor="ctr"/>
+          <a:lstStyle/>
+          <a:p>
             <a:pPr marL="0" indent="0">
               <a:buNone/>
             </a:pPr>
@@ -2971,31 +2539,31 @@
       <p:sp>
         <p:nvSpPr>
           <p:cNvPr id="20" name="Text 17">
-            <a:extLst xmlns:a="http://schemas.openxmlformats.org/drawingml/2006/main">
+            <a:extLst>
               <a:ext uri="{FF2B5EF4-FFF2-40B4-BE49-F238E27FC236}">
                 <a16:creationId xmlns:a16="http://schemas.microsoft.com/office/drawing/2014/main" id="{F8DEB9C2-BD8F-438F-B9AB-D090C7BF9863}"/>
               </a:ext>
             </a:extLst>
           </p:cNvPr>
           <p:cNvSpPr>
-            <a:spLocks xmlns:a="http://schemas.openxmlformats.org/drawingml/2006/main" noGrp="1"/>
-          </p:cNvSpPr>
-          <p:nvPr/>
-        </p:nvSpPr>
-        <p:spPr>
-          <a:xfrm xmlns:a="http://schemas.openxmlformats.org/drawingml/2006/main">
+            <a:spLocks noGrp="1"/>
+          </p:cNvSpPr>
+          <p:nvPr/>
+        </p:nvSpPr>
+        <p:spPr>
+          <a:xfrm>
             <a:off x="548640" y="6355080"/>
             <a:ext cx="11064240" cy="274320"/>
           </a:xfrm>
-          <a:prstGeom xmlns:a="http://schemas.openxmlformats.org/drawingml/2006/main" prst="rect">
-            <a:avLst/>
-          </a:prstGeom>
-          <a:noFill xmlns:a="http://schemas.openxmlformats.org/drawingml/2006/main"/>
-        </p:spPr>
-        <p:txBody>
-          <a:bodyPr xmlns:a="http://schemas.openxmlformats.org/drawingml/2006/main" wrap="square" lIns="0" tIns="0" rIns="0" bIns="0" anchor="ctr"/>
-          <a:lstStyle xmlns:a="http://schemas.openxmlformats.org/drawingml/2006/main"/>
-          <a:p xmlns:a="http://schemas.openxmlformats.org/drawingml/2006/main">
+          <a:prstGeom prst="rect">
+            <a:avLst/>
+          </a:prstGeom>
+          <a:noFill/>
+        </p:spPr>
+        <p:txBody>
+          <a:bodyPr wrap="square" lIns="0" tIns="0" rIns="0" bIns="0" anchor="ctr"/>
+          <a:lstStyle/>
+          <a:p>
             <a:pPr marL="0" indent="0">
               <a:buNone/>
             </a:pPr>
@@ -3021,11 +2589,14 @@
       </p:ext>
     </p:extLst>
   </p:cSld>
+  <p:clrMapOvr>
+    <a:masterClrMapping/>
+  </p:clrMapOvr>
 </p:sld>
 </file>
 
 <file path=ppt/slides/slide2.xml><?xml version="1.0" encoding="utf-8"?>
-<p:sld xmlns:p="http://schemas.openxmlformats.org/presentationml/2006/main">
+<p:sld xmlns:a="http://schemas.openxmlformats.org/drawingml/2006/main" xmlns:r="http://schemas.openxmlformats.org/officeDocument/2006/relationships" xmlns:p="http://schemas.openxmlformats.org/presentationml/2006/main">
   <p:cSld>
     <p:spTree>
       <p:nvGrpSpPr>
@@ -3034,36 +2605,41 @@
         <p:nvPr/>
       </p:nvGrpSpPr>
       <p:grpSpPr>
-        <a:xfrm xmlns:a="http://schemas.openxmlformats.org/drawingml/2006/main"/>
+        <a:xfrm>
+          <a:off x="0" y="0"/>
+          <a:ext cx="0" cy="0"/>
+          <a:chOff x="0" y="0"/>
+          <a:chExt cx="0" cy="0"/>
+        </a:xfrm>
       </p:grpSpPr>
       <p:sp>
         <p:nvSpPr>
           <p:cNvPr id="2" name="Text 0">
-            <a:extLst xmlns:a="http://schemas.openxmlformats.org/drawingml/2006/main">
+            <a:extLst>
               <a:ext uri="{FF2B5EF4-FFF2-40B4-BE49-F238E27FC236}">
                 <a16:creationId xmlns:a16="http://schemas.microsoft.com/office/drawing/2014/main" id="{6DB928BE-0B02-4F1D-82C9-C314CA855DF4}"/>
               </a:ext>
             </a:extLst>
           </p:cNvPr>
           <p:cNvSpPr>
-            <a:spLocks xmlns:a="http://schemas.openxmlformats.org/drawingml/2006/main" noGrp="1"/>
-          </p:cNvSpPr>
-          <p:nvPr/>
-        </p:nvSpPr>
-        <p:spPr>
-          <a:xfrm xmlns:a="http://schemas.openxmlformats.org/drawingml/2006/main">
+            <a:spLocks noGrp="1"/>
+          </p:cNvSpPr>
+          <p:nvPr/>
+        </p:nvSpPr>
+        <p:spPr>
+          <a:xfrm>
             <a:off x="457200" y="960120"/>
             <a:ext cx="11274552" cy="731520"/>
           </a:xfrm>
-          <a:prstGeom xmlns:a="http://schemas.openxmlformats.org/drawingml/2006/main" prst="rect">
-            <a:avLst/>
-          </a:prstGeom>
-          <a:noFill xmlns:a="http://schemas.openxmlformats.org/drawingml/2006/main"/>
-        </p:spPr>
-        <p:txBody>
-          <a:bodyPr xmlns:a="http://schemas.openxmlformats.org/drawingml/2006/main" wrap="square" lIns="0" tIns="0" rIns="0" bIns="0" anchor="ctr"/>
-          <a:lstStyle xmlns:a="http://schemas.openxmlformats.org/drawingml/2006/main"/>
-          <a:p xmlns:a="http://schemas.openxmlformats.org/drawingml/2006/main">
+          <a:prstGeom prst="rect">
+            <a:avLst/>
+          </a:prstGeom>
+          <a:noFill/>
+        </p:spPr>
+        <p:txBody>
+          <a:bodyPr wrap="square" lIns="0" tIns="0" rIns="0" bIns="0" anchor="ctr"/>
+          <a:lstStyle/>
+          <a:p>
             <a:pPr marL="0" indent="0">
               <a:buNone/>
             </a:pPr>
@@ -3085,31 +2661,31 @@
       <p:sp>
         <p:nvSpPr>
           <p:cNvPr id="3" name="Team tag">
-            <a:extLst xmlns:a="http://schemas.openxmlformats.org/drawingml/2006/main">
+            <a:extLst>
               <a:ext uri="{FF2B5EF4-FFF2-40B4-BE49-F238E27FC236}">
                 <a16:creationId xmlns:a16="http://schemas.microsoft.com/office/drawing/2014/main" id="{3A0094AC-1A8F-4DDC-8C19-1ED642196279}"/>
               </a:ext>
             </a:extLst>
           </p:cNvPr>
           <p:cNvSpPr>
-            <a:spLocks xmlns:a="http://schemas.openxmlformats.org/drawingml/2006/main" noGrp="1"/>
-          </p:cNvSpPr>
-          <p:nvPr/>
-        </p:nvSpPr>
-        <p:spPr>
-          <a:xfrm xmlns:a="http://schemas.openxmlformats.org/drawingml/2006/main">
+            <a:spLocks noGrp="1"/>
+          </p:cNvSpPr>
+          <p:nvPr/>
+        </p:nvSpPr>
+        <p:spPr>
+          <a:xfrm>
             <a:off x="8503920" y="1097280"/>
             <a:ext cx="3227832" cy="320040"/>
           </a:xfrm>
-          <a:prstGeom xmlns:a="http://schemas.openxmlformats.org/drawingml/2006/main" prst="rect">
-            <a:avLst/>
-          </a:prstGeom>
-          <a:noFill xmlns:a="http://schemas.openxmlformats.org/drawingml/2006/main"/>
-        </p:spPr>
-        <p:txBody>
-          <a:bodyPr xmlns:a="http://schemas.openxmlformats.org/drawingml/2006/main" wrap="square" lIns="0" tIns="0" rIns="0" bIns="0" anchor="ctr"/>
-          <a:lstStyle xmlns:a="http://schemas.openxmlformats.org/drawingml/2006/main"/>
-          <a:p xmlns:a="http://schemas.openxmlformats.org/drawingml/2006/main">
+          <a:prstGeom prst="rect">
+            <a:avLst/>
+          </a:prstGeom>
+          <a:noFill/>
+        </p:spPr>
+        <p:txBody>
+          <a:bodyPr wrap="square" lIns="0" tIns="0" rIns="0" bIns="0" anchor="ctr"/>
+          <a:lstStyle/>
+          <a:p>
             <a:pPr marL="0" indent="0" algn="r">
               <a:buNone/>
             </a:pPr>
@@ -3131,33 +2707,33 @@
       <p:sp>
         <p:nvSpPr>
           <p:cNvPr id="4" name="Problem card">
-            <a:extLst xmlns:a="http://schemas.openxmlformats.org/drawingml/2006/main">
+            <a:extLst>
               <a:ext uri="{FF2B5EF4-FFF2-40B4-BE49-F238E27FC236}">
                 <a16:creationId xmlns:a16="http://schemas.microsoft.com/office/drawing/2014/main" id="{E6FD2254-DAEE-4243-822B-B39DC44ED9A1}"/>
               </a:ext>
             </a:extLst>
           </p:cNvPr>
           <p:cNvSpPr>
-            <a:spLocks xmlns:a="http://schemas.openxmlformats.org/drawingml/2006/main" noGrp="1"/>
-          </p:cNvSpPr>
-          <p:nvPr/>
-        </p:nvSpPr>
-        <p:spPr>
-          <a:xfrm xmlns:a="http://schemas.openxmlformats.org/drawingml/2006/main">
+            <a:spLocks noGrp="1"/>
+          </p:cNvSpPr>
+          <p:nvPr/>
+        </p:nvSpPr>
+        <p:spPr>
+          <a:xfrm>
             <a:off x="457200" y="1691640"/>
             <a:ext cx="5486400" cy="4434840"/>
           </a:xfrm>
-          <a:prstGeom xmlns:a="http://schemas.openxmlformats.org/drawingml/2006/main" prst="roundRect">
+          <a:prstGeom prst="roundRect">
             <a:avLst>
               <a:gd name="adj" fmla="val 2474"/>
             </a:avLst>
           </a:prstGeom>
-          <a:solidFill xmlns:a="http://schemas.openxmlformats.org/drawingml/2006/main">
+          <a:solidFill>
             <a:srgbClr val="0B1A4A">
               <a:alpha val="75000"/>
             </a:srgbClr>
           </a:solidFill>
-          <a:ln xmlns:a="http://schemas.openxmlformats.org/drawingml/2006/main" w="12700">
+          <a:ln w="12700">
             <a:solidFill>
               <a:srgbClr val="1E5BFF"/>
             </a:solidFill>
@@ -3168,31 +2744,31 @@
       <p:sp>
         <p:nvSpPr>
           <p:cNvPr id="5" name="Problem head">
-            <a:extLst xmlns:a="http://schemas.openxmlformats.org/drawingml/2006/main">
+            <a:extLst>
               <a:ext uri="{FF2B5EF4-FFF2-40B4-BE49-F238E27FC236}">
                 <a16:creationId xmlns:a16="http://schemas.microsoft.com/office/drawing/2014/main" id="{690D0E3F-A0A1-4604-BBEE-A33BA98168A0}"/>
               </a:ext>
             </a:extLst>
           </p:cNvPr>
           <p:cNvSpPr>
-            <a:spLocks xmlns:a="http://schemas.openxmlformats.org/drawingml/2006/main" noGrp="1"/>
-          </p:cNvSpPr>
-          <p:nvPr/>
-        </p:nvSpPr>
-        <p:spPr>
-          <a:xfrm xmlns:a="http://schemas.openxmlformats.org/drawingml/2006/main">
+            <a:spLocks noGrp="1"/>
+          </p:cNvSpPr>
+          <p:nvPr/>
+        </p:nvSpPr>
+        <p:spPr>
+          <a:xfrm>
             <a:off x="731520" y="1874520"/>
             <a:ext cx="4937760" cy="320040"/>
           </a:xfrm>
-          <a:prstGeom xmlns:a="http://schemas.openxmlformats.org/drawingml/2006/main" prst="rect">
-            <a:avLst/>
-          </a:prstGeom>
-          <a:noFill xmlns:a="http://schemas.openxmlformats.org/drawingml/2006/main"/>
-        </p:spPr>
-        <p:txBody>
-          <a:bodyPr xmlns:a="http://schemas.openxmlformats.org/drawingml/2006/main" wrap="square" lIns="0" tIns="0" rIns="0" bIns="0" anchor="ctr"/>
-          <a:lstStyle xmlns:a="http://schemas.openxmlformats.org/drawingml/2006/main"/>
-          <a:p xmlns:a="http://schemas.openxmlformats.org/drawingml/2006/main">
+          <a:prstGeom prst="rect">
+            <a:avLst/>
+          </a:prstGeom>
+          <a:noFill/>
+        </p:spPr>
+        <p:txBody>
+          <a:bodyPr wrap="square" lIns="0" tIns="0" rIns="0" bIns="0" anchor="ctr"/>
+          <a:lstStyle/>
+          <a:p>
             <a:pPr marL="0" indent="0">
               <a:buNone/>
             </a:pPr>
@@ -3214,30 +2790,30 @@
       <p:sp>
         <p:nvSpPr>
           <p:cNvPr id="6" name="Problem body">
-            <a:extLst xmlns:a="http://schemas.openxmlformats.org/drawingml/2006/main">
+            <a:extLst>
               <a:ext uri="{FF2B5EF4-FFF2-40B4-BE49-F238E27FC236}">
                 <a16:creationId xmlns:a16="http://schemas.microsoft.com/office/drawing/2014/main" id="{44491090-5A3B-4EFB-873A-976C629AE6E4}"/>
               </a:ext>
             </a:extLst>
           </p:cNvPr>
           <p:cNvSpPr>
-            <a:spLocks xmlns:a="http://schemas.openxmlformats.org/drawingml/2006/main" noGrp="1"/>
-          </p:cNvSpPr>
-          <p:nvPr/>
-        </p:nvSpPr>
-        <p:spPr>
-          <a:xfrm xmlns:a="http://schemas.openxmlformats.org/drawingml/2006/main">
+            <a:spLocks noGrp="1"/>
+          </p:cNvSpPr>
+          <p:nvPr/>
+        </p:nvSpPr>
+        <p:spPr>
+          <a:xfrm>
             <a:off x="731520" y="2286000"/>
             <a:ext cx="4937760" cy="3657600"/>
           </a:xfrm>
-          <a:prstGeom xmlns:a="http://schemas.openxmlformats.org/drawingml/2006/main" prst="rect">
-            <a:avLst/>
-          </a:prstGeom>
-          <a:noFill xmlns:a="http://schemas.openxmlformats.org/drawingml/2006/main"/>
-        </p:spPr>
-        <p:txBody>
-          <a:bodyPr xmlns:a="http://schemas.openxmlformats.org/drawingml/2006/main" wrap="square" lIns="0" tIns="0" rIns="0" bIns="0" anchor="t"/>
-          <a:lstStyle xmlns:a="http://schemas.openxmlformats.org/drawingml/2006/main">
+          <a:prstGeom prst="rect">
+            <a:avLst/>
+          </a:prstGeom>
+          <a:noFill/>
+        </p:spPr>
+        <p:txBody>
+          <a:bodyPr wrap="square" lIns="0" tIns="0" rIns="0" bIns="0" anchor="t"/>
+          <a:lstStyle>
             <a:defPPr algn="l">
               <a:defRPr sz="1400">
                 <a:solidFill>
@@ -3348,7 +2924,7 @@
               </a:defRPr>
             </a:lvl9pPr>
           </a:lstStyle>
-          <a:p xmlns:a="http://schemas.openxmlformats.org/drawingml/2006/main">
+          <a:p>
             <a:pPr marL="342900" indent="-342900" algn="l">
               <a:spcAft>
                 <a:spcPts val="600"/>
@@ -3375,7 +2951,7 @@
               <a:t>Edits can leave stale terms, claims, or graph links.</a:t>
             </a:r>
           </a:p>
-          <a:p xmlns:a="http://schemas.openxmlformats.org/drawingml/2006/main">
+          <a:p>
             <a:pPr marL="342900" indent="-342900" algn="l">
               <a:spcAft>
                 <a:spcPts val="600"/>
@@ -3402,7 +2978,7 @@
               <a:t>One source must not erase a conflicting claim from another.</a:t>
             </a:r>
           </a:p>
-          <a:p xmlns:a="http://schemas.openxmlformats.org/drawingml/2006/main">
+          <a:p>
             <a:pPr marL="342900" indent="-342900" algn="l">
               <a:spcAft>
                 <a:spcPts val="600"/>
@@ -3429,7 +3005,7 @@
               <a:t>Embedded instructions can try to steer retrieval.</a:t>
             </a:r>
           </a:p>
-          <a:p xmlns:a="http://schemas.openxmlformats.org/drawingml/2006/main">
+          <a:p>
             <a:pPr marL="342900" indent="-342900" algn="l">
               <a:spcAft>
                 <a:spcPts val="600"/>
@@ -3456,7 +3032,7 @@
               <a:t>Hindi questions can miss relevant English records.</a:t>
             </a:r>
           </a:p>
-          <a:p xmlns:a="http://schemas.openxmlformats.org/drawingml/2006/main">
+          <a:p>
             <a:pPr marL="342900" indent="-342900" algn="l">
               <a:spcAft>
                 <a:spcPts val="600"/>
@@ -3483,7 +3059,7 @@
               <a:t>Example: ERP lists Helios ACTIVE; DOC-2026-04 says SUSPENDED.</a:t>
             </a:r>
           </a:p>
-          <a:p xmlns:a="http://schemas.openxmlformats.org/drawingml/2006/main">
+          <a:p>
             <a:pPr marL="342900" indent="-342900" algn="l">
               <a:spcAft>
                 <a:spcPts val="600"/>
@@ -3515,33 +3091,33 @@
       <p:sp>
         <p:nvSpPr>
           <p:cNvPr id="7" name="Solution card">
-            <a:extLst xmlns:a="http://schemas.openxmlformats.org/drawingml/2006/main">
+            <a:extLst>
               <a:ext uri="{FF2B5EF4-FFF2-40B4-BE49-F238E27FC236}">
                 <a16:creationId xmlns:a16="http://schemas.microsoft.com/office/drawing/2014/main" id="{B9179F29-2F02-45DA-9D09-CB735845190B}"/>
               </a:ext>
             </a:extLst>
           </p:cNvPr>
           <p:cNvSpPr>
-            <a:spLocks xmlns:a="http://schemas.openxmlformats.org/drawingml/2006/main" noGrp="1"/>
-          </p:cNvSpPr>
-          <p:nvPr/>
-        </p:nvSpPr>
-        <p:spPr>
-          <a:xfrm xmlns:a="http://schemas.openxmlformats.org/drawingml/2006/main">
+            <a:spLocks noGrp="1"/>
+          </p:cNvSpPr>
+          <p:nvPr/>
+        </p:nvSpPr>
+        <p:spPr>
+          <a:xfrm>
             <a:off x="6245352" y="1691640"/>
             <a:ext cx="5486400" cy="2743200"/>
           </a:xfrm>
-          <a:prstGeom xmlns:a="http://schemas.openxmlformats.org/drawingml/2006/main" prst="roundRect">
+          <a:prstGeom prst="roundRect">
             <a:avLst>
               <a:gd name="adj" fmla="val 4000"/>
             </a:avLst>
           </a:prstGeom>
-          <a:solidFill xmlns:a="http://schemas.openxmlformats.org/drawingml/2006/main">
+          <a:solidFill>
             <a:srgbClr val="0B1A4A">
               <a:alpha val="75000"/>
             </a:srgbClr>
           </a:solidFill>
-          <a:ln xmlns:a="http://schemas.openxmlformats.org/drawingml/2006/main" w="12700">
+          <a:ln w="12700">
             <a:solidFill>
               <a:srgbClr val="1E5BFF"/>
             </a:solidFill>
@@ -3552,31 +3128,31 @@
       <p:sp>
         <p:nvSpPr>
           <p:cNvPr id="8" name="Solution head">
-            <a:extLst xmlns:a="http://schemas.openxmlformats.org/drawingml/2006/main">
+            <a:extLst>
               <a:ext uri="{FF2B5EF4-FFF2-40B4-BE49-F238E27FC236}">
                 <a16:creationId xmlns:a16="http://schemas.microsoft.com/office/drawing/2014/main" id="{85A324C7-CF03-4039-99A6-64D81ABCF7BB}"/>
               </a:ext>
             </a:extLst>
           </p:cNvPr>
           <p:cNvSpPr>
-            <a:spLocks xmlns:a="http://schemas.openxmlformats.org/drawingml/2006/main" noGrp="1"/>
-          </p:cNvSpPr>
-          <p:nvPr/>
-        </p:nvSpPr>
-        <p:spPr>
-          <a:xfrm xmlns:a="http://schemas.openxmlformats.org/drawingml/2006/main">
+            <a:spLocks noGrp="1"/>
+          </p:cNvSpPr>
+          <p:nvPr/>
+        </p:nvSpPr>
+        <p:spPr>
+          <a:xfrm>
             <a:off x="6519672" y="1874520"/>
             <a:ext cx="4937760" cy="320040"/>
           </a:xfrm>
-          <a:prstGeom xmlns:a="http://schemas.openxmlformats.org/drawingml/2006/main" prst="rect">
-            <a:avLst/>
-          </a:prstGeom>
-          <a:noFill xmlns:a="http://schemas.openxmlformats.org/drawingml/2006/main"/>
-        </p:spPr>
-        <p:txBody>
-          <a:bodyPr xmlns:a="http://schemas.openxmlformats.org/drawingml/2006/main" wrap="square" lIns="0" tIns="0" rIns="0" bIns="0" anchor="ctr"/>
-          <a:lstStyle xmlns:a="http://schemas.openxmlformats.org/drawingml/2006/main"/>
-          <a:p xmlns:a="http://schemas.openxmlformats.org/drawingml/2006/main">
+          <a:prstGeom prst="rect">
+            <a:avLst/>
+          </a:prstGeom>
+          <a:noFill/>
+        </p:spPr>
+        <p:txBody>
+          <a:bodyPr wrap="square" lIns="0" tIns="0" rIns="0" bIns="0" anchor="ctr"/>
+          <a:lstStyle/>
+          <a:p>
             <a:pPr marL="0" indent="0">
               <a:buNone/>
             </a:pPr>
@@ -3598,31 +3174,31 @@
       <p:sp>
         <p:nvSpPr>
           <p:cNvPr id="9" name="Solution body">
-            <a:extLst xmlns:a="http://schemas.openxmlformats.org/drawingml/2006/main">
+            <a:extLst>
               <a:ext uri="{FF2B5EF4-FFF2-40B4-BE49-F238E27FC236}">
                 <a16:creationId xmlns:a16="http://schemas.microsoft.com/office/drawing/2014/main" id="{00938271-0837-458B-85A2-4B8B1B012934}"/>
               </a:ext>
             </a:extLst>
           </p:cNvPr>
           <p:cNvSpPr>
-            <a:spLocks xmlns:a="http://schemas.openxmlformats.org/drawingml/2006/main" noGrp="1"/>
-          </p:cNvSpPr>
-          <p:nvPr/>
-        </p:nvSpPr>
-        <p:spPr>
-          <a:xfrm xmlns:a="http://schemas.openxmlformats.org/drawingml/2006/main">
+            <a:spLocks noGrp="1"/>
+          </p:cNvSpPr>
+          <p:nvPr/>
+        </p:nvSpPr>
+        <p:spPr>
+          <a:xfrm>
             <a:off x="6519672" y="2286000"/>
             <a:ext cx="4937760" cy="2011680"/>
           </a:xfrm>
-          <a:prstGeom xmlns:a="http://schemas.openxmlformats.org/drawingml/2006/main" prst="rect">
-            <a:avLst/>
-          </a:prstGeom>
-          <a:noFill xmlns:a="http://schemas.openxmlformats.org/drawingml/2006/main"/>
-        </p:spPr>
-        <p:txBody>
-          <a:bodyPr xmlns:a="http://schemas.openxmlformats.org/drawingml/2006/main" wrap="square" lIns="0" tIns="0" rIns="0" bIns="0" anchor="t"/>
-          <a:lstStyle xmlns:a="http://schemas.openxmlformats.org/drawingml/2006/main"/>
-          <a:p xmlns:a="http://schemas.openxmlformats.org/drawingml/2006/main">
+          <a:prstGeom prst="rect">
+            <a:avLst/>
+          </a:prstGeom>
+          <a:noFill/>
+        </p:spPr>
+        <p:txBody>
+          <a:bodyPr wrap="square" lIns="0" tIns="0" rIns="0" bIns="0" anchor="t"/>
+          <a:lstStyle/>
+          <a:p>
             <a:pPr marL="342900" indent="-342900">
               <a:spcAft>
                 <a:spcPts val="600"/>
@@ -3643,7 +3219,7 @@
             </a:r>
             <a:endParaRPr sz="1400"/>
           </a:p>
-          <a:p xmlns:a="http://schemas.openxmlformats.org/drawingml/2006/main">
+          <a:p>
             <a:pPr marL="342900" indent="-342900">
               <a:spcAft>
                 <a:spcPts val="600"/>
@@ -3664,7 +3240,7 @@
             </a:r>
             <a:endParaRPr sz="1400"/>
           </a:p>
-          <a:p xmlns:a="http://schemas.openxmlformats.org/drawingml/2006/main">
+          <a:p>
             <a:pPr marL="342900" indent="-342900">
               <a:spcAft>
                 <a:spcPts val="600"/>
@@ -3690,33 +3266,33 @@
       <p:sp>
         <p:nvSpPr>
           <p:cNvPr id="10" name="Visual card">
-            <a:extLst xmlns:a="http://schemas.openxmlformats.org/drawingml/2006/main">
+            <a:extLst>
               <a:ext uri="{FF2B5EF4-FFF2-40B4-BE49-F238E27FC236}">
                 <a16:creationId xmlns:a16="http://schemas.microsoft.com/office/drawing/2014/main" id="{79769746-62D1-4116-A972-F8266C7C3B55}"/>
               </a:ext>
             </a:extLst>
           </p:cNvPr>
           <p:cNvSpPr>
-            <a:spLocks xmlns:a="http://schemas.openxmlformats.org/drawingml/2006/main" noGrp="1"/>
-          </p:cNvSpPr>
-          <p:nvPr/>
-        </p:nvSpPr>
-        <p:spPr>
-          <a:xfrm xmlns:a="http://schemas.openxmlformats.org/drawingml/2006/main">
+            <a:spLocks noGrp="1"/>
+          </p:cNvSpPr>
+          <p:nvPr/>
+        </p:nvSpPr>
+        <p:spPr>
+          <a:xfrm>
             <a:off x="6245352" y="4617720"/>
             <a:ext cx="5486400" cy="1508760"/>
           </a:xfrm>
-          <a:prstGeom xmlns:a="http://schemas.openxmlformats.org/drawingml/2006/main" prst="roundRect">
+          <a:prstGeom prst="roundRect">
             <a:avLst>
               <a:gd name="adj" fmla="val 7273"/>
             </a:avLst>
           </a:prstGeom>
-          <a:solidFill xmlns:a="http://schemas.openxmlformats.org/drawingml/2006/main">
+          <a:solidFill>
             <a:srgbClr val="0B1A4A">
               <a:alpha val="75000"/>
             </a:srgbClr>
           </a:solidFill>
-          <a:ln xmlns:a="http://schemas.openxmlformats.org/drawingml/2006/main" w="12700">
+          <a:ln w="12700">
             <a:solidFill>
               <a:srgbClr val="1E5BFF"/>
             </a:solidFill>
@@ -3727,30 +3303,30 @@
       <p:sp>
         <p:nvSpPr>
           <p:cNvPr id="11" name="Image placeholder text">
-            <a:extLst xmlns:a="http://schemas.openxmlformats.org/drawingml/2006/main">
+            <a:extLst>
               <a:ext uri="{FF2B5EF4-FFF2-40B4-BE49-F238E27FC236}">
                 <a16:creationId xmlns:a16="http://schemas.microsoft.com/office/drawing/2014/main" id="{E7EF1465-EAAB-4A16-A020-85708C678F04}"/>
               </a:ext>
             </a:extLst>
           </p:cNvPr>
           <p:cNvSpPr>
-            <a:spLocks xmlns:a="http://schemas.openxmlformats.org/drawingml/2006/main" noGrp="1"/>
-          </p:cNvSpPr>
-          <p:nvPr/>
-        </p:nvSpPr>
-        <p:spPr>
-          <a:xfrm xmlns:a="http://schemas.openxmlformats.org/drawingml/2006/main">
+            <a:spLocks noGrp="1"/>
+          </p:cNvSpPr>
+          <p:nvPr/>
+        </p:nvSpPr>
+        <p:spPr>
+          <a:xfrm>
             <a:off x="6245352" y="4617720"/>
             <a:ext cx="5486400" cy="1508760"/>
           </a:xfrm>
-          <a:prstGeom xmlns:a="http://schemas.openxmlformats.org/drawingml/2006/main" prst="rect">
-            <a:avLst/>
-          </a:prstGeom>
-          <a:noFill xmlns:a="http://schemas.openxmlformats.org/drawingml/2006/main"/>
-        </p:spPr>
-        <p:txBody>
-          <a:bodyPr xmlns:a="http://schemas.openxmlformats.org/drawingml/2006/main" wrap="square" anchor="ctr"/>
-          <a:lstStyle xmlns:a="http://schemas.openxmlformats.org/drawingml/2006/main">
+          <a:prstGeom prst="rect">
+            <a:avLst/>
+          </a:prstGeom>
+          <a:noFill/>
+        </p:spPr>
+        <p:txBody>
+          <a:bodyPr wrap="square" anchor="ctr"/>
+          <a:lstStyle>
             <a:defPPr algn="ctr">
               <a:defRPr sz="1500" b="1" i="0">
                 <a:solidFill>
@@ -3861,7 +3437,7 @@
               </a:defRPr>
             </a:lvl9pPr>
           </a:lstStyle>
-          <a:p xmlns:a="http://schemas.openxmlformats.org/drawingml/2006/main">
+          <a:p>
             <a:pPr marL="0" indent="0" algn="ctr">
               <a:buNone/>
               <a:defRPr sz="1500" b="1" i="0">
@@ -3886,7 +3462,7 @@
             </a:r>
             <a:endParaRPr sz="1400"/>
           </a:p>
-          <a:p xmlns:a="http://schemas.openxmlformats.org/drawingml/2006/main">
+          <a:p>
             <a:pPr marL="0" indent="0" algn="ctr">
               <a:buNone/>
               <a:defRPr sz="1500" b="1" i="0">
@@ -3911,7 +3487,7 @@
             </a:r>
             <a:endParaRPr sz="1400"/>
           </a:p>
-          <a:p xmlns:a="http://schemas.openxmlformats.org/drawingml/2006/main">
+          <a:p>
             <a:pPr marL="0" indent="0" algn="ctr">
               <a:buNone/>
               <a:defRPr sz="1500" b="1" i="0">
@@ -3941,31 +3517,31 @@
       <p:sp>
         <p:nvSpPr>
           <p:cNvPr id="25" name="Slide Number Placeholder 0">
-            <a:extLst xmlns:a="http://schemas.openxmlformats.org/drawingml/2006/main">
+            <a:extLst>
               <a:ext uri="{FF2B5EF4-FFF2-40B4-BE49-F238E27FC236}">
                 <a16:creationId xmlns:a16="http://schemas.microsoft.com/office/drawing/2014/main" id="{FD038C33-4A8E-4BF3-B3B4-27969BF93B5E}"/>
               </a:ext>
             </a:extLst>
           </p:cNvPr>
           <p:cNvSpPr>
-            <a:spLocks xmlns:a="http://schemas.openxmlformats.org/drawingml/2006/main" noGrp="1"/>
+            <a:spLocks noGrp="1"/>
           </p:cNvSpPr>
           <p:nvPr>
             <p:ph type="sldNum" idx="4294967295"/>
           </p:nvPr>
         </p:nvSpPr>
         <p:spPr>
-          <a:xfrm xmlns:a="http://schemas.openxmlformats.org/drawingml/2006/main">
+          <a:xfrm>
             <a:off x="11155680" y="6428232"/>
             <a:ext cx="576072" cy="274320"/>
           </a:xfrm>
-          <a:prstGeom xmlns:a="http://schemas.openxmlformats.org/drawingml/2006/main" prst="rect">
-            <a:avLst/>
-          </a:prstGeom>
-        </p:spPr>
-        <p:txBody>
-          <a:bodyPr xmlns:a="http://schemas.openxmlformats.org/drawingml/2006/main"/>
-          <a:lstStyle xmlns:a="http://schemas.openxmlformats.org/drawingml/2006/main">
+          <a:prstGeom prst="rect">
+            <a:avLst/>
+          </a:prstGeom>
+        </p:spPr>
+        <p:txBody>
+          <a:bodyPr/>
+          <a:lstStyle>
             <a:lvl1pPr>
               <a:buNone/>
               <a:defRPr sz="1000">
@@ -3978,7 +3554,7 @@
               </a:defRPr>
             </a:lvl1pPr>
           </a:lstStyle>
-          <a:p xmlns:a="http://schemas.openxmlformats.org/drawingml/2006/main">
+          <a:p>
             <a:pPr algn="r">
               <a:buNone/>
             </a:pPr>
@@ -3997,11 +3573,14 @@
       </p:ext>
     </p:extLst>
   </p:cSld>
+  <p:clrMapOvr>
+    <a:masterClrMapping/>
+  </p:clrMapOvr>
 </p:sld>
 </file>
 
 <file path=ppt/slides/slide3.xml><?xml version="1.0" encoding="utf-8"?>
-<p:sld xmlns:p="http://schemas.openxmlformats.org/presentationml/2006/main">
+<p:sld xmlns:a="http://schemas.openxmlformats.org/drawingml/2006/main" xmlns:r="http://schemas.openxmlformats.org/officeDocument/2006/relationships" xmlns:p="http://schemas.openxmlformats.org/presentationml/2006/main">
   <p:cSld>
     <p:spTree>
       <p:nvGrpSpPr>
@@ -4010,36 +3589,41 @@
         <p:nvPr/>
       </p:nvGrpSpPr>
       <p:grpSpPr>
-        <a:xfrm xmlns:a="http://schemas.openxmlformats.org/drawingml/2006/main"/>
+        <a:xfrm>
+          <a:off x="0" y="0"/>
+          <a:ext cx="0" cy="0"/>
+          <a:chOff x="0" y="0"/>
+          <a:chExt cx="0" cy="0"/>
+        </a:xfrm>
       </p:grpSpPr>
       <p:sp>
         <p:nvSpPr>
           <p:cNvPr id="2" name="Text 0">
-            <a:extLst xmlns:a="http://schemas.openxmlformats.org/drawingml/2006/main">
+            <a:extLst>
               <a:ext uri="{FF2B5EF4-FFF2-40B4-BE49-F238E27FC236}">
                 <a16:creationId xmlns:a16="http://schemas.microsoft.com/office/drawing/2014/main" id="{2FA75ADD-4D6E-434F-8393-FFFBC3356BA4}"/>
               </a:ext>
             </a:extLst>
           </p:cNvPr>
           <p:cNvSpPr>
-            <a:spLocks xmlns:a="http://schemas.openxmlformats.org/drawingml/2006/main" noGrp="1"/>
-          </p:cNvSpPr>
-          <p:nvPr/>
-        </p:nvSpPr>
-        <p:spPr>
-          <a:xfrm xmlns:a="http://schemas.openxmlformats.org/drawingml/2006/main">
+            <a:spLocks noGrp="1"/>
+          </p:cNvSpPr>
+          <p:nvPr/>
+        </p:nvSpPr>
+        <p:spPr>
+          <a:xfrm>
             <a:off x="457200" y="960120"/>
             <a:ext cx="11274552" cy="731520"/>
           </a:xfrm>
-          <a:prstGeom xmlns:a="http://schemas.openxmlformats.org/drawingml/2006/main" prst="rect">
-            <a:avLst/>
-          </a:prstGeom>
-          <a:noFill xmlns:a="http://schemas.openxmlformats.org/drawingml/2006/main"/>
-        </p:spPr>
-        <p:txBody>
-          <a:bodyPr xmlns:a="http://schemas.openxmlformats.org/drawingml/2006/main" wrap="square" lIns="0" tIns="0" rIns="0" bIns="0" anchor="ctr"/>
-          <a:lstStyle xmlns:a="http://schemas.openxmlformats.org/drawingml/2006/main"/>
-          <a:p xmlns:a="http://schemas.openxmlformats.org/drawingml/2006/main">
+          <a:prstGeom prst="rect">
+            <a:avLst/>
+          </a:prstGeom>
+          <a:noFill/>
+        </p:spPr>
+        <p:txBody>
+          <a:bodyPr wrap="square" lIns="0" tIns="0" rIns="0" bIns="0" anchor="ctr"/>
+          <a:lstStyle/>
+          <a:p>
             <a:pPr marL="0" indent="0">
               <a:buNone/>
             </a:pPr>
@@ -4061,31 +3645,31 @@
       <p:sp>
         <p:nvSpPr>
           <p:cNvPr id="3" name="Team tag">
-            <a:extLst xmlns:a="http://schemas.openxmlformats.org/drawingml/2006/main">
+            <a:extLst>
               <a:ext uri="{FF2B5EF4-FFF2-40B4-BE49-F238E27FC236}">
                 <a16:creationId xmlns:a16="http://schemas.microsoft.com/office/drawing/2014/main" id="{C1EA5B08-FE3C-4939-BEC1-392DCAD87C85}"/>
               </a:ext>
             </a:extLst>
           </p:cNvPr>
           <p:cNvSpPr>
-            <a:spLocks xmlns:a="http://schemas.openxmlformats.org/drawingml/2006/main" noGrp="1"/>
-          </p:cNvSpPr>
-          <p:nvPr/>
-        </p:nvSpPr>
-        <p:spPr>
-          <a:xfrm xmlns:a="http://schemas.openxmlformats.org/drawingml/2006/main">
+            <a:spLocks noGrp="1"/>
+          </p:cNvSpPr>
+          <p:nvPr/>
+        </p:nvSpPr>
+        <p:spPr>
+          <a:xfrm>
             <a:off x="8503920" y="1097280"/>
             <a:ext cx="3227832" cy="320040"/>
           </a:xfrm>
-          <a:prstGeom xmlns:a="http://schemas.openxmlformats.org/drawingml/2006/main" prst="rect">
-            <a:avLst/>
-          </a:prstGeom>
-          <a:noFill xmlns:a="http://schemas.openxmlformats.org/drawingml/2006/main"/>
-        </p:spPr>
-        <p:txBody>
-          <a:bodyPr xmlns:a="http://schemas.openxmlformats.org/drawingml/2006/main" wrap="square" lIns="0" tIns="0" rIns="0" bIns="0" anchor="ctr"/>
-          <a:lstStyle xmlns:a="http://schemas.openxmlformats.org/drawingml/2006/main"/>
-          <a:p xmlns:a="http://schemas.openxmlformats.org/drawingml/2006/main">
+          <a:prstGeom prst="rect">
+            <a:avLst/>
+          </a:prstGeom>
+          <a:noFill/>
+        </p:spPr>
+        <p:txBody>
+          <a:bodyPr wrap="square" lIns="0" tIns="0" rIns="0" bIns="0" anchor="ctr"/>
+          <a:lstStyle/>
+          <a:p>
             <a:pPr marL="0" indent="0" algn="r">
               <a:buNone/>
             </a:pPr>
@@ -4107,33 +3691,33 @@
       <p:sp>
         <p:nvSpPr>
           <p:cNvPr id="4" name="Architecture card">
-            <a:extLst xmlns:a="http://schemas.openxmlformats.org/drawingml/2006/main">
+            <a:extLst>
               <a:ext uri="{FF2B5EF4-FFF2-40B4-BE49-F238E27FC236}">
                 <a16:creationId xmlns:a16="http://schemas.microsoft.com/office/drawing/2014/main" id="{6C7972C3-55CA-4383-BAD6-A507F91DC820}"/>
               </a:ext>
             </a:extLst>
           </p:cNvPr>
           <p:cNvSpPr>
-            <a:spLocks xmlns:a="http://schemas.openxmlformats.org/drawingml/2006/main" noGrp="1"/>
-          </p:cNvSpPr>
-          <p:nvPr/>
-        </p:nvSpPr>
-        <p:spPr>
-          <a:xfrm xmlns:a="http://schemas.openxmlformats.org/drawingml/2006/main">
+            <a:spLocks noGrp="1"/>
+          </p:cNvSpPr>
+          <p:nvPr/>
+        </p:nvSpPr>
+        <p:spPr>
+          <a:xfrm>
             <a:off x="457200" y="1691640"/>
             <a:ext cx="5486400" cy="4434840"/>
           </a:xfrm>
-          <a:prstGeom xmlns:a="http://schemas.openxmlformats.org/drawingml/2006/main" prst="roundRect">
+          <a:prstGeom prst="roundRect">
             <a:avLst>
               <a:gd name="adj" fmla="val 2474"/>
             </a:avLst>
           </a:prstGeom>
-          <a:solidFill xmlns:a="http://schemas.openxmlformats.org/drawingml/2006/main">
+          <a:solidFill>
             <a:srgbClr val="0B1A4A">
               <a:alpha val="75000"/>
             </a:srgbClr>
           </a:solidFill>
-          <a:ln xmlns:a="http://schemas.openxmlformats.org/drawingml/2006/main" w="12700">
+          <a:ln w="12700">
             <a:solidFill>
               <a:srgbClr val="1E5BFF"/>
             </a:solidFill>
@@ -4144,31 +3728,31 @@
       <p:sp>
         <p:nvSpPr>
           <p:cNvPr id="5" name="Arch head">
-            <a:extLst xmlns:a="http://schemas.openxmlformats.org/drawingml/2006/main">
+            <a:extLst>
               <a:ext uri="{FF2B5EF4-FFF2-40B4-BE49-F238E27FC236}">
                 <a16:creationId xmlns:a16="http://schemas.microsoft.com/office/drawing/2014/main" id="{4B2A7553-B886-4F02-B6D3-2CB488691A5A}"/>
               </a:ext>
             </a:extLst>
           </p:cNvPr>
           <p:cNvSpPr>
-            <a:spLocks xmlns:a="http://schemas.openxmlformats.org/drawingml/2006/main" noGrp="1"/>
-          </p:cNvSpPr>
-          <p:nvPr/>
-        </p:nvSpPr>
-        <p:spPr>
-          <a:xfrm xmlns:a="http://schemas.openxmlformats.org/drawingml/2006/main">
+            <a:spLocks noGrp="1"/>
+          </p:cNvSpPr>
+          <p:nvPr/>
+        </p:nvSpPr>
+        <p:spPr>
+          <a:xfrm>
             <a:off x="731520" y="1874520"/>
             <a:ext cx="4937760" cy="320040"/>
           </a:xfrm>
-          <a:prstGeom xmlns:a="http://schemas.openxmlformats.org/drawingml/2006/main" prst="rect">
-            <a:avLst/>
-          </a:prstGeom>
-          <a:noFill xmlns:a="http://schemas.openxmlformats.org/drawingml/2006/main"/>
-        </p:spPr>
-        <p:txBody>
-          <a:bodyPr xmlns:a="http://schemas.openxmlformats.org/drawingml/2006/main" wrap="square" lIns="0" tIns="0" rIns="0" bIns="0" anchor="ctr"/>
-          <a:lstStyle xmlns:a="http://schemas.openxmlformats.org/drawingml/2006/main"/>
-          <a:p xmlns:a="http://schemas.openxmlformats.org/drawingml/2006/main">
+          <a:prstGeom prst="rect">
+            <a:avLst/>
+          </a:prstGeom>
+          <a:noFill/>
+        </p:spPr>
+        <p:txBody>
+          <a:bodyPr wrap="square" lIns="0" tIns="0" rIns="0" bIns="0" anchor="ctr"/>
+          <a:lstStyle/>
+          <a:p>
             <a:pPr marL="0" indent="0">
               <a:buNone/>
             </a:pPr>
@@ -4190,31 +3774,31 @@
       <p:sp>
         <p:nvSpPr>
           <p:cNvPr id="6" name="Arch body">
-            <a:extLst xmlns:a="http://schemas.openxmlformats.org/drawingml/2006/main">
+            <a:extLst>
               <a:ext uri="{FF2B5EF4-FFF2-40B4-BE49-F238E27FC236}">
                 <a16:creationId xmlns:a16="http://schemas.microsoft.com/office/drawing/2014/main" id="{55B52155-67A4-4574-9FAC-2A9F7A3AEC1A}"/>
               </a:ext>
             </a:extLst>
           </p:cNvPr>
           <p:cNvSpPr>
-            <a:spLocks xmlns:a="http://schemas.openxmlformats.org/drawingml/2006/main" noGrp="1"/>
-          </p:cNvSpPr>
-          <p:nvPr/>
-        </p:nvSpPr>
-        <p:spPr>
-          <a:xfrm xmlns:a="http://schemas.openxmlformats.org/drawingml/2006/main">
+            <a:spLocks noGrp="1"/>
+          </p:cNvSpPr>
+          <p:nvPr/>
+        </p:nvSpPr>
+        <p:spPr>
+          <a:xfrm>
             <a:off x="731520" y="2286000"/>
             <a:ext cx="4937760" cy="3657600"/>
           </a:xfrm>
-          <a:prstGeom xmlns:a="http://schemas.openxmlformats.org/drawingml/2006/main" prst="rect">
-            <a:avLst/>
-          </a:prstGeom>
-          <a:noFill xmlns:a="http://schemas.openxmlformats.org/drawingml/2006/main"/>
-        </p:spPr>
-        <p:txBody>
-          <a:bodyPr xmlns:a="http://schemas.openxmlformats.org/drawingml/2006/main" wrap="square" lIns="0" tIns="0" rIns="0" bIns="0" anchor="t"/>
-          <a:lstStyle xmlns:a="http://schemas.openxmlformats.org/drawingml/2006/main"/>
-          <a:p xmlns:a="http://schemas.openxmlformats.org/drawingml/2006/main">
+          <a:prstGeom prst="rect">
+            <a:avLst/>
+          </a:prstGeom>
+          <a:noFill/>
+        </p:spPr>
+        <p:txBody>
+          <a:bodyPr wrap="square" lIns="0" tIns="0" rIns="0" bIns="0" anchor="t"/>
+          <a:lstStyle/>
+          <a:p>
             <a:pPr marL="342900" indent="-342900">
               <a:spcAft>
                 <a:spcPts val="600"/>
@@ -4223,131 +3807,37 @@
               <a:buChar char="•"/>
             </a:pPr>
             <a:r>
-              <a:rPr sz="1400">
-                <a:solidFill>
-                  <a:srgbClr val="FFFFFF"/>
-                </a:solidFill>
-                <a:latin typeface="Calibri"/>
-                <a:ea typeface="Calibri"/>
-                <a:cs typeface="Calibri"/>
-              </a:rPr>
-              <a:t>FastAPI accepts single documents and batches. A safety pass filters instruction-bearing text before indexing. SQLite stores document terms, claims and provenance edges. An add, edit or delete updates only that document's records. Hindi and romanized-Hindi queries expand toward English terms. Answers retain English evidence and a supporting graph path.</a:t>
-            </a:r>
-            <a:endParaRPr sz="1400"/>
-          </a:p>
-        </p:txBody>
-      </p:sp>
-      <p:sp>
-        <p:nvSpPr>
-          <p:cNvPr id="7" name="Tech card">
-            <a:extLst xmlns:a="http://schemas.openxmlformats.org/drawingml/2006/main">
-              <a:ext uri="{FF2B5EF4-FFF2-40B4-BE49-F238E27FC236}">
-                <a16:creationId xmlns:a16="http://schemas.microsoft.com/office/drawing/2014/main" id="{DB185296-33B6-46DE-A0F7-95BD16C87BB0}"/>
-              </a:ext>
-            </a:extLst>
-          </p:cNvPr>
-          <p:cNvSpPr>
-            <a:spLocks xmlns:a="http://schemas.openxmlformats.org/drawingml/2006/main" noGrp="1"/>
-          </p:cNvSpPr>
-          <p:nvPr/>
-        </p:nvSpPr>
-        <p:spPr>
-          <a:xfrm xmlns:a="http://schemas.openxmlformats.org/drawingml/2006/main">
-            <a:off x="6245352" y="1691640"/>
-            <a:ext cx="5486400" cy="2148840"/>
-          </a:xfrm>
-          <a:prstGeom xmlns:a="http://schemas.openxmlformats.org/drawingml/2006/main" prst="roundRect">
-            <a:avLst>
-              <a:gd name="adj" fmla="val 5106"/>
-            </a:avLst>
-          </a:prstGeom>
-          <a:solidFill xmlns:a="http://schemas.openxmlformats.org/drawingml/2006/main">
-            <a:srgbClr val="0B1A4A">
-              <a:alpha val="75000"/>
-            </a:srgbClr>
-          </a:solidFill>
-          <a:ln xmlns:a="http://schemas.openxmlformats.org/drawingml/2006/main" w="12700">
-            <a:solidFill>
-              <a:srgbClr val="1E5BFF"/>
-            </a:solidFill>
-            <a:prstDash val="solid"/>
-          </a:ln>
-        </p:spPr>
-      </p:sp>
-      <p:sp>
-        <p:nvSpPr>
-          <p:cNvPr id="8" name="Tech head">
-            <a:extLst xmlns:a="http://schemas.openxmlformats.org/drawingml/2006/main">
-              <a:ext uri="{FF2B5EF4-FFF2-40B4-BE49-F238E27FC236}">
-                <a16:creationId xmlns:a16="http://schemas.microsoft.com/office/drawing/2014/main" id="{8F5DB58A-8B59-436A-A212-6A67B6903198}"/>
-              </a:ext>
-            </a:extLst>
-          </p:cNvPr>
-          <p:cNvSpPr>
-            <a:spLocks xmlns:a="http://schemas.openxmlformats.org/drawingml/2006/main" noGrp="1"/>
-          </p:cNvSpPr>
-          <p:nvPr/>
-        </p:nvSpPr>
-        <p:spPr>
-          <a:xfrm xmlns:a="http://schemas.openxmlformats.org/drawingml/2006/main">
-            <a:off x="6519672" y="1874520"/>
-            <a:ext cx="4937760" cy="320040"/>
-          </a:xfrm>
-          <a:prstGeom xmlns:a="http://schemas.openxmlformats.org/drawingml/2006/main" prst="rect">
-            <a:avLst/>
-          </a:prstGeom>
-          <a:noFill xmlns:a="http://schemas.openxmlformats.org/drawingml/2006/main"/>
-        </p:spPr>
-        <p:txBody>
-          <a:bodyPr xmlns:a="http://schemas.openxmlformats.org/drawingml/2006/main" wrap="square" lIns="0" tIns="0" rIns="0" bIns="0" anchor="ctr"/>
-          <a:lstStyle xmlns:a="http://schemas.openxmlformats.org/drawingml/2006/main"/>
-          <a:p xmlns:a="http://schemas.openxmlformats.org/drawingml/2006/main">
-            <a:pPr marL="0" indent="0">
-              <a:buNone/>
-            </a:pPr>
-            <a:r>
-              <a:rPr sz="1500" b="1" spc="200">
-                <a:solidFill>
-                  <a:srgbClr val="4DA3FF"/>
-                </a:solidFill>
-                <a:latin typeface="Arial"/>
-                <a:ea typeface="Arial"/>
-                <a:cs typeface="Arial"/>
-              </a:rPr>
-              <a:t>CORE TECHNOLOGIES</a:t>
-            </a:r>
-            <a:endParaRPr sz="1500"/>
-          </a:p>
-        </p:txBody>
-      </p:sp>
-      <p:sp>
-        <p:nvSpPr>
-          <p:cNvPr id="9" name="Tech body">
-            <a:extLst xmlns:a="http://schemas.openxmlformats.org/drawingml/2006/main">
-              <a:ext uri="{FF2B5EF4-FFF2-40B4-BE49-F238E27FC236}">
-                <a16:creationId xmlns:a16="http://schemas.microsoft.com/office/drawing/2014/main" id="{75518A5F-EBAB-420F-B744-7D84ADD92F1F}"/>
-              </a:ext>
-            </a:extLst>
-          </p:cNvPr>
-          <p:cNvSpPr>
-            <a:spLocks xmlns:a="http://schemas.openxmlformats.org/drawingml/2006/main" noGrp="1"/>
-          </p:cNvSpPr>
-          <p:nvPr/>
-        </p:nvSpPr>
-        <p:spPr>
-          <a:xfrm xmlns:a="http://schemas.openxmlformats.org/drawingml/2006/main">
-            <a:off x="6519672" y="2286000"/>
-            <a:ext cx="4937760" cy="1463040"/>
-          </a:xfrm>
-          <a:prstGeom xmlns:a="http://schemas.openxmlformats.org/drawingml/2006/main" prst="rect">
-            <a:avLst/>
-          </a:prstGeom>
-          <a:noFill xmlns:a="http://schemas.openxmlformats.org/drawingml/2006/main"/>
-        </p:spPr>
-        <p:txBody>
-          <a:bodyPr xmlns:a="http://schemas.openxmlformats.org/drawingml/2006/main" wrap="square" lIns="0" tIns="0" rIns="0" bIns="0" anchor="t"/>
-          <a:lstStyle xmlns:a="http://schemas.openxmlformats.org/drawingml/2006/main"/>
-          <a:p xmlns:a="http://schemas.openxmlformats.org/drawingml/2006/main">
+              <a:rPr sz="1400" dirty="0" err="1">
+                <a:solidFill>
+                  <a:srgbClr val="FFFFFF"/>
+                </a:solidFill>
+                <a:latin typeface="Calibri"/>
+                <a:ea typeface="Calibri"/>
+                <a:cs typeface="Calibri"/>
+              </a:rPr>
+              <a:t>FastAPI</a:t>
+            </a:r>
+            <a:r>
+              <a:rPr sz="1400" dirty="0">
+                <a:solidFill>
+                  <a:srgbClr val="FFFFFF"/>
+                </a:solidFill>
+                <a:latin typeface="Calibri"/>
+                <a:ea typeface="Calibri"/>
+                <a:cs typeface="Calibri"/>
+              </a:rPr>
+              <a:t> accepts single documents and batches. </a:t>
+            </a:r>
+            <a:endParaRPr lang="en-US" sz="1400" dirty="0">
+              <a:solidFill>
+                <a:srgbClr val="FFFFFF"/>
+              </a:solidFill>
+              <a:latin typeface="Calibri"/>
+              <a:ea typeface="Calibri"/>
+              <a:cs typeface="Calibri"/>
+            </a:endParaRPr>
+          </a:p>
+          <a:p>
             <a:pPr marL="342900" indent="-342900">
               <a:spcAft>
                 <a:spcPts val="600"/>
@@ -4355,20 +3845,16 @@
               <a:buSzPct val="100000"/>
               <a:buChar char="•"/>
             </a:pPr>
-            <a:r>
-              <a:rPr sz="1400">
-                <a:solidFill>
-                  <a:srgbClr val="FFFFFF"/>
-                </a:solidFill>
-                <a:latin typeface="Calibri"/>
-                <a:ea typeface="Calibri"/>
-                <a:cs typeface="Calibri"/>
-              </a:rPr>
-              <a:t>Python + FastAPI backend</a:t>
-            </a:r>
-            <a:endParaRPr sz="1400"/>
-          </a:p>
-          <a:p xmlns:a="http://schemas.openxmlformats.org/drawingml/2006/main">
+            <a:endParaRPr lang="en-US" sz="1400" dirty="0">
+              <a:solidFill>
+                <a:srgbClr val="FFFFFF"/>
+              </a:solidFill>
+              <a:latin typeface="Calibri"/>
+              <a:ea typeface="Calibri"/>
+              <a:cs typeface="Calibri"/>
+            </a:endParaRPr>
+          </a:p>
+          <a:p>
             <a:pPr marL="342900" indent="-342900">
               <a:spcAft>
                 <a:spcPts val="600"/>
@@ -4377,19 +3863,26 @@
               <a:buChar char="•"/>
             </a:pPr>
             <a:r>
-              <a:rPr sz="1400">
-                <a:solidFill>
-                  <a:srgbClr val="FFFFFF"/>
-                </a:solidFill>
-                <a:latin typeface="Calibri"/>
-                <a:ea typeface="Calibri"/>
-                <a:cs typeface="Calibri"/>
-              </a:rPr>
-              <a:t>SQLite document and graph stores</a:t>
-            </a:r>
-            <a:endParaRPr sz="1400"/>
-          </a:p>
-          <a:p xmlns:a="http://schemas.openxmlformats.org/drawingml/2006/main">
+              <a:rPr sz="1400" dirty="0">
+                <a:solidFill>
+                  <a:srgbClr val="FFFFFF"/>
+                </a:solidFill>
+                <a:latin typeface="Calibri"/>
+                <a:ea typeface="Calibri"/>
+                <a:cs typeface="Calibri"/>
+              </a:rPr>
+              <a:t>A safety pass filters instruction-bearing text before indexing. SQLite stores document terms, claims and provenance edges.</a:t>
+            </a:r>
+            <a:endParaRPr lang="en-US" sz="1400" dirty="0">
+              <a:solidFill>
+                <a:srgbClr val="FFFFFF"/>
+              </a:solidFill>
+              <a:latin typeface="Calibri"/>
+              <a:ea typeface="Calibri"/>
+              <a:cs typeface="Calibri"/>
+            </a:endParaRPr>
+          </a:p>
+          <a:p>
             <a:pPr marL="342900" indent="-342900">
               <a:spcAft>
                 <a:spcPts val="600"/>
@@ -4397,132 +3890,13 @@
               <a:buSzPct val="100000"/>
               <a:buChar char="•"/>
             </a:pPr>
-            <a:r>
-              <a:rPr sz="1400">
-                <a:solidFill>
-                  <a:srgbClr val="FFFFFF"/>
-                </a:solidFill>
-                <a:latin typeface="Calibri"/>
-                <a:ea typeface="Calibri"/>
-                <a:cs typeface="Calibri"/>
-              </a:rPr>
-              <a:t>React + TypeScript + Vite frontend</a:t>
-            </a:r>
-            <a:endParaRPr sz="1400"/>
-          </a:p>
-        </p:txBody>
-      </p:sp>
-      <p:sp>
-        <p:nvSpPr>
-          <p:cNvPr id="10" name="Unique card">
-            <a:extLst xmlns:a="http://schemas.openxmlformats.org/drawingml/2006/main">
-              <a:ext uri="{FF2B5EF4-FFF2-40B4-BE49-F238E27FC236}">
-                <a16:creationId xmlns:a16="http://schemas.microsoft.com/office/drawing/2014/main" id="{119570D4-010A-4676-A07E-20B7C27D5CD3}"/>
-              </a:ext>
-            </a:extLst>
-          </p:cNvPr>
-          <p:cNvSpPr>
-            <a:spLocks xmlns:a="http://schemas.openxmlformats.org/drawingml/2006/main" noGrp="1"/>
-          </p:cNvSpPr>
-          <p:nvPr/>
-        </p:nvSpPr>
-        <p:spPr>
-          <a:xfrm xmlns:a="http://schemas.openxmlformats.org/drawingml/2006/main">
-            <a:off x="6245352" y="4023360"/>
-            <a:ext cx="5486400" cy="2103120"/>
-          </a:xfrm>
-          <a:prstGeom xmlns:a="http://schemas.openxmlformats.org/drawingml/2006/main" prst="roundRect">
-            <a:avLst>
-              <a:gd name="adj" fmla="val 5217"/>
-            </a:avLst>
-          </a:prstGeom>
-          <a:solidFill xmlns:a="http://schemas.openxmlformats.org/drawingml/2006/main">
-            <a:srgbClr val="0B1A4A">
-              <a:alpha val="75000"/>
-            </a:srgbClr>
-          </a:solidFill>
-          <a:ln xmlns:a="http://schemas.openxmlformats.org/drawingml/2006/main" w="12700">
-            <a:solidFill>
-              <a:srgbClr val="1E5BFF"/>
-            </a:solidFill>
-            <a:prstDash val="solid"/>
-          </a:ln>
-        </p:spPr>
-      </p:sp>
-      <p:sp>
-        <p:nvSpPr>
-          <p:cNvPr id="11" name="Unique head">
-            <a:extLst xmlns:a="http://schemas.openxmlformats.org/drawingml/2006/main">
-              <a:ext uri="{FF2B5EF4-FFF2-40B4-BE49-F238E27FC236}">
-                <a16:creationId xmlns:a16="http://schemas.microsoft.com/office/drawing/2014/main" id="{366309E2-2E33-47D8-889B-348306AECE79}"/>
-              </a:ext>
-            </a:extLst>
-          </p:cNvPr>
-          <p:cNvSpPr>
-            <a:spLocks xmlns:a="http://schemas.openxmlformats.org/drawingml/2006/main" noGrp="1"/>
-          </p:cNvSpPr>
-          <p:nvPr/>
-        </p:nvSpPr>
-        <p:spPr>
-          <a:xfrm xmlns:a="http://schemas.openxmlformats.org/drawingml/2006/main">
-            <a:off x="6519672" y="4206240"/>
-            <a:ext cx="4937760" cy="320040"/>
-          </a:xfrm>
-          <a:prstGeom xmlns:a="http://schemas.openxmlformats.org/drawingml/2006/main" prst="rect">
-            <a:avLst/>
-          </a:prstGeom>
-          <a:noFill xmlns:a="http://schemas.openxmlformats.org/drawingml/2006/main"/>
-        </p:spPr>
-        <p:txBody>
-          <a:bodyPr xmlns:a="http://schemas.openxmlformats.org/drawingml/2006/main" wrap="square" lIns="0" tIns="0" rIns="0" bIns="0" anchor="ctr"/>
-          <a:lstStyle xmlns:a="http://schemas.openxmlformats.org/drawingml/2006/main"/>
-          <a:p xmlns:a="http://schemas.openxmlformats.org/drawingml/2006/main">
-            <a:pPr marL="0" indent="0">
-              <a:buNone/>
-            </a:pPr>
-            <a:r>
-              <a:rPr sz="1500" b="1" spc="200">
-                <a:solidFill>
-                  <a:srgbClr val="4DA3FF"/>
-                </a:solidFill>
-                <a:latin typeface="Arial"/>
-                <a:ea typeface="Arial"/>
-                <a:cs typeface="Arial"/>
-              </a:rPr>
-              <a:t>UNIQUE POINTS</a:t>
-            </a:r>
-            <a:endParaRPr sz="1500"/>
-          </a:p>
-        </p:txBody>
-      </p:sp>
-      <p:sp>
-        <p:nvSpPr>
-          <p:cNvPr id="12" name="Unique body">
-            <a:extLst xmlns:a="http://schemas.openxmlformats.org/drawingml/2006/main">
-              <a:ext uri="{FF2B5EF4-FFF2-40B4-BE49-F238E27FC236}">
-                <a16:creationId xmlns:a16="http://schemas.microsoft.com/office/drawing/2014/main" id="{F708072A-57CF-4526-BB7A-9C3EBD8E26BD}"/>
-              </a:ext>
-            </a:extLst>
-          </p:cNvPr>
-          <p:cNvSpPr>
-            <a:spLocks xmlns:a="http://schemas.openxmlformats.org/drawingml/2006/main" noGrp="1"/>
-          </p:cNvSpPr>
-          <p:nvPr/>
-        </p:nvSpPr>
-        <p:spPr>
-          <a:xfrm xmlns:a="http://schemas.openxmlformats.org/drawingml/2006/main">
-            <a:off x="6519672" y="4617720"/>
-            <a:ext cx="4937760" cy="1371600"/>
-          </a:xfrm>
-          <a:prstGeom xmlns:a="http://schemas.openxmlformats.org/drawingml/2006/main" prst="rect">
-            <a:avLst/>
-          </a:prstGeom>
-          <a:noFill xmlns:a="http://schemas.openxmlformats.org/drawingml/2006/main"/>
-        </p:spPr>
-        <p:txBody>
-          <a:bodyPr xmlns:a="http://schemas.openxmlformats.org/drawingml/2006/main" wrap="square" lIns="0" tIns="0" rIns="0" bIns="0" anchor="t"/>
-          <a:lstStyle xmlns:a="http://schemas.openxmlformats.org/drawingml/2006/main"/>
-          <a:p xmlns:a="http://schemas.openxmlformats.org/drawingml/2006/main">
+            <a:endParaRPr lang="en-US" sz="1400" dirty="0">
+              <a:solidFill>
+                <a:srgbClr val="FFFFFF"/>
+              </a:solidFill>
+            </a:endParaRPr>
+          </a:p>
+          <a:p>
             <a:pPr marL="342900" indent="-342900">
               <a:spcAft>
                 <a:spcPts val="600"/>
@@ -4531,19 +3905,31 @@
               <a:buChar char="•"/>
             </a:pPr>
             <a:r>
-              <a:rPr sz="1400">
-                <a:solidFill>
-                  <a:srgbClr val="FFFFFF"/>
-                </a:solidFill>
-                <a:latin typeface="Calibri"/>
-                <a:ea typeface="Calibri"/>
-                <a:cs typeface="Calibri"/>
-              </a:rPr>
-              <a:t>Each document updates without a full rebuild.</a:t>
-            </a:r>
-            <a:endParaRPr sz="1400"/>
-          </a:p>
-          <a:p xmlns:a="http://schemas.openxmlformats.org/drawingml/2006/main">
+              <a:rPr lang="en-US" sz="1400" dirty="0">
+                <a:solidFill>
+                  <a:srgbClr val="FFFFFF"/>
+                </a:solidFill>
+              </a:rPr>
+              <a:t>An add, edit or delete updates only that document's records. Hindi and </a:t>
+            </a:r>
+            <a:r>
+              <a:rPr lang="en-US" sz="1400" dirty="0" err="1">
+                <a:solidFill>
+                  <a:srgbClr val="FFFFFF"/>
+                </a:solidFill>
+              </a:rPr>
+              <a:t>romanized</a:t>
+            </a:r>
+            <a:r>
+              <a:rPr lang="en-US" sz="1400" dirty="0">
+                <a:solidFill>
+                  <a:srgbClr val="FFFFFF"/>
+                </a:solidFill>
+              </a:rPr>
+              <a:t>-Hindi queries expand toward English terms. </a:t>
+            </a:r>
+          </a:p>
+          <a:p>
             <a:pPr marL="342900" indent="-342900">
               <a:spcAft>
                 <a:spcPts val="600"/>
@@ -4551,6 +3937,161 @@
               <a:buSzPct val="100000"/>
               <a:buChar char="•"/>
             </a:pPr>
+            <a:endParaRPr lang="en-US" sz="1400" dirty="0">
+              <a:solidFill>
+                <a:srgbClr val="FFFFFF"/>
+              </a:solidFill>
+            </a:endParaRPr>
+          </a:p>
+          <a:p>
+            <a:pPr marL="342900" indent="-342900">
+              <a:spcAft>
+                <a:spcPts val="600"/>
+              </a:spcAft>
+              <a:buSzPct val="100000"/>
+              <a:buChar char="•"/>
+            </a:pPr>
+            <a:r>
+              <a:rPr lang="en-US" sz="1400" dirty="0">
+                <a:solidFill>
+                  <a:srgbClr val="FFFFFF"/>
+                </a:solidFill>
+              </a:rPr>
+              <a:t>Answers retain English evidence and a supporting graph path</a:t>
+            </a:r>
+            <a:r>
+              <a:rPr sz="1400" dirty="0">
+                <a:solidFill>
+                  <a:srgbClr val="FFFFFF"/>
+                </a:solidFill>
+                <a:latin typeface="Calibri"/>
+                <a:ea typeface="Calibri"/>
+                <a:cs typeface="Calibri"/>
+              </a:rPr>
+              <a:t>.</a:t>
+            </a:r>
+            <a:endParaRPr sz="1400" dirty="0"/>
+          </a:p>
+        </p:txBody>
+      </p:sp>
+      <p:sp>
+        <p:nvSpPr>
+          <p:cNvPr id="7" name="Tech card">
+            <a:extLst>
+              <a:ext uri="{FF2B5EF4-FFF2-40B4-BE49-F238E27FC236}">
+                <a16:creationId xmlns:a16="http://schemas.microsoft.com/office/drawing/2014/main" id="{DB185296-33B6-46DE-A0F7-95BD16C87BB0}"/>
+              </a:ext>
+            </a:extLst>
+          </p:cNvPr>
+          <p:cNvSpPr>
+            <a:spLocks noGrp="1"/>
+          </p:cNvSpPr>
+          <p:nvPr/>
+        </p:nvSpPr>
+        <p:spPr>
+          <a:xfrm>
+            <a:off x="6245352" y="1691640"/>
+            <a:ext cx="5486400" cy="2148840"/>
+          </a:xfrm>
+          <a:prstGeom prst="roundRect">
+            <a:avLst>
+              <a:gd name="adj" fmla="val 5106"/>
+            </a:avLst>
+          </a:prstGeom>
+          <a:solidFill>
+            <a:srgbClr val="0B1A4A">
+              <a:alpha val="75000"/>
+            </a:srgbClr>
+          </a:solidFill>
+          <a:ln w="12700">
+            <a:solidFill>
+              <a:srgbClr val="1E5BFF"/>
+            </a:solidFill>
+            <a:prstDash val="solid"/>
+          </a:ln>
+        </p:spPr>
+      </p:sp>
+      <p:sp>
+        <p:nvSpPr>
+          <p:cNvPr id="8" name="Tech head">
+            <a:extLst>
+              <a:ext uri="{FF2B5EF4-FFF2-40B4-BE49-F238E27FC236}">
+                <a16:creationId xmlns:a16="http://schemas.microsoft.com/office/drawing/2014/main" id="{8F5DB58A-8B59-436A-A212-6A67B6903198}"/>
+              </a:ext>
+            </a:extLst>
+          </p:cNvPr>
+          <p:cNvSpPr>
+            <a:spLocks noGrp="1"/>
+          </p:cNvSpPr>
+          <p:nvPr/>
+        </p:nvSpPr>
+        <p:spPr>
+          <a:xfrm>
+            <a:off x="6519672" y="1874520"/>
+            <a:ext cx="4937760" cy="320040"/>
+          </a:xfrm>
+          <a:prstGeom prst="rect">
+            <a:avLst/>
+          </a:prstGeom>
+          <a:noFill/>
+        </p:spPr>
+        <p:txBody>
+          <a:bodyPr wrap="square" lIns="0" tIns="0" rIns="0" bIns="0" anchor="ctr"/>
+          <a:lstStyle/>
+          <a:p>
+            <a:pPr marL="0" indent="0">
+              <a:buNone/>
+            </a:pPr>
+            <a:r>
+              <a:rPr sz="1500" b="1" spc="200">
+                <a:solidFill>
+                  <a:srgbClr val="4DA3FF"/>
+                </a:solidFill>
+                <a:latin typeface="Arial"/>
+                <a:ea typeface="Arial"/>
+                <a:cs typeface="Arial"/>
+              </a:rPr>
+              <a:t>CORE TECHNOLOGIES</a:t>
+            </a:r>
+            <a:endParaRPr sz="1500"/>
+          </a:p>
+        </p:txBody>
+      </p:sp>
+      <p:sp>
+        <p:nvSpPr>
+          <p:cNvPr id="9" name="Tech body">
+            <a:extLst>
+              <a:ext uri="{FF2B5EF4-FFF2-40B4-BE49-F238E27FC236}">
+                <a16:creationId xmlns:a16="http://schemas.microsoft.com/office/drawing/2014/main" id="{75518A5F-EBAB-420F-B744-7D84ADD92F1F}"/>
+              </a:ext>
+            </a:extLst>
+          </p:cNvPr>
+          <p:cNvSpPr>
+            <a:spLocks noGrp="1"/>
+          </p:cNvSpPr>
+          <p:nvPr/>
+        </p:nvSpPr>
+        <p:spPr>
+          <a:xfrm>
+            <a:off x="6519672" y="2286000"/>
+            <a:ext cx="4937760" cy="1463040"/>
+          </a:xfrm>
+          <a:prstGeom prst="rect">
+            <a:avLst/>
+          </a:prstGeom>
+          <a:noFill/>
+        </p:spPr>
+        <p:txBody>
+          <a:bodyPr wrap="square" lIns="0" tIns="0" rIns="0" bIns="0" anchor="t"/>
+          <a:lstStyle/>
+          <a:p>
+            <a:pPr marL="342900" indent="-342900">
+              <a:spcAft>
+                <a:spcPts val="600"/>
+              </a:spcAft>
+              <a:buSzPct val="100000"/>
+              <a:buChar char="•"/>
+            </a:pPr>
             <a:r>
               <a:rPr sz="1400">
                 <a:solidFill>
@@ -4560,6 +4101,202 @@
                 <a:ea typeface="Calibri"/>
                 <a:cs typeface="Calibri"/>
               </a:rPr>
+              <a:t>Python + FastAPI backend</a:t>
+            </a:r>
+            <a:endParaRPr sz="1400"/>
+          </a:p>
+          <a:p>
+            <a:pPr marL="342900" indent="-342900">
+              <a:spcAft>
+                <a:spcPts val="600"/>
+              </a:spcAft>
+              <a:buSzPct val="100000"/>
+              <a:buChar char="•"/>
+            </a:pPr>
+            <a:r>
+              <a:rPr sz="1400">
+                <a:solidFill>
+                  <a:srgbClr val="FFFFFF"/>
+                </a:solidFill>
+                <a:latin typeface="Calibri"/>
+                <a:ea typeface="Calibri"/>
+                <a:cs typeface="Calibri"/>
+              </a:rPr>
+              <a:t>SQLite document and graph stores</a:t>
+            </a:r>
+            <a:endParaRPr sz="1400"/>
+          </a:p>
+          <a:p>
+            <a:pPr marL="342900" indent="-342900">
+              <a:spcAft>
+                <a:spcPts val="600"/>
+              </a:spcAft>
+              <a:buSzPct val="100000"/>
+              <a:buChar char="•"/>
+            </a:pPr>
+            <a:r>
+              <a:rPr sz="1400">
+                <a:solidFill>
+                  <a:srgbClr val="FFFFFF"/>
+                </a:solidFill>
+                <a:latin typeface="Calibri"/>
+                <a:ea typeface="Calibri"/>
+                <a:cs typeface="Calibri"/>
+              </a:rPr>
+              <a:t>React + TypeScript + Vite frontend</a:t>
+            </a:r>
+            <a:endParaRPr sz="1400"/>
+          </a:p>
+        </p:txBody>
+      </p:sp>
+      <p:sp>
+        <p:nvSpPr>
+          <p:cNvPr id="10" name="Unique card">
+            <a:extLst>
+              <a:ext uri="{FF2B5EF4-FFF2-40B4-BE49-F238E27FC236}">
+                <a16:creationId xmlns:a16="http://schemas.microsoft.com/office/drawing/2014/main" id="{119570D4-010A-4676-A07E-20B7C27D5CD3}"/>
+              </a:ext>
+            </a:extLst>
+          </p:cNvPr>
+          <p:cNvSpPr>
+            <a:spLocks noGrp="1"/>
+          </p:cNvSpPr>
+          <p:nvPr/>
+        </p:nvSpPr>
+        <p:spPr>
+          <a:xfrm>
+            <a:off x="6245352" y="4023360"/>
+            <a:ext cx="5486400" cy="2103120"/>
+          </a:xfrm>
+          <a:prstGeom prst="roundRect">
+            <a:avLst>
+              <a:gd name="adj" fmla="val 5217"/>
+            </a:avLst>
+          </a:prstGeom>
+          <a:solidFill>
+            <a:srgbClr val="0B1A4A">
+              <a:alpha val="75000"/>
+            </a:srgbClr>
+          </a:solidFill>
+          <a:ln w="12700">
+            <a:solidFill>
+              <a:srgbClr val="1E5BFF"/>
+            </a:solidFill>
+            <a:prstDash val="solid"/>
+          </a:ln>
+        </p:spPr>
+      </p:sp>
+      <p:sp>
+        <p:nvSpPr>
+          <p:cNvPr id="11" name="Unique head">
+            <a:extLst>
+              <a:ext uri="{FF2B5EF4-FFF2-40B4-BE49-F238E27FC236}">
+                <a16:creationId xmlns:a16="http://schemas.microsoft.com/office/drawing/2014/main" id="{366309E2-2E33-47D8-889B-348306AECE79}"/>
+              </a:ext>
+            </a:extLst>
+          </p:cNvPr>
+          <p:cNvSpPr>
+            <a:spLocks noGrp="1"/>
+          </p:cNvSpPr>
+          <p:nvPr/>
+        </p:nvSpPr>
+        <p:spPr>
+          <a:xfrm>
+            <a:off x="6519672" y="4206240"/>
+            <a:ext cx="4937760" cy="320040"/>
+          </a:xfrm>
+          <a:prstGeom prst="rect">
+            <a:avLst/>
+          </a:prstGeom>
+          <a:noFill/>
+        </p:spPr>
+        <p:txBody>
+          <a:bodyPr wrap="square" lIns="0" tIns="0" rIns="0" bIns="0" anchor="ctr"/>
+          <a:lstStyle/>
+          <a:p>
+            <a:pPr marL="0" indent="0">
+              <a:buNone/>
+            </a:pPr>
+            <a:r>
+              <a:rPr sz="1500" b="1" spc="200">
+                <a:solidFill>
+                  <a:srgbClr val="4DA3FF"/>
+                </a:solidFill>
+                <a:latin typeface="Arial"/>
+                <a:ea typeface="Arial"/>
+                <a:cs typeface="Arial"/>
+              </a:rPr>
+              <a:t>UNIQUE POINTS</a:t>
+            </a:r>
+            <a:endParaRPr sz="1500"/>
+          </a:p>
+        </p:txBody>
+      </p:sp>
+      <p:sp>
+        <p:nvSpPr>
+          <p:cNvPr id="12" name="Unique body">
+            <a:extLst>
+              <a:ext uri="{FF2B5EF4-FFF2-40B4-BE49-F238E27FC236}">
+                <a16:creationId xmlns:a16="http://schemas.microsoft.com/office/drawing/2014/main" id="{F708072A-57CF-4526-BB7A-9C3EBD8E26BD}"/>
+              </a:ext>
+            </a:extLst>
+          </p:cNvPr>
+          <p:cNvSpPr>
+            <a:spLocks noGrp="1"/>
+          </p:cNvSpPr>
+          <p:nvPr/>
+        </p:nvSpPr>
+        <p:spPr>
+          <a:xfrm>
+            <a:off x="6519672" y="4617720"/>
+            <a:ext cx="4937760" cy="1371600"/>
+          </a:xfrm>
+          <a:prstGeom prst="rect">
+            <a:avLst/>
+          </a:prstGeom>
+          <a:noFill/>
+        </p:spPr>
+        <p:txBody>
+          <a:bodyPr wrap="square" lIns="0" tIns="0" rIns="0" bIns="0" anchor="t"/>
+          <a:lstStyle/>
+          <a:p>
+            <a:pPr marL="342900" indent="-342900">
+              <a:spcAft>
+                <a:spcPts val="600"/>
+              </a:spcAft>
+              <a:buSzPct val="100000"/>
+              <a:buChar char="•"/>
+            </a:pPr>
+            <a:r>
+              <a:rPr sz="1400">
+                <a:solidFill>
+                  <a:srgbClr val="FFFFFF"/>
+                </a:solidFill>
+                <a:latin typeface="Calibri"/>
+                <a:ea typeface="Calibri"/>
+                <a:cs typeface="Calibri"/>
+              </a:rPr>
+              <a:t>Each document updates without a full rebuild.</a:t>
+            </a:r>
+            <a:endParaRPr sz="1400"/>
+          </a:p>
+          <a:p>
+            <a:pPr marL="342900" indent="-342900">
+              <a:spcAft>
+                <a:spcPts val="600"/>
+              </a:spcAft>
+              <a:buSzPct val="100000"/>
+              <a:buChar char="•"/>
+            </a:pPr>
+            <a:r>
+              <a:rPr sz="1400">
+                <a:solidFill>
+                  <a:srgbClr val="FFFFFF"/>
+                </a:solidFill>
+                <a:latin typeface="Calibri"/>
+                <a:ea typeface="Calibri"/>
+                <a:cs typeface="Calibri"/>
+              </a:rPr>
               <a:t>Conflicts remain visible with source paths.</a:t>
             </a:r>
             <a:endParaRPr sz="1400"/>
@@ -4569,31 +4306,31 @@
       <p:sp>
         <p:nvSpPr>
           <p:cNvPr id="25" name="Slide Number Placeholder 0">
-            <a:extLst xmlns:a="http://schemas.openxmlformats.org/drawingml/2006/main">
+            <a:extLst>
               <a:ext uri="{FF2B5EF4-FFF2-40B4-BE49-F238E27FC236}">
                 <a16:creationId xmlns:a16="http://schemas.microsoft.com/office/drawing/2014/main" id="{7DC208FD-50B4-4737-A539-D41C018E9AB2}"/>
               </a:ext>
             </a:extLst>
           </p:cNvPr>
           <p:cNvSpPr>
-            <a:spLocks xmlns:a="http://schemas.openxmlformats.org/drawingml/2006/main" noGrp="1"/>
+            <a:spLocks noGrp="1"/>
           </p:cNvSpPr>
           <p:nvPr>
             <p:ph type="sldNum" idx="4294967295"/>
           </p:nvPr>
         </p:nvSpPr>
         <p:spPr>
-          <a:xfrm xmlns:a="http://schemas.openxmlformats.org/drawingml/2006/main">
+          <a:xfrm>
             <a:off x="11155680" y="6428232"/>
             <a:ext cx="576072" cy="274320"/>
           </a:xfrm>
-          <a:prstGeom xmlns:a="http://schemas.openxmlformats.org/drawingml/2006/main" prst="rect">
-            <a:avLst/>
-          </a:prstGeom>
-        </p:spPr>
-        <p:txBody>
-          <a:bodyPr xmlns:a="http://schemas.openxmlformats.org/drawingml/2006/main"/>
-          <a:lstStyle xmlns:a="http://schemas.openxmlformats.org/drawingml/2006/main">
+          <a:prstGeom prst="rect">
+            <a:avLst/>
+          </a:prstGeom>
+        </p:spPr>
+        <p:txBody>
+          <a:bodyPr/>
+          <a:lstStyle>
             <a:lvl1pPr>
               <a:buNone/>
               <a:defRPr sz="1000">
@@ -4606,7 +4343,7 @@
               </a:defRPr>
             </a:lvl1pPr>
           </a:lstStyle>
-          <a:p xmlns:a="http://schemas.openxmlformats.org/drawingml/2006/main">
+          <a:p>
             <a:pPr algn="r">
               <a:buNone/>
             </a:pPr>
@@ -4625,11 +4362,14 @@
       </p:ext>
     </p:extLst>
   </p:cSld>
+  <p:clrMapOvr>
+    <a:masterClrMapping/>
+  </p:clrMapOvr>
 </p:sld>
 </file>
 
 <file path=ppt/slides/slide4.xml><?xml version="1.0" encoding="utf-8"?>
-<p:sld xmlns:p="http://schemas.openxmlformats.org/presentationml/2006/main">
+<p:sld xmlns:a="http://schemas.openxmlformats.org/drawingml/2006/main" xmlns:r="http://schemas.openxmlformats.org/officeDocument/2006/relationships" xmlns:p="http://schemas.openxmlformats.org/presentationml/2006/main">
   <p:cSld>
     <p:spTree>
       <p:nvGrpSpPr>
@@ -4638,36 +4378,41 @@
         <p:nvPr/>
       </p:nvGrpSpPr>
       <p:grpSpPr>
-        <a:xfrm xmlns:a="http://schemas.openxmlformats.org/drawingml/2006/main"/>
+        <a:xfrm>
+          <a:off x="0" y="0"/>
+          <a:ext cx="0" cy="0"/>
+          <a:chOff x="0" y="0"/>
+          <a:chExt cx="0" cy="0"/>
+        </a:xfrm>
       </p:grpSpPr>
       <p:sp>
         <p:nvSpPr>
           <p:cNvPr id="2" name="Text 0">
-            <a:extLst xmlns:a="http://schemas.openxmlformats.org/drawingml/2006/main">
+            <a:extLst>
               <a:ext uri="{FF2B5EF4-FFF2-40B4-BE49-F238E27FC236}">
                 <a16:creationId xmlns:a16="http://schemas.microsoft.com/office/drawing/2014/main" id="{497A7651-D794-4689-A1CF-0A89E19DD4B9}"/>
               </a:ext>
             </a:extLst>
           </p:cNvPr>
           <p:cNvSpPr>
-            <a:spLocks xmlns:a="http://schemas.openxmlformats.org/drawingml/2006/main" noGrp="1"/>
-          </p:cNvSpPr>
-          <p:nvPr/>
-        </p:nvSpPr>
-        <p:spPr>
-          <a:xfrm xmlns:a="http://schemas.openxmlformats.org/drawingml/2006/main">
+            <a:spLocks noGrp="1"/>
+          </p:cNvSpPr>
+          <p:nvPr/>
+        </p:nvSpPr>
+        <p:spPr>
+          <a:xfrm>
             <a:off x="457200" y="960120"/>
             <a:ext cx="11274552" cy="731520"/>
           </a:xfrm>
-          <a:prstGeom xmlns:a="http://schemas.openxmlformats.org/drawingml/2006/main" prst="rect">
-            <a:avLst/>
-          </a:prstGeom>
-          <a:noFill xmlns:a="http://schemas.openxmlformats.org/drawingml/2006/main"/>
-        </p:spPr>
-        <p:txBody>
-          <a:bodyPr xmlns:a="http://schemas.openxmlformats.org/drawingml/2006/main" wrap="square" lIns="0" tIns="0" rIns="0" bIns="0" anchor="ctr"/>
-          <a:lstStyle xmlns:a="http://schemas.openxmlformats.org/drawingml/2006/main"/>
-          <a:p xmlns:a="http://schemas.openxmlformats.org/drawingml/2006/main">
+          <a:prstGeom prst="rect">
+            <a:avLst/>
+          </a:prstGeom>
+          <a:noFill/>
+        </p:spPr>
+        <p:txBody>
+          <a:bodyPr wrap="square" lIns="0" tIns="0" rIns="0" bIns="0" anchor="ctr"/>
+          <a:lstStyle/>
+          <a:p>
             <a:pPr marL="0" indent="0">
               <a:buNone/>
             </a:pPr>
@@ -4689,31 +4434,31 @@
       <p:sp>
         <p:nvSpPr>
           <p:cNvPr id="3" name="Team tag">
-            <a:extLst xmlns:a="http://schemas.openxmlformats.org/drawingml/2006/main">
+            <a:extLst>
               <a:ext uri="{FF2B5EF4-FFF2-40B4-BE49-F238E27FC236}">
                 <a16:creationId xmlns:a16="http://schemas.microsoft.com/office/drawing/2014/main" id="{C14B8D7F-7864-4A41-8C40-80AF0B50E91F}"/>
               </a:ext>
             </a:extLst>
           </p:cNvPr>
           <p:cNvSpPr>
-            <a:spLocks xmlns:a="http://schemas.openxmlformats.org/drawingml/2006/main" noGrp="1"/>
-          </p:cNvSpPr>
-          <p:nvPr/>
-        </p:nvSpPr>
-        <p:spPr>
-          <a:xfrm xmlns:a="http://schemas.openxmlformats.org/drawingml/2006/main">
+            <a:spLocks noGrp="1"/>
+          </p:cNvSpPr>
+          <p:nvPr/>
+        </p:nvSpPr>
+        <p:spPr>
+          <a:xfrm>
             <a:off x="8503920" y="1097280"/>
             <a:ext cx="3227832" cy="320040"/>
           </a:xfrm>
-          <a:prstGeom xmlns:a="http://schemas.openxmlformats.org/drawingml/2006/main" prst="rect">
-            <a:avLst/>
-          </a:prstGeom>
-          <a:noFill xmlns:a="http://schemas.openxmlformats.org/drawingml/2006/main"/>
-        </p:spPr>
-        <p:txBody>
-          <a:bodyPr xmlns:a="http://schemas.openxmlformats.org/drawingml/2006/main" wrap="square" lIns="0" tIns="0" rIns="0" bIns="0" anchor="ctr"/>
-          <a:lstStyle xmlns:a="http://schemas.openxmlformats.org/drawingml/2006/main"/>
-          <a:p xmlns:a="http://schemas.openxmlformats.org/drawingml/2006/main">
+          <a:prstGeom prst="rect">
+            <a:avLst/>
+          </a:prstGeom>
+          <a:noFill/>
+        </p:spPr>
+        <p:txBody>
+          <a:bodyPr wrap="square" lIns="0" tIns="0" rIns="0" bIns="0" anchor="ctr"/>
+          <a:lstStyle/>
+          <a:p>
             <a:pPr marL="0" indent="0" algn="r">
               <a:buNone/>
             </a:pPr>
@@ -4735,33 +4480,33 @@
       <p:sp>
         <p:nvSpPr>
           <p:cNvPr id="4" name="UI card">
-            <a:extLst xmlns:a="http://schemas.openxmlformats.org/drawingml/2006/main">
+            <a:extLst>
               <a:ext uri="{FF2B5EF4-FFF2-40B4-BE49-F238E27FC236}">
                 <a16:creationId xmlns:a16="http://schemas.microsoft.com/office/drawing/2014/main" id="{68B4CBFD-25E4-4BD9-B969-4079D12F10F0}"/>
               </a:ext>
             </a:extLst>
           </p:cNvPr>
           <p:cNvSpPr>
-            <a:spLocks xmlns:a="http://schemas.openxmlformats.org/drawingml/2006/main" noGrp="1"/>
-          </p:cNvSpPr>
-          <p:nvPr/>
-        </p:nvSpPr>
-        <p:spPr>
-          <a:xfrm xmlns:a="http://schemas.openxmlformats.org/drawingml/2006/main">
+            <a:spLocks noGrp="1"/>
+          </p:cNvSpPr>
+          <p:nvPr/>
+        </p:nvSpPr>
+        <p:spPr>
+          <a:xfrm>
             <a:off x="457200" y="1691640"/>
             <a:ext cx="3657600" cy="4434840"/>
           </a:xfrm>
-          <a:prstGeom xmlns:a="http://schemas.openxmlformats.org/drawingml/2006/main" prst="roundRect">
+          <a:prstGeom prst="roundRect">
             <a:avLst>
               <a:gd name="adj" fmla="val 3000"/>
             </a:avLst>
           </a:prstGeom>
-          <a:solidFill xmlns:a="http://schemas.openxmlformats.org/drawingml/2006/main">
+          <a:solidFill>
             <a:srgbClr val="0B1A4A">
               <a:alpha val="75000"/>
             </a:srgbClr>
           </a:solidFill>
-          <a:ln xmlns:a="http://schemas.openxmlformats.org/drawingml/2006/main" w="12700">
+          <a:ln w="12700">
             <a:solidFill>
               <a:srgbClr val="1E5BFF"/>
             </a:solidFill>
@@ -4772,31 +4517,31 @@
       <p:sp>
         <p:nvSpPr>
           <p:cNvPr id="5" name="UI head">
-            <a:extLst xmlns:a="http://schemas.openxmlformats.org/drawingml/2006/main">
+            <a:extLst>
               <a:ext uri="{FF2B5EF4-FFF2-40B4-BE49-F238E27FC236}">
                 <a16:creationId xmlns:a16="http://schemas.microsoft.com/office/drawing/2014/main" id="{51494179-AEC6-41B4-8AA7-741891029A6A}"/>
               </a:ext>
             </a:extLst>
           </p:cNvPr>
           <p:cNvSpPr>
-            <a:spLocks xmlns:a="http://schemas.openxmlformats.org/drawingml/2006/main" noGrp="1"/>
-          </p:cNvSpPr>
-          <p:nvPr/>
-        </p:nvSpPr>
-        <p:spPr>
-          <a:xfrm xmlns:a="http://schemas.openxmlformats.org/drawingml/2006/main">
+            <a:spLocks noGrp="1"/>
+          </p:cNvSpPr>
+          <p:nvPr/>
+        </p:nvSpPr>
+        <p:spPr>
+          <a:xfrm>
             <a:off x="731520" y="1874520"/>
             <a:ext cx="3108960" cy="320040"/>
           </a:xfrm>
-          <a:prstGeom xmlns:a="http://schemas.openxmlformats.org/drawingml/2006/main" prst="rect">
-            <a:avLst/>
-          </a:prstGeom>
-          <a:noFill xmlns:a="http://schemas.openxmlformats.org/drawingml/2006/main"/>
-        </p:spPr>
-        <p:txBody>
-          <a:bodyPr xmlns:a="http://schemas.openxmlformats.org/drawingml/2006/main" wrap="square" lIns="0" tIns="0" rIns="0" bIns="0" anchor="ctr"/>
-          <a:lstStyle xmlns:a="http://schemas.openxmlformats.org/drawingml/2006/main"/>
-          <a:p xmlns:a="http://schemas.openxmlformats.org/drawingml/2006/main">
+          <a:prstGeom prst="rect">
+            <a:avLst/>
+          </a:prstGeom>
+          <a:noFill/>
+        </p:spPr>
+        <p:txBody>
+          <a:bodyPr wrap="square" lIns="0" tIns="0" rIns="0" bIns="0" anchor="ctr"/>
+          <a:lstStyle/>
+          <a:p>
             <a:pPr marL="0" indent="0">
               <a:buNone/>
             </a:pPr>
@@ -4818,31 +4563,31 @@
       <p:sp>
         <p:nvSpPr>
           <p:cNvPr id="6" name="UI body">
-            <a:extLst xmlns:a="http://schemas.openxmlformats.org/drawingml/2006/main">
+            <a:extLst>
               <a:ext uri="{FF2B5EF4-FFF2-40B4-BE49-F238E27FC236}">
                 <a16:creationId xmlns:a16="http://schemas.microsoft.com/office/drawing/2014/main" id="{E4E0A486-FE0C-4F48-9FB5-84781AAB55DB}"/>
               </a:ext>
             </a:extLst>
           </p:cNvPr>
           <p:cNvSpPr>
-            <a:spLocks xmlns:a="http://schemas.openxmlformats.org/drawingml/2006/main" noGrp="1"/>
-          </p:cNvSpPr>
-          <p:nvPr/>
-        </p:nvSpPr>
-        <p:spPr>
-          <a:xfrm xmlns:a="http://schemas.openxmlformats.org/drawingml/2006/main">
+            <a:spLocks noGrp="1"/>
+          </p:cNvSpPr>
+          <p:nvPr/>
+        </p:nvSpPr>
+        <p:spPr>
+          <a:xfrm>
             <a:off x="731520" y="2286000"/>
             <a:ext cx="3108960" cy="3657600"/>
           </a:xfrm>
-          <a:prstGeom xmlns:a="http://schemas.openxmlformats.org/drawingml/2006/main" prst="rect">
-            <a:avLst/>
-          </a:prstGeom>
-          <a:noFill xmlns:a="http://schemas.openxmlformats.org/drawingml/2006/main"/>
-        </p:spPr>
-        <p:txBody>
-          <a:bodyPr xmlns:a="http://schemas.openxmlformats.org/drawingml/2006/main" wrap="square" lIns="0" tIns="0" rIns="0" bIns="0" anchor="t"/>
-          <a:lstStyle xmlns:a="http://schemas.openxmlformats.org/drawingml/2006/main"/>
-          <a:p xmlns:a="http://schemas.openxmlformats.org/drawingml/2006/main">
+          <a:prstGeom prst="rect">
+            <a:avLst/>
+          </a:prstGeom>
+          <a:noFill/>
+        </p:spPr>
+        <p:txBody>
+          <a:bodyPr wrap="square" lIns="0" tIns="0" rIns="0" bIns="0" anchor="t"/>
+          <a:lstStyle/>
+          <a:p>
             <a:pPr marL="342900" indent="-342900">
               <a:spcAft>
                 <a:spcPts val="600"/>
@@ -4868,33 +4613,33 @@
       <p:sp>
         <p:nvSpPr>
           <p:cNvPr id="7" name="Flow card">
-            <a:extLst xmlns:a="http://schemas.openxmlformats.org/drawingml/2006/main">
+            <a:extLst>
               <a:ext uri="{FF2B5EF4-FFF2-40B4-BE49-F238E27FC236}">
                 <a16:creationId xmlns:a16="http://schemas.microsoft.com/office/drawing/2014/main" id="{2055541C-16A9-46A8-9806-FE62CA595318}"/>
               </a:ext>
             </a:extLst>
           </p:cNvPr>
           <p:cNvSpPr>
-            <a:spLocks xmlns:a="http://schemas.openxmlformats.org/drawingml/2006/main" noGrp="1"/>
-          </p:cNvSpPr>
-          <p:nvPr/>
-        </p:nvSpPr>
-        <p:spPr>
-          <a:xfrm xmlns:a="http://schemas.openxmlformats.org/drawingml/2006/main">
+            <a:spLocks noGrp="1"/>
+          </p:cNvSpPr>
+          <p:nvPr/>
+        </p:nvSpPr>
+        <p:spPr>
+          <a:xfrm>
             <a:off x="4270248" y="1691640"/>
             <a:ext cx="3657600" cy="4434840"/>
           </a:xfrm>
-          <a:prstGeom xmlns:a="http://schemas.openxmlformats.org/drawingml/2006/main" prst="roundRect">
+          <a:prstGeom prst="roundRect">
             <a:avLst>
               <a:gd name="adj" fmla="val 3000"/>
             </a:avLst>
           </a:prstGeom>
-          <a:solidFill xmlns:a="http://schemas.openxmlformats.org/drawingml/2006/main">
+          <a:solidFill>
             <a:srgbClr val="0B1A4A">
               <a:alpha val="75000"/>
             </a:srgbClr>
           </a:solidFill>
-          <a:ln xmlns:a="http://schemas.openxmlformats.org/drawingml/2006/main" w="12700">
+          <a:ln w="12700">
             <a:solidFill>
               <a:srgbClr val="1E5BFF"/>
             </a:solidFill>
@@ -4905,31 +4650,31 @@
       <p:sp>
         <p:nvSpPr>
           <p:cNvPr id="8" name="Flow head">
-            <a:extLst xmlns:a="http://schemas.openxmlformats.org/drawingml/2006/main">
+            <a:extLst>
               <a:ext uri="{FF2B5EF4-FFF2-40B4-BE49-F238E27FC236}">
                 <a16:creationId xmlns:a16="http://schemas.microsoft.com/office/drawing/2014/main" id="{F0CF6D4E-570F-441E-8552-9FDCF4DBECFE}"/>
               </a:ext>
             </a:extLst>
           </p:cNvPr>
           <p:cNvSpPr>
-            <a:spLocks xmlns:a="http://schemas.openxmlformats.org/drawingml/2006/main" noGrp="1"/>
-          </p:cNvSpPr>
-          <p:nvPr/>
-        </p:nvSpPr>
-        <p:spPr>
-          <a:xfrm xmlns:a="http://schemas.openxmlformats.org/drawingml/2006/main">
+            <a:spLocks noGrp="1"/>
+          </p:cNvSpPr>
+          <p:nvPr/>
+        </p:nvSpPr>
+        <p:spPr>
+          <a:xfrm>
             <a:off x="4544568" y="1874520"/>
             <a:ext cx="3108960" cy="320040"/>
           </a:xfrm>
-          <a:prstGeom xmlns:a="http://schemas.openxmlformats.org/drawingml/2006/main" prst="rect">
-            <a:avLst/>
-          </a:prstGeom>
-          <a:noFill xmlns:a="http://schemas.openxmlformats.org/drawingml/2006/main"/>
-        </p:spPr>
-        <p:txBody>
-          <a:bodyPr xmlns:a="http://schemas.openxmlformats.org/drawingml/2006/main" wrap="square" lIns="0" tIns="0" rIns="0" bIns="0" anchor="ctr"/>
-          <a:lstStyle xmlns:a="http://schemas.openxmlformats.org/drawingml/2006/main"/>
-          <a:p xmlns:a="http://schemas.openxmlformats.org/drawingml/2006/main">
+          <a:prstGeom prst="rect">
+            <a:avLst/>
+          </a:prstGeom>
+          <a:noFill/>
+        </p:spPr>
+        <p:txBody>
+          <a:bodyPr wrap="square" lIns="0" tIns="0" rIns="0" bIns="0" anchor="ctr"/>
+          <a:lstStyle/>
+          <a:p>
             <a:pPr marL="0" indent="0">
               <a:buNone/>
             </a:pPr>
@@ -4951,29 +4696,29 @@
       <p:sp>
         <p:nvSpPr>
           <p:cNvPr id="9" name="Flow dot 1">
-            <a:extLst xmlns:a="http://schemas.openxmlformats.org/drawingml/2006/main">
+            <a:extLst>
               <a:ext uri="{FF2B5EF4-FFF2-40B4-BE49-F238E27FC236}">
                 <a16:creationId xmlns:a16="http://schemas.microsoft.com/office/drawing/2014/main" id="{DF091EA1-E644-4915-BFD4-9C82C1DC46CC}"/>
               </a:ext>
             </a:extLst>
           </p:cNvPr>
           <p:cNvSpPr>
-            <a:spLocks xmlns:a="http://schemas.openxmlformats.org/drawingml/2006/main" noGrp="1"/>
-          </p:cNvSpPr>
-          <p:nvPr/>
-        </p:nvSpPr>
-        <p:spPr>
-          <a:xfrm xmlns:a="http://schemas.openxmlformats.org/drawingml/2006/main">
+            <a:spLocks noGrp="1"/>
+          </p:cNvSpPr>
+          <p:nvPr/>
+        </p:nvSpPr>
+        <p:spPr>
+          <a:xfrm>
             <a:off x="4544568" y="2331720"/>
             <a:ext cx="502920" cy="502920"/>
           </a:xfrm>
-          <a:prstGeom xmlns:a="http://schemas.openxmlformats.org/drawingml/2006/main" prst="ellipse">
-            <a:avLst/>
-          </a:prstGeom>
-          <a:solidFill xmlns:a="http://schemas.openxmlformats.org/drawingml/2006/main">
+          <a:prstGeom prst="ellipse">
+            <a:avLst/>
+          </a:prstGeom>
+          <a:solidFill>
             <a:schemeClr val="accent1"/>
           </a:solidFill>
-          <a:ln xmlns:a="http://schemas.openxmlformats.org/drawingml/2006/main" w="12700">
+          <a:ln w="12700">
             <a:solidFill>
               <a:srgbClr val="FFFFFF"/>
             </a:solidFill>
@@ -4984,31 +4729,31 @@
       <p:sp>
         <p:nvSpPr>
           <p:cNvPr id="10" name="Text 8">
-            <a:extLst xmlns:a="http://schemas.openxmlformats.org/drawingml/2006/main">
+            <a:extLst>
               <a:ext uri="{FF2B5EF4-FFF2-40B4-BE49-F238E27FC236}">
                 <a16:creationId xmlns:a16="http://schemas.microsoft.com/office/drawing/2014/main" id="{E6167F41-2C0A-499A-B1F2-B40A63646502}"/>
               </a:ext>
             </a:extLst>
           </p:cNvPr>
           <p:cNvSpPr>
-            <a:spLocks xmlns:a="http://schemas.openxmlformats.org/drawingml/2006/main" noGrp="1"/>
-          </p:cNvSpPr>
-          <p:nvPr/>
-        </p:nvSpPr>
-        <p:spPr>
-          <a:xfrm xmlns:a="http://schemas.openxmlformats.org/drawingml/2006/main">
+            <a:spLocks noGrp="1"/>
+          </p:cNvSpPr>
+          <p:nvPr/>
+        </p:nvSpPr>
+        <p:spPr>
+          <a:xfrm>
             <a:off x="4544568" y="2331720"/>
             <a:ext cx="502920" cy="502920"/>
           </a:xfrm>
-          <a:prstGeom xmlns:a="http://schemas.openxmlformats.org/drawingml/2006/main" prst="rect">
-            <a:avLst/>
-          </a:prstGeom>
-          <a:noFill xmlns:a="http://schemas.openxmlformats.org/drawingml/2006/main"/>
-        </p:spPr>
-        <p:txBody>
-          <a:bodyPr xmlns:a="http://schemas.openxmlformats.org/drawingml/2006/main" wrap="square" lIns="0" tIns="0" rIns="0" bIns="0" anchor="ctr"/>
-          <a:lstStyle xmlns:a="http://schemas.openxmlformats.org/drawingml/2006/main"/>
-          <a:p xmlns:a="http://schemas.openxmlformats.org/drawingml/2006/main">
+          <a:prstGeom prst="rect">
+            <a:avLst/>
+          </a:prstGeom>
+          <a:noFill/>
+        </p:spPr>
+        <p:txBody>
+          <a:bodyPr wrap="square" lIns="0" tIns="0" rIns="0" bIns="0" anchor="ctr"/>
+          <a:lstStyle/>
+          <a:p>
             <a:pPr marL="0" indent="0" algn="ctr">
               <a:buNone/>
             </a:pPr>
@@ -5030,31 +4775,31 @@
       <p:sp>
         <p:nvSpPr>
           <p:cNvPr id="11" name="Text 9">
-            <a:extLst xmlns:a="http://schemas.openxmlformats.org/drawingml/2006/main">
+            <a:extLst>
               <a:ext uri="{FF2B5EF4-FFF2-40B4-BE49-F238E27FC236}">
                 <a16:creationId xmlns:a16="http://schemas.microsoft.com/office/drawing/2014/main" id="{7BCDF33F-394C-4D20-8B54-5F78FE74A186}"/>
               </a:ext>
             </a:extLst>
           </p:cNvPr>
           <p:cNvSpPr>
-            <a:spLocks xmlns:a="http://schemas.openxmlformats.org/drawingml/2006/main" noGrp="1"/>
-          </p:cNvSpPr>
-          <p:nvPr/>
-        </p:nvSpPr>
-        <p:spPr>
-          <a:xfrm xmlns:a="http://schemas.openxmlformats.org/drawingml/2006/main">
+            <a:spLocks noGrp="1"/>
+          </p:cNvSpPr>
+          <p:nvPr/>
+        </p:nvSpPr>
+        <p:spPr>
+          <a:xfrm>
             <a:off x="5212080" y="2286000"/>
             <a:ext cx="2560320" cy="594360"/>
           </a:xfrm>
-          <a:prstGeom xmlns:a="http://schemas.openxmlformats.org/drawingml/2006/main" prst="rect">
-            <a:avLst/>
-          </a:prstGeom>
-          <a:noFill xmlns:a="http://schemas.openxmlformats.org/drawingml/2006/main"/>
-        </p:spPr>
-        <p:txBody>
-          <a:bodyPr xmlns:a="http://schemas.openxmlformats.org/drawingml/2006/main" wrap="square" lIns="0" tIns="0" rIns="0" bIns="0" anchor="ctr"/>
-          <a:lstStyle xmlns:a="http://schemas.openxmlformats.org/drawingml/2006/main"/>
-          <a:p xmlns:a="http://schemas.openxmlformats.org/drawingml/2006/main">
+          <a:prstGeom prst="rect">
+            <a:avLst/>
+          </a:prstGeom>
+          <a:noFill/>
+        </p:spPr>
+        <p:txBody>
+          <a:bodyPr wrap="square" lIns="0" tIns="0" rIns="0" bIns="0" anchor="ctr"/>
+          <a:lstStyle/>
+          <a:p>
             <a:pPr marL="0" indent="0">
               <a:buNone/>
             </a:pPr>
@@ -5071,7 +4816,7 @@
             </a:r>
             <a:endParaRPr sz="1400"/>
           </a:p>
-          <a:p xmlns:a="http://schemas.openxmlformats.org/drawingml/2006/main">
+          <a:p>
             <a:pPr marL="0" indent="0">
               <a:buNone/>
             </a:pPr>
@@ -5093,29 +4838,29 @@
       <p:sp>
         <p:nvSpPr>
           <p:cNvPr id="12" name="Flow dot 2">
-            <a:extLst xmlns:a="http://schemas.openxmlformats.org/drawingml/2006/main">
+            <a:extLst>
               <a:ext uri="{FF2B5EF4-FFF2-40B4-BE49-F238E27FC236}">
                 <a16:creationId xmlns:a16="http://schemas.microsoft.com/office/drawing/2014/main" id="{FAA436ED-A327-4FF1-8FA5-E2538271583A}"/>
               </a:ext>
             </a:extLst>
           </p:cNvPr>
           <p:cNvSpPr>
-            <a:spLocks xmlns:a="http://schemas.openxmlformats.org/drawingml/2006/main" noGrp="1"/>
-          </p:cNvSpPr>
-          <p:nvPr/>
-        </p:nvSpPr>
-        <p:spPr>
-          <a:xfrm xmlns:a="http://schemas.openxmlformats.org/drawingml/2006/main">
+            <a:spLocks noGrp="1"/>
+          </p:cNvSpPr>
+          <p:nvPr/>
+        </p:nvSpPr>
+        <p:spPr>
+          <a:xfrm>
             <a:off x="4544568" y="3520440"/>
             <a:ext cx="502920" cy="502920"/>
           </a:xfrm>
-          <a:prstGeom xmlns:a="http://schemas.openxmlformats.org/drawingml/2006/main" prst="ellipse">
-            <a:avLst/>
-          </a:prstGeom>
-          <a:solidFill xmlns:a="http://schemas.openxmlformats.org/drawingml/2006/main">
+          <a:prstGeom prst="ellipse">
+            <a:avLst/>
+          </a:prstGeom>
+          <a:solidFill>
             <a:schemeClr val="accent1"/>
           </a:solidFill>
-          <a:ln xmlns:a="http://schemas.openxmlformats.org/drawingml/2006/main" w="12700">
+          <a:ln w="12700">
             <a:solidFill>
               <a:srgbClr val="FFFFFF"/>
             </a:solidFill>
@@ -5126,31 +4871,31 @@
       <p:sp>
         <p:nvSpPr>
           <p:cNvPr id="13" name="Text 11">
-            <a:extLst xmlns:a="http://schemas.openxmlformats.org/drawingml/2006/main">
+            <a:extLst>
               <a:ext uri="{FF2B5EF4-FFF2-40B4-BE49-F238E27FC236}">
                 <a16:creationId xmlns:a16="http://schemas.microsoft.com/office/drawing/2014/main" id="{6D921AA6-C6C9-4AD0-91B8-15E2E1609F43}"/>
               </a:ext>
             </a:extLst>
           </p:cNvPr>
           <p:cNvSpPr>
-            <a:spLocks xmlns:a="http://schemas.openxmlformats.org/drawingml/2006/main" noGrp="1"/>
-          </p:cNvSpPr>
-          <p:nvPr/>
-        </p:nvSpPr>
-        <p:spPr>
-          <a:xfrm xmlns:a="http://schemas.openxmlformats.org/drawingml/2006/main">
+            <a:spLocks noGrp="1"/>
+          </p:cNvSpPr>
+          <p:nvPr/>
+        </p:nvSpPr>
+        <p:spPr>
+          <a:xfrm>
             <a:off x="4544568" y="3520440"/>
             <a:ext cx="502920" cy="502920"/>
           </a:xfrm>
-          <a:prstGeom xmlns:a="http://schemas.openxmlformats.org/drawingml/2006/main" prst="rect">
-            <a:avLst/>
-          </a:prstGeom>
-          <a:noFill xmlns:a="http://schemas.openxmlformats.org/drawingml/2006/main"/>
-        </p:spPr>
-        <p:txBody>
-          <a:bodyPr xmlns:a="http://schemas.openxmlformats.org/drawingml/2006/main" wrap="square" lIns="0" tIns="0" rIns="0" bIns="0" anchor="ctr"/>
-          <a:lstStyle xmlns:a="http://schemas.openxmlformats.org/drawingml/2006/main"/>
-          <a:p xmlns:a="http://schemas.openxmlformats.org/drawingml/2006/main">
+          <a:prstGeom prst="rect">
+            <a:avLst/>
+          </a:prstGeom>
+          <a:noFill/>
+        </p:spPr>
+        <p:txBody>
+          <a:bodyPr wrap="square" lIns="0" tIns="0" rIns="0" bIns="0" anchor="ctr"/>
+          <a:lstStyle/>
+          <a:p>
             <a:pPr marL="0" indent="0" algn="ctr">
               <a:buNone/>
             </a:pPr>
@@ -5172,31 +4917,31 @@
       <p:sp>
         <p:nvSpPr>
           <p:cNvPr id="14" name="Text 12">
-            <a:extLst xmlns:a="http://schemas.openxmlformats.org/drawingml/2006/main">
+            <a:extLst>
               <a:ext uri="{FF2B5EF4-FFF2-40B4-BE49-F238E27FC236}">
                 <a16:creationId xmlns:a16="http://schemas.microsoft.com/office/drawing/2014/main" id="{0D605CE5-3F26-4737-8C50-7FC26AEDC448}"/>
               </a:ext>
             </a:extLst>
           </p:cNvPr>
           <p:cNvSpPr>
-            <a:spLocks xmlns:a="http://schemas.openxmlformats.org/drawingml/2006/main" noGrp="1"/>
-          </p:cNvSpPr>
-          <p:nvPr/>
-        </p:nvSpPr>
-        <p:spPr>
-          <a:xfrm xmlns:a="http://schemas.openxmlformats.org/drawingml/2006/main">
+            <a:spLocks noGrp="1"/>
+          </p:cNvSpPr>
+          <p:nvPr/>
+        </p:nvSpPr>
+        <p:spPr>
+          <a:xfrm>
             <a:off x="5212080" y="3474720"/>
             <a:ext cx="2560320" cy="594360"/>
           </a:xfrm>
-          <a:prstGeom xmlns:a="http://schemas.openxmlformats.org/drawingml/2006/main" prst="rect">
-            <a:avLst/>
-          </a:prstGeom>
-          <a:noFill xmlns:a="http://schemas.openxmlformats.org/drawingml/2006/main"/>
-        </p:spPr>
-        <p:txBody>
-          <a:bodyPr xmlns:a="http://schemas.openxmlformats.org/drawingml/2006/main" wrap="square" lIns="0" tIns="0" rIns="0" bIns="0" anchor="ctr"/>
-          <a:lstStyle xmlns:a="http://schemas.openxmlformats.org/drawingml/2006/main"/>
-          <a:p xmlns:a="http://schemas.openxmlformats.org/drawingml/2006/main">
+          <a:prstGeom prst="rect">
+            <a:avLst/>
+          </a:prstGeom>
+          <a:noFill/>
+        </p:spPr>
+        <p:txBody>
+          <a:bodyPr wrap="square" lIns="0" tIns="0" rIns="0" bIns="0" anchor="ctr"/>
+          <a:lstStyle/>
+          <a:p>
             <a:pPr marL="0" indent="0">
               <a:buNone/>
             </a:pPr>
@@ -5213,7 +4958,7 @@
             </a:r>
             <a:endParaRPr sz="1400"/>
           </a:p>
-          <a:p xmlns:a="http://schemas.openxmlformats.org/drawingml/2006/main">
+          <a:p>
             <a:pPr marL="0" indent="0">
               <a:buNone/>
             </a:pPr>
@@ -5235,29 +4980,29 @@
       <p:sp>
         <p:nvSpPr>
           <p:cNvPr id="15" name="Flow dot 3">
-            <a:extLst xmlns:a="http://schemas.openxmlformats.org/drawingml/2006/main">
+            <a:extLst>
               <a:ext uri="{FF2B5EF4-FFF2-40B4-BE49-F238E27FC236}">
                 <a16:creationId xmlns:a16="http://schemas.microsoft.com/office/drawing/2014/main" id="{B31A7553-83BC-4E50-BEFF-9B76D78C36A5}"/>
               </a:ext>
             </a:extLst>
           </p:cNvPr>
           <p:cNvSpPr>
-            <a:spLocks xmlns:a="http://schemas.openxmlformats.org/drawingml/2006/main" noGrp="1"/>
-          </p:cNvSpPr>
-          <p:nvPr/>
-        </p:nvSpPr>
-        <p:spPr>
-          <a:xfrm xmlns:a="http://schemas.openxmlformats.org/drawingml/2006/main">
+            <a:spLocks noGrp="1"/>
+          </p:cNvSpPr>
+          <p:nvPr/>
+        </p:nvSpPr>
+        <p:spPr>
+          <a:xfrm>
             <a:off x="4544568" y="4709160"/>
             <a:ext cx="502920" cy="502920"/>
           </a:xfrm>
-          <a:prstGeom xmlns:a="http://schemas.openxmlformats.org/drawingml/2006/main" prst="ellipse">
-            <a:avLst/>
-          </a:prstGeom>
-          <a:solidFill xmlns:a="http://schemas.openxmlformats.org/drawingml/2006/main">
+          <a:prstGeom prst="ellipse">
+            <a:avLst/>
+          </a:prstGeom>
+          <a:solidFill>
             <a:schemeClr val="accent1"/>
           </a:solidFill>
-          <a:ln xmlns:a="http://schemas.openxmlformats.org/drawingml/2006/main" w="12700">
+          <a:ln w="12700">
             <a:solidFill>
               <a:srgbClr val="FFFFFF"/>
             </a:solidFill>
@@ -5268,31 +5013,31 @@
       <p:sp>
         <p:nvSpPr>
           <p:cNvPr id="16" name="Text 14">
-            <a:extLst xmlns:a="http://schemas.openxmlformats.org/drawingml/2006/main">
+            <a:extLst>
               <a:ext uri="{FF2B5EF4-FFF2-40B4-BE49-F238E27FC236}">
                 <a16:creationId xmlns:a16="http://schemas.microsoft.com/office/drawing/2014/main" id="{8577198F-53EF-40CE-9B9C-35398E5E6B3B}"/>
               </a:ext>
             </a:extLst>
           </p:cNvPr>
           <p:cNvSpPr>
-            <a:spLocks xmlns:a="http://schemas.openxmlformats.org/drawingml/2006/main" noGrp="1"/>
-          </p:cNvSpPr>
-          <p:nvPr/>
-        </p:nvSpPr>
-        <p:spPr>
-          <a:xfrm xmlns:a="http://schemas.openxmlformats.org/drawingml/2006/main">
+            <a:spLocks noGrp="1"/>
+          </p:cNvSpPr>
+          <p:nvPr/>
+        </p:nvSpPr>
+        <p:spPr>
+          <a:xfrm>
             <a:off x="4544568" y="4709160"/>
             <a:ext cx="502920" cy="502920"/>
           </a:xfrm>
-          <a:prstGeom xmlns:a="http://schemas.openxmlformats.org/drawingml/2006/main" prst="rect">
-            <a:avLst/>
-          </a:prstGeom>
-          <a:noFill xmlns:a="http://schemas.openxmlformats.org/drawingml/2006/main"/>
-        </p:spPr>
-        <p:txBody>
-          <a:bodyPr xmlns:a="http://schemas.openxmlformats.org/drawingml/2006/main" wrap="square" lIns="0" tIns="0" rIns="0" bIns="0" anchor="ctr"/>
-          <a:lstStyle xmlns:a="http://schemas.openxmlformats.org/drawingml/2006/main"/>
-          <a:p xmlns:a="http://schemas.openxmlformats.org/drawingml/2006/main">
+          <a:prstGeom prst="rect">
+            <a:avLst/>
+          </a:prstGeom>
+          <a:noFill/>
+        </p:spPr>
+        <p:txBody>
+          <a:bodyPr wrap="square" lIns="0" tIns="0" rIns="0" bIns="0" anchor="ctr"/>
+          <a:lstStyle/>
+          <a:p>
             <a:pPr marL="0" indent="0" algn="ctr">
               <a:buNone/>
             </a:pPr>
@@ -5314,31 +5059,31 @@
       <p:sp>
         <p:nvSpPr>
           <p:cNvPr id="17" name="Text 15">
-            <a:extLst xmlns:a="http://schemas.openxmlformats.org/drawingml/2006/main">
+            <a:extLst>
               <a:ext uri="{FF2B5EF4-FFF2-40B4-BE49-F238E27FC236}">
                 <a16:creationId xmlns:a16="http://schemas.microsoft.com/office/drawing/2014/main" id="{6260D5A3-BFE1-4DA4-9058-9D067922FF3B}"/>
               </a:ext>
             </a:extLst>
           </p:cNvPr>
           <p:cNvSpPr>
-            <a:spLocks xmlns:a="http://schemas.openxmlformats.org/drawingml/2006/main" noGrp="1"/>
-          </p:cNvSpPr>
-          <p:nvPr/>
-        </p:nvSpPr>
-        <p:spPr>
-          <a:xfrm xmlns:a="http://schemas.openxmlformats.org/drawingml/2006/main">
+            <a:spLocks noGrp="1"/>
+          </p:cNvSpPr>
+          <p:nvPr/>
+        </p:nvSpPr>
+        <p:spPr>
+          <a:xfrm>
             <a:off x="5212080" y="4663440"/>
             <a:ext cx="2560320" cy="594360"/>
           </a:xfrm>
-          <a:prstGeom xmlns:a="http://schemas.openxmlformats.org/drawingml/2006/main" prst="rect">
-            <a:avLst/>
-          </a:prstGeom>
-          <a:noFill xmlns:a="http://schemas.openxmlformats.org/drawingml/2006/main"/>
-        </p:spPr>
-        <p:txBody>
-          <a:bodyPr xmlns:a="http://schemas.openxmlformats.org/drawingml/2006/main" wrap="square" lIns="0" tIns="0" rIns="0" bIns="0" anchor="ctr"/>
-          <a:lstStyle xmlns:a="http://schemas.openxmlformats.org/drawingml/2006/main"/>
-          <a:p xmlns:a="http://schemas.openxmlformats.org/drawingml/2006/main">
+          <a:prstGeom prst="rect">
+            <a:avLst/>
+          </a:prstGeom>
+          <a:noFill/>
+        </p:spPr>
+        <p:txBody>
+          <a:bodyPr wrap="square" lIns="0" tIns="0" rIns="0" bIns="0" anchor="ctr"/>
+          <a:lstStyle/>
+          <a:p>
             <a:pPr marL="0" indent="0">
               <a:buNone/>
             </a:pPr>
@@ -5355,7 +5100,7 @@
             </a:r>
             <a:endParaRPr sz="1400"/>
           </a:p>
-          <a:p xmlns:a="http://schemas.openxmlformats.org/drawingml/2006/main">
+          <a:p>
             <a:pPr marL="0" indent="0">
               <a:buNone/>
             </a:pPr>
@@ -5377,33 +5122,33 @@
       <p:sp>
         <p:nvSpPr>
           <p:cNvPr id="18" name="Goal card">
-            <a:extLst xmlns:a="http://schemas.openxmlformats.org/drawingml/2006/main">
+            <a:extLst>
               <a:ext uri="{FF2B5EF4-FFF2-40B4-BE49-F238E27FC236}">
                 <a16:creationId xmlns:a16="http://schemas.microsoft.com/office/drawing/2014/main" id="{6DBCFF46-202D-4056-ABA6-225F0213A29C}"/>
               </a:ext>
             </a:extLst>
           </p:cNvPr>
           <p:cNvSpPr>
-            <a:spLocks xmlns:a="http://schemas.openxmlformats.org/drawingml/2006/main" noGrp="1"/>
-          </p:cNvSpPr>
-          <p:nvPr/>
-        </p:nvSpPr>
-        <p:spPr>
-          <a:xfrm xmlns:a="http://schemas.openxmlformats.org/drawingml/2006/main">
+            <a:spLocks noGrp="1"/>
+          </p:cNvSpPr>
+          <p:nvPr/>
+        </p:nvSpPr>
+        <p:spPr>
+          <a:xfrm>
             <a:off x="8074152" y="1691640"/>
             <a:ext cx="3657600" cy="4434840"/>
           </a:xfrm>
-          <a:prstGeom xmlns:a="http://schemas.openxmlformats.org/drawingml/2006/main" prst="roundRect">
+          <a:prstGeom prst="roundRect">
             <a:avLst>
               <a:gd name="adj" fmla="val 3000"/>
             </a:avLst>
           </a:prstGeom>
-          <a:solidFill xmlns:a="http://schemas.openxmlformats.org/drawingml/2006/main">
+          <a:solidFill>
             <a:srgbClr val="0B1A4A">
               <a:alpha val="75000"/>
             </a:srgbClr>
           </a:solidFill>
-          <a:ln xmlns:a="http://schemas.openxmlformats.org/drawingml/2006/main" w="12700">
+          <a:ln w="12700">
             <a:solidFill>
               <a:srgbClr val="1E5BFF"/>
             </a:solidFill>
@@ -5414,31 +5159,31 @@
       <p:sp>
         <p:nvSpPr>
           <p:cNvPr id="19" name="Goal head">
-            <a:extLst xmlns:a="http://schemas.openxmlformats.org/drawingml/2006/main">
+            <a:extLst>
               <a:ext uri="{FF2B5EF4-FFF2-40B4-BE49-F238E27FC236}">
                 <a16:creationId xmlns:a16="http://schemas.microsoft.com/office/drawing/2014/main" id="{F5ADC8EE-55AE-4045-9FA9-82A8B761ACA5}"/>
               </a:ext>
             </a:extLst>
           </p:cNvPr>
           <p:cNvSpPr>
-            <a:spLocks xmlns:a="http://schemas.openxmlformats.org/drawingml/2006/main" noGrp="1"/>
-          </p:cNvSpPr>
-          <p:nvPr/>
-        </p:nvSpPr>
-        <p:spPr>
-          <a:xfrm xmlns:a="http://schemas.openxmlformats.org/drawingml/2006/main">
+            <a:spLocks noGrp="1"/>
+          </p:cNvSpPr>
+          <p:nvPr/>
+        </p:nvSpPr>
+        <p:spPr>
+          <a:xfrm>
             <a:off x="8348472" y="1874520"/>
             <a:ext cx="3108960" cy="320040"/>
           </a:xfrm>
-          <a:prstGeom xmlns:a="http://schemas.openxmlformats.org/drawingml/2006/main" prst="rect">
-            <a:avLst/>
-          </a:prstGeom>
-          <a:noFill xmlns:a="http://schemas.openxmlformats.org/drawingml/2006/main"/>
-        </p:spPr>
-        <p:txBody>
-          <a:bodyPr xmlns:a="http://schemas.openxmlformats.org/drawingml/2006/main" wrap="square" lIns="0" tIns="0" rIns="0" bIns="0" anchor="ctr"/>
-          <a:lstStyle xmlns:a="http://schemas.openxmlformats.org/drawingml/2006/main"/>
-          <a:p xmlns:a="http://schemas.openxmlformats.org/drawingml/2006/main">
+          <a:prstGeom prst="rect">
+            <a:avLst/>
+          </a:prstGeom>
+          <a:noFill/>
+        </p:spPr>
+        <p:txBody>
+          <a:bodyPr wrap="square" lIns="0" tIns="0" rIns="0" bIns="0" anchor="ctr"/>
+          <a:lstStyle/>
+          <a:p>
             <a:pPr marL="0" indent="0">
               <a:buNone/>
             </a:pPr>
@@ -5460,31 +5205,31 @@
       <p:sp>
         <p:nvSpPr>
           <p:cNvPr id="20" name="Goal body">
-            <a:extLst xmlns:a="http://schemas.openxmlformats.org/drawingml/2006/main">
+            <a:extLst>
               <a:ext uri="{FF2B5EF4-FFF2-40B4-BE49-F238E27FC236}">
                 <a16:creationId xmlns:a16="http://schemas.microsoft.com/office/drawing/2014/main" id="{1F48EFD7-9B86-4C8F-BED4-E1D59B18847B}"/>
               </a:ext>
             </a:extLst>
           </p:cNvPr>
           <p:cNvSpPr>
-            <a:spLocks xmlns:a="http://schemas.openxmlformats.org/drawingml/2006/main" noGrp="1"/>
-          </p:cNvSpPr>
-          <p:nvPr/>
-        </p:nvSpPr>
-        <p:spPr>
-          <a:xfrm xmlns:a="http://schemas.openxmlformats.org/drawingml/2006/main">
+            <a:spLocks noGrp="1"/>
+          </p:cNvSpPr>
+          <p:nvPr/>
+        </p:nvSpPr>
+        <p:spPr>
+          <a:xfrm>
             <a:off x="8348472" y="2286000"/>
             <a:ext cx="3108960" cy="1463040"/>
           </a:xfrm>
-          <a:prstGeom xmlns:a="http://schemas.openxmlformats.org/drawingml/2006/main" prst="rect">
-            <a:avLst/>
-          </a:prstGeom>
-          <a:noFill xmlns:a="http://schemas.openxmlformats.org/drawingml/2006/main"/>
-        </p:spPr>
-        <p:txBody>
-          <a:bodyPr xmlns:a="http://schemas.openxmlformats.org/drawingml/2006/main" wrap="square" lIns="0" tIns="0" rIns="0" bIns="0" anchor="t"/>
-          <a:lstStyle xmlns:a="http://schemas.openxmlformats.org/drawingml/2006/main"/>
-          <a:p xmlns:a="http://schemas.openxmlformats.org/drawingml/2006/main">
+          <a:prstGeom prst="rect">
+            <a:avLst/>
+          </a:prstGeom>
+          <a:noFill/>
+        </p:spPr>
+        <p:txBody>
+          <a:bodyPr wrap="square" lIns="0" tIns="0" rIns="0" bIns="0" anchor="t"/>
+          <a:lstStyle/>
+          <a:p>
             <a:pPr marL="0" indent="0">
               <a:buNone/>
             </a:pPr>
@@ -5506,31 +5251,31 @@
       <p:sp>
         <p:nvSpPr>
           <p:cNvPr id="21" name="Wireframe placeholder">
-            <a:extLst xmlns:a="http://schemas.openxmlformats.org/drawingml/2006/main">
+            <a:extLst>
               <a:ext uri="{FF2B5EF4-FFF2-40B4-BE49-F238E27FC236}">
                 <a16:creationId xmlns:a16="http://schemas.microsoft.com/office/drawing/2014/main" id="{F1427D5C-8E20-47D1-B890-3D0BFE2E447E}"/>
               </a:ext>
             </a:extLst>
           </p:cNvPr>
           <p:cNvSpPr>
-            <a:spLocks xmlns:a="http://schemas.openxmlformats.org/drawingml/2006/main" noGrp="1"/>
-          </p:cNvSpPr>
-          <p:nvPr/>
-        </p:nvSpPr>
-        <p:spPr>
-          <a:xfrm xmlns:a="http://schemas.openxmlformats.org/drawingml/2006/main">
+            <a:spLocks noGrp="1"/>
+          </p:cNvSpPr>
+          <p:nvPr/>
+        </p:nvSpPr>
+        <p:spPr>
+          <a:xfrm>
             <a:off x="8348472" y="4206240"/>
             <a:ext cx="3108960" cy="1645920"/>
           </a:xfrm>
-          <a:prstGeom xmlns:a="http://schemas.openxmlformats.org/drawingml/2006/main" prst="rect">
-            <a:avLst/>
-          </a:prstGeom>
-          <a:noFill xmlns:a="http://schemas.openxmlformats.org/drawingml/2006/main"/>
-        </p:spPr>
-        <p:txBody>
-          <a:bodyPr xmlns:a="http://schemas.openxmlformats.org/drawingml/2006/main" wrap="square" anchor="ctr"/>
-          <a:lstStyle xmlns:a="http://schemas.openxmlformats.org/drawingml/2006/main"/>
-          <a:p xmlns:a="http://schemas.openxmlformats.org/drawingml/2006/main">
+          <a:prstGeom prst="rect">
+            <a:avLst/>
+          </a:prstGeom>
+          <a:noFill/>
+        </p:spPr>
+        <p:txBody>
+          <a:bodyPr wrap="square" anchor="ctr"/>
+          <a:lstStyle/>
+          <a:p>
             <a:pPr marL="0" indent="0" algn="ctr">
               <a:buNone/>
             </a:pPr>
@@ -5552,31 +5297,31 @@
       <p:sp>
         <p:nvSpPr>
           <p:cNvPr id="25" name="Slide Number Placeholder 0">
-            <a:extLst xmlns:a="http://schemas.openxmlformats.org/drawingml/2006/main">
+            <a:extLst>
               <a:ext uri="{FF2B5EF4-FFF2-40B4-BE49-F238E27FC236}">
                 <a16:creationId xmlns:a16="http://schemas.microsoft.com/office/drawing/2014/main" id="{F133C4AF-F8E3-4F4E-B6DB-3868DCBD8213}"/>
               </a:ext>
             </a:extLst>
           </p:cNvPr>
           <p:cNvSpPr>
-            <a:spLocks xmlns:a="http://schemas.openxmlformats.org/drawingml/2006/main" noGrp="1"/>
+            <a:spLocks noGrp="1"/>
           </p:cNvSpPr>
           <p:nvPr>
             <p:ph type="sldNum" idx="4294967295"/>
           </p:nvPr>
         </p:nvSpPr>
         <p:spPr>
-          <a:xfrm xmlns:a="http://schemas.openxmlformats.org/drawingml/2006/main">
+          <a:xfrm>
             <a:off x="11155680" y="6428232"/>
             <a:ext cx="576072" cy="274320"/>
           </a:xfrm>
-          <a:prstGeom xmlns:a="http://schemas.openxmlformats.org/drawingml/2006/main" prst="rect">
-            <a:avLst/>
-          </a:prstGeom>
-        </p:spPr>
-        <p:txBody>
-          <a:bodyPr xmlns:a="http://schemas.openxmlformats.org/drawingml/2006/main"/>
-          <a:lstStyle xmlns:a="http://schemas.openxmlformats.org/drawingml/2006/main">
+          <a:prstGeom prst="rect">
+            <a:avLst/>
+          </a:prstGeom>
+        </p:spPr>
+        <p:txBody>
+          <a:bodyPr/>
+          <a:lstStyle>
             <a:lvl1pPr>
               <a:buNone/>
               <a:defRPr sz="1000">
@@ -5589,7 +5334,7 @@
               </a:defRPr>
             </a:lvl1pPr>
           </a:lstStyle>
-          <a:p xmlns:a="http://schemas.openxmlformats.org/drawingml/2006/main">
+          <a:p>
             <a:pPr algn="r">
               <a:buNone/>
             </a:pPr>
@@ -5608,11 +5353,14 @@
       </p:ext>
     </p:extLst>
   </p:cSld>
+  <p:clrMapOvr>
+    <a:masterClrMapping/>
+  </p:clrMapOvr>
 </p:sld>
 </file>
 
 <file path=ppt/slides/slide5.xml><?xml version="1.0" encoding="utf-8"?>
-<p:sld xmlns:p="http://schemas.openxmlformats.org/presentationml/2006/main">
+<p:sld xmlns:a="http://schemas.openxmlformats.org/drawingml/2006/main" xmlns:r="http://schemas.openxmlformats.org/officeDocument/2006/relationships" xmlns:p="http://schemas.openxmlformats.org/presentationml/2006/main">
   <p:cSld>
     <p:spTree>
       <p:nvGrpSpPr>
@@ -5621,36 +5369,41 @@
         <p:nvPr/>
       </p:nvGrpSpPr>
       <p:grpSpPr>
-        <a:xfrm xmlns:a="http://schemas.openxmlformats.org/drawingml/2006/main"/>
+        <a:xfrm>
+          <a:off x="0" y="0"/>
+          <a:ext cx="0" cy="0"/>
+          <a:chOff x="0" y="0"/>
+          <a:chExt cx="0" cy="0"/>
+        </a:xfrm>
       </p:grpSpPr>
       <p:sp>
         <p:nvSpPr>
           <p:cNvPr id="2" name="Text 0">
-            <a:extLst xmlns:a="http://schemas.openxmlformats.org/drawingml/2006/main">
+            <a:extLst>
               <a:ext uri="{FF2B5EF4-FFF2-40B4-BE49-F238E27FC236}">
                 <a16:creationId xmlns:a16="http://schemas.microsoft.com/office/drawing/2014/main" id="{FC8B109D-F983-49F5-BF3B-94D3D2328EBE}"/>
               </a:ext>
             </a:extLst>
           </p:cNvPr>
           <p:cNvSpPr>
-            <a:spLocks xmlns:a="http://schemas.openxmlformats.org/drawingml/2006/main" noGrp="1"/>
-          </p:cNvSpPr>
-          <p:nvPr/>
-        </p:nvSpPr>
-        <p:spPr>
-          <a:xfrm xmlns:a="http://schemas.openxmlformats.org/drawingml/2006/main">
+            <a:spLocks noGrp="1"/>
+          </p:cNvSpPr>
+          <p:nvPr/>
+        </p:nvSpPr>
+        <p:spPr>
+          <a:xfrm>
             <a:off x="457200" y="960120"/>
             <a:ext cx="11274552" cy="731520"/>
           </a:xfrm>
-          <a:prstGeom xmlns:a="http://schemas.openxmlformats.org/drawingml/2006/main" prst="rect">
-            <a:avLst/>
-          </a:prstGeom>
-          <a:noFill xmlns:a="http://schemas.openxmlformats.org/drawingml/2006/main"/>
-        </p:spPr>
-        <p:txBody>
-          <a:bodyPr xmlns:a="http://schemas.openxmlformats.org/drawingml/2006/main" wrap="square" lIns="0" tIns="0" rIns="0" bIns="0" anchor="ctr"/>
-          <a:lstStyle xmlns:a="http://schemas.openxmlformats.org/drawingml/2006/main"/>
-          <a:p xmlns:a="http://schemas.openxmlformats.org/drawingml/2006/main">
+          <a:prstGeom prst="rect">
+            <a:avLst/>
+          </a:prstGeom>
+          <a:noFill/>
+        </p:spPr>
+        <p:txBody>
+          <a:bodyPr wrap="square" lIns="0" tIns="0" rIns="0" bIns="0" anchor="ctr"/>
+          <a:lstStyle/>
+          <a:p>
             <a:pPr marL="0" indent="0">
               <a:buNone/>
             </a:pPr>
@@ -5672,31 +5425,31 @@
       <p:sp>
         <p:nvSpPr>
           <p:cNvPr id="3" name="Team tag">
-            <a:extLst xmlns:a="http://schemas.openxmlformats.org/drawingml/2006/main">
+            <a:extLst>
               <a:ext uri="{FF2B5EF4-FFF2-40B4-BE49-F238E27FC236}">
                 <a16:creationId xmlns:a16="http://schemas.microsoft.com/office/drawing/2014/main" id="{A9D6734E-1CC5-41F0-8509-1CFEA4791C8C}"/>
               </a:ext>
             </a:extLst>
           </p:cNvPr>
           <p:cNvSpPr>
-            <a:spLocks xmlns:a="http://schemas.openxmlformats.org/drawingml/2006/main" noGrp="1"/>
-          </p:cNvSpPr>
-          <p:nvPr/>
-        </p:nvSpPr>
-        <p:spPr>
-          <a:xfrm xmlns:a="http://schemas.openxmlformats.org/drawingml/2006/main">
+            <a:spLocks noGrp="1"/>
+          </p:cNvSpPr>
+          <p:nvPr/>
+        </p:nvSpPr>
+        <p:spPr>
+          <a:xfrm>
             <a:off x="8503920" y="1097280"/>
             <a:ext cx="3227832" cy="320040"/>
           </a:xfrm>
-          <a:prstGeom xmlns:a="http://schemas.openxmlformats.org/drawingml/2006/main" prst="rect">
-            <a:avLst/>
-          </a:prstGeom>
-          <a:noFill xmlns:a="http://schemas.openxmlformats.org/drawingml/2006/main"/>
-        </p:spPr>
-        <p:txBody>
-          <a:bodyPr xmlns:a="http://schemas.openxmlformats.org/drawingml/2006/main" wrap="square" lIns="0" tIns="0" rIns="0" bIns="0" anchor="ctr"/>
-          <a:lstStyle xmlns:a="http://schemas.openxmlformats.org/drawingml/2006/main"/>
-          <a:p xmlns:a="http://schemas.openxmlformats.org/drawingml/2006/main">
+          <a:prstGeom prst="rect">
+            <a:avLst/>
+          </a:prstGeom>
+          <a:noFill/>
+        </p:spPr>
+        <p:txBody>
+          <a:bodyPr wrap="square" lIns="0" tIns="0" rIns="0" bIns="0" anchor="ctr"/>
+          <a:lstStyle/>
+          <a:p>
             <a:pPr marL="0" indent="0" algn="r">
               <a:buNone/>
             </a:pPr>
@@ -5718,33 +5471,33 @@
       <p:sp>
         <p:nvSpPr>
           <p:cNvPr id="4" name="Technical Feasibility card">
-            <a:extLst xmlns:a="http://schemas.openxmlformats.org/drawingml/2006/main">
+            <a:extLst>
               <a:ext uri="{FF2B5EF4-FFF2-40B4-BE49-F238E27FC236}">
                 <a16:creationId xmlns:a16="http://schemas.microsoft.com/office/drawing/2014/main" id="{1BAC6998-7A03-4B89-AFCC-05C34C148E14}"/>
               </a:ext>
             </a:extLst>
           </p:cNvPr>
           <p:cNvSpPr>
-            <a:spLocks xmlns:a="http://schemas.openxmlformats.org/drawingml/2006/main" noGrp="1"/>
-          </p:cNvSpPr>
-          <p:nvPr/>
-        </p:nvSpPr>
-        <p:spPr>
-          <a:xfrm xmlns:a="http://schemas.openxmlformats.org/drawingml/2006/main">
+            <a:spLocks noGrp="1"/>
+          </p:cNvSpPr>
+          <p:nvPr/>
+        </p:nvSpPr>
+        <p:spPr>
+          <a:xfrm>
             <a:off x="457200" y="1691640"/>
             <a:ext cx="3657600" cy="4434840"/>
           </a:xfrm>
-          <a:prstGeom xmlns:a="http://schemas.openxmlformats.org/drawingml/2006/main" prst="roundRect">
+          <a:prstGeom prst="roundRect">
             <a:avLst>
               <a:gd name="adj" fmla="val 3000"/>
             </a:avLst>
           </a:prstGeom>
-          <a:solidFill xmlns:a="http://schemas.openxmlformats.org/drawingml/2006/main">
+          <a:solidFill>
             <a:srgbClr val="0B1A4A">
               <a:alpha val="75000"/>
             </a:srgbClr>
           </a:solidFill>
-          <a:ln xmlns:a="http://schemas.openxmlformats.org/drawingml/2006/main" w="12700">
+          <a:ln w="12700">
             <a:solidFill>
               <a:srgbClr val="1E5BFF"/>
             </a:solidFill>
@@ -5755,31 +5508,31 @@
       <p:sp>
         <p:nvSpPr>
           <p:cNvPr id="5" name="Technical Feasibility head">
-            <a:extLst xmlns:a="http://schemas.openxmlformats.org/drawingml/2006/main">
+            <a:extLst>
               <a:ext uri="{FF2B5EF4-FFF2-40B4-BE49-F238E27FC236}">
                 <a16:creationId xmlns:a16="http://schemas.microsoft.com/office/drawing/2014/main" id="{9067B5D4-D149-465D-8D5D-567BCCE1E24B}"/>
               </a:ext>
             </a:extLst>
           </p:cNvPr>
           <p:cNvSpPr>
-            <a:spLocks xmlns:a="http://schemas.openxmlformats.org/drawingml/2006/main" noGrp="1"/>
-          </p:cNvSpPr>
-          <p:nvPr/>
-        </p:nvSpPr>
-        <p:spPr>
-          <a:xfrm xmlns:a="http://schemas.openxmlformats.org/drawingml/2006/main">
+            <a:spLocks noGrp="1"/>
+          </p:cNvSpPr>
+          <p:nvPr/>
+        </p:nvSpPr>
+        <p:spPr>
+          <a:xfrm>
             <a:off x="731520" y="1874520"/>
             <a:ext cx="3108960" cy="320040"/>
           </a:xfrm>
-          <a:prstGeom xmlns:a="http://schemas.openxmlformats.org/drawingml/2006/main" prst="rect">
-            <a:avLst/>
-          </a:prstGeom>
-          <a:noFill xmlns:a="http://schemas.openxmlformats.org/drawingml/2006/main"/>
-        </p:spPr>
-        <p:txBody>
-          <a:bodyPr xmlns:a="http://schemas.openxmlformats.org/drawingml/2006/main" wrap="square" lIns="0" tIns="0" rIns="0" bIns="0" anchor="ctr"/>
-          <a:lstStyle xmlns:a="http://schemas.openxmlformats.org/drawingml/2006/main"/>
-          <a:p xmlns:a="http://schemas.openxmlformats.org/drawingml/2006/main">
+          <a:prstGeom prst="rect">
+            <a:avLst/>
+          </a:prstGeom>
+          <a:noFill/>
+        </p:spPr>
+        <p:txBody>
+          <a:bodyPr wrap="square" lIns="0" tIns="0" rIns="0" bIns="0" anchor="ctr"/>
+          <a:lstStyle/>
+          <a:p>
             <a:pPr marL="0" indent="0">
               <a:buNone/>
             </a:pPr>
@@ -5801,30 +5554,30 @@
       <p:sp>
         <p:nvSpPr>
           <p:cNvPr id="6" name="Technical Feasibility body">
-            <a:extLst xmlns:a="http://schemas.openxmlformats.org/drawingml/2006/main">
+            <a:extLst>
               <a:ext uri="{FF2B5EF4-FFF2-40B4-BE49-F238E27FC236}">
                 <a16:creationId xmlns:a16="http://schemas.microsoft.com/office/drawing/2014/main" id="{881F0955-00CA-4185-A707-555AC67065B9}"/>
               </a:ext>
             </a:extLst>
           </p:cNvPr>
           <p:cNvSpPr>
-            <a:spLocks xmlns:a="http://schemas.openxmlformats.org/drawingml/2006/main" noGrp="1"/>
-          </p:cNvSpPr>
-          <p:nvPr/>
-        </p:nvSpPr>
-        <p:spPr>
-          <a:xfrm xmlns:a="http://schemas.openxmlformats.org/drawingml/2006/main">
+            <a:spLocks noGrp="1"/>
+          </p:cNvSpPr>
+          <p:nvPr/>
+        </p:nvSpPr>
+        <p:spPr>
+          <a:xfrm>
             <a:off x="731520" y="2377440"/>
             <a:ext cx="3108960" cy="3474720"/>
           </a:xfrm>
-          <a:prstGeom xmlns:a="http://schemas.openxmlformats.org/drawingml/2006/main" prst="rect">
-            <a:avLst/>
-          </a:prstGeom>
-          <a:noFill xmlns:a="http://schemas.openxmlformats.org/drawingml/2006/main"/>
-        </p:spPr>
-        <p:txBody>
-          <a:bodyPr xmlns:a="http://schemas.openxmlformats.org/drawingml/2006/main" wrap="square" lIns="0" tIns="0" rIns="0" bIns="0" anchor="t"/>
-          <a:lstStyle xmlns:a="http://schemas.openxmlformats.org/drawingml/2006/main">
+          <a:prstGeom prst="rect">
+            <a:avLst/>
+          </a:prstGeom>
+          <a:noFill/>
+        </p:spPr>
+        <p:txBody>
+          <a:bodyPr wrap="square" lIns="0" tIns="0" rIns="0" bIns="0" anchor="t"/>
+          <a:lstStyle>
             <a:defPPr algn="l">
               <a:defRPr sz="1400">
                 <a:solidFill>
@@ -5935,7 +5688,7 @@
               </a:defRPr>
             </a:lvl9pPr>
           </a:lstStyle>
-          <a:p xmlns:a="http://schemas.openxmlformats.org/drawingml/2006/main">
+          <a:p>
             <a:pPr marL="342900" indent="-342900" algn="l">
               <a:spcAft>
                 <a:spcPts val="600"/>
@@ -5962,7 +5715,7 @@
               <a:t>Python, FastAPI and SQLite run locally.</a:t>
             </a:r>
           </a:p>
-          <a:p xmlns:a="http://schemas.openxmlformats.org/drawingml/2006/main">
+          <a:p>
             <a:pPr marL="342900" indent="-342900" algn="l">
               <a:spcAft>
                 <a:spcPts val="600"/>
@@ -5989,7 +5742,7 @@
               <a:t>A mutation replaces only one document's index, claims and edges.</a:t>
             </a:r>
           </a:p>
-          <a:p xmlns:a="http://schemas.openxmlformats.org/drawingml/2006/main">
+          <a:p>
             <a:pPr marL="342900" indent="-342900" algn="l">
               <a:spcAft>
                 <a:spcPts val="600"/>
@@ -6016,7 +5769,7 @@
               <a:t>Batch ingestion accepts up to 2,000 documents per request.</a:t>
             </a:r>
           </a:p>
-          <a:p xmlns:a="http://schemas.openxmlformats.org/drawingml/2006/main">
+          <a:p>
             <a:pPr marL="342900" indent="-342900" algn="l">
               <a:spcAft>
                 <a:spcPts val="600"/>
@@ -6043,7 +5796,7 @@
               <a:t>Results report time, failures, ignored instructions and graph size.</a:t>
             </a:r>
           </a:p>
-          <a:p xmlns:a="http://schemas.openxmlformats.org/drawingml/2006/main">
+          <a:p>
             <a:pPr marL="342900" indent="-342900" algn="l">
               <a:spcAft>
                 <a:spcPts val="600"/>
@@ -6075,33 +5828,33 @@
       <p:sp>
         <p:nvSpPr>
           <p:cNvPr id="7" name="Economic Feasibility card">
-            <a:extLst xmlns:a="http://schemas.openxmlformats.org/drawingml/2006/main">
+            <a:extLst>
               <a:ext uri="{FF2B5EF4-FFF2-40B4-BE49-F238E27FC236}">
                 <a16:creationId xmlns:a16="http://schemas.microsoft.com/office/drawing/2014/main" id="{A7A75D63-DF7D-427D-8FD8-0933F1F0985F}"/>
               </a:ext>
             </a:extLst>
           </p:cNvPr>
           <p:cNvSpPr>
-            <a:spLocks xmlns:a="http://schemas.openxmlformats.org/drawingml/2006/main" noGrp="1"/>
-          </p:cNvSpPr>
-          <p:nvPr/>
-        </p:nvSpPr>
-        <p:spPr>
-          <a:xfrm xmlns:a="http://schemas.openxmlformats.org/drawingml/2006/main">
+            <a:spLocks noGrp="1"/>
+          </p:cNvSpPr>
+          <p:nvPr/>
+        </p:nvSpPr>
+        <p:spPr>
+          <a:xfrm>
             <a:off x="4270248" y="1691640"/>
             <a:ext cx="3657600" cy="4434840"/>
           </a:xfrm>
-          <a:prstGeom xmlns:a="http://schemas.openxmlformats.org/drawingml/2006/main" prst="roundRect">
+          <a:prstGeom prst="roundRect">
             <a:avLst>
               <a:gd name="adj" fmla="val 3000"/>
             </a:avLst>
           </a:prstGeom>
-          <a:solidFill xmlns:a="http://schemas.openxmlformats.org/drawingml/2006/main">
+          <a:solidFill>
             <a:srgbClr val="0B1A4A">
               <a:alpha val="75000"/>
             </a:srgbClr>
           </a:solidFill>
-          <a:ln xmlns:a="http://schemas.openxmlformats.org/drawingml/2006/main" w="12700">
+          <a:ln w="12700">
             <a:solidFill>
               <a:srgbClr val="1E5BFF"/>
             </a:solidFill>
@@ -6112,31 +5865,31 @@
       <p:sp>
         <p:nvSpPr>
           <p:cNvPr id="8" name="Economic Feasibility head">
-            <a:extLst xmlns:a="http://schemas.openxmlformats.org/drawingml/2006/main">
+            <a:extLst>
               <a:ext uri="{FF2B5EF4-FFF2-40B4-BE49-F238E27FC236}">
                 <a16:creationId xmlns:a16="http://schemas.microsoft.com/office/drawing/2014/main" id="{3333672E-7C7F-475C-B0F4-EA39C06A3490}"/>
               </a:ext>
             </a:extLst>
           </p:cNvPr>
           <p:cNvSpPr>
-            <a:spLocks xmlns:a="http://schemas.openxmlformats.org/drawingml/2006/main" noGrp="1"/>
-          </p:cNvSpPr>
-          <p:nvPr/>
-        </p:nvSpPr>
-        <p:spPr>
-          <a:xfrm xmlns:a="http://schemas.openxmlformats.org/drawingml/2006/main">
+            <a:spLocks noGrp="1"/>
+          </p:cNvSpPr>
+          <p:nvPr/>
+        </p:nvSpPr>
+        <p:spPr>
+          <a:xfrm>
             <a:off x="4544568" y="1874520"/>
             <a:ext cx="3108960" cy="320040"/>
           </a:xfrm>
-          <a:prstGeom xmlns:a="http://schemas.openxmlformats.org/drawingml/2006/main" prst="rect">
-            <a:avLst/>
-          </a:prstGeom>
-          <a:noFill xmlns:a="http://schemas.openxmlformats.org/drawingml/2006/main"/>
-        </p:spPr>
-        <p:txBody>
-          <a:bodyPr xmlns:a="http://schemas.openxmlformats.org/drawingml/2006/main" wrap="square" lIns="0" tIns="0" rIns="0" bIns="0" anchor="ctr"/>
-          <a:lstStyle xmlns:a="http://schemas.openxmlformats.org/drawingml/2006/main"/>
-          <a:p xmlns:a="http://schemas.openxmlformats.org/drawingml/2006/main">
+          <a:prstGeom prst="rect">
+            <a:avLst/>
+          </a:prstGeom>
+          <a:noFill/>
+        </p:spPr>
+        <p:txBody>
+          <a:bodyPr wrap="square" lIns="0" tIns="0" rIns="0" bIns="0" anchor="ctr"/>
+          <a:lstStyle/>
+          <a:p>
             <a:pPr marL="0" indent="0">
               <a:buNone/>
             </a:pPr>
@@ -6158,31 +5911,31 @@
       <p:sp>
         <p:nvSpPr>
           <p:cNvPr id="9" name="Economic Feasibility body">
-            <a:extLst xmlns:a="http://schemas.openxmlformats.org/drawingml/2006/main">
+            <a:extLst>
               <a:ext uri="{FF2B5EF4-FFF2-40B4-BE49-F238E27FC236}">
                 <a16:creationId xmlns:a16="http://schemas.microsoft.com/office/drawing/2014/main" id="{AE81AC13-FFED-427C-AD02-E1CEDCCCF22F}"/>
               </a:ext>
             </a:extLst>
           </p:cNvPr>
           <p:cNvSpPr>
-            <a:spLocks xmlns:a="http://schemas.openxmlformats.org/drawingml/2006/main" noGrp="1"/>
-          </p:cNvSpPr>
-          <p:nvPr/>
-        </p:nvSpPr>
-        <p:spPr>
-          <a:xfrm xmlns:a="http://schemas.openxmlformats.org/drawingml/2006/main">
+            <a:spLocks noGrp="1"/>
+          </p:cNvSpPr>
+          <p:nvPr/>
+        </p:nvSpPr>
+        <p:spPr>
+          <a:xfrm>
             <a:off x="4544568" y="2377440"/>
             <a:ext cx="3108960" cy="3474720"/>
           </a:xfrm>
-          <a:prstGeom xmlns:a="http://schemas.openxmlformats.org/drawingml/2006/main" prst="rect">
-            <a:avLst/>
-          </a:prstGeom>
-          <a:noFill xmlns:a="http://schemas.openxmlformats.org/drawingml/2006/main"/>
-        </p:spPr>
-        <p:txBody>
-          <a:bodyPr xmlns:a="http://schemas.openxmlformats.org/drawingml/2006/main" wrap="square" lIns="0" tIns="0" rIns="0" bIns="0" anchor="t"/>
-          <a:lstStyle xmlns:a="http://schemas.openxmlformats.org/drawingml/2006/main"/>
-          <a:p xmlns:a="http://schemas.openxmlformats.org/drawingml/2006/main">
+          <a:prstGeom prst="rect">
+            <a:avLst/>
+          </a:prstGeom>
+          <a:noFill/>
+        </p:spPr>
+        <p:txBody>
+          <a:bodyPr wrap="square" lIns="0" tIns="0" rIns="0" bIns="0" anchor="t"/>
+          <a:lstStyle/>
+          <a:p>
             <a:pPr marL="342900" indent="-342900">
               <a:spcAft>
                 <a:spcPts val="600"/>
@@ -6203,7 +5956,7 @@
             </a:r>
             <a:endParaRPr sz="1400"/>
           </a:p>
-          <a:p xmlns:a="http://schemas.openxmlformats.org/drawingml/2006/main">
+          <a:p>
             <a:pPr marL="342900" indent="-342900">
               <a:spcAft>
                 <a:spcPts val="600"/>
@@ -6224,7 +5977,7 @@
             </a:r>
             <a:endParaRPr sz="1400"/>
           </a:p>
-          <a:p xmlns:a="http://schemas.openxmlformats.org/drawingml/2006/main">
+          <a:p>
             <a:pPr marL="342900" indent="-342900">
               <a:spcAft>
                 <a:spcPts val="600"/>
@@ -6250,33 +6003,33 @@
       <p:sp>
         <p:nvSpPr>
           <p:cNvPr id="10" name="Operational Viability card">
-            <a:extLst xmlns:a="http://schemas.openxmlformats.org/drawingml/2006/main">
+            <a:extLst>
               <a:ext uri="{FF2B5EF4-FFF2-40B4-BE49-F238E27FC236}">
                 <a16:creationId xmlns:a16="http://schemas.microsoft.com/office/drawing/2014/main" id="{B5759BA6-FE8F-4F7D-A38E-6C5E0AF235DD}"/>
               </a:ext>
             </a:extLst>
           </p:cNvPr>
           <p:cNvSpPr>
-            <a:spLocks xmlns:a="http://schemas.openxmlformats.org/drawingml/2006/main" noGrp="1"/>
-          </p:cNvSpPr>
-          <p:nvPr/>
-        </p:nvSpPr>
-        <p:spPr>
-          <a:xfrm xmlns:a="http://schemas.openxmlformats.org/drawingml/2006/main">
+            <a:spLocks noGrp="1"/>
+          </p:cNvSpPr>
+          <p:nvPr/>
+        </p:nvSpPr>
+        <p:spPr>
+          <a:xfrm>
             <a:off x="8083296" y="1691640"/>
             <a:ext cx="3657600" cy="4434840"/>
           </a:xfrm>
-          <a:prstGeom xmlns:a="http://schemas.openxmlformats.org/drawingml/2006/main" prst="roundRect">
+          <a:prstGeom prst="roundRect">
             <a:avLst>
               <a:gd name="adj" fmla="val 3000"/>
             </a:avLst>
           </a:prstGeom>
-          <a:solidFill xmlns:a="http://schemas.openxmlformats.org/drawingml/2006/main">
+          <a:solidFill>
             <a:srgbClr val="0B1A4A">
               <a:alpha val="75000"/>
             </a:srgbClr>
           </a:solidFill>
-          <a:ln xmlns:a="http://schemas.openxmlformats.org/drawingml/2006/main" w="12700">
+          <a:ln w="12700">
             <a:solidFill>
               <a:srgbClr val="1E5BFF"/>
             </a:solidFill>
@@ -6287,31 +6040,31 @@
       <p:sp>
         <p:nvSpPr>
           <p:cNvPr id="11" name="Operational Viability head">
-            <a:extLst xmlns:a="http://schemas.openxmlformats.org/drawingml/2006/main">
+            <a:extLst>
               <a:ext uri="{FF2B5EF4-FFF2-40B4-BE49-F238E27FC236}">
                 <a16:creationId xmlns:a16="http://schemas.microsoft.com/office/drawing/2014/main" id="{F278E489-FE61-4DF6-90BF-A2184B4CED01}"/>
               </a:ext>
             </a:extLst>
           </p:cNvPr>
           <p:cNvSpPr>
-            <a:spLocks xmlns:a="http://schemas.openxmlformats.org/drawingml/2006/main" noGrp="1"/>
-          </p:cNvSpPr>
-          <p:nvPr/>
-        </p:nvSpPr>
-        <p:spPr>
-          <a:xfrm xmlns:a="http://schemas.openxmlformats.org/drawingml/2006/main">
+            <a:spLocks noGrp="1"/>
+          </p:cNvSpPr>
+          <p:nvPr/>
+        </p:nvSpPr>
+        <p:spPr>
+          <a:xfrm>
             <a:off x="8357616" y="1874520"/>
             <a:ext cx="3108960" cy="320040"/>
           </a:xfrm>
-          <a:prstGeom xmlns:a="http://schemas.openxmlformats.org/drawingml/2006/main" prst="rect">
-            <a:avLst/>
-          </a:prstGeom>
-          <a:noFill xmlns:a="http://schemas.openxmlformats.org/drawingml/2006/main"/>
-        </p:spPr>
-        <p:txBody>
-          <a:bodyPr xmlns:a="http://schemas.openxmlformats.org/drawingml/2006/main" wrap="square" lIns="0" tIns="0" rIns="0" bIns="0" anchor="ctr"/>
-          <a:lstStyle xmlns:a="http://schemas.openxmlformats.org/drawingml/2006/main"/>
-          <a:p xmlns:a="http://schemas.openxmlformats.org/drawingml/2006/main">
+          <a:prstGeom prst="rect">
+            <a:avLst/>
+          </a:prstGeom>
+          <a:noFill/>
+        </p:spPr>
+        <p:txBody>
+          <a:bodyPr wrap="square" lIns="0" tIns="0" rIns="0" bIns="0" anchor="ctr"/>
+          <a:lstStyle/>
+          <a:p>
             <a:pPr marL="0" indent="0">
               <a:buNone/>
             </a:pPr>
@@ -6333,31 +6086,31 @@
       <p:sp>
         <p:nvSpPr>
           <p:cNvPr id="12" name="Operational Viability body">
-            <a:extLst xmlns:a="http://schemas.openxmlformats.org/drawingml/2006/main">
+            <a:extLst>
               <a:ext uri="{FF2B5EF4-FFF2-40B4-BE49-F238E27FC236}">
                 <a16:creationId xmlns:a16="http://schemas.microsoft.com/office/drawing/2014/main" id="{73EAD07D-1697-43B4-89CC-5FCD50FB5832}"/>
               </a:ext>
             </a:extLst>
           </p:cNvPr>
           <p:cNvSpPr>
-            <a:spLocks xmlns:a="http://schemas.openxmlformats.org/drawingml/2006/main" noGrp="1"/>
-          </p:cNvSpPr>
-          <p:nvPr/>
-        </p:nvSpPr>
-        <p:spPr>
-          <a:xfrm xmlns:a="http://schemas.openxmlformats.org/drawingml/2006/main">
+            <a:spLocks noGrp="1"/>
+          </p:cNvSpPr>
+          <p:nvPr/>
+        </p:nvSpPr>
+        <p:spPr>
+          <a:xfrm>
             <a:off x="8357616" y="2377440"/>
             <a:ext cx="3108960" cy="3474720"/>
           </a:xfrm>
-          <a:prstGeom xmlns:a="http://schemas.openxmlformats.org/drawingml/2006/main" prst="rect">
-            <a:avLst/>
-          </a:prstGeom>
-          <a:noFill xmlns:a="http://schemas.openxmlformats.org/drawingml/2006/main"/>
-        </p:spPr>
-        <p:txBody>
-          <a:bodyPr xmlns:a="http://schemas.openxmlformats.org/drawingml/2006/main" wrap="square" lIns="0" tIns="0" rIns="0" bIns="0" anchor="t"/>
-          <a:lstStyle xmlns:a="http://schemas.openxmlformats.org/drawingml/2006/main"/>
-          <a:p xmlns:a="http://schemas.openxmlformats.org/drawingml/2006/main">
+          <a:prstGeom prst="rect">
+            <a:avLst/>
+          </a:prstGeom>
+          <a:noFill/>
+        </p:spPr>
+        <p:txBody>
+          <a:bodyPr wrap="square" lIns="0" tIns="0" rIns="0" bIns="0" anchor="t"/>
+          <a:lstStyle/>
+          <a:p>
             <a:pPr marL="342900" indent="-342900">
               <a:spcAft>
                 <a:spcPts val="600"/>
@@ -6378,7 +6131,7 @@
             </a:r>
             <a:endParaRPr sz="1400"/>
           </a:p>
-          <a:p xmlns:a="http://schemas.openxmlformats.org/drawingml/2006/main">
+          <a:p>
             <a:pPr marL="342900" indent="-342900">
               <a:spcAft>
                 <a:spcPts val="600"/>
@@ -6399,7 +6152,7 @@
             </a:r>
             <a:endParaRPr sz="1400"/>
           </a:p>
-          <a:p xmlns:a="http://schemas.openxmlformats.org/drawingml/2006/main">
+          <a:p>
             <a:pPr marL="342900" indent="-342900">
               <a:spcAft>
                 <a:spcPts val="600"/>
@@ -6425,31 +6178,31 @@
       <p:sp>
         <p:nvSpPr>
           <p:cNvPr id="25" name="Slide Number Placeholder 0">
-            <a:extLst xmlns:a="http://schemas.openxmlformats.org/drawingml/2006/main">
+            <a:extLst>
               <a:ext uri="{FF2B5EF4-FFF2-40B4-BE49-F238E27FC236}">
                 <a16:creationId xmlns:a16="http://schemas.microsoft.com/office/drawing/2014/main" id="{8107E5C4-5414-4027-86D6-8FE5EAD1A816}"/>
               </a:ext>
             </a:extLst>
           </p:cNvPr>
           <p:cNvSpPr>
-            <a:spLocks xmlns:a="http://schemas.openxmlformats.org/drawingml/2006/main" noGrp="1"/>
+            <a:spLocks noGrp="1"/>
           </p:cNvSpPr>
           <p:nvPr>
             <p:ph type="sldNum" idx="4294967295"/>
           </p:nvPr>
         </p:nvSpPr>
         <p:spPr>
-          <a:xfrm xmlns:a="http://schemas.openxmlformats.org/drawingml/2006/main">
+          <a:xfrm>
             <a:off x="11155680" y="6428232"/>
             <a:ext cx="576072" cy="274320"/>
           </a:xfrm>
-          <a:prstGeom xmlns:a="http://schemas.openxmlformats.org/drawingml/2006/main" prst="rect">
-            <a:avLst/>
-          </a:prstGeom>
-        </p:spPr>
-        <p:txBody>
-          <a:bodyPr xmlns:a="http://schemas.openxmlformats.org/drawingml/2006/main"/>
-          <a:lstStyle xmlns:a="http://schemas.openxmlformats.org/drawingml/2006/main">
+          <a:prstGeom prst="rect">
+            <a:avLst/>
+          </a:prstGeom>
+        </p:spPr>
+        <p:txBody>
+          <a:bodyPr/>
+          <a:lstStyle>
             <a:lvl1pPr>
               <a:buNone/>
               <a:defRPr sz="1000">
@@ -6462,7 +6215,7 @@
               </a:defRPr>
             </a:lvl1pPr>
           </a:lstStyle>
-          <a:p xmlns:a="http://schemas.openxmlformats.org/drawingml/2006/main">
+          <a:p>
             <a:pPr algn="r">
               <a:buNone/>
             </a:pPr>
@@ -6481,11 +6234,14 @@
       </p:ext>
     </p:extLst>
   </p:cSld>
+  <p:clrMapOvr>
+    <a:masterClrMapping/>
+  </p:clrMapOvr>
 </p:sld>
 </file>
 
 <file path=ppt/slides/slide6.xml><?xml version="1.0" encoding="utf-8"?>
-<p:sld xmlns:p="http://schemas.openxmlformats.org/presentationml/2006/main">
+<p:sld xmlns:a="http://schemas.openxmlformats.org/drawingml/2006/main" xmlns:r="http://schemas.openxmlformats.org/officeDocument/2006/relationships" xmlns:p="http://schemas.openxmlformats.org/presentationml/2006/main">
   <p:cSld>
     <p:spTree>
       <p:nvGrpSpPr>
@@ -6494,36 +6250,41 @@
         <p:nvPr/>
       </p:nvGrpSpPr>
       <p:grpSpPr>
-        <a:xfrm xmlns:a="http://schemas.openxmlformats.org/drawingml/2006/main"/>
+        <a:xfrm>
+          <a:off x="0" y="0"/>
+          <a:ext cx="0" cy="0"/>
+          <a:chOff x="0" y="0"/>
+          <a:chExt cx="0" cy="0"/>
+        </a:xfrm>
       </p:grpSpPr>
       <p:sp>
         <p:nvSpPr>
           <p:cNvPr id="2" name="Text 0">
-            <a:extLst xmlns:a="http://schemas.openxmlformats.org/drawingml/2006/main">
+            <a:extLst>
               <a:ext uri="{FF2B5EF4-FFF2-40B4-BE49-F238E27FC236}">
                 <a16:creationId xmlns:a16="http://schemas.microsoft.com/office/drawing/2014/main" id="{49976D94-CDF9-4B2E-9107-53723F2670B1}"/>
               </a:ext>
             </a:extLst>
           </p:cNvPr>
           <p:cNvSpPr>
-            <a:spLocks xmlns:a="http://schemas.openxmlformats.org/drawingml/2006/main" noGrp="1"/>
-          </p:cNvSpPr>
-          <p:nvPr/>
-        </p:nvSpPr>
-        <p:spPr>
-          <a:xfrm xmlns:a="http://schemas.openxmlformats.org/drawingml/2006/main">
+            <a:spLocks noGrp="1"/>
+          </p:cNvSpPr>
+          <p:nvPr/>
+        </p:nvSpPr>
+        <p:spPr>
+          <a:xfrm>
             <a:off x="457200" y="960120"/>
             <a:ext cx="11274552" cy="731520"/>
           </a:xfrm>
-          <a:prstGeom xmlns:a="http://schemas.openxmlformats.org/drawingml/2006/main" prst="rect">
-            <a:avLst/>
-          </a:prstGeom>
-          <a:noFill xmlns:a="http://schemas.openxmlformats.org/drawingml/2006/main"/>
-        </p:spPr>
-        <p:txBody>
-          <a:bodyPr xmlns:a="http://schemas.openxmlformats.org/drawingml/2006/main" wrap="square" lIns="0" tIns="0" rIns="0" bIns="0" anchor="ctr"/>
-          <a:lstStyle xmlns:a="http://schemas.openxmlformats.org/drawingml/2006/main"/>
-          <a:p xmlns:a="http://schemas.openxmlformats.org/drawingml/2006/main">
+          <a:prstGeom prst="rect">
+            <a:avLst/>
+          </a:prstGeom>
+          <a:noFill/>
+        </p:spPr>
+        <p:txBody>
+          <a:bodyPr wrap="square" lIns="0" tIns="0" rIns="0" bIns="0" anchor="ctr"/>
+          <a:lstStyle/>
+          <a:p>
             <a:pPr marL="0" indent="0">
               <a:buNone/>
             </a:pPr>
@@ -6545,31 +6306,31 @@
       <p:sp>
         <p:nvSpPr>
           <p:cNvPr id="3" name="Team tag">
-            <a:extLst xmlns:a="http://schemas.openxmlformats.org/drawingml/2006/main">
+            <a:extLst>
               <a:ext uri="{FF2B5EF4-FFF2-40B4-BE49-F238E27FC236}">
                 <a16:creationId xmlns:a16="http://schemas.microsoft.com/office/drawing/2014/main" id="{D513DB1C-2F83-4220-A533-7474E89D6D8A}"/>
               </a:ext>
             </a:extLst>
           </p:cNvPr>
           <p:cNvSpPr>
-            <a:spLocks xmlns:a="http://schemas.openxmlformats.org/drawingml/2006/main" noGrp="1"/>
-          </p:cNvSpPr>
-          <p:nvPr/>
-        </p:nvSpPr>
-        <p:spPr>
-          <a:xfrm xmlns:a="http://schemas.openxmlformats.org/drawingml/2006/main">
+            <a:spLocks noGrp="1"/>
+          </p:cNvSpPr>
+          <p:nvPr/>
+        </p:nvSpPr>
+        <p:spPr>
+          <a:xfrm>
             <a:off x="8503920" y="1097280"/>
             <a:ext cx="3227832" cy="320040"/>
           </a:xfrm>
-          <a:prstGeom xmlns:a="http://schemas.openxmlformats.org/drawingml/2006/main" prst="rect">
-            <a:avLst/>
-          </a:prstGeom>
-          <a:noFill xmlns:a="http://schemas.openxmlformats.org/drawingml/2006/main"/>
-        </p:spPr>
-        <p:txBody>
-          <a:bodyPr xmlns:a="http://schemas.openxmlformats.org/drawingml/2006/main" wrap="square" lIns="0" tIns="0" rIns="0" bIns="0" anchor="ctr"/>
-          <a:lstStyle xmlns:a="http://schemas.openxmlformats.org/drawingml/2006/main"/>
-          <a:p xmlns:a="http://schemas.openxmlformats.org/drawingml/2006/main">
+          <a:prstGeom prst="rect">
+            <a:avLst/>
+          </a:prstGeom>
+          <a:noFill/>
+        </p:spPr>
+        <p:txBody>
+          <a:bodyPr wrap="square" lIns="0" tIns="0" rIns="0" bIns="0" anchor="ctr"/>
+          <a:lstStyle/>
+          <a:p>
             <a:pPr marL="0" indent="0" algn="r">
               <a:buNone/>
             </a:pPr>
@@ -6591,33 +6352,33 @@
       <p:sp>
         <p:nvSpPr>
           <p:cNvPr id="4" name="Social Impact card">
-            <a:extLst xmlns:a="http://schemas.openxmlformats.org/drawingml/2006/main">
+            <a:extLst>
               <a:ext uri="{FF2B5EF4-FFF2-40B4-BE49-F238E27FC236}">
                 <a16:creationId xmlns:a16="http://schemas.microsoft.com/office/drawing/2014/main" id="{C192C4B7-72F7-4389-A573-175365065134}"/>
               </a:ext>
             </a:extLst>
           </p:cNvPr>
           <p:cNvSpPr>
-            <a:spLocks xmlns:a="http://schemas.openxmlformats.org/drawingml/2006/main" noGrp="1"/>
-          </p:cNvSpPr>
-          <p:nvPr/>
-        </p:nvSpPr>
-        <p:spPr>
-          <a:xfrm xmlns:a="http://schemas.openxmlformats.org/drawingml/2006/main">
+            <a:spLocks noGrp="1"/>
+          </p:cNvSpPr>
+          <p:nvPr/>
+        </p:nvSpPr>
+        <p:spPr>
+          <a:xfrm>
             <a:off x="457200" y="1691640"/>
             <a:ext cx="5486400" cy="2103120"/>
           </a:xfrm>
-          <a:prstGeom xmlns:a="http://schemas.openxmlformats.org/drawingml/2006/main" prst="roundRect">
+          <a:prstGeom prst="roundRect">
             <a:avLst>
               <a:gd name="adj" fmla="val 5217"/>
             </a:avLst>
           </a:prstGeom>
-          <a:solidFill xmlns:a="http://schemas.openxmlformats.org/drawingml/2006/main">
+          <a:solidFill>
             <a:srgbClr val="0B1A4A">
               <a:alpha val="75000"/>
             </a:srgbClr>
           </a:solidFill>
-          <a:ln xmlns:a="http://schemas.openxmlformats.org/drawingml/2006/main" w="12700">
+          <a:ln w="12700">
             <a:solidFill>
               <a:srgbClr val="1E5BFF"/>
             </a:solidFill>
@@ -6628,29 +6389,29 @@
       <p:sp>
         <p:nvSpPr>
           <p:cNvPr id="5" name="Social Impact badge">
-            <a:extLst xmlns:a="http://schemas.openxmlformats.org/drawingml/2006/main">
+            <a:extLst>
               <a:ext uri="{FF2B5EF4-FFF2-40B4-BE49-F238E27FC236}">
                 <a16:creationId xmlns:a16="http://schemas.microsoft.com/office/drawing/2014/main" id="{C5566014-5924-45A0-8383-9FFF71125875}"/>
               </a:ext>
             </a:extLst>
           </p:cNvPr>
           <p:cNvSpPr>
-            <a:spLocks xmlns:a="http://schemas.openxmlformats.org/drawingml/2006/main" noGrp="1"/>
-          </p:cNvSpPr>
-          <p:nvPr/>
-        </p:nvSpPr>
-        <p:spPr>
-          <a:xfrm xmlns:a="http://schemas.openxmlformats.org/drawingml/2006/main">
+            <a:spLocks noGrp="1"/>
+          </p:cNvSpPr>
+          <p:nvPr/>
+        </p:nvSpPr>
+        <p:spPr>
+          <a:xfrm>
             <a:off x="731520" y="1965960"/>
             <a:ext cx="548640" cy="548640"/>
           </a:xfrm>
-          <a:prstGeom xmlns:a="http://schemas.openxmlformats.org/drawingml/2006/main" prst="ellipse">
-            <a:avLst/>
-          </a:prstGeom>
-          <a:solidFill xmlns:a="http://schemas.openxmlformats.org/drawingml/2006/main">
+          <a:prstGeom prst="ellipse">
+            <a:avLst/>
+          </a:prstGeom>
+          <a:solidFill>
             <a:schemeClr val="accent1"/>
           </a:solidFill>
-          <a:ln xmlns:a="http://schemas.openxmlformats.org/drawingml/2006/main" w="12700">
+          <a:ln w="12700">
             <a:solidFill>
               <a:srgbClr val="FFFFFF"/>
             </a:solidFill>
@@ -6661,31 +6422,31 @@
       <p:sp>
         <p:nvSpPr>
           <p:cNvPr id="6" name="Text 4">
-            <a:extLst xmlns:a="http://schemas.openxmlformats.org/drawingml/2006/main">
+            <a:extLst>
               <a:ext uri="{FF2B5EF4-FFF2-40B4-BE49-F238E27FC236}">
                 <a16:creationId xmlns:a16="http://schemas.microsoft.com/office/drawing/2014/main" id="{7B284CBA-4B94-41EC-BB97-501CB7E9F40F}"/>
               </a:ext>
             </a:extLst>
           </p:cNvPr>
           <p:cNvSpPr>
-            <a:spLocks xmlns:a="http://schemas.openxmlformats.org/drawingml/2006/main" noGrp="1"/>
-          </p:cNvSpPr>
-          <p:nvPr/>
-        </p:nvSpPr>
-        <p:spPr>
-          <a:xfrm xmlns:a="http://schemas.openxmlformats.org/drawingml/2006/main">
+            <a:spLocks noGrp="1"/>
+          </p:cNvSpPr>
+          <p:nvPr/>
+        </p:nvSpPr>
+        <p:spPr>
+          <a:xfrm>
             <a:off x="731520" y="1965960"/>
             <a:ext cx="548640" cy="548640"/>
           </a:xfrm>
-          <a:prstGeom xmlns:a="http://schemas.openxmlformats.org/drawingml/2006/main" prst="rect">
-            <a:avLst/>
-          </a:prstGeom>
-          <a:noFill xmlns:a="http://schemas.openxmlformats.org/drawingml/2006/main"/>
-        </p:spPr>
-        <p:txBody>
-          <a:bodyPr xmlns:a="http://schemas.openxmlformats.org/drawingml/2006/main" wrap="square" lIns="0" tIns="0" rIns="0" bIns="0" anchor="ctr"/>
-          <a:lstStyle xmlns:a="http://schemas.openxmlformats.org/drawingml/2006/main"/>
-          <a:p xmlns:a="http://schemas.openxmlformats.org/drawingml/2006/main">
+          <a:prstGeom prst="rect">
+            <a:avLst/>
+          </a:prstGeom>
+          <a:noFill/>
+        </p:spPr>
+        <p:txBody>
+          <a:bodyPr wrap="square" lIns="0" tIns="0" rIns="0" bIns="0" anchor="ctr"/>
+          <a:lstStyle/>
+          <a:p>
             <a:pPr marL="0" indent="0" algn="ctr">
               <a:buNone/>
             </a:pPr>
@@ -6707,31 +6468,31 @@
       <p:sp>
         <p:nvSpPr>
           <p:cNvPr id="7" name="Social Impact head">
-            <a:extLst xmlns:a="http://schemas.openxmlformats.org/drawingml/2006/main">
+            <a:extLst>
               <a:ext uri="{FF2B5EF4-FFF2-40B4-BE49-F238E27FC236}">
                 <a16:creationId xmlns:a16="http://schemas.microsoft.com/office/drawing/2014/main" id="{13DBEE0A-6B27-44CC-B1FD-C08CD8EB5500}"/>
               </a:ext>
             </a:extLst>
           </p:cNvPr>
           <p:cNvSpPr>
-            <a:spLocks xmlns:a="http://schemas.openxmlformats.org/drawingml/2006/main" noGrp="1"/>
-          </p:cNvSpPr>
-          <p:nvPr/>
-        </p:nvSpPr>
-        <p:spPr>
-          <a:xfrm xmlns:a="http://schemas.openxmlformats.org/drawingml/2006/main">
+            <a:spLocks noGrp="1"/>
+          </p:cNvSpPr>
+          <p:nvPr/>
+        </p:nvSpPr>
+        <p:spPr>
+          <a:xfrm>
             <a:off x="1554480" y="2057400"/>
             <a:ext cx="4114800" cy="320040"/>
           </a:xfrm>
-          <a:prstGeom xmlns:a="http://schemas.openxmlformats.org/drawingml/2006/main" prst="rect">
-            <a:avLst/>
-          </a:prstGeom>
-          <a:noFill xmlns:a="http://schemas.openxmlformats.org/drawingml/2006/main"/>
-        </p:spPr>
-        <p:txBody>
-          <a:bodyPr xmlns:a="http://schemas.openxmlformats.org/drawingml/2006/main" wrap="square" lIns="0" tIns="0" rIns="0" bIns="0" anchor="ctr"/>
-          <a:lstStyle xmlns:a="http://schemas.openxmlformats.org/drawingml/2006/main"/>
-          <a:p xmlns:a="http://schemas.openxmlformats.org/drawingml/2006/main">
+          <a:prstGeom prst="rect">
+            <a:avLst/>
+          </a:prstGeom>
+          <a:noFill/>
+        </p:spPr>
+        <p:txBody>
+          <a:bodyPr wrap="square" lIns="0" tIns="0" rIns="0" bIns="0" anchor="ctr"/>
+          <a:lstStyle/>
+          <a:p>
             <a:pPr marL="0" indent="0">
               <a:buNone/>
             </a:pPr>
@@ -6753,31 +6514,31 @@
       <p:sp>
         <p:nvSpPr>
           <p:cNvPr id="8" name="Social Impact body">
-            <a:extLst xmlns:a="http://schemas.openxmlformats.org/drawingml/2006/main">
+            <a:extLst>
               <a:ext uri="{FF2B5EF4-FFF2-40B4-BE49-F238E27FC236}">
                 <a16:creationId xmlns:a16="http://schemas.microsoft.com/office/drawing/2014/main" id="{6F7AC066-E267-444A-B3BB-3D6B81979588}"/>
               </a:ext>
             </a:extLst>
           </p:cNvPr>
           <p:cNvSpPr>
-            <a:spLocks xmlns:a="http://schemas.openxmlformats.org/drawingml/2006/main" noGrp="1"/>
-          </p:cNvSpPr>
-          <p:nvPr/>
-        </p:nvSpPr>
-        <p:spPr>
-          <a:xfrm xmlns:a="http://schemas.openxmlformats.org/drawingml/2006/main">
+            <a:spLocks noGrp="1"/>
+          </p:cNvSpPr>
+          <p:nvPr/>
+        </p:nvSpPr>
+        <p:spPr>
+          <a:xfrm>
             <a:off x="1554480" y="2514600"/>
             <a:ext cx="4114800" cy="1097280"/>
           </a:xfrm>
-          <a:prstGeom xmlns:a="http://schemas.openxmlformats.org/drawingml/2006/main" prst="rect">
-            <a:avLst/>
-          </a:prstGeom>
-          <a:noFill xmlns:a="http://schemas.openxmlformats.org/drawingml/2006/main"/>
-        </p:spPr>
-        <p:txBody>
-          <a:bodyPr xmlns:a="http://schemas.openxmlformats.org/drawingml/2006/main" wrap="square" lIns="0" tIns="0" rIns="0" bIns="0" anchor="t"/>
-          <a:lstStyle xmlns:a="http://schemas.openxmlformats.org/drawingml/2006/main"/>
-          <a:p xmlns:a="http://schemas.openxmlformats.org/drawingml/2006/main">
+          <a:prstGeom prst="rect">
+            <a:avLst/>
+          </a:prstGeom>
+          <a:noFill/>
+        </p:spPr>
+        <p:txBody>
+          <a:bodyPr wrap="square" lIns="0" tIns="0" rIns="0" bIns="0" anchor="t"/>
+          <a:lstStyle/>
+          <a:p>
             <a:pPr marL="0" indent="0">
               <a:buNone/>
             </a:pPr>
@@ -6794,7 +6555,7 @@
             </a:r>
             <a:endParaRPr sz="1400"/>
           </a:p>
-          <a:p xmlns:a="http://schemas.openxmlformats.org/drawingml/2006/main">
+          <a:p>
             <a:pPr marL="0" indent="0">
               <a:buNone/>
             </a:pPr>
@@ -6816,33 +6577,33 @@
       <p:sp>
         <p:nvSpPr>
           <p:cNvPr id="9" name="Environmental Impact card">
-            <a:extLst xmlns:a="http://schemas.openxmlformats.org/drawingml/2006/main">
+            <a:extLst>
               <a:ext uri="{FF2B5EF4-FFF2-40B4-BE49-F238E27FC236}">
                 <a16:creationId xmlns:a16="http://schemas.microsoft.com/office/drawing/2014/main" id="{7207B70D-F021-4860-AE3A-217851525400}"/>
               </a:ext>
             </a:extLst>
           </p:cNvPr>
           <p:cNvSpPr>
-            <a:spLocks xmlns:a="http://schemas.openxmlformats.org/drawingml/2006/main" noGrp="1"/>
-          </p:cNvSpPr>
-          <p:nvPr/>
-        </p:nvSpPr>
-        <p:spPr>
-          <a:xfrm xmlns:a="http://schemas.openxmlformats.org/drawingml/2006/main">
+            <a:spLocks noGrp="1"/>
+          </p:cNvSpPr>
+          <p:nvPr/>
+        </p:nvSpPr>
+        <p:spPr>
+          <a:xfrm>
             <a:off x="6099048" y="1691640"/>
             <a:ext cx="5486400" cy="2103120"/>
           </a:xfrm>
-          <a:prstGeom xmlns:a="http://schemas.openxmlformats.org/drawingml/2006/main" prst="roundRect">
+          <a:prstGeom prst="roundRect">
             <a:avLst>
               <a:gd name="adj" fmla="val 5217"/>
             </a:avLst>
           </a:prstGeom>
-          <a:solidFill xmlns:a="http://schemas.openxmlformats.org/drawingml/2006/main">
+          <a:solidFill>
             <a:srgbClr val="0B1A4A">
               <a:alpha val="75000"/>
             </a:srgbClr>
           </a:solidFill>
-          <a:ln xmlns:a="http://schemas.openxmlformats.org/drawingml/2006/main" w="12700">
+          <a:ln w="12700">
             <a:solidFill>
               <a:srgbClr val="1E5BFF"/>
             </a:solidFill>
@@ -6853,29 +6614,29 @@
       <p:sp>
         <p:nvSpPr>
           <p:cNvPr id="10" name="Environmental Impact badge">
-            <a:extLst xmlns:a="http://schemas.openxmlformats.org/drawingml/2006/main">
+            <a:extLst>
               <a:ext uri="{FF2B5EF4-FFF2-40B4-BE49-F238E27FC236}">
                 <a16:creationId xmlns:a16="http://schemas.microsoft.com/office/drawing/2014/main" id="{9FB68E70-8E96-41C6-BD28-959D8DD4B491}"/>
               </a:ext>
             </a:extLst>
           </p:cNvPr>
           <p:cNvSpPr>
-            <a:spLocks xmlns:a="http://schemas.openxmlformats.org/drawingml/2006/main" noGrp="1"/>
-          </p:cNvSpPr>
-          <p:nvPr/>
-        </p:nvSpPr>
-        <p:spPr>
-          <a:xfrm xmlns:a="http://schemas.openxmlformats.org/drawingml/2006/main">
+            <a:spLocks noGrp="1"/>
+          </p:cNvSpPr>
+          <p:nvPr/>
+        </p:nvSpPr>
+        <p:spPr>
+          <a:xfrm>
             <a:off x="6373368" y="1965960"/>
             <a:ext cx="548640" cy="548640"/>
           </a:xfrm>
-          <a:prstGeom xmlns:a="http://schemas.openxmlformats.org/drawingml/2006/main" prst="ellipse">
-            <a:avLst/>
-          </a:prstGeom>
-          <a:solidFill xmlns:a="http://schemas.openxmlformats.org/drawingml/2006/main">
+          <a:prstGeom prst="ellipse">
+            <a:avLst/>
+          </a:prstGeom>
+          <a:solidFill>
             <a:schemeClr val="accent1"/>
           </a:solidFill>
-          <a:ln xmlns:a="http://schemas.openxmlformats.org/drawingml/2006/main" w="12700">
+          <a:ln w="12700">
             <a:solidFill>
               <a:srgbClr val="FFFFFF"/>
             </a:solidFill>
@@ -6886,31 +6647,31 @@
       <p:sp>
         <p:nvSpPr>
           <p:cNvPr id="11" name="Text 9">
-            <a:extLst xmlns:a="http://schemas.openxmlformats.org/drawingml/2006/main">
+            <a:extLst>
               <a:ext uri="{FF2B5EF4-FFF2-40B4-BE49-F238E27FC236}">
                 <a16:creationId xmlns:a16="http://schemas.microsoft.com/office/drawing/2014/main" id="{D96E2EEE-96DD-4183-9A05-778FC7788000}"/>
               </a:ext>
             </a:extLst>
           </p:cNvPr>
           <p:cNvSpPr>
-            <a:spLocks xmlns:a="http://schemas.openxmlformats.org/drawingml/2006/main" noGrp="1"/>
-          </p:cNvSpPr>
-          <p:nvPr/>
-        </p:nvSpPr>
-        <p:spPr>
-          <a:xfrm xmlns:a="http://schemas.openxmlformats.org/drawingml/2006/main">
+            <a:spLocks noGrp="1"/>
+          </p:cNvSpPr>
+          <p:nvPr/>
+        </p:nvSpPr>
+        <p:spPr>
+          <a:xfrm>
             <a:off x="6373368" y="1965960"/>
             <a:ext cx="548640" cy="548640"/>
           </a:xfrm>
-          <a:prstGeom xmlns:a="http://schemas.openxmlformats.org/drawingml/2006/main" prst="rect">
-            <a:avLst/>
-          </a:prstGeom>
-          <a:noFill xmlns:a="http://schemas.openxmlformats.org/drawingml/2006/main"/>
-        </p:spPr>
-        <p:txBody>
-          <a:bodyPr xmlns:a="http://schemas.openxmlformats.org/drawingml/2006/main" wrap="square" lIns="0" tIns="0" rIns="0" bIns="0" anchor="ctr"/>
-          <a:lstStyle xmlns:a="http://schemas.openxmlformats.org/drawingml/2006/main"/>
-          <a:p xmlns:a="http://schemas.openxmlformats.org/drawingml/2006/main">
+          <a:prstGeom prst="rect">
+            <a:avLst/>
+          </a:prstGeom>
+          <a:noFill/>
+        </p:spPr>
+        <p:txBody>
+          <a:bodyPr wrap="square" lIns="0" tIns="0" rIns="0" bIns="0" anchor="ctr"/>
+          <a:lstStyle/>
+          <a:p>
             <a:pPr marL="0" indent="0" algn="ctr">
               <a:buNone/>
             </a:pPr>
@@ -6932,31 +6693,31 @@
       <p:sp>
         <p:nvSpPr>
           <p:cNvPr id="12" name="Environmental Impact head">
-            <a:extLst xmlns:a="http://schemas.openxmlformats.org/drawingml/2006/main">
+            <a:extLst>
               <a:ext uri="{FF2B5EF4-FFF2-40B4-BE49-F238E27FC236}">
                 <a16:creationId xmlns:a16="http://schemas.microsoft.com/office/drawing/2014/main" id="{CD71DD86-6980-4F7A-A04A-11589859CEBE}"/>
               </a:ext>
             </a:extLst>
           </p:cNvPr>
           <p:cNvSpPr>
-            <a:spLocks xmlns:a="http://schemas.openxmlformats.org/drawingml/2006/main" noGrp="1"/>
-          </p:cNvSpPr>
-          <p:nvPr/>
-        </p:nvSpPr>
-        <p:spPr>
-          <a:xfrm xmlns:a="http://schemas.openxmlformats.org/drawingml/2006/main">
+            <a:spLocks noGrp="1"/>
+          </p:cNvSpPr>
+          <p:nvPr/>
+        </p:nvSpPr>
+        <p:spPr>
+          <a:xfrm>
             <a:off x="7196328" y="2057400"/>
             <a:ext cx="4114800" cy="320040"/>
           </a:xfrm>
-          <a:prstGeom xmlns:a="http://schemas.openxmlformats.org/drawingml/2006/main" prst="rect">
-            <a:avLst/>
-          </a:prstGeom>
-          <a:noFill xmlns:a="http://schemas.openxmlformats.org/drawingml/2006/main"/>
-        </p:spPr>
-        <p:txBody>
-          <a:bodyPr xmlns:a="http://schemas.openxmlformats.org/drawingml/2006/main" wrap="square" lIns="0" tIns="0" rIns="0" bIns="0" anchor="ctr"/>
-          <a:lstStyle xmlns:a="http://schemas.openxmlformats.org/drawingml/2006/main"/>
-          <a:p xmlns:a="http://schemas.openxmlformats.org/drawingml/2006/main">
+          <a:prstGeom prst="rect">
+            <a:avLst/>
+          </a:prstGeom>
+          <a:noFill/>
+        </p:spPr>
+        <p:txBody>
+          <a:bodyPr wrap="square" lIns="0" tIns="0" rIns="0" bIns="0" anchor="ctr"/>
+          <a:lstStyle/>
+          <a:p>
             <a:pPr marL="0" indent="0">
               <a:buNone/>
             </a:pPr>
@@ -6978,31 +6739,31 @@
       <p:sp>
         <p:nvSpPr>
           <p:cNvPr id="13" name="Environmental Impact body">
-            <a:extLst xmlns:a="http://schemas.openxmlformats.org/drawingml/2006/main">
+            <a:extLst>
               <a:ext uri="{FF2B5EF4-FFF2-40B4-BE49-F238E27FC236}">
                 <a16:creationId xmlns:a16="http://schemas.microsoft.com/office/drawing/2014/main" id="{221396DA-109D-47CB-99DC-E15D90BE21D6}"/>
               </a:ext>
             </a:extLst>
           </p:cNvPr>
           <p:cNvSpPr>
-            <a:spLocks xmlns:a="http://schemas.openxmlformats.org/drawingml/2006/main" noGrp="1"/>
-          </p:cNvSpPr>
-          <p:nvPr/>
-        </p:nvSpPr>
-        <p:spPr>
-          <a:xfrm xmlns:a="http://schemas.openxmlformats.org/drawingml/2006/main">
+            <a:spLocks noGrp="1"/>
+          </p:cNvSpPr>
+          <p:nvPr/>
+        </p:nvSpPr>
+        <p:spPr>
+          <a:xfrm>
             <a:off x="7196328" y="2514600"/>
             <a:ext cx="4114800" cy="1097280"/>
           </a:xfrm>
-          <a:prstGeom xmlns:a="http://schemas.openxmlformats.org/drawingml/2006/main" prst="rect">
-            <a:avLst/>
-          </a:prstGeom>
-          <a:noFill xmlns:a="http://schemas.openxmlformats.org/drawingml/2006/main"/>
-        </p:spPr>
-        <p:txBody>
-          <a:bodyPr xmlns:a="http://schemas.openxmlformats.org/drawingml/2006/main" wrap="square" lIns="0" tIns="0" rIns="0" bIns="0" anchor="t"/>
-          <a:lstStyle xmlns:a="http://schemas.openxmlformats.org/drawingml/2006/main"/>
-          <a:p xmlns:a="http://schemas.openxmlformats.org/drawingml/2006/main">
+          <a:prstGeom prst="rect">
+            <a:avLst/>
+          </a:prstGeom>
+          <a:noFill/>
+        </p:spPr>
+        <p:txBody>
+          <a:bodyPr wrap="square" lIns="0" tIns="0" rIns="0" bIns="0" anchor="t"/>
+          <a:lstStyle/>
+          <a:p>
             <a:pPr marL="0" indent="0">
               <a:buNone/>
             </a:pPr>
@@ -7019,7 +6780,7 @@
             </a:r>
             <a:endParaRPr sz="1400"/>
           </a:p>
-          <a:p xmlns:a="http://schemas.openxmlformats.org/drawingml/2006/main">
+          <a:p>
             <a:pPr marL="0" indent="0">
               <a:buNone/>
             </a:pPr>
@@ -7041,33 +6802,33 @@
       <p:sp>
         <p:nvSpPr>
           <p:cNvPr id="14" name="Technical Impact card">
-            <a:extLst xmlns:a="http://schemas.openxmlformats.org/drawingml/2006/main">
+            <a:extLst>
               <a:ext uri="{FF2B5EF4-FFF2-40B4-BE49-F238E27FC236}">
                 <a16:creationId xmlns:a16="http://schemas.microsoft.com/office/drawing/2014/main" id="{99561A0B-8E41-4570-9D99-23FF85B6FF58}"/>
               </a:ext>
             </a:extLst>
           </p:cNvPr>
           <p:cNvSpPr>
-            <a:spLocks xmlns:a="http://schemas.openxmlformats.org/drawingml/2006/main" noGrp="1"/>
-          </p:cNvSpPr>
-          <p:nvPr/>
-        </p:nvSpPr>
-        <p:spPr>
-          <a:xfrm xmlns:a="http://schemas.openxmlformats.org/drawingml/2006/main">
+            <a:spLocks noGrp="1"/>
+          </p:cNvSpPr>
+          <p:nvPr/>
+        </p:nvSpPr>
+        <p:spPr>
+          <a:xfrm>
             <a:off x="457200" y="3977640"/>
             <a:ext cx="5486400" cy="2103120"/>
           </a:xfrm>
-          <a:prstGeom xmlns:a="http://schemas.openxmlformats.org/drawingml/2006/main" prst="roundRect">
+          <a:prstGeom prst="roundRect">
             <a:avLst>
               <a:gd name="adj" fmla="val 5217"/>
             </a:avLst>
           </a:prstGeom>
-          <a:solidFill xmlns:a="http://schemas.openxmlformats.org/drawingml/2006/main">
+          <a:solidFill>
             <a:srgbClr val="0B1A4A">
               <a:alpha val="75000"/>
             </a:srgbClr>
           </a:solidFill>
-          <a:ln xmlns:a="http://schemas.openxmlformats.org/drawingml/2006/main" w="12700">
+          <a:ln w="12700">
             <a:solidFill>
               <a:srgbClr val="1E5BFF"/>
             </a:solidFill>
@@ -7078,29 +6839,29 @@
       <p:sp>
         <p:nvSpPr>
           <p:cNvPr id="15" name="Technical Impact badge">
-            <a:extLst xmlns:a="http://schemas.openxmlformats.org/drawingml/2006/main">
+            <a:extLst>
               <a:ext uri="{FF2B5EF4-FFF2-40B4-BE49-F238E27FC236}">
                 <a16:creationId xmlns:a16="http://schemas.microsoft.com/office/drawing/2014/main" id="{9FC94E6F-89AA-4B0A-8D22-48A027C07291}"/>
               </a:ext>
             </a:extLst>
           </p:cNvPr>
           <p:cNvSpPr>
-            <a:spLocks xmlns:a="http://schemas.openxmlformats.org/drawingml/2006/main" noGrp="1"/>
-          </p:cNvSpPr>
-          <p:nvPr/>
-        </p:nvSpPr>
-        <p:spPr>
-          <a:xfrm xmlns:a="http://schemas.openxmlformats.org/drawingml/2006/main">
+            <a:spLocks noGrp="1"/>
+          </p:cNvSpPr>
+          <p:nvPr/>
+        </p:nvSpPr>
+        <p:spPr>
+          <a:xfrm>
             <a:off x="731520" y="4251960"/>
             <a:ext cx="548640" cy="548640"/>
           </a:xfrm>
-          <a:prstGeom xmlns:a="http://schemas.openxmlformats.org/drawingml/2006/main" prst="ellipse">
-            <a:avLst/>
-          </a:prstGeom>
-          <a:solidFill xmlns:a="http://schemas.openxmlformats.org/drawingml/2006/main">
+          <a:prstGeom prst="ellipse">
+            <a:avLst/>
+          </a:prstGeom>
+          <a:solidFill>
             <a:schemeClr val="accent1"/>
           </a:solidFill>
-          <a:ln xmlns:a="http://schemas.openxmlformats.org/drawingml/2006/main" w="12700">
+          <a:ln w="12700">
             <a:solidFill>
               <a:srgbClr val="FFFFFF"/>
             </a:solidFill>
@@ -7111,31 +6872,31 @@
       <p:sp>
         <p:nvSpPr>
           <p:cNvPr id="16" name="Text 14">
-            <a:extLst xmlns:a="http://schemas.openxmlformats.org/drawingml/2006/main">
+            <a:extLst>
               <a:ext uri="{FF2B5EF4-FFF2-40B4-BE49-F238E27FC236}">
                 <a16:creationId xmlns:a16="http://schemas.microsoft.com/office/drawing/2014/main" id="{D9C21E8C-4905-46F3-BD48-181BD3EAC2A8}"/>
               </a:ext>
             </a:extLst>
           </p:cNvPr>
           <p:cNvSpPr>
-            <a:spLocks xmlns:a="http://schemas.openxmlformats.org/drawingml/2006/main" noGrp="1"/>
-          </p:cNvSpPr>
-          <p:nvPr/>
-        </p:nvSpPr>
-        <p:spPr>
-          <a:xfrm xmlns:a="http://schemas.openxmlformats.org/drawingml/2006/main">
+            <a:spLocks noGrp="1"/>
+          </p:cNvSpPr>
+          <p:nvPr/>
+        </p:nvSpPr>
+        <p:spPr>
+          <a:xfrm>
             <a:off x="731520" y="4251960"/>
             <a:ext cx="548640" cy="548640"/>
           </a:xfrm>
-          <a:prstGeom xmlns:a="http://schemas.openxmlformats.org/drawingml/2006/main" prst="rect">
-            <a:avLst/>
-          </a:prstGeom>
-          <a:noFill xmlns:a="http://schemas.openxmlformats.org/drawingml/2006/main"/>
-        </p:spPr>
-        <p:txBody>
-          <a:bodyPr xmlns:a="http://schemas.openxmlformats.org/drawingml/2006/main" wrap="square" lIns="0" tIns="0" rIns="0" bIns="0" anchor="ctr"/>
-          <a:lstStyle xmlns:a="http://schemas.openxmlformats.org/drawingml/2006/main"/>
-          <a:p xmlns:a="http://schemas.openxmlformats.org/drawingml/2006/main">
+          <a:prstGeom prst="rect">
+            <a:avLst/>
+          </a:prstGeom>
+          <a:noFill/>
+        </p:spPr>
+        <p:txBody>
+          <a:bodyPr wrap="square" lIns="0" tIns="0" rIns="0" bIns="0" anchor="ctr"/>
+          <a:lstStyle/>
+          <a:p>
             <a:pPr marL="0" indent="0" algn="ctr">
               <a:buNone/>
             </a:pPr>
@@ -7157,31 +6918,31 @@
       <p:sp>
         <p:nvSpPr>
           <p:cNvPr id="17" name="Technical Impact head">
-            <a:extLst xmlns:a="http://schemas.openxmlformats.org/drawingml/2006/main">
+            <a:extLst>
               <a:ext uri="{FF2B5EF4-FFF2-40B4-BE49-F238E27FC236}">
                 <a16:creationId xmlns:a16="http://schemas.microsoft.com/office/drawing/2014/main" id="{32AB9EBC-15CB-42DB-8559-C4FBD780A4D4}"/>
               </a:ext>
             </a:extLst>
           </p:cNvPr>
           <p:cNvSpPr>
-            <a:spLocks xmlns:a="http://schemas.openxmlformats.org/drawingml/2006/main" noGrp="1"/>
-          </p:cNvSpPr>
-          <p:nvPr/>
-        </p:nvSpPr>
-        <p:spPr>
-          <a:xfrm xmlns:a="http://schemas.openxmlformats.org/drawingml/2006/main">
+            <a:spLocks noGrp="1"/>
+          </p:cNvSpPr>
+          <p:nvPr/>
+        </p:nvSpPr>
+        <p:spPr>
+          <a:xfrm>
             <a:off x="1554480" y="4343400"/>
             <a:ext cx="4114800" cy="320040"/>
           </a:xfrm>
-          <a:prstGeom xmlns:a="http://schemas.openxmlformats.org/drawingml/2006/main" prst="rect">
-            <a:avLst/>
-          </a:prstGeom>
-          <a:noFill xmlns:a="http://schemas.openxmlformats.org/drawingml/2006/main"/>
-        </p:spPr>
-        <p:txBody>
-          <a:bodyPr xmlns:a="http://schemas.openxmlformats.org/drawingml/2006/main" wrap="square" lIns="0" tIns="0" rIns="0" bIns="0" anchor="ctr"/>
-          <a:lstStyle xmlns:a="http://schemas.openxmlformats.org/drawingml/2006/main"/>
-          <a:p xmlns:a="http://schemas.openxmlformats.org/drawingml/2006/main">
+          <a:prstGeom prst="rect">
+            <a:avLst/>
+          </a:prstGeom>
+          <a:noFill/>
+        </p:spPr>
+        <p:txBody>
+          <a:bodyPr wrap="square" lIns="0" tIns="0" rIns="0" bIns="0" anchor="ctr"/>
+          <a:lstStyle/>
+          <a:p>
             <a:pPr marL="0" indent="0">
               <a:buNone/>
             </a:pPr>
@@ -7203,31 +6964,31 @@
       <p:sp>
         <p:nvSpPr>
           <p:cNvPr id="18" name="Technical Impact body">
-            <a:extLst xmlns:a="http://schemas.openxmlformats.org/drawingml/2006/main">
+            <a:extLst>
               <a:ext uri="{FF2B5EF4-FFF2-40B4-BE49-F238E27FC236}">
                 <a16:creationId xmlns:a16="http://schemas.microsoft.com/office/drawing/2014/main" id="{518069F1-3131-47FA-9426-8163D8505F2E}"/>
               </a:ext>
             </a:extLst>
           </p:cNvPr>
           <p:cNvSpPr>
-            <a:spLocks xmlns:a="http://schemas.openxmlformats.org/drawingml/2006/main" noGrp="1"/>
-          </p:cNvSpPr>
-          <p:nvPr/>
-        </p:nvSpPr>
-        <p:spPr>
-          <a:xfrm xmlns:a="http://schemas.openxmlformats.org/drawingml/2006/main">
+            <a:spLocks noGrp="1"/>
+          </p:cNvSpPr>
+          <p:nvPr/>
+        </p:nvSpPr>
+        <p:spPr>
+          <a:xfrm>
             <a:off x="1554480" y="4800600"/>
             <a:ext cx="4114800" cy="1097280"/>
           </a:xfrm>
-          <a:prstGeom xmlns:a="http://schemas.openxmlformats.org/drawingml/2006/main" prst="rect">
-            <a:avLst/>
-          </a:prstGeom>
-          <a:noFill xmlns:a="http://schemas.openxmlformats.org/drawingml/2006/main"/>
-        </p:spPr>
-        <p:txBody>
-          <a:bodyPr xmlns:a="http://schemas.openxmlformats.org/drawingml/2006/main" wrap="square" lIns="0" tIns="0" rIns="0" bIns="0" anchor="t"/>
-          <a:lstStyle xmlns:a="http://schemas.openxmlformats.org/drawingml/2006/main"/>
-          <a:p xmlns:a="http://schemas.openxmlformats.org/drawingml/2006/main">
+          <a:prstGeom prst="rect">
+            <a:avLst/>
+          </a:prstGeom>
+          <a:noFill/>
+        </p:spPr>
+        <p:txBody>
+          <a:bodyPr wrap="square" lIns="0" tIns="0" rIns="0" bIns="0" anchor="t"/>
+          <a:lstStyle/>
+          <a:p>
             <a:pPr marL="0" indent="0">
               <a:buNone/>
             </a:pPr>
@@ -7244,7 +7005,7 @@
             </a:r>
             <a:endParaRPr sz="1400"/>
           </a:p>
-          <a:p xmlns:a="http://schemas.openxmlformats.org/drawingml/2006/main">
+          <a:p>
             <a:pPr marL="0" indent="0">
               <a:buNone/>
             </a:pPr>
@@ -7261,7 +7022,7 @@
             </a:r>
             <a:endParaRPr sz="1400"/>
           </a:p>
-          <a:p xmlns:a="http://schemas.openxmlformats.org/drawingml/2006/main">
+          <a:p>
             <a:pPr marL="0" indent="0">
               <a:buNone/>
             </a:pPr>
@@ -7283,33 +7044,33 @@
       <p:sp>
         <p:nvSpPr>
           <p:cNvPr id="19" name="Educational Impact card">
-            <a:extLst xmlns:a="http://schemas.openxmlformats.org/drawingml/2006/main">
+            <a:extLst>
               <a:ext uri="{FF2B5EF4-FFF2-40B4-BE49-F238E27FC236}">
                 <a16:creationId xmlns:a16="http://schemas.microsoft.com/office/drawing/2014/main" id="{73A6582C-7222-490A-95F1-556B820AEC5D}"/>
               </a:ext>
             </a:extLst>
           </p:cNvPr>
           <p:cNvSpPr>
-            <a:spLocks xmlns:a="http://schemas.openxmlformats.org/drawingml/2006/main" noGrp="1"/>
-          </p:cNvSpPr>
-          <p:nvPr/>
-        </p:nvSpPr>
-        <p:spPr>
-          <a:xfrm xmlns:a="http://schemas.openxmlformats.org/drawingml/2006/main">
+            <a:spLocks noGrp="1"/>
+          </p:cNvSpPr>
+          <p:nvPr/>
+        </p:nvSpPr>
+        <p:spPr>
+          <a:xfrm>
             <a:off x="6099048" y="3977640"/>
             <a:ext cx="5486400" cy="2103120"/>
           </a:xfrm>
-          <a:prstGeom xmlns:a="http://schemas.openxmlformats.org/drawingml/2006/main" prst="roundRect">
+          <a:prstGeom prst="roundRect">
             <a:avLst>
               <a:gd name="adj" fmla="val 5217"/>
             </a:avLst>
           </a:prstGeom>
-          <a:solidFill xmlns:a="http://schemas.openxmlformats.org/drawingml/2006/main">
+          <a:solidFill>
             <a:srgbClr val="0B1A4A">
               <a:alpha val="75000"/>
             </a:srgbClr>
           </a:solidFill>
-          <a:ln xmlns:a="http://schemas.openxmlformats.org/drawingml/2006/main" w="12700">
+          <a:ln w="12700">
             <a:solidFill>
               <a:srgbClr val="1E5BFF"/>
             </a:solidFill>
@@ -7320,29 +7081,29 @@
       <p:sp>
         <p:nvSpPr>
           <p:cNvPr id="20" name="Educational Impact badge">
-            <a:extLst xmlns:a="http://schemas.openxmlformats.org/drawingml/2006/main">
+            <a:extLst>
               <a:ext uri="{FF2B5EF4-FFF2-40B4-BE49-F238E27FC236}">
                 <a16:creationId xmlns:a16="http://schemas.microsoft.com/office/drawing/2014/main" id="{BEA2EFD4-57D8-4131-ACFD-C4C143AA6DC1}"/>
               </a:ext>
             </a:extLst>
           </p:cNvPr>
           <p:cNvSpPr>
-            <a:spLocks xmlns:a="http://schemas.openxmlformats.org/drawingml/2006/main" noGrp="1"/>
-          </p:cNvSpPr>
-          <p:nvPr/>
-        </p:nvSpPr>
-        <p:spPr>
-          <a:xfrm xmlns:a="http://schemas.openxmlformats.org/drawingml/2006/main">
+            <a:spLocks noGrp="1"/>
+          </p:cNvSpPr>
+          <p:nvPr/>
+        </p:nvSpPr>
+        <p:spPr>
+          <a:xfrm>
             <a:off x="6373368" y="4251960"/>
             <a:ext cx="548640" cy="548640"/>
           </a:xfrm>
-          <a:prstGeom xmlns:a="http://schemas.openxmlformats.org/drawingml/2006/main" prst="ellipse">
-            <a:avLst/>
-          </a:prstGeom>
-          <a:solidFill xmlns:a="http://schemas.openxmlformats.org/drawingml/2006/main">
+          <a:prstGeom prst="ellipse">
+            <a:avLst/>
+          </a:prstGeom>
+          <a:solidFill>
             <a:schemeClr val="accent1"/>
           </a:solidFill>
-          <a:ln xmlns:a="http://schemas.openxmlformats.org/drawingml/2006/main" w="12700">
+          <a:ln w="12700">
             <a:solidFill>
               <a:srgbClr val="FFFFFF"/>
             </a:solidFill>
@@ -7353,31 +7114,31 @@
       <p:sp>
         <p:nvSpPr>
           <p:cNvPr id="21" name="Text 19">
-            <a:extLst xmlns:a="http://schemas.openxmlformats.org/drawingml/2006/main">
+            <a:extLst>
               <a:ext uri="{FF2B5EF4-FFF2-40B4-BE49-F238E27FC236}">
                 <a16:creationId xmlns:a16="http://schemas.microsoft.com/office/drawing/2014/main" id="{D2942D8A-CA47-4240-B13B-8B82E990A80D}"/>
               </a:ext>
             </a:extLst>
           </p:cNvPr>
           <p:cNvSpPr>
-            <a:spLocks xmlns:a="http://schemas.openxmlformats.org/drawingml/2006/main" noGrp="1"/>
-          </p:cNvSpPr>
-          <p:nvPr/>
-        </p:nvSpPr>
-        <p:spPr>
-          <a:xfrm xmlns:a="http://schemas.openxmlformats.org/drawingml/2006/main">
+            <a:spLocks noGrp="1"/>
+          </p:cNvSpPr>
+          <p:nvPr/>
+        </p:nvSpPr>
+        <p:spPr>
+          <a:xfrm>
             <a:off x="6373368" y="4251960"/>
             <a:ext cx="548640" cy="548640"/>
           </a:xfrm>
-          <a:prstGeom xmlns:a="http://schemas.openxmlformats.org/drawingml/2006/main" prst="rect">
-            <a:avLst/>
-          </a:prstGeom>
-          <a:noFill xmlns:a="http://schemas.openxmlformats.org/drawingml/2006/main"/>
-        </p:spPr>
-        <p:txBody>
-          <a:bodyPr xmlns:a="http://schemas.openxmlformats.org/drawingml/2006/main" wrap="square" lIns="0" tIns="0" rIns="0" bIns="0" anchor="ctr"/>
-          <a:lstStyle xmlns:a="http://schemas.openxmlformats.org/drawingml/2006/main"/>
-          <a:p xmlns:a="http://schemas.openxmlformats.org/drawingml/2006/main">
+          <a:prstGeom prst="rect">
+            <a:avLst/>
+          </a:prstGeom>
+          <a:noFill/>
+        </p:spPr>
+        <p:txBody>
+          <a:bodyPr wrap="square" lIns="0" tIns="0" rIns="0" bIns="0" anchor="ctr"/>
+          <a:lstStyle/>
+          <a:p>
             <a:pPr marL="0" indent="0" algn="ctr">
               <a:buNone/>
             </a:pPr>
@@ -7399,31 +7160,31 @@
       <p:sp>
         <p:nvSpPr>
           <p:cNvPr id="22" name="Educational Impact head">
-            <a:extLst xmlns:a="http://schemas.openxmlformats.org/drawingml/2006/main">
+            <a:extLst>
               <a:ext uri="{FF2B5EF4-FFF2-40B4-BE49-F238E27FC236}">
                 <a16:creationId xmlns:a16="http://schemas.microsoft.com/office/drawing/2014/main" id="{94A4B706-1E10-4F84-9722-4463EFF67C85}"/>
               </a:ext>
             </a:extLst>
           </p:cNvPr>
           <p:cNvSpPr>
-            <a:spLocks xmlns:a="http://schemas.openxmlformats.org/drawingml/2006/main" noGrp="1"/>
-          </p:cNvSpPr>
-          <p:nvPr/>
-        </p:nvSpPr>
-        <p:spPr>
-          <a:xfrm xmlns:a="http://schemas.openxmlformats.org/drawingml/2006/main">
+            <a:spLocks noGrp="1"/>
+          </p:cNvSpPr>
+          <p:nvPr/>
+        </p:nvSpPr>
+        <p:spPr>
+          <a:xfrm>
             <a:off x="7196328" y="4343400"/>
             <a:ext cx="4114800" cy="320040"/>
           </a:xfrm>
-          <a:prstGeom xmlns:a="http://schemas.openxmlformats.org/drawingml/2006/main" prst="rect">
-            <a:avLst/>
-          </a:prstGeom>
-          <a:noFill xmlns:a="http://schemas.openxmlformats.org/drawingml/2006/main"/>
-        </p:spPr>
-        <p:txBody>
-          <a:bodyPr xmlns:a="http://schemas.openxmlformats.org/drawingml/2006/main" wrap="square" lIns="0" tIns="0" rIns="0" bIns="0" anchor="ctr"/>
-          <a:lstStyle xmlns:a="http://schemas.openxmlformats.org/drawingml/2006/main"/>
-          <a:p xmlns:a="http://schemas.openxmlformats.org/drawingml/2006/main">
+          <a:prstGeom prst="rect">
+            <a:avLst/>
+          </a:prstGeom>
+          <a:noFill/>
+        </p:spPr>
+        <p:txBody>
+          <a:bodyPr wrap="square" lIns="0" tIns="0" rIns="0" bIns="0" anchor="ctr"/>
+          <a:lstStyle/>
+          <a:p>
             <a:pPr marL="0" indent="0">
               <a:buNone/>
             </a:pPr>
@@ -7445,31 +7206,31 @@
       <p:sp>
         <p:nvSpPr>
           <p:cNvPr id="23" name="Educational Impact body">
-            <a:extLst xmlns:a="http://schemas.openxmlformats.org/drawingml/2006/main">
+            <a:extLst>
               <a:ext uri="{FF2B5EF4-FFF2-40B4-BE49-F238E27FC236}">
                 <a16:creationId xmlns:a16="http://schemas.microsoft.com/office/drawing/2014/main" id="{C03BE820-1CD9-412F-BF77-B7955F919AFA}"/>
               </a:ext>
             </a:extLst>
           </p:cNvPr>
           <p:cNvSpPr>
-            <a:spLocks xmlns:a="http://schemas.openxmlformats.org/drawingml/2006/main" noGrp="1"/>
-          </p:cNvSpPr>
-          <p:nvPr/>
-        </p:nvSpPr>
-        <p:spPr>
-          <a:xfrm xmlns:a="http://schemas.openxmlformats.org/drawingml/2006/main">
+            <a:spLocks noGrp="1"/>
+          </p:cNvSpPr>
+          <p:nvPr/>
+        </p:nvSpPr>
+        <p:spPr>
+          <a:xfrm>
             <a:off x="7196328" y="4800600"/>
             <a:ext cx="4114800" cy="1097280"/>
           </a:xfrm>
-          <a:prstGeom xmlns:a="http://schemas.openxmlformats.org/drawingml/2006/main" prst="rect">
-            <a:avLst/>
-          </a:prstGeom>
-          <a:noFill xmlns:a="http://schemas.openxmlformats.org/drawingml/2006/main"/>
-        </p:spPr>
-        <p:txBody>
-          <a:bodyPr xmlns:a="http://schemas.openxmlformats.org/drawingml/2006/main" wrap="square" lIns="0" tIns="0" rIns="0" bIns="0" anchor="t"/>
-          <a:lstStyle xmlns:a="http://schemas.openxmlformats.org/drawingml/2006/main"/>
-          <a:p xmlns:a="http://schemas.openxmlformats.org/drawingml/2006/main">
+          <a:prstGeom prst="rect">
+            <a:avLst/>
+          </a:prstGeom>
+          <a:noFill/>
+        </p:spPr>
+        <p:txBody>
+          <a:bodyPr wrap="square" lIns="0" tIns="0" rIns="0" bIns="0" anchor="t"/>
+          <a:lstStyle/>
+          <a:p>
             <a:pPr marL="0" indent="0">
               <a:buNone/>
             </a:pPr>
@@ -7486,7 +7247,7 @@
             </a:r>
             <a:endParaRPr sz="1400"/>
           </a:p>
-          <a:p xmlns:a="http://schemas.openxmlformats.org/drawingml/2006/main">
+          <a:p>
             <a:pPr marL="0" indent="0">
               <a:buNone/>
             </a:pPr>
@@ -7508,31 +7269,31 @@
       <p:sp>
         <p:nvSpPr>
           <p:cNvPr id="25" name="Slide Number Placeholder 0">
-            <a:extLst xmlns:a="http://schemas.openxmlformats.org/drawingml/2006/main">
+            <a:extLst>
               <a:ext uri="{FF2B5EF4-FFF2-40B4-BE49-F238E27FC236}">
                 <a16:creationId xmlns:a16="http://schemas.microsoft.com/office/drawing/2014/main" id="{21CC3903-C09E-4790-98F8-97F8D0460691}"/>
               </a:ext>
             </a:extLst>
           </p:cNvPr>
           <p:cNvSpPr>
-            <a:spLocks xmlns:a="http://schemas.openxmlformats.org/drawingml/2006/main" noGrp="1"/>
+            <a:spLocks noGrp="1"/>
           </p:cNvSpPr>
           <p:nvPr>
             <p:ph type="sldNum" idx="4294967295"/>
           </p:nvPr>
         </p:nvSpPr>
         <p:spPr>
-          <a:xfrm xmlns:a="http://schemas.openxmlformats.org/drawingml/2006/main">
+          <a:xfrm>
             <a:off x="11155680" y="6428232"/>
             <a:ext cx="576072" cy="274320"/>
           </a:xfrm>
-          <a:prstGeom xmlns:a="http://schemas.openxmlformats.org/drawingml/2006/main" prst="rect">
-            <a:avLst/>
-          </a:prstGeom>
-        </p:spPr>
-        <p:txBody>
-          <a:bodyPr xmlns:a="http://schemas.openxmlformats.org/drawingml/2006/main"/>
-          <a:lstStyle xmlns:a="http://schemas.openxmlformats.org/drawingml/2006/main">
+          <a:prstGeom prst="rect">
+            <a:avLst/>
+          </a:prstGeom>
+        </p:spPr>
+        <p:txBody>
+          <a:bodyPr/>
+          <a:lstStyle>
             <a:lvl1pPr>
               <a:buNone/>
               <a:defRPr sz="1000">
@@ -7545,7 +7306,7 @@
               </a:defRPr>
             </a:lvl1pPr>
           </a:lstStyle>
-          <a:p xmlns:a="http://schemas.openxmlformats.org/drawingml/2006/main">
+          <a:p>
             <a:pPr algn="r">
               <a:buNone/>
             </a:pPr>
@@ -7564,11 +7325,14 @@
       </p:ext>
     </p:extLst>
   </p:cSld>
+  <p:clrMapOvr>
+    <a:masterClrMapping/>
+  </p:clrMapOvr>
 </p:sld>
 </file>
 
 <file path=ppt/slides/slide7.xml><?xml version="1.0" encoding="utf-8"?>
-<p:sld xmlns:p="http://schemas.openxmlformats.org/presentationml/2006/main">
+<p:sld xmlns:a="http://schemas.openxmlformats.org/drawingml/2006/main" xmlns:r="http://schemas.openxmlformats.org/officeDocument/2006/relationships" xmlns:p="http://schemas.openxmlformats.org/presentationml/2006/main">
   <p:cSld>
     <p:spTree>
       <p:nvGrpSpPr>
@@ -7577,36 +7341,41 @@
         <p:nvPr/>
       </p:nvGrpSpPr>
       <p:grpSpPr>
-        <a:xfrm xmlns:a="http://schemas.openxmlformats.org/drawingml/2006/main"/>
+        <a:xfrm>
+          <a:off x="0" y="0"/>
+          <a:ext cx="0" cy="0"/>
+          <a:chOff x="0" y="0"/>
+          <a:chExt cx="0" cy="0"/>
+        </a:xfrm>
       </p:grpSpPr>
       <p:sp>
         <p:nvSpPr>
           <p:cNvPr id="2" name="Text 0">
-            <a:extLst xmlns:a="http://schemas.openxmlformats.org/drawingml/2006/main">
+            <a:extLst>
               <a:ext uri="{FF2B5EF4-FFF2-40B4-BE49-F238E27FC236}">
                 <a16:creationId xmlns:a16="http://schemas.microsoft.com/office/drawing/2014/main" id="{D0EC107A-6954-496E-8E68-7AE9F11E26BE}"/>
               </a:ext>
             </a:extLst>
           </p:cNvPr>
           <p:cNvSpPr>
-            <a:spLocks xmlns:a="http://schemas.openxmlformats.org/drawingml/2006/main" noGrp="1"/>
-          </p:cNvSpPr>
-          <p:nvPr/>
-        </p:nvSpPr>
-        <p:spPr>
-          <a:xfrm xmlns:a="http://schemas.openxmlformats.org/drawingml/2006/main">
+            <a:spLocks noGrp="1"/>
+          </p:cNvSpPr>
+          <p:nvPr/>
+        </p:nvSpPr>
+        <p:spPr>
+          <a:xfrm>
             <a:off x="457200" y="960120"/>
             <a:ext cx="11274552" cy="731520"/>
           </a:xfrm>
-          <a:prstGeom xmlns:a="http://schemas.openxmlformats.org/drawingml/2006/main" prst="rect">
-            <a:avLst/>
-          </a:prstGeom>
-          <a:noFill xmlns:a="http://schemas.openxmlformats.org/drawingml/2006/main"/>
-        </p:spPr>
-        <p:txBody>
-          <a:bodyPr xmlns:a="http://schemas.openxmlformats.org/drawingml/2006/main" wrap="square" lIns="0" tIns="0" rIns="0" bIns="0" anchor="ctr"/>
-          <a:lstStyle xmlns:a="http://schemas.openxmlformats.org/drawingml/2006/main"/>
-          <a:p xmlns:a="http://schemas.openxmlformats.org/drawingml/2006/main">
+          <a:prstGeom prst="rect">
+            <a:avLst/>
+          </a:prstGeom>
+          <a:noFill/>
+        </p:spPr>
+        <p:txBody>
+          <a:bodyPr wrap="square" lIns="0" tIns="0" rIns="0" bIns="0" anchor="ctr"/>
+          <a:lstStyle/>
+          <a:p>
             <a:pPr marL="0" indent="0">
               <a:buNone/>
             </a:pPr>
@@ -7628,31 +7397,31 @@
       <p:sp>
         <p:nvSpPr>
           <p:cNvPr id="3" name="Team tag">
-            <a:extLst xmlns:a="http://schemas.openxmlformats.org/drawingml/2006/main">
+            <a:extLst>
               <a:ext uri="{FF2B5EF4-FFF2-40B4-BE49-F238E27FC236}">
                 <a16:creationId xmlns:a16="http://schemas.microsoft.com/office/drawing/2014/main" id="{A5F30C45-C4DF-4B89-AAB6-216E90032C58}"/>
               </a:ext>
             </a:extLst>
           </p:cNvPr>
           <p:cNvSpPr>
-            <a:spLocks xmlns:a="http://schemas.openxmlformats.org/drawingml/2006/main" noGrp="1"/>
-          </p:cNvSpPr>
-          <p:nvPr/>
-        </p:nvSpPr>
-        <p:spPr>
-          <a:xfrm xmlns:a="http://schemas.openxmlformats.org/drawingml/2006/main">
+            <a:spLocks noGrp="1"/>
+          </p:cNvSpPr>
+          <p:nvPr/>
+        </p:nvSpPr>
+        <p:spPr>
+          <a:xfrm>
             <a:off x="8503920" y="1097280"/>
             <a:ext cx="3227832" cy="320040"/>
           </a:xfrm>
-          <a:prstGeom xmlns:a="http://schemas.openxmlformats.org/drawingml/2006/main" prst="rect">
-            <a:avLst/>
-          </a:prstGeom>
-          <a:noFill xmlns:a="http://schemas.openxmlformats.org/drawingml/2006/main"/>
-        </p:spPr>
-        <p:txBody>
-          <a:bodyPr xmlns:a="http://schemas.openxmlformats.org/drawingml/2006/main" wrap="square" lIns="0" tIns="0" rIns="0" bIns="0" anchor="ctr"/>
-          <a:lstStyle xmlns:a="http://schemas.openxmlformats.org/drawingml/2006/main"/>
-          <a:p xmlns:a="http://schemas.openxmlformats.org/drawingml/2006/main">
+          <a:prstGeom prst="rect">
+            <a:avLst/>
+          </a:prstGeom>
+          <a:noFill/>
+        </p:spPr>
+        <p:txBody>
+          <a:bodyPr wrap="square" lIns="0" tIns="0" rIns="0" bIns="0" anchor="ctr"/>
+          <a:lstStyle/>
+          <a:p>
             <a:pPr marL="0" indent="0" algn="r">
               <a:buNone/>
             </a:pPr>
@@ -7674,33 +7443,33 @@
       <p:sp>
         <p:nvSpPr>
           <p:cNvPr id="4" name="Users card">
-            <a:extLst xmlns:a="http://schemas.openxmlformats.org/drawingml/2006/main">
+            <a:extLst>
               <a:ext uri="{FF2B5EF4-FFF2-40B4-BE49-F238E27FC236}">
                 <a16:creationId xmlns:a16="http://schemas.microsoft.com/office/drawing/2014/main" id="{03D16733-900C-4036-83B7-71FE46C1417B}"/>
               </a:ext>
             </a:extLst>
           </p:cNvPr>
           <p:cNvSpPr>
-            <a:spLocks xmlns:a="http://schemas.openxmlformats.org/drawingml/2006/main" noGrp="1"/>
-          </p:cNvSpPr>
-          <p:nvPr/>
-        </p:nvSpPr>
-        <p:spPr>
-          <a:xfrm xmlns:a="http://schemas.openxmlformats.org/drawingml/2006/main">
+            <a:spLocks noGrp="1"/>
+          </p:cNvSpPr>
+          <p:nvPr/>
+        </p:nvSpPr>
+        <p:spPr>
+          <a:xfrm>
             <a:off x="457200" y="1691640"/>
             <a:ext cx="3657600" cy="4434840"/>
           </a:xfrm>
-          <a:prstGeom xmlns:a="http://schemas.openxmlformats.org/drawingml/2006/main" prst="roundRect">
+          <a:prstGeom prst="roundRect">
             <a:avLst>
               <a:gd name="adj" fmla="val 3000"/>
             </a:avLst>
           </a:prstGeom>
-          <a:solidFill xmlns:a="http://schemas.openxmlformats.org/drawingml/2006/main">
+          <a:solidFill>
             <a:srgbClr val="0B1A4A">
               <a:alpha val="75000"/>
             </a:srgbClr>
           </a:solidFill>
-          <a:ln xmlns:a="http://schemas.openxmlformats.org/drawingml/2006/main" w="12700">
+          <a:ln w="12700">
             <a:solidFill>
               <a:srgbClr val="1E5BFF"/>
             </a:solidFill>
@@ -7711,31 +7480,31 @@
       <p:sp>
         <p:nvSpPr>
           <p:cNvPr id="5" name="Users head">
-            <a:extLst xmlns:a="http://schemas.openxmlformats.org/drawingml/2006/main">
+            <a:extLst>
               <a:ext uri="{FF2B5EF4-FFF2-40B4-BE49-F238E27FC236}">
                 <a16:creationId xmlns:a16="http://schemas.microsoft.com/office/drawing/2014/main" id="{6E4439F8-FB7C-47A4-9746-44024299B533}"/>
               </a:ext>
             </a:extLst>
           </p:cNvPr>
           <p:cNvSpPr>
-            <a:spLocks xmlns:a="http://schemas.openxmlformats.org/drawingml/2006/main" noGrp="1"/>
-          </p:cNvSpPr>
-          <p:nvPr/>
-        </p:nvSpPr>
-        <p:spPr>
-          <a:xfrm xmlns:a="http://schemas.openxmlformats.org/drawingml/2006/main">
+            <a:spLocks noGrp="1"/>
+          </p:cNvSpPr>
+          <p:nvPr/>
+        </p:nvSpPr>
+        <p:spPr>
+          <a:xfrm>
             <a:off x="731520" y="1874520"/>
             <a:ext cx="3108960" cy="320040"/>
           </a:xfrm>
-          <a:prstGeom xmlns:a="http://schemas.openxmlformats.org/drawingml/2006/main" prst="rect">
-            <a:avLst/>
-          </a:prstGeom>
-          <a:noFill xmlns:a="http://schemas.openxmlformats.org/drawingml/2006/main"/>
-        </p:spPr>
-        <p:txBody>
-          <a:bodyPr xmlns:a="http://schemas.openxmlformats.org/drawingml/2006/main" wrap="square" lIns="0" tIns="0" rIns="0" bIns="0" anchor="ctr"/>
-          <a:lstStyle xmlns:a="http://schemas.openxmlformats.org/drawingml/2006/main"/>
-          <a:p xmlns:a="http://schemas.openxmlformats.org/drawingml/2006/main">
+          <a:prstGeom prst="rect">
+            <a:avLst/>
+          </a:prstGeom>
+          <a:noFill/>
+        </p:spPr>
+        <p:txBody>
+          <a:bodyPr wrap="square" lIns="0" tIns="0" rIns="0" bIns="0" anchor="ctr"/>
+          <a:lstStyle/>
+          <a:p>
             <a:pPr marL="0" indent="0">
               <a:buNone/>
             </a:pPr>
@@ -7757,31 +7526,31 @@
       <p:sp>
         <p:nvSpPr>
           <p:cNvPr id="6" name="Users body">
-            <a:extLst xmlns:a="http://schemas.openxmlformats.org/drawingml/2006/main">
+            <a:extLst>
               <a:ext uri="{FF2B5EF4-FFF2-40B4-BE49-F238E27FC236}">
                 <a16:creationId xmlns:a16="http://schemas.microsoft.com/office/drawing/2014/main" id="{B0748EE7-781B-4094-8787-2028CCA5260F}"/>
               </a:ext>
             </a:extLst>
           </p:cNvPr>
           <p:cNvSpPr>
-            <a:spLocks xmlns:a="http://schemas.openxmlformats.org/drawingml/2006/main" noGrp="1"/>
-          </p:cNvSpPr>
-          <p:nvPr/>
-        </p:nvSpPr>
-        <p:spPr>
-          <a:xfrm xmlns:a="http://schemas.openxmlformats.org/drawingml/2006/main">
+            <a:spLocks noGrp="1"/>
+          </p:cNvSpPr>
+          <p:nvPr/>
+        </p:nvSpPr>
+        <p:spPr>
+          <a:xfrm>
             <a:off x="731520" y="2377440"/>
             <a:ext cx="3108960" cy="3474720"/>
           </a:xfrm>
-          <a:prstGeom xmlns:a="http://schemas.openxmlformats.org/drawingml/2006/main" prst="rect">
-            <a:avLst/>
-          </a:prstGeom>
-          <a:noFill xmlns:a="http://schemas.openxmlformats.org/drawingml/2006/main"/>
-        </p:spPr>
-        <p:txBody>
-          <a:bodyPr xmlns:a="http://schemas.openxmlformats.org/drawingml/2006/main" wrap="square" lIns="0" tIns="0" rIns="0" bIns="0" anchor="t"/>
-          <a:lstStyle xmlns:a="http://schemas.openxmlformats.org/drawingml/2006/main"/>
-          <a:p xmlns:a="http://schemas.openxmlformats.org/drawingml/2006/main">
+          <a:prstGeom prst="rect">
+            <a:avLst/>
+          </a:prstGeom>
+          <a:noFill/>
+        </p:spPr>
+        <p:txBody>
+          <a:bodyPr wrap="square" lIns="0" tIns="0" rIns="0" bIns="0" anchor="t"/>
+          <a:lstStyle/>
+          <a:p>
             <a:pPr marL="342900" indent="-342900">
               <a:spcAft>
                 <a:spcPts val="600"/>
@@ -7802,7 +7571,7 @@
             </a:r>
             <a:endParaRPr sz="1400"/>
           </a:p>
-          <a:p xmlns:a="http://schemas.openxmlformats.org/drawingml/2006/main">
+          <a:p>
             <a:pPr marL="342900" indent="-342900">
               <a:spcAft>
                 <a:spcPts val="600"/>
@@ -7823,7 +7592,7 @@
             </a:r>
             <a:endParaRPr sz="1400"/>
           </a:p>
-          <a:p xmlns:a="http://schemas.openxmlformats.org/drawingml/2006/main">
+          <a:p>
             <a:pPr marL="342900" indent="-342900">
               <a:spcAft>
                 <a:spcPts val="600"/>
@@ -7849,33 +7618,33 @@
       <p:sp>
         <p:nvSpPr>
           <p:cNvPr id="7" name="Revenue card">
-            <a:extLst xmlns:a="http://schemas.openxmlformats.org/drawingml/2006/main">
+            <a:extLst>
               <a:ext uri="{FF2B5EF4-FFF2-40B4-BE49-F238E27FC236}">
                 <a16:creationId xmlns:a16="http://schemas.microsoft.com/office/drawing/2014/main" id="{1F39B524-A837-49EB-8FA2-9F144F64241E}"/>
               </a:ext>
             </a:extLst>
           </p:cNvPr>
           <p:cNvSpPr>
-            <a:spLocks xmlns:a="http://schemas.openxmlformats.org/drawingml/2006/main" noGrp="1"/>
-          </p:cNvSpPr>
-          <p:nvPr/>
-        </p:nvSpPr>
-        <p:spPr>
-          <a:xfrm xmlns:a="http://schemas.openxmlformats.org/drawingml/2006/main">
+            <a:spLocks noGrp="1"/>
+          </p:cNvSpPr>
+          <p:nvPr/>
+        </p:nvSpPr>
+        <p:spPr>
+          <a:xfrm>
             <a:off x="4270248" y="1691640"/>
             <a:ext cx="3657600" cy="4434840"/>
           </a:xfrm>
-          <a:prstGeom xmlns:a="http://schemas.openxmlformats.org/drawingml/2006/main" prst="roundRect">
+          <a:prstGeom prst="roundRect">
             <a:avLst>
               <a:gd name="adj" fmla="val 3000"/>
             </a:avLst>
           </a:prstGeom>
-          <a:solidFill xmlns:a="http://schemas.openxmlformats.org/drawingml/2006/main">
+          <a:solidFill>
             <a:srgbClr val="0B1A4A">
               <a:alpha val="75000"/>
             </a:srgbClr>
           </a:solidFill>
-          <a:ln xmlns:a="http://schemas.openxmlformats.org/drawingml/2006/main" w="12700">
+          <a:ln w="12700">
             <a:solidFill>
               <a:srgbClr val="1E5BFF"/>
             </a:solidFill>
@@ -7886,31 +7655,31 @@
       <p:sp>
         <p:nvSpPr>
           <p:cNvPr id="8" name="Rev head">
-            <a:extLst xmlns:a="http://schemas.openxmlformats.org/drawingml/2006/main">
+            <a:extLst>
               <a:ext uri="{FF2B5EF4-FFF2-40B4-BE49-F238E27FC236}">
                 <a16:creationId xmlns:a16="http://schemas.microsoft.com/office/drawing/2014/main" id="{7A819027-232F-410C-980C-5DF81BD0A013}"/>
               </a:ext>
             </a:extLst>
           </p:cNvPr>
           <p:cNvSpPr>
-            <a:spLocks xmlns:a="http://schemas.openxmlformats.org/drawingml/2006/main" noGrp="1"/>
-          </p:cNvSpPr>
-          <p:nvPr/>
-        </p:nvSpPr>
-        <p:spPr>
-          <a:xfrm xmlns:a="http://schemas.openxmlformats.org/drawingml/2006/main">
+            <a:spLocks noGrp="1"/>
+          </p:cNvSpPr>
+          <p:nvPr/>
+        </p:nvSpPr>
+        <p:spPr>
+          <a:xfrm>
             <a:off x="4544568" y="1874520"/>
             <a:ext cx="3108960" cy="320040"/>
           </a:xfrm>
-          <a:prstGeom xmlns:a="http://schemas.openxmlformats.org/drawingml/2006/main" prst="rect">
-            <a:avLst/>
-          </a:prstGeom>
-          <a:noFill xmlns:a="http://schemas.openxmlformats.org/drawingml/2006/main"/>
-        </p:spPr>
-        <p:txBody>
-          <a:bodyPr xmlns:a="http://schemas.openxmlformats.org/drawingml/2006/main" wrap="square" lIns="0" tIns="0" rIns="0" bIns="0" anchor="ctr"/>
-          <a:lstStyle xmlns:a="http://schemas.openxmlformats.org/drawingml/2006/main"/>
-          <a:p xmlns:a="http://schemas.openxmlformats.org/drawingml/2006/main">
+          <a:prstGeom prst="rect">
+            <a:avLst/>
+          </a:prstGeom>
+          <a:noFill/>
+        </p:spPr>
+        <p:txBody>
+          <a:bodyPr wrap="square" lIns="0" tIns="0" rIns="0" bIns="0" anchor="ctr"/>
+          <a:lstStyle/>
+          <a:p>
             <a:pPr marL="0" indent="0">
               <a:buNone/>
             </a:pPr>
@@ -7932,31 +7701,31 @@
       <p:sp>
         <p:nvSpPr>
           <p:cNvPr id="9" name="Rev body">
-            <a:extLst xmlns:a="http://schemas.openxmlformats.org/drawingml/2006/main">
+            <a:extLst>
               <a:ext uri="{FF2B5EF4-FFF2-40B4-BE49-F238E27FC236}">
                 <a16:creationId xmlns:a16="http://schemas.microsoft.com/office/drawing/2014/main" id="{C0CF8A77-C404-4E3C-A580-2DD7A0BF0319}"/>
               </a:ext>
             </a:extLst>
           </p:cNvPr>
           <p:cNvSpPr>
-            <a:spLocks xmlns:a="http://schemas.openxmlformats.org/drawingml/2006/main" noGrp="1"/>
-          </p:cNvSpPr>
-          <p:nvPr/>
-        </p:nvSpPr>
-        <p:spPr>
-          <a:xfrm xmlns:a="http://schemas.openxmlformats.org/drawingml/2006/main">
+            <a:spLocks noGrp="1"/>
+          </p:cNvSpPr>
+          <p:nvPr/>
+        </p:nvSpPr>
+        <p:spPr>
+          <a:xfrm>
             <a:off x="4544568" y="2377440"/>
             <a:ext cx="3108960" cy="3474720"/>
           </a:xfrm>
-          <a:prstGeom xmlns:a="http://schemas.openxmlformats.org/drawingml/2006/main" prst="rect">
-            <a:avLst/>
-          </a:prstGeom>
-          <a:noFill xmlns:a="http://schemas.openxmlformats.org/drawingml/2006/main"/>
-        </p:spPr>
-        <p:txBody>
-          <a:bodyPr xmlns:a="http://schemas.openxmlformats.org/drawingml/2006/main" wrap="square" lIns="0" tIns="0" rIns="0" bIns="0" anchor="t"/>
-          <a:lstStyle xmlns:a="http://schemas.openxmlformats.org/drawingml/2006/main"/>
-          <a:p xmlns:a="http://schemas.openxmlformats.org/drawingml/2006/main">
+          <a:prstGeom prst="rect">
+            <a:avLst/>
+          </a:prstGeom>
+          <a:noFill/>
+        </p:spPr>
+        <p:txBody>
+          <a:bodyPr wrap="square" lIns="0" tIns="0" rIns="0" bIns="0" anchor="t"/>
+          <a:lstStyle/>
+          <a:p>
             <a:pPr marL="342900" indent="-342900">
               <a:spcAft>
                 <a:spcPts val="600"/>
@@ -7977,7 +7746,7 @@
             </a:r>
             <a:endParaRPr sz="1400"/>
           </a:p>
-          <a:p xmlns:a="http://schemas.openxmlformats.org/drawingml/2006/main">
+          <a:p>
             <a:pPr marL="342900" indent="-342900">
               <a:spcAft>
                 <a:spcPts val="600"/>
@@ -7998,7 +7767,7 @@
             </a:r>
             <a:endParaRPr sz="1400"/>
           </a:p>
-          <a:p xmlns:a="http://schemas.openxmlformats.org/drawingml/2006/main">
+          <a:p>
             <a:pPr marL="342900" indent="-342900">
               <a:spcAft>
                 <a:spcPts val="600"/>
@@ -8024,33 +7793,33 @@
       <p:sp>
         <p:nvSpPr>
           <p:cNvPr id="10" name="Sustain card">
-            <a:extLst xmlns:a="http://schemas.openxmlformats.org/drawingml/2006/main">
+            <a:extLst>
               <a:ext uri="{FF2B5EF4-FFF2-40B4-BE49-F238E27FC236}">
                 <a16:creationId xmlns:a16="http://schemas.microsoft.com/office/drawing/2014/main" id="{41A4A359-B3A0-4223-B5E3-3D34278F8835}"/>
               </a:ext>
             </a:extLst>
           </p:cNvPr>
           <p:cNvSpPr>
-            <a:spLocks xmlns:a="http://schemas.openxmlformats.org/drawingml/2006/main" noGrp="1"/>
-          </p:cNvSpPr>
-          <p:nvPr/>
-        </p:nvSpPr>
-        <p:spPr>
-          <a:xfrm xmlns:a="http://schemas.openxmlformats.org/drawingml/2006/main">
+            <a:spLocks noGrp="1"/>
+          </p:cNvSpPr>
+          <p:nvPr/>
+        </p:nvSpPr>
+        <p:spPr>
+          <a:xfrm>
             <a:off x="8074152" y="1691640"/>
             <a:ext cx="3657600" cy="4434840"/>
           </a:xfrm>
-          <a:prstGeom xmlns:a="http://schemas.openxmlformats.org/drawingml/2006/main" prst="roundRect">
+          <a:prstGeom prst="roundRect">
             <a:avLst>
               <a:gd name="adj" fmla="val 3000"/>
             </a:avLst>
           </a:prstGeom>
-          <a:solidFill xmlns:a="http://schemas.openxmlformats.org/drawingml/2006/main">
+          <a:solidFill>
             <a:srgbClr val="0B1A4A">
               <a:alpha val="75000"/>
             </a:srgbClr>
           </a:solidFill>
-          <a:ln xmlns:a="http://schemas.openxmlformats.org/drawingml/2006/main" w="12700">
+          <a:ln w="12700">
             <a:solidFill>
               <a:srgbClr val="1E5BFF"/>
             </a:solidFill>
@@ -8061,31 +7830,31 @@
       <p:sp>
         <p:nvSpPr>
           <p:cNvPr id="11" name="Sus head">
-            <a:extLst xmlns:a="http://schemas.openxmlformats.org/drawingml/2006/main">
+            <a:extLst>
               <a:ext uri="{FF2B5EF4-FFF2-40B4-BE49-F238E27FC236}">
                 <a16:creationId xmlns:a16="http://schemas.microsoft.com/office/drawing/2014/main" id="{CF69F010-B67A-4180-8C61-CD73CCBAA9A6}"/>
               </a:ext>
             </a:extLst>
           </p:cNvPr>
           <p:cNvSpPr>
-            <a:spLocks xmlns:a="http://schemas.openxmlformats.org/drawingml/2006/main" noGrp="1"/>
-          </p:cNvSpPr>
-          <p:nvPr/>
-        </p:nvSpPr>
-        <p:spPr>
-          <a:xfrm xmlns:a="http://schemas.openxmlformats.org/drawingml/2006/main">
+            <a:spLocks noGrp="1"/>
+          </p:cNvSpPr>
+          <p:nvPr/>
+        </p:nvSpPr>
+        <p:spPr>
+          <a:xfrm>
             <a:off x="8348472" y="1874520"/>
             <a:ext cx="3108960" cy="320040"/>
           </a:xfrm>
-          <a:prstGeom xmlns:a="http://schemas.openxmlformats.org/drawingml/2006/main" prst="rect">
-            <a:avLst/>
-          </a:prstGeom>
-          <a:noFill xmlns:a="http://schemas.openxmlformats.org/drawingml/2006/main"/>
-        </p:spPr>
-        <p:txBody>
-          <a:bodyPr xmlns:a="http://schemas.openxmlformats.org/drawingml/2006/main" wrap="square" lIns="0" tIns="0" rIns="0" bIns="0" anchor="ctr"/>
-          <a:lstStyle xmlns:a="http://schemas.openxmlformats.org/drawingml/2006/main"/>
-          <a:p xmlns:a="http://schemas.openxmlformats.org/drawingml/2006/main">
+          <a:prstGeom prst="rect">
+            <a:avLst/>
+          </a:prstGeom>
+          <a:noFill/>
+        </p:spPr>
+        <p:txBody>
+          <a:bodyPr wrap="square" lIns="0" tIns="0" rIns="0" bIns="0" anchor="ctr"/>
+          <a:lstStyle/>
+          <a:p>
             <a:pPr marL="0" indent="0">
               <a:buNone/>
             </a:pPr>
@@ -8107,31 +7876,31 @@
       <p:sp>
         <p:nvSpPr>
           <p:cNvPr id="12" name="Sus body">
-            <a:extLst xmlns:a="http://schemas.openxmlformats.org/drawingml/2006/main">
+            <a:extLst>
               <a:ext uri="{FF2B5EF4-FFF2-40B4-BE49-F238E27FC236}">
                 <a16:creationId xmlns:a16="http://schemas.microsoft.com/office/drawing/2014/main" id="{1D440CB4-778C-42D3-AA08-961991B65639}"/>
               </a:ext>
             </a:extLst>
           </p:cNvPr>
           <p:cNvSpPr>
-            <a:spLocks xmlns:a="http://schemas.openxmlformats.org/drawingml/2006/main" noGrp="1"/>
-          </p:cNvSpPr>
-          <p:nvPr/>
-        </p:nvSpPr>
-        <p:spPr>
-          <a:xfrm xmlns:a="http://schemas.openxmlformats.org/drawingml/2006/main">
+            <a:spLocks noGrp="1"/>
+          </p:cNvSpPr>
+          <p:nvPr/>
+        </p:nvSpPr>
+        <p:spPr>
+          <a:xfrm>
             <a:off x="8348472" y="2377440"/>
             <a:ext cx="3108960" cy="3474720"/>
           </a:xfrm>
-          <a:prstGeom xmlns:a="http://schemas.openxmlformats.org/drawingml/2006/main" prst="rect">
-            <a:avLst/>
-          </a:prstGeom>
-          <a:noFill xmlns:a="http://schemas.openxmlformats.org/drawingml/2006/main"/>
-        </p:spPr>
-        <p:txBody>
-          <a:bodyPr xmlns:a="http://schemas.openxmlformats.org/drawingml/2006/main" wrap="square" lIns="0" tIns="0" rIns="0" bIns="0" anchor="t"/>
-          <a:lstStyle xmlns:a="http://schemas.openxmlformats.org/drawingml/2006/main"/>
-          <a:p xmlns:a="http://schemas.openxmlformats.org/drawingml/2006/main">
+          <a:prstGeom prst="rect">
+            <a:avLst/>
+          </a:prstGeom>
+          <a:noFill/>
+        </p:spPr>
+        <p:txBody>
+          <a:bodyPr wrap="square" lIns="0" tIns="0" rIns="0" bIns="0" anchor="t"/>
+          <a:lstStyle/>
+          <a:p>
             <a:pPr marL="342900" indent="-342900">
               <a:spcAft>
                 <a:spcPts val="600"/>
@@ -8152,7 +7921,7 @@
             </a:r>
             <a:endParaRPr sz="1400"/>
           </a:p>
-          <a:p xmlns:a="http://schemas.openxmlformats.org/drawingml/2006/main">
+          <a:p>
             <a:pPr marL="342900" indent="-342900">
               <a:spcAft>
                 <a:spcPts val="600"/>
@@ -8173,7 +7942,7 @@
             </a:r>
             <a:endParaRPr sz="1400"/>
           </a:p>
-          <a:p xmlns:a="http://schemas.openxmlformats.org/drawingml/2006/main">
+          <a:p>
             <a:pPr marL="342900" indent="-342900">
               <a:spcAft>
                 <a:spcPts val="600"/>
@@ -8199,31 +7968,31 @@
       <p:sp>
         <p:nvSpPr>
           <p:cNvPr id="25" name="Slide Number Placeholder 0">
-            <a:extLst xmlns:a="http://schemas.openxmlformats.org/drawingml/2006/main">
+            <a:extLst>
               <a:ext uri="{FF2B5EF4-FFF2-40B4-BE49-F238E27FC236}">
                 <a16:creationId xmlns:a16="http://schemas.microsoft.com/office/drawing/2014/main" id="{8972E406-BFF5-4FD0-9108-DA023FA88ADF}"/>
               </a:ext>
             </a:extLst>
           </p:cNvPr>
           <p:cNvSpPr>
-            <a:spLocks xmlns:a="http://schemas.openxmlformats.org/drawingml/2006/main" noGrp="1"/>
+            <a:spLocks noGrp="1"/>
           </p:cNvSpPr>
           <p:nvPr>
             <p:ph type="sldNum" idx="4294967295"/>
           </p:nvPr>
         </p:nvSpPr>
         <p:spPr>
-          <a:xfrm xmlns:a="http://schemas.openxmlformats.org/drawingml/2006/main">
+          <a:xfrm>
             <a:off x="11155680" y="6428232"/>
             <a:ext cx="576072" cy="274320"/>
           </a:xfrm>
-          <a:prstGeom xmlns:a="http://schemas.openxmlformats.org/drawingml/2006/main" prst="rect">
-            <a:avLst/>
-          </a:prstGeom>
-        </p:spPr>
-        <p:txBody>
-          <a:bodyPr xmlns:a="http://schemas.openxmlformats.org/drawingml/2006/main"/>
-          <a:lstStyle xmlns:a="http://schemas.openxmlformats.org/drawingml/2006/main">
+          <a:prstGeom prst="rect">
+            <a:avLst/>
+          </a:prstGeom>
+        </p:spPr>
+        <p:txBody>
+          <a:bodyPr/>
+          <a:lstStyle>
             <a:lvl1pPr>
               <a:buNone/>
               <a:defRPr sz="1000">
@@ -8236,7 +8005,7 @@
               </a:defRPr>
             </a:lvl1pPr>
           </a:lstStyle>
-          <a:p xmlns:a="http://schemas.openxmlformats.org/drawingml/2006/main">
+          <a:p>
             <a:pPr algn="r">
               <a:buNone/>
             </a:pPr>
@@ -8255,11 +8024,14 @@
       </p:ext>
     </p:extLst>
   </p:cSld>
+  <p:clrMapOvr>
+    <a:masterClrMapping/>
+  </p:clrMapOvr>
 </p:sld>
 </file>
 
 <file path=ppt/slides/slide8.xml><?xml version="1.0" encoding="utf-8"?>
-<p:sld xmlns:p="http://schemas.openxmlformats.org/presentationml/2006/main">
+<p:sld xmlns:a="http://schemas.openxmlformats.org/drawingml/2006/main" xmlns:r="http://schemas.openxmlformats.org/officeDocument/2006/relationships" xmlns:p="http://schemas.openxmlformats.org/presentationml/2006/main">
   <p:cSld>
     <p:spTree>
       <p:nvGrpSpPr>
@@ -8268,36 +8040,41 @@
         <p:nvPr/>
       </p:nvGrpSpPr>
       <p:grpSpPr>
-        <a:xfrm xmlns:a="http://schemas.openxmlformats.org/drawingml/2006/main"/>
+        <a:xfrm>
+          <a:off x="0" y="0"/>
+          <a:ext cx="0" cy="0"/>
+          <a:chOff x="0" y="0"/>
+          <a:chExt cx="0" cy="0"/>
+        </a:xfrm>
       </p:grpSpPr>
       <p:sp>
         <p:nvSpPr>
           <p:cNvPr id="2" name="Text 0">
-            <a:extLst xmlns:a="http://schemas.openxmlformats.org/drawingml/2006/main">
+            <a:extLst>
               <a:ext uri="{FF2B5EF4-FFF2-40B4-BE49-F238E27FC236}">
                 <a16:creationId xmlns:a16="http://schemas.microsoft.com/office/drawing/2014/main" id="{B7B406E3-FBB9-40B8-B1B8-94683ACC8954}"/>
               </a:ext>
             </a:extLst>
           </p:cNvPr>
           <p:cNvSpPr>
-            <a:spLocks xmlns:a="http://schemas.openxmlformats.org/drawingml/2006/main" noGrp="1"/>
-          </p:cNvSpPr>
-          <p:nvPr/>
-        </p:nvSpPr>
-        <p:spPr>
-          <a:xfrm xmlns:a="http://schemas.openxmlformats.org/drawingml/2006/main">
+            <a:spLocks noGrp="1"/>
+          </p:cNvSpPr>
+          <p:nvPr/>
+        </p:nvSpPr>
+        <p:spPr>
+          <a:xfrm>
             <a:off x="457200" y="960120"/>
             <a:ext cx="11274552" cy="731520"/>
           </a:xfrm>
-          <a:prstGeom xmlns:a="http://schemas.openxmlformats.org/drawingml/2006/main" prst="rect">
-            <a:avLst/>
-          </a:prstGeom>
-          <a:noFill xmlns:a="http://schemas.openxmlformats.org/drawingml/2006/main"/>
-        </p:spPr>
-        <p:txBody>
-          <a:bodyPr xmlns:a="http://schemas.openxmlformats.org/drawingml/2006/main" wrap="square" lIns="0" tIns="0" rIns="0" bIns="0" anchor="ctr"/>
-          <a:lstStyle xmlns:a="http://schemas.openxmlformats.org/drawingml/2006/main"/>
-          <a:p xmlns:a="http://schemas.openxmlformats.org/drawingml/2006/main">
+          <a:prstGeom prst="rect">
+            <a:avLst/>
+          </a:prstGeom>
+          <a:noFill/>
+        </p:spPr>
+        <p:txBody>
+          <a:bodyPr wrap="square" lIns="0" tIns="0" rIns="0" bIns="0" anchor="ctr"/>
+          <a:lstStyle/>
+          <a:p>
             <a:pPr marL="0" indent="0">
               <a:buNone/>
             </a:pPr>
@@ -8319,31 +8096,31 @@
       <p:sp>
         <p:nvSpPr>
           <p:cNvPr id="3" name="Team tag">
-            <a:extLst xmlns:a="http://schemas.openxmlformats.org/drawingml/2006/main">
+            <a:extLst>
               <a:ext uri="{FF2B5EF4-FFF2-40B4-BE49-F238E27FC236}">
                 <a16:creationId xmlns:a16="http://schemas.microsoft.com/office/drawing/2014/main" id="{12E3B3E9-A06D-4113-890F-A7D2DC38C7A1}"/>
               </a:ext>
             </a:extLst>
           </p:cNvPr>
           <p:cNvSpPr>
-            <a:spLocks xmlns:a="http://schemas.openxmlformats.org/drawingml/2006/main" noGrp="1"/>
-          </p:cNvSpPr>
-          <p:nvPr/>
-        </p:nvSpPr>
-        <p:spPr>
-          <a:xfrm xmlns:a="http://schemas.openxmlformats.org/drawingml/2006/main">
+            <a:spLocks noGrp="1"/>
+          </p:cNvSpPr>
+          <p:nvPr/>
+        </p:nvSpPr>
+        <p:spPr>
+          <a:xfrm>
             <a:off x="8503920" y="1097280"/>
             <a:ext cx="3227832" cy="320040"/>
           </a:xfrm>
-          <a:prstGeom xmlns:a="http://schemas.openxmlformats.org/drawingml/2006/main" prst="rect">
-            <a:avLst/>
-          </a:prstGeom>
-          <a:noFill xmlns:a="http://schemas.openxmlformats.org/drawingml/2006/main"/>
-        </p:spPr>
-        <p:txBody>
-          <a:bodyPr xmlns:a="http://schemas.openxmlformats.org/drawingml/2006/main" wrap="square" lIns="0" tIns="0" rIns="0" bIns="0" anchor="ctr"/>
-          <a:lstStyle xmlns:a="http://schemas.openxmlformats.org/drawingml/2006/main"/>
-          <a:p xmlns:a="http://schemas.openxmlformats.org/drawingml/2006/main">
+          <a:prstGeom prst="rect">
+            <a:avLst/>
+          </a:prstGeom>
+          <a:noFill/>
+        </p:spPr>
+        <p:txBody>
+          <a:bodyPr wrap="square" lIns="0" tIns="0" rIns="0" bIns="0" anchor="ctr"/>
+          <a:lstStyle/>
+          <a:p>
             <a:pPr marL="0" indent="0" algn="r">
               <a:buNone/>
             </a:pPr>
@@ -8365,33 +8142,33 @@
       <p:sp>
         <p:nvSpPr>
           <p:cNvPr id="4" name="References card">
-            <a:extLst xmlns:a="http://schemas.openxmlformats.org/drawingml/2006/main">
+            <a:extLst>
               <a:ext uri="{FF2B5EF4-FFF2-40B4-BE49-F238E27FC236}">
                 <a16:creationId xmlns:a16="http://schemas.microsoft.com/office/drawing/2014/main" id="{025D9C11-FCF2-4428-BE6B-4C4EDAD1C452}"/>
               </a:ext>
             </a:extLst>
           </p:cNvPr>
           <p:cNvSpPr>
-            <a:spLocks xmlns:a="http://schemas.openxmlformats.org/drawingml/2006/main" noGrp="1"/>
-          </p:cNvSpPr>
-          <p:nvPr/>
-        </p:nvSpPr>
-        <p:spPr>
-          <a:xfrm xmlns:a="http://schemas.openxmlformats.org/drawingml/2006/main">
+            <a:spLocks noGrp="1"/>
+          </p:cNvSpPr>
+          <p:nvPr/>
+        </p:nvSpPr>
+        <p:spPr>
+          <a:xfrm>
             <a:off x="457200" y="1691640"/>
             <a:ext cx="11274552" cy="4434840"/>
           </a:xfrm>
-          <a:prstGeom xmlns:a="http://schemas.openxmlformats.org/drawingml/2006/main" prst="roundRect">
+          <a:prstGeom prst="roundRect">
             <a:avLst>
               <a:gd name="adj" fmla="val 2474"/>
             </a:avLst>
           </a:prstGeom>
-          <a:solidFill xmlns:a="http://schemas.openxmlformats.org/drawingml/2006/main">
+          <a:solidFill>
             <a:srgbClr val="0B1A4A">
               <a:alpha val="75000"/>
             </a:srgbClr>
           </a:solidFill>
-          <a:ln xmlns:a="http://schemas.openxmlformats.org/drawingml/2006/main" w="12700">
+          <a:ln w="12700">
             <a:solidFill>
               <a:srgbClr val="1E5BFF"/>
             </a:solidFill>
@@ -8402,31 +8179,31 @@
       <p:sp>
         <p:nvSpPr>
           <p:cNvPr id="5" name="Ref head">
-            <a:extLst xmlns:a="http://schemas.openxmlformats.org/drawingml/2006/main">
+            <a:extLst>
               <a:ext uri="{FF2B5EF4-FFF2-40B4-BE49-F238E27FC236}">
                 <a16:creationId xmlns:a16="http://schemas.microsoft.com/office/drawing/2014/main" id="{3C6BB596-438D-4804-8097-4F3E494175CF}"/>
               </a:ext>
             </a:extLst>
           </p:cNvPr>
           <p:cNvSpPr>
-            <a:spLocks xmlns:a="http://schemas.openxmlformats.org/drawingml/2006/main" noGrp="1"/>
-          </p:cNvSpPr>
-          <p:nvPr/>
-        </p:nvSpPr>
-        <p:spPr>
-          <a:xfrm xmlns:a="http://schemas.openxmlformats.org/drawingml/2006/main">
+            <a:spLocks noGrp="1"/>
+          </p:cNvSpPr>
+          <p:nvPr/>
+        </p:nvSpPr>
+        <p:spPr>
+          <a:xfrm>
             <a:off x="731520" y="1874520"/>
             <a:ext cx="10515600" cy="320040"/>
           </a:xfrm>
-          <a:prstGeom xmlns:a="http://schemas.openxmlformats.org/drawingml/2006/main" prst="rect">
-            <a:avLst/>
-          </a:prstGeom>
-          <a:noFill xmlns:a="http://schemas.openxmlformats.org/drawingml/2006/main"/>
-        </p:spPr>
-        <p:txBody>
-          <a:bodyPr xmlns:a="http://schemas.openxmlformats.org/drawingml/2006/main" wrap="square" lIns="0" tIns="0" rIns="0" bIns="0" anchor="ctr"/>
-          <a:lstStyle xmlns:a="http://schemas.openxmlformats.org/drawingml/2006/main"/>
-          <a:p xmlns:a="http://schemas.openxmlformats.org/drawingml/2006/main">
+          <a:prstGeom prst="rect">
+            <a:avLst/>
+          </a:prstGeom>
+          <a:noFill/>
+        </p:spPr>
+        <p:txBody>
+          <a:bodyPr wrap="square" lIns="0" tIns="0" rIns="0" bIns="0" anchor="ctr"/>
+          <a:lstStyle/>
+          <a:p>
             <a:pPr marL="0" indent="0">
               <a:buNone/>
             </a:pPr>
@@ -8448,30 +8225,30 @@
       <p:sp>
         <p:nvSpPr>
           <p:cNvPr id="6" name="Ref body">
-            <a:extLst xmlns:a="http://schemas.openxmlformats.org/drawingml/2006/main">
+            <a:extLst>
               <a:ext uri="{FF2B5EF4-FFF2-40B4-BE49-F238E27FC236}">
                 <a16:creationId xmlns:a16="http://schemas.microsoft.com/office/drawing/2014/main" id="{B323AC0B-2051-4D78-939A-C98883EE891C}"/>
               </a:ext>
             </a:extLst>
           </p:cNvPr>
           <p:cNvSpPr>
-            <a:spLocks xmlns:a="http://schemas.openxmlformats.org/drawingml/2006/main" noGrp="1"/>
-          </p:cNvSpPr>
-          <p:nvPr/>
-        </p:nvSpPr>
-        <p:spPr>
-          <a:xfrm xmlns:a="http://schemas.openxmlformats.org/drawingml/2006/main">
+            <a:spLocks noGrp="1"/>
+          </p:cNvSpPr>
+          <p:nvPr/>
+        </p:nvSpPr>
+        <p:spPr>
+          <a:xfrm>
             <a:off x="731520" y="2377440"/>
             <a:ext cx="10698480" cy="3474720"/>
           </a:xfrm>
-          <a:prstGeom xmlns:a="http://schemas.openxmlformats.org/drawingml/2006/main" prst="rect">
-            <a:avLst/>
-          </a:prstGeom>
-          <a:noFill xmlns:a="http://schemas.openxmlformats.org/drawingml/2006/main"/>
-        </p:spPr>
-        <p:txBody>
-          <a:bodyPr xmlns:a="http://schemas.openxmlformats.org/drawingml/2006/main" wrap="square" lIns="0" tIns="0" rIns="0" bIns="0" anchor="t"/>
-          <a:lstStyle xmlns:a="http://schemas.openxmlformats.org/drawingml/2006/main">
+          <a:prstGeom prst="rect">
+            <a:avLst/>
+          </a:prstGeom>
+          <a:noFill/>
+        </p:spPr>
+        <p:txBody>
+          <a:bodyPr wrap="square" lIns="0" tIns="0" rIns="0" bIns="0" anchor="t"/>
+          <a:lstStyle>
             <a:defPPr algn="l">
               <a:defRPr sz="1600">
                 <a:solidFill>
@@ -8582,7 +8359,7 @@
               </a:defRPr>
             </a:lvl9pPr>
           </a:lstStyle>
-          <a:p xmlns:a="http://schemas.openxmlformats.org/drawingml/2006/main">
+          <a:p>
             <a:pPr marL="342900" indent="-342900" algn="l">
               <a:spcAft>
                 <a:spcPts val="600"/>
@@ -8609,7 +8386,7 @@
               <a:t>README.md — architecture, setup and Phase 2 API</a:t>
             </a:r>
           </a:p>
-          <a:p xmlns:a="http://schemas.openxmlformats.org/drawingml/2006/main">
+          <a:p>
             <a:pPr marL="342900" indent="-342900" algn="l">
               <a:spcAft>
                 <a:spcPts val="600"/>
@@ -8636,7 +8413,7 @@
               <a:t>document_store.py + graph_engine.py — index and graph updates</a:t>
             </a:r>
           </a:p>
-          <a:p xmlns:a="http://schemas.openxmlformats.org/drawingml/2006/main">
+          <a:p>
             <a:pPr marL="342900" indent="-342900" algn="l">
               <a:spcAft>
                 <a:spcPts val="600"/>
@@ -8663,7 +8440,7 @@
               <a:t>validation_engine.py — evidence paths and conflict answers</a:t>
             </a:r>
           </a:p>
-          <a:p xmlns:a="http://schemas.openxmlformats.org/drawingml/2006/main">
+          <a:p>
             <a:pPr marL="342900" indent="-342900" algn="l">
               <a:spcAft>
                 <a:spcPts val="600"/>
@@ -8690,7 +8467,7 @@
               <a:t>test_phase2_documents.py — 500 docs, conflicts, injection and Hindi checks</a:t>
             </a:r>
           </a:p>
-          <a:p xmlns:a="http://schemas.openxmlformats.org/drawingml/2006/main">
+          <a:p>
             <a:pPr marL="342900" indent="-342900" algn="l">
               <a:spcAft>
                 <a:spcPts val="600"/>
@@ -8717,7 +8494,7 @@
               <a:t>document_safety.py + retrieval_engine.py — filtering and cross-language retrieval</a:t>
             </a:r>
           </a:p>
-          <a:p xmlns:a="http://schemas.openxmlformats.org/drawingml/2006/main">
+          <a:p>
             <a:pPr marL="342900" indent="-342900" algn="l">
               <a:spcAft>
                 <a:spcPts val="600"/>
@@ -8744,7 +8521,7 @@
               <a:t>scripts/benchmark_phase2.py — verifies six Phase 2 requirements</a:t>
             </a:r>
           </a:p>
-          <a:p xmlns:a="http://schemas.openxmlformats.org/drawingml/2006/main">
+          <a:p>
             <a:pPr marL="342900" indent="-342900" algn="l">
               <a:spcAft>
                 <a:spcPts val="600"/>
@@ -8771,7 +8548,7 @@
               <a:t>DataStudioView.tsx + EvidencePathReplayPanel.tsx — document and evidence UI</a:t>
             </a:r>
           </a:p>
-          <a:p xmlns:a="http://schemas.openxmlformats.org/drawingml/2006/main">
+          <a:p>
             <a:pPr marL="342900" indent="-342900" algn="l">
               <a:spcAft>
                 <a:spcPts val="600"/>
@@ -8805,12 +8582,12 @@
                 <a:latin typeface="Calibri"/>
                 <a:ea typeface="Calibri"/>
                 <a:cs typeface="Calibri"/>
-                <a:hlinkClick xmlns:r="http://schemas.openxmlformats.org/officeDocument/2006/relationships" r:id="R20d0d975a5a34020"/>
+                <a:hlinkClick r:id="rId3"/>
               </a:rPr>
               <a:t>https://data-trust-ai-26.vercel.app/</a:t>
             </a:r>
           </a:p>
-          <a:p xmlns:a="http://schemas.openxmlformats.org/drawingml/2006/main">
+          <a:p>
             <a:pPr marL="342900" indent="-342900" algn="l">
               <a:spcAft>
                 <a:spcPts val="600"/>
@@ -8844,7 +8621,7 @@
                 <a:latin typeface="Calibri"/>
                 <a:ea typeface="Calibri"/>
                 <a:cs typeface="Calibri"/>
-                <a:hlinkClick xmlns:r="http://schemas.openxmlformats.org/officeDocument/2006/relationships" r:id="Rf33444d75ca94746"/>
+                <a:hlinkClick r:id="rId4"/>
               </a:rPr>
               <a:t>https://vercel.com/kc100official-cmds-projects/data-trust-ai-26</a:t>
             </a:r>
@@ -8854,31 +8631,31 @@
       <p:sp>
         <p:nvSpPr>
           <p:cNvPr id="25" name="Slide Number Placeholder 0">
-            <a:extLst xmlns:a="http://schemas.openxmlformats.org/drawingml/2006/main">
+            <a:extLst>
               <a:ext uri="{FF2B5EF4-FFF2-40B4-BE49-F238E27FC236}">
                 <a16:creationId xmlns:a16="http://schemas.microsoft.com/office/drawing/2014/main" id="{C30F8C26-0289-42B7-9517-86DB47617212}"/>
               </a:ext>
             </a:extLst>
           </p:cNvPr>
           <p:cNvSpPr>
-            <a:spLocks xmlns:a="http://schemas.openxmlformats.org/drawingml/2006/main" noGrp="1"/>
+            <a:spLocks noGrp="1"/>
           </p:cNvSpPr>
           <p:nvPr>
             <p:ph type="sldNum" idx="4294967295"/>
           </p:nvPr>
         </p:nvSpPr>
         <p:spPr>
-          <a:xfrm xmlns:a="http://schemas.openxmlformats.org/drawingml/2006/main">
+          <a:xfrm>
             <a:off x="11155680" y="6428232"/>
             <a:ext cx="576072" cy="274320"/>
           </a:xfrm>
-          <a:prstGeom xmlns:a="http://schemas.openxmlformats.org/drawingml/2006/main" prst="rect">
-            <a:avLst/>
-          </a:prstGeom>
-        </p:spPr>
-        <p:txBody>
-          <a:bodyPr xmlns:a="http://schemas.openxmlformats.org/drawingml/2006/main"/>
-          <a:lstStyle xmlns:a="http://schemas.openxmlformats.org/drawingml/2006/main">
+          <a:prstGeom prst="rect">
+            <a:avLst/>
+          </a:prstGeom>
+        </p:spPr>
+        <p:txBody>
+          <a:bodyPr/>
+          <a:lstStyle>
             <a:lvl1pPr>
               <a:buNone/>
               <a:defRPr sz="1000">
@@ -8891,7 +8668,7 @@
               </a:defRPr>
             </a:lvl1pPr>
           </a:lstStyle>
-          <a:p xmlns:a="http://schemas.openxmlformats.org/drawingml/2006/main">
+          <a:p>
             <a:pPr algn="r">
               <a:buNone/>
             </a:pPr>
@@ -8910,11 +8687,14 @@
       </p:ext>
     </p:extLst>
   </p:cSld>
+  <p:clrMapOvr>
+    <a:masterClrMapping/>
+  </p:clrMapOvr>
 </p:sld>
 </file>
 
 <file path=ppt/slides/slide9.xml><?xml version="1.0" encoding="utf-8"?>
-<p:sld xmlns:p="http://schemas.openxmlformats.org/presentationml/2006/main">
+<p:sld xmlns:a="http://schemas.openxmlformats.org/drawingml/2006/main" xmlns:r="http://schemas.openxmlformats.org/officeDocument/2006/relationships" xmlns:p="http://schemas.openxmlformats.org/presentationml/2006/main">
   <p:cSld>
     <p:spTree>
       <p:nvGrpSpPr>
@@ -8923,34 +8703,39 @@
         <p:nvPr/>
       </p:nvGrpSpPr>
       <p:grpSpPr>
-        <a:xfrm xmlns:a="http://schemas.openxmlformats.org/drawingml/2006/main"/>
+        <a:xfrm>
+          <a:off x="0" y="0"/>
+          <a:ext cx="0" cy="0"/>
+          <a:chOff x="0" y="0"/>
+          <a:chExt cx="0" cy="0"/>
+        </a:xfrm>
       </p:grpSpPr>
       <p:pic>
         <p:nvPicPr>
           <p:cNvPr id="2" name="Image 0">
-            <a:extLst xmlns:a="http://schemas.openxmlformats.org/drawingml/2006/main">
+            <a:extLst>
               <a:ext uri="{FF2B5EF4-FFF2-40B4-BE49-F238E27FC236}">
                 <a16:creationId xmlns:a16="http://schemas.microsoft.com/office/drawing/2014/main" id="{8B50CCD4-B35A-44F8-8F8E-74A8CD8B62CC}"/>
               </a:ext>
             </a:extLst>
           </p:cNvPr>
           <p:cNvPicPr>
-            <a:picLocks xmlns:a="http://schemas.openxmlformats.org/drawingml/2006/main" noChangeAspect="1"/>
+            <a:picLocks noChangeAspect="1"/>
           </p:cNvPicPr>
           <p:nvPr/>
         </p:nvPicPr>
         <p:blipFill>
-          <a:blip xmlns:r="http://schemas.openxmlformats.org/officeDocument/2006/relationships" xmlns:a="http://schemas.openxmlformats.org/drawingml/2006/main" r:embed="Rcc6e4fa7d7484fdd"/>
-          <a:stretch xmlns:a="http://schemas.openxmlformats.org/drawingml/2006/main">
-            <a:fillRect l="0" t="0" r="0" b="0"/>
+          <a:blip r:embed="rId3"/>
+          <a:stretch>
+            <a:fillRect/>
           </a:stretch>
         </p:blipFill>
         <p:spPr>
-          <a:xfrm xmlns:a="http://schemas.openxmlformats.org/drawingml/2006/main">
+          <a:xfrm>
             <a:off x="548640" y="1828800"/>
             <a:ext cx="4754880" cy="2163776"/>
           </a:xfrm>
-          <a:prstGeom xmlns:a="http://schemas.openxmlformats.org/drawingml/2006/main" prst="rect">
+          <a:prstGeom prst="rect">
             <a:avLst/>
           </a:prstGeom>
         </p:spPr>
@@ -8958,31 +8743,31 @@
       <p:sp>
         <p:nvSpPr>
           <p:cNvPr id="3" name="Text 0">
-            <a:extLst xmlns:a="http://schemas.openxmlformats.org/drawingml/2006/main">
+            <a:extLst>
               <a:ext uri="{FF2B5EF4-FFF2-40B4-BE49-F238E27FC236}">
                 <a16:creationId xmlns:a16="http://schemas.microsoft.com/office/drawing/2014/main" id="{CDED595D-A33E-48DB-8CD9-81E8CDF1D4F2}"/>
               </a:ext>
             </a:extLst>
           </p:cNvPr>
           <p:cNvSpPr>
-            <a:spLocks xmlns:a="http://schemas.openxmlformats.org/drawingml/2006/main" noGrp="1"/>
-          </p:cNvSpPr>
-          <p:nvPr/>
-        </p:nvSpPr>
-        <p:spPr>
-          <a:xfrm xmlns:a="http://schemas.openxmlformats.org/drawingml/2006/main">
+            <a:spLocks noGrp="1"/>
+          </p:cNvSpPr>
+          <p:nvPr/>
+        </p:nvSpPr>
+        <p:spPr>
+          <a:xfrm>
             <a:off x="548640" y="4297680"/>
             <a:ext cx="7315200" cy="822960"/>
           </a:xfrm>
-          <a:prstGeom xmlns:a="http://schemas.openxmlformats.org/drawingml/2006/main" prst="rect">
-            <a:avLst/>
-          </a:prstGeom>
-          <a:noFill xmlns:a="http://schemas.openxmlformats.org/drawingml/2006/main"/>
-        </p:spPr>
-        <p:txBody>
-          <a:bodyPr xmlns:a="http://schemas.openxmlformats.org/drawingml/2006/main" wrap="square" lIns="0" tIns="0" rIns="0" bIns="0" anchor="ctr"/>
-          <a:lstStyle xmlns:a="http://schemas.openxmlformats.org/drawingml/2006/main"/>
-          <a:p xmlns:a="http://schemas.openxmlformats.org/drawingml/2006/main">
+          <a:prstGeom prst="rect">
+            <a:avLst/>
+          </a:prstGeom>
+          <a:noFill/>
+        </p:spPr>
+        <p:txBody>
+          <a:bodyPr wrap="square" lIns="0" tIns="0" rIns="0" bIns="0" anchor="ctr"/>
+          <a:lstStyle/>
+          <a:p>
             <a:pPr marL="0" indent="0">
               <a:buNone/>
             </a:pPr>
@@ -9004,31 +8789,31 @@
       <p:sp>
         <p:nvSpPr>
           <p:cNvPr id="4" name="Text 1">
-            <a:extLst xmlns:a="http://schemas.openxmlformats.org/drawingml/2006/main">
+            <a:extLst>
               <a:ext uri="{FF2B5EF4-FFF2-40B4-BE49-F238E27FC236}">
                 <a16:creationId xmlns:a16="http://schemas.microsoft.com/office/drawing/2014/main" id="{6F27D164-6D56-42F1-806F-C6E437DAC0C1}"/>
               </a:ext>
             </a:extLst>
           </p:cNvPr>
           <p:cNvSpPr>
-            <a:spLocks xmlns:a="http://schemas.openxmlformats.org/drawingml/2006/main" noGrp="1"/>
-          </p:cNvSpPr>
-          <p:nvPr/>
-        </p:nvSpPr>
-        <p:spPr>
-          <a:xfrm xmlns:a="http://schemas.openxmlformats.org/drawingml/2006/main">
+            <a:spLocks noGrp="1"/>
+          </p:cNvSpPr>
+          <p:nvPr/>
+        </p:nvSpPr>
+        <p:spPr>
+          <a:xfrm>
             <a:off x="548640" y="5120640"/>
             <a:ext cx="7315200" cy="365760"/>
           </a:xfrm>
-          <a:prstGeom xmlns:a="http://schemas.openxmlformats.org/drawingml/2006/main" prst="rect">
-            <a:avLst/>
-          </a:prstGeom>
-          <a:noFill xmlns:a="http://schemas.openxmlformats.org/drawingml/2006/main"/>
-        </p:spPr>
-        <p:txBody>
-          <a:bodyPr xmlns:a="http://schemas.openxmlformats.org/drawingml/2006/main" wrap="square" lIns="0" tIns="0" rIns="0" bIns="0" anchor="ctr"/>
-          <a:lstStyle xmlns:a="http://schemas.openxmlformats.org/drawingml/2006/main"/>
-          <a:p xmlns:a="http://schemas.openxmlformats.org/drawingml/2006/main">
+          <a:prstGeom prst="rect">
+            <a:avLst/>
+          </a:prstGeom>
+          <a:noFill/>
+        </p:spPr>
+        <p:txBody>
+          <a:bodyPr wrap="square" lIns="0" tIns="0" rIns="0" bIns="0" anchor="ctr"/>
+          <a:lstStyle/>
+          <a:p>
             <a:pPr marL="0" indent="0">
               <a:buNone/>
             </a:pPr>
@@ -9050,31 +8835,31 @@
       <p:sp>
         <p:nvSpPr>
           <p:cNvPr id="5" name="Text 2">
-            <a:extLst xmlns:a="http://schemas.openxmlformats.org/drawingml/2006/main">
+            <a:extLst>
               <a:ext uri="{FF2B5EF4-FFF2-40B4-BE49-F238E27FC236}">
                 <a16:creationId xmlns:a16="http://schemas.microsoft.com/office/drawing/2014/main" id="{9DB75615-C4E7-4E16-B86E-87DAAAABCCCC}"/>
               </a:ext>
             </a:extLst>
           </p:cNvPr>
           <p:cNvSpPr>
-            <a:spLocks xmlns:a="http://schemas.openxmlformats.org/drawingml/2006/main" noGrp="1"/>
-          </p:cNvSpPr>
-          <p:nvPr/>
-        </p:nvSpPr>
-        <p:spPr>
-          <a:xfrm xmlns:a="http://schemas.openxmlformats.org/drawingml/2006/main">
+            <a:spLocks noGrp="1"/>
+          </p:cNvSpPr>
+          <p:nvPr/>
+        </p:nvSpPr>
+        <p:spPr>
+          <a:xfrm>
             <a:off x="548640" y="6035040"/>
             <a:ext cx="7315200" cy="320040"/>
           </a:xfrm>
-          <a:prstGeom xmlns:a="http://schemas.openxmlformats.org/drawingml/2006/main" prst="rect">
-            <a:avLst/>
-          </a:prstGeom>
-          <a:noFill xmlns:a="http://schemas.openxmlformats.org/drawingml/2006/main"/>
-        </p:spPr>
-        <p:txBody>
-          <a:bodyPr xmlns:a="http://schemas.openxmlformats.org/drawingml/2006/main" wrap="square" lIns="0" tIns="0" rIns="0" bIns="0" anchor="ctr"/>
-          <a:lstStyle xmlns:a="http://schemas.openxmlformats.org/drawingml/2006/main"/>
-          <a:p xmlns:a="http://schemas.openxmlformats.org/drawingml/2006/main">
+          <a:prstGeom prst="rect">
+            <a:avLst/>
+          </a:prstGeom>
+          <a:noFill/>
+        </p:spPr>
+        <p:txBody>
+          <a:bodyPr wrap="square" lIns="0" tIns="0" rIns="0" bIns="0" anchor="ctr"/>
+          <a:lstStyle/>
+          <a:p>
             <a:pPr marL="0" indent="0">
               <a:buNone/>
             </a:pPr>
@@ -9100,6 +8885,9 @@
       </p:ext>
     </p:extLst>
   </p:cSld>
+  <p:clrMapOvr>
+    <a:masterClrMapping/>
+  </p:clrMapOvr>
 </p:sld>
 </file>
 
@@ -9385,5 +9173,294 @@
       </a:bgFillStyleLst>
     </a:fmtScheme>
   </a:themeElements>
+  <a:objectDefaults/>
+  <a:extraClrSchemeLst/>
+</a:theme>
+</file>
+
+<file path=ppt/theme/theme2.xml><?xml version="1.0" encoding="utf-8"?>
+<a:theme xmlns:a="http://schemas.openxmlformats.org/drawingml/2006/main" name="Hypnexis">
+  <a:themeElements>
+    <a:clrScheme name="Hypnexis">
+      <a:dk1>
+        <a:srgbClr val="040A20"/>
+      </a:dk1>
+      <a:lt1>
+        <a:srgbClr val="FFFFFF"/>
+      </a:lt1>
+      <a:dk2>
+        <a:srgbClr val="0B1A4A"/>
+      </a:dk2>
+      <a:lt2>
+        <a:srgbClr val="CFE0FF"/>
+      </a:lt2>
+      <a:accent1>
+        <a:srgbClr val="1E5BFF"/>
+      </a:accent1>
+      <a:accent2>
+        <a:srgbClr val="4DA3FF"/>
+      </a:accent2>
+      <a:accent3>
+        <a:srgbClr val="0A2A8F"/>
+      </a:accent3>
+      <a:accent4>
+        <a:srgbClr val="9CC4FF"/>
+      </a:accent4>
+      <a:accent5>
+        <a:srgbClr val="6C8CFF"/>
+      </a:accent5>
+      <a:accent6>
+        <a:srgbClr val="00C2FF"/>
+      </a:accent6>
+      <a:hlink>
+        <a:srgbClr val="4DA3FF"/>
+      </a:hlink>
+      <a:folHlink>
+        <a:srgbClr val="9CC4FF"/>
+      </a:folHlink>
+    </a:clrScheme>
+    <a:fontScheme name="Hypnexis">
+      <a:majorFont>
+        <a:latin typeface="Arial"/>
+        <a:ea typeface=""/>
+        <a:cs typeface=""/>
+        <a:font script="Jpan" typeface="游ゴシック Light"/>
+        <a:font script="Hang" typeface="맑은 고딕"/>
+        <a:font script="Hans" typeface="等线 Light"/>
+        <a:font script="Hant" typeface="新細明體"/>
+        <a:font script="Arab" typeface="Times New Roman"/>
+        <a:font script="Hebr" typeface="Times New Roman"/>
+        <a:font script="Thai" typeface="Angsana New"/>
+        <a:font script="Ethi" typeface="Nyala"/>
+        <a:font script="Beng" typeface="Vrinda"/>
+        <a:font script="Gujr" typeface="Shruti"/>
+        <a:font script="Khmr" typeface="MoolBoran"/>
+        <a:font script="Knda" typeface="Tunga"/>
+        <a:font script="Guru" typeface="Raavi"/>
+        <a:font script="Cans" typeface="Euphemia"/>
+        <a:font script="Cher" typeface="Plantagenet Cherokee"/>
+        <a:font script="Yiii" typeface="Microsoft Yi Baiti"/>
+        <a:font script="Tibt" typeface="Microsoft Himalaya"/>
+        <a:font script="Thaa" typeface="MV Boli"/>
+        <a:font script="Deva" typeface="Mangal"/>
+        <a:font script="Telu" typeface="Gautami"/>
+        <a:font script="Taml" typeface="Latha"/>
+        <a:font script="Syrc" typeface="Estrangelo Edessa"/>
+        <a:font script="Orya" typeface="Kalinga"/>
+        <a:font script="Mlym" typeface="Kartika"/>
+        <a:font script="Laoo" typeface="DokChampa"/>
+        <a:font script="Sinh" typeface="Iskoola Pota"/>
+        <a:font script="Mong" typeface="Mongolian Baiti"/>
+        <a:font script="Viet" typeface="Times New Roman"/>
+        <a:font script="Uigh" typeface="Microsoft Uighur"/>
+        <a:font script="Geor" typeface="Sylfaen"/>
+        <a:font script="Armn" typeface="Arial"/>
+        <a:font script="Bugi" typeface="Leelawadee UI"/>
+        <a:font script="Bopo" typeface="Microsoft JhengHei"/>
+        <a:font script="Java" typeface="Javanese Text"/>
+        <a:font script="Lisu" typeface="Segoe UI"/>
+        <a:font script="Mymr" typeface="Myanmar Text"/>
+        <a:font script="Nkoo" typeface="Ebrima"/>
+        <a:font script="Olck" typeface="Nirmala UI"/>
+        <a:font script="Osma" typeface="Ebrima"/>
+        <a:font script="Phag" typeface="Phagspa"/>
+        <a:font script="Syrn" typeface="Estrangelo Edessa"/>
+        <a:font script="Syrj" typeface="Estrangelo Edessa"/>
+        <a:font script="Syre" typeface="Estrangelo Edessa"/>
+        <a:font script="Sora" typeface="Nirmala UI"/>
+        <a:font script="Tale" typeface="Microsoft Tai Le"/>
+        <a:font script="Talu" typeface="Microsoft New Tai Lue"/>
+        <a:font script="Tfng" typeface="Ebrima"/>
+      </a:majorFont>
+      <a:minorFont>
+        <a:latin typeface="Calibri"/>
+        <a:ea typeface=""/>
+        <a:cs typeface=""/>
+        <a:font script="Jpan" typeface="游ゴシック"/>
+        <a:font script="Hang" typeface="맑은 고딕"/>
+        <a:font script="Hans" typeface="等线"/>
+        <a:font script="Hant" typeface="新細明體"/>
+        <a:font script="Arab" typeface="Arial"/>
+        <a:font script="Hebr" typeface="Arial"/>
+        <a:font script="Thai" typeface="Cordia New"/>
+        <a:font script="Ethi" typeface="Nyala"/>
+        <a:font script="Beng" typeface="Vrinda"/>
+        <a:font script="Gujr" typeface="Shruti"/>
+        <a:font script="Khmr" typeface="DaunPenh"/>
+        <a:font script="Knda" typeface="Tunga"/>
+        <a:font script="Guru" typeface="Raavi"/>
+        <a:font script="Cans" typeface="Euphemia"/>
+        <a:font script="Cher" typeface="Plantagenet Cherokee"/>
+        <a:font script="Yiii" typeface="Microsoft Yi Baiti"/>
+        <a:font script="Tibt" typeface="Microsoft Himalaya"/>
+        <a:font script="Thaa" typeface="MV Boli"/>
+        <a:font script="Deva" typeface="Mangal"/>
+        <a:font script="Telu" typeface="Gautami"/>
+        <a:font script="Taml" typeface="Latha"/>
+        <a:font script="Syrc" typeface="Estrangelo Edessa"/>
+        <a:font script="Orya" typeface="Kalinga"/>
+        <a:font script="Mlym" typeface="Kartika"/>
+        <a:font script="Laoo" typeface="DokChampa"/>
+        <a:font script="Sinh" typeface="Iskoola Pota"/>
+        <a:font script="Mong" typeface="Mongolian Baiti"/>
+        <a:font script="Viet" typeface="Arial"/>
+        <a:font script="Uigh" typeface="Microsoft Uighur"/>
+        <a:font script="Geor" typeface="Sylfaen"/>
+        <a:font script="Armn" typeface="Arial"/>
+        <a:font script="Bugi" typeface="Leelawadee UI"/>
+        <a:font script="Bopo" typeface="Microsoft JhengHei"/>
+        <a:font script="Java" typeface="Javanese Text"/>
+        <a:font script="Lisu" typeface="Segoe UI"/>
+        <a:font script="Mymr" typeface="Myanmar Text"/>
+        <a:font script="Nkoo" typeface="Ebrima"/>
+        <a:font script="Olck" typeface="Nirmala UI"/>
+        <a:font script="Osma" typeface="Ebrima"/>
+        <a:font script="Phag" typeface="Phagspa"/>
+        <a:font script="Syrn" typeface="Estrangelo Edessa"/>
+        <a:font script="Syrj" typeface="Estrangelo Edessa"/>
+        <a:font script="Syre" typeface="Estrangelo Edessa"/>
+        <a:font script="Sora" typeface="Nirmala UI"/>
+        <a:font script="Tale" typeface="Microsoft Tai Le"/>
+        <a:font script="Talu" typeface="Microsoft New Tai Lue"/>
+        <a:font script="Tfng" typeface="Ebrima"/>
+      </a:minorFont>
+    </a:fontScheme>
+    <a:fmtScheme name="Hypnexis">
+      <a:fillStyleLst>
+        <a:solidFill>
+          <a:schemeClr val="phClr"/>
+        </a:solidFill>
+        <a:gradFill rotWithShape="1">
+          <a:gsLst>
+            <a:gs pos="0">
+              <a:schemeClr val="phClr">
+                <a:tint val="67000"/>
+                <a:lumMod val="110000"/>
+                <a:satMod val="105000"/>
+              </a:schemeClr>
+            </a:gs>
+            <a:gs pos="50000">
+              <a:schemeClr val="phClr">
+                <a:tint val="73000"/>
+                <a:lumMod val="105000"/>
+                <a:satMod val="103000"/>
+              </a:schemeClr>
+            </a:gs>
+            <a:gs pos="100000">
+              <a:schemeClr val="phClr">
+                <a:tint val="81000"/>
+                <a:lumMod val="105000"/>
+                <a:satMod val="109000"/>
+              </a:schemeClr>
+            </a:gs>
+          </a:gsLst>
+          <a:lin ang="5400000" scaled="0"/>
+        </a:gradFill>
+        <a:gradFill rotWithShape="1">
+          <a:gsLst>
+            <a:gs pos="0">
+              <a:schemeClr val="phClr">
+                <a:tint val="94000"/>
+                <a:lumMod val="102000"/>
+                <a:satMod val="103000"/>
+              </a:schemeClr>
+            </a:gs>
+            <a:gs pos="50000">
+              <a:schemeClr val="phClr">
+                <a:shade val="100000"/>
+                <a:lumMod val="100000"/>
+                <a:satMod val="110000"/>
+              </a:schemeClr>
+            </a:gs>
+            <a:gs pos="100000">
+              <a:schemeClr val="phClr">
+                <a:shade val="78000"/>
+                <a:lumMod val="99000"/>
+                <a:satMod val="120000"/>
+              </a:schemeClr>
+            </a:gs>
+          </a:gsLst>
+          <a:lin ang="5400000" scaled="0"/>
+        </a:gradFill>
+      </a:fillStyleLst>
+      <a:lnStyleLst>
+        <a:ln w="6350">
+          <a:solidFill>
+            <a:schemeClr val="phClr"/>
+          </a:solidFill>
+          <a:prstDash val="solid"/>
+        </a:ln>
+        <a:ln w="12700">
+          <a:solidFill>
+            <a:schemeClr val="phClr"/>
+          </a:solidFill>
+          <a:prstDash val="solid"/>
+        </a:ln>
+        <a:ln w="19050">
+          <a:solidFill>
+            <a:schemeClr val="phClr"/>
+          </a:solidFill>
+          <a:prstDash val="solid"/>
+        </a:ln>
+      </a:lnStyleLst>
+      <a:effectStyleLst>
+        <a:effectStyle>
+          <a:effectLst/>
+        </a:effectStyle>
+        <a:effectStyle>
+          <a:effectLst/>
+        </a:effectStyle>
+        <a:effectStyle>
+          <a:effectLst>
+            <a:outerShdw blurRad="57150" dist="19050" dir="5400000" algn="ctr" rotWithShape="0">
+              <a:srgbClr val="000000">
+                <a:alpha val="63000"/>
+              </a:srgbClr>
+            </a:outerShdw>
+          </a:effectLst>
+        </a:effectStyle>
+      </a:effectStyleLst>
+      <a:bgFillStyleLst>
+        <a:solidFill>
+          <a:schemeClr val="phClr"/>
+        </a:solidFill>
+        <a:solidFill>
+          <a:schemeClr val="phClr">
+            <a:tint val="95000"/>
+            <a:satMod val="170000"/>
+          </a:schemeClr>
+        </a:solidFill>
+        <a:gradFill rotWithShape="1">
+          <a:gsLst>
+            <a:gs pos="0">
+              <a:schemeClr val="phClr">
+                <a:tint val="93000"/>
+                <a:shade val="98000"/>
+                <a:lumMod val="102000"/>
+                <a:satMod val="150000"/>
+              </a:schemeClr>
+            </a:gs>
+            <a:gs pos="50000">
+              <a:schemeClr val="phClr">
+                <a:tint val="98000"/>
+                <a:shade val="90000"/>
+                <a:lumMod val="103000"/>
+                <a:satMod val="130000"/>
+              </a:schemeClr>
+            </a:gs>
+            <a:gs pos="100000">
+              <a:schemeClr val="phClr">
+                <a:shade val="63000"/>
+                <a:satMod val="120000"/>
+              </a:schemeClr>
+            </a:gs>
+          </a:gsLst>
+          <a:lin ang="5400000" scaled="0"/>
+        </a:gradFill>
+      </a:bgFillStyleLst>
+    </a:fmtScheme>
+  </a:themeElements>
+  <a:objectDefaults/>
+  <a:extraClrSchemeLst/>
 </a:theme>
 </file>